--- a/Introduccion a la Ingenieria/Clases/Clase 14 - Preparacion de la presentacion final/Presentacion.pptx
+++ b/Introduccion a la Ingenieria/Clases/Clase 14 - Preparacion de la presentacion final/Presentacion.pptx
@@ -18,6 +18,14 @@
     <p:sldId id="266" r:id="rId17"/>
     <p:sldId id="267" r:id="rId18"/>
     <p:sldId id="268" r:id="rId19"/>
+    <p:sldId id="269" r:id="rId20"/>
+    <p:sldId id="270" r:id="rId21"/>
+    <p:sldId id="271" r:id="rId22"/>
+    <p:sldId id="272" r:id="rId23"/>
+    <p:sldId id="273" r:id="rId24"/>
+    <p:sldId id="274" r:id="rId25"/>
+    <p:sldId id="275" r:id="rId26"/>
+    <p:sldId id="276" r:id="rId27"/>
   </p:sldIdLst>
   <p:sldSz cx="12191695" cy="6858000" type="screen4x3"/>
   <p:notesSz cx="6858000" cy="9144000"/>
@@ -3512,7 +3520,7 @@
         <p:spPr>
           <a:xfrm>
             <a:off x="0" y="0"/>
-            <a:ext cx="12191695" cy="1170432"/>
+            <a:ext cx="12191695" cy="960120"/>
           </a:xfrm>
           <a:prstGeom prst="rect">
             <a:avLst/>
@@ -3554,7 +3562,7 @@
         </p:nvSpPr>
         <p:spPr>
           <a:xfrm>
-            <a:off x="0" y="1170432"/>
+            <a:off x="0" y="960120"/>
             <a:ext cx="12191695" cy="41148"/>
           </a:xfrm>
           <a:prstGeom prst="rect">
@@ -3598,7 +3606,7 @@
         <p:spPr>
           <a:xfrm>
             <a:off x="457200" y="164592"/>
-            <a:ext cx="11277295" cy="384048"/>
+            <a:ext cx="11277295" cy="502920"/>
           </a:xfrm>
           <a:prstGeom prst="rect">
             <a:avLst/>
@@ -3618,7 +3626,7 @@
                 </a:solidFill>
                 <a:latin typeface="Calibri"/>
               </a:rPr>
-              <a:t>Taller de hoy: Guion de nueve minutos y plan B</a:t>
+              <a:t>La pregunta de entrada: cuánto dura contarlo todo (1/2)</a:t>
             </a:r>
           </a:p>
         </p:txBody>
@@ -3631,8 +3639,8 @@
         </p:nvSpPr>
         <p:spPr>
           <a:xfrm>
-            <a:off x="457200" y="566928"/>
-            <a:ext cx="11277295" cy="411480"/>
+            <a:off x="457200" y="1170432"/>
+            <a:ext cx="11277295" cy="5230368"/>
           </a:xfrm>
           <a:prstGeom prst="rect">
             <a:avLst/>
@@ -3645,1053 +3653,110 @@
           </a:bodyPr>
           <a:lstStyle/>
           <a:p>
-            <a:r>
-              <a:rPr sz="1400" b="0" i="0">
-                <a:solidFill>
-                  <a:srgbClr val="B8D8EE"/>
-                </a:solidFill>
-                <a:latin typeface="Calibri"/>
-              </a:rPr>
-              <a:t>27 min en equipos · 27 min: guion, diapositivas, demostración y plan B · guion con tiempos + diapositivas + PDF y capturas del plan B</a:t>
-            </a:r>
-          </a:p>
-        </p:txBody>
-      </p:sp>
-      <p:sp>
-        <p:nvSpPr>
-          <p:cNvPr id="6" name="Rounded Rectangle 5"/>
-          <p:cNvSpPr/>
-          <p:nvPr/>
-        </p:nvSpPr>
-        <p:spPr>
-          <a:xfrm>
-            <a:off x="457200" y="1472184"/>
-            <a:ext cx="11277295" cy="566928"/>
-          </a:xfrm>
-          <a:prstGeom prst="roundRect">
-            <a:avLst>
-              <a:gd name="adj" fmla="val 12000"/>
-            </a:avLst>
-          </a:prstGeom>
-          <a:solidFill>
-            <a:srgbClr val="F2F2F2"/>
-          </a:solidFill>
-          <a:ln>
-            <a:noFill/>
-          </a:ln>
-        </p:spPr>
-        <p:style>
-          <a:lnRef idx="1">
-            <a:schemeClr val="accent1"/>
-          </a:lnRef>
-          <a:fillRef idx="3">
-            <a:schemeClr val="accent1"/>
-          </a:fillRef>
-          <a:effectRef idx="2">
-            <a:schemeClr val="accent1"/>
-          </a:effectRef>
-          <a:fontRef idx="minor">
-            <a:schemeClr val="lt1"/>
-          </a:fontRef>
-        </p:style>
-        <p:txBody>
-          <a:bodyPr rtlCol="0" anchor="ctr"/>
-          <a:lstStyle/>
-          <a:p>
-            <a:pPr algn="ctr"/>
-          </a:p>
-        </p:txBody>
-      </p:sp>
-      <p:sp>
-        <p:nvSpPr>
-          <p:cNvPr id="7" name="Rectangle 6"/>
-          <p:cNvSpPr/>
-          <p:nvPr/>
-        </p:nvSpPr>
-        <p:spPr>
-          <a:xfrm>
-            <a:off x="640080" y="1618487"/>
-            <a:ext cx="274320" cy="274320"/>
-          </a:xfrm>
-          <a:prstGeom prst="rect">
-            <a:avLst/>
-          </a:prstGeom>
-          <a:solidFill>
-            <a:srgbClr val="FFFFFF"/>
-          </a:solidFill>
-          <a:ln>
-            <a:solidFill>
-              <a:srgbClr val="333333"/>
-            </a:solidFill>
-          </a:ln>
-        </p:spPr>
-        <p:style>
-          <a:lnRef idx="1">
-            <a:schemeClr val="accent1"/>
-          </a:lnRef>
-          <a:fillRef idx="3">
-            <a:schemeClr val="accent1"/>
-          </a:fillRef>
-          <a:effectRef idx="2">
-            <a:schemeClr val="accent1"/>
-          </a:effectRef>
-          <a:fontRef idx="minor">
-            <a:schemeClr val="lt1"/>
-          </a:fontRef>
-        </p:style>
-        <p:txBody>
-          <a:bodyPr rtlCol="0" anchor="ctr"/>
-          <a:lstStyle/>
-          <a:p>
-            <a:pPr algn="ctr"/>
-          </a:p>
-        </p:txBody>
-      </p:sp>
-      <p:sp>
-        <p:nvSpPr>
-          <p:cNvPr id="8" name="Rectangle 7"/>
-          <p:cNvSpPr/>
-          <p:nvPr/>
-        </p:nvSpPr>
-        <p:spPr>
-          <a:xfrm>
-            <a:off x="640080" y="1618487"/>
-            <a:ext cx="73152" cy="274320"/>
-          </a:xfrm>
-          <a:prstGeom prst="rect">
-            <a:avLst/>
-          </a:prstGeom>
-          <a:solidFill>
-            <a:srgbClr val="269CCB"/>
-          </a:solidFill>
-          <a:ln>
-            <a:noFill/>
-          </a:ln>
-        </p:spPr>
-        <p:style>
-          <a:lnRef idx="1">
-            <a:schemeClr val="accent1"/>
-          </a:lnRef>
-          <a:fillRef idx="3">
-            <a:schemeClr val="accent1"/>
-          </a:fillRef>
-          <a:effectRef idx="2">
-            <a:schemeClr val="accent1"/>
-          </a:effectRef>
-          <a:fontRef idx="minor">
-            <a:schemeClr val="lt1"/>
-          </a:fontRef>
-        </p:style>
-        <p:txBody>
-          <a:bodyPr rtlCol="0" anchor="ctr"/>
-          <a:lstStyle/>
-          <a:p>
-            <a:pPr algn="ctr"/>
-          </a:p>
-        </p:txBody>
-      </p:sp>
-      <p:sp>
-        <p:nvSpPr>
-          <p:cNvPr id="9" name="TextBox 8"/>
-          <p:cNvSpPr txBox="1"/>
-          <p:nvPr/>
-        </p:nvSpPr>
-        <p:spPr>
-          <a:xfrm>
-            <a:off x="1097280" y="1563624"/>
-            <a:ext cx="10362895" cy="402336"/>
-          </a:xfrm>
-          <a:prstGeom prst="rect">
-            <a:avLst/>
-          </a:prstGeom>
-          <a:noFill/>
-        </p:spPr>
-        <p:txBody>
-          <a:bodyPr wrap="square" anchor="ctr"/>
-          <a:lstStyle/>
-          <a:p>
-            <a:r>
-              <a:rPr sz="1500" b="1" i="0">
-                <a:solidFill>
-                  <a:srgbClr val="333333"/>
-                </a:solidFill>
-                <a:latin typeface="Calibri"/>
-              </a:rPr>
-              <a:t>EL GUION DE LOS CINCO TRAMOS</a:t>
-            </a:r>
-            <a:r>
-              <a:rPr sz="1500" b="0" i="0">
-                <a:solidFill>
-                  <a:srgbClr val="333333"/>
-                </a:solidFill>
-                <a:latin typeface="Calibri"/>
-              </a:rPr>
-              <a:t> — Los cinco tramos con </a:t>
-            </a:r>
-            <a:r>
-              <a:rPr sz="1500" b="1" i="0">
-                <a:solidFill>
-                  <a:srgbClr val="333333"/>
-                </a:solidFill>
-                <a:latin typeface="Calibri"/>
-              </a:rPr>
-              <a:t>el tiempo asignado a cada uno</a:t>
-            </a:r>
-            <a:r>
-              <a:rPr sz="1500" b="0" i="0">
-                <a:solidFill>
-                  <a:srgbClr val="333333"/>
-                </a:solidFill>
-                <a:latin typeface="Calibri"/>
-              </a:rPr>
-              <a:t> —que sume nueve minutos— y </a:t>
-            </a:r>
-            <a:r>
-              <a:rPr sz="1500" b="1" i="0">
-                <a:solidFill>
-                  <a:srgbClr val="333333"/>
-                </a:solidFill>
-                <a:latin typeface="Calibri"/>
-              </a:rPr>
-              <a:t>quién habla</a:t>
-            </a:r>
-            <a:r>
-              <a:rPr sz="1500" b="0" i="0">
-                <a:solidFill>
-                  <a:srgbClr val="333333"/>
-                </a:solidFill>
-                <a:latin typeface="Calibri"/>
-              </a:rPr>
-              <a:t> en cada uno.</a:t>
-            </a:r>
-          </a:p>
-        </p:txBody>
-      </p:sp>
-      <p:sp>
-        <p:nvSpPr>
-          <p:cNvPr id="10" name="Rounded Rectangle 9"/>
-          <p:cNvSpPr/>
-          <p:nvPr/>
-        </p:nvSpPr>
-        <p:spPr>
-          <a:xfrm>
-            <a:off x="457200" y="2148839"/>
-            <a:ext cx="11277295" cy="566928"/>
-          </a:xfrm>
-          <a:prstGeom prst="roundRect">
-            <a:avLst>
-              <a:gd name="adj" fmla="val 12000"/>
-            </a:avLst>
-          </a:prstGeom>
-          <a:solidFill>
-            <a:srgbClr val="F2F2F2"/>
-          </a:solidFill>
-          <a:ln>
-            <a:noFill/>
-          </a:ln>
-        </p:spPr>
-        <p:style>
-          <a:lnRef idx="1">
-            <a:schemeClr val="accent1"/>
-          </a:lnRef>
-          <a:fillRef idx="3">
-            <a:schemeClr val="accent1"/>
-          </a:fillRef>
-          <a:effectRef idx="2">
-            <a:schemeClr val="accent1"/>
-          </a:effectRef>
-          <a:fontRef idx="minor">
-            <a:schemeClr val="lt1"/>
-          </a:fontRef>
-        </p:style>
-        <p:txBody>
-          <a:bodyPr rtlCol="0" anchor="ctr"/>
-          <a:lstStyle/>
-          <a:p>
-            <a:pPr algn="ctr"/>
-          </a:p>
-        </p:txBody>
-      </p:sp>
-      <p:sp>
-        <p:nvSpPr>
-          <p:cNvPr id="11" name="Rectangle 10"/>
-          <p:cNvSpPr/>
-          <p:nvPr/>
-        </p:nvSpPr>
-        <p:spPr>
-          <a:xfrm>
-            <a:off x="640080" y="2295144"/>
-            <a:ext cx="274320" cy="274320"/>
-          </a:xfrm>
-          <a:prstGeom prst="rect">
-            <a:avLst/>
-          </a:prstGeom>
-          <a:solidFill>
-            <a:srgbClr val="FFFFFF"/>
-          </a:solidFill>
-          <a:ln>
-            <a:solidFill>
-              <a:srgbClr val="333333"/>
-            </a:solidFill>
-          </a:ln>
-        </p:spPr>
-        <p:style>
-          <a:lnRef idx="1">
-            <a:schemeClr val="accent1"/>
-          </a:lnRef>
-          <a:fillRef idx="3">
-            <a:schemeClr val="accent1"/>
-          </a:fillRef>
-          <a:effectRef idx="2">
-            <a:schemeClr val="accent1"/>
-          </a:effectRef>
-          <a:fontRef idx="minor">
-            <a:schemeClr val="lt1"/>
-          </a:fontRef>
-        </p:style>
-        <p:txBody>
-          <a:bodyPr rtlCol="0" anchor="ctr"/>
-          <a:lstStyle/>
-          <a:p>
-            <a:pPr algn="ctr"/>
-          </a:p>
-        </p:txBody>
-      </p:sp>
-      <p:sp>
-        <p:nvSpPr>
-          <p:cNvPr id="12" name="Rectangle 11"/>
-          <p:cNvSpPr/>
-          <p:nvPr/>
-        </p:nvSpPr>
-        <p:spPr>
-          <a:xfrm>
-            <a:off x="640080" y="2295144"/>
-            <a:ext cx="73152" cy="274320"/>
-          </a:xfrm>
-          <a:prstGeom prst="rect">
-            <a:avLst/>
-          </a:prstGeom>
-          <a:solidFill>
-            <a:srgbClr val="269CCB"/>
-          </a:solidFill>
-          <a:ln>
-            <a:noFill/>
-          </a:ln>
-        </p:spPr>
-        <p:style>
-          <a:lnRef idx="1">
-            <a:schemeClr val="accent1"/>
-          </a:lnRef>
-          <a:fillRef idx="3">
-            <a:schemeClr val="accent1"/>
-          </a:fillRef>
-          <a:effectRef idx="2">
-            <a:schemeClr val="accent1"/>
-          </a:effectRef>
-          <a:fontRef idx="minor">
-            <a:schemeClr val="lt1"/>
-          </a:fontRef>
-        </p:style>
-        <p:txBody>
-          <a:bodyPr rtlCol="0" anchor="ctr"/>
-          <a:lstStyle/>
-          <a:p>
-            <a:pPr algn="ctr"/>
-          </a:p>
-        </p:txBody>
-      </p:sp>
-      <p:sp>
-        <p:nvSpPr>
-          <p:cNvPr id="13" name="TextBox 12"/>
-          <p:cNvSpPr txBox="1"/>
-          <p:nvPr/>
-        </p:nvSpPr>
-        <p:spPr>
-          <a:xfrm>
-            <a:off x="1097280" y="2240279"/>
-            <a:ext cx="10362895" cy="402336"/>
-          </a:xfrm>
-          <a:prstGeom prst="rect">
-            <a:avLst/>
-          </a:prstGeom>
-          <a:noFill/>
-        </p:spPr>
-        <p:txBody>
-          <a:bodyPr wrap="square" anchor="ctr"/>
-          <a:lstStyle/>
-          <a:p>
-            <a:r>
-              <a:rPr sz="1500" b="1" i="0">
-                <a:solidFill>
-                  <a:srgbClr val="333333"/>
-                </a:solidFill>
-                <a:latin typeface="Calibri"/>
-              </a:rPr>
-              <a:t>LAS OCHO DIAPOSITIVAS</a:t>
-            </a:r>
-            <a:r>
-              <a:rPr sz="1500" b="0" i="0">
-                <a:solidFill>
-                  <a:srgbClr val="333333"/>
-                </a:solidFill>
-                <a:latin typeface="Calibri"/>
-              </a:rPr>
-              <a:t> — Máximo ocho, </a:t>
-            </a:r>
-            <a:r>
-              <a:rPr sz="1500" b="1" i="0">
-                <a:solidFill>
-                  <a:srgbClr val="333333"/>
-                </a:solidFill>
-                <a:latin typeface="Calibri"/>
-              </a:rPr>
-              <a:t>una idea cada una</a:t>
-            </a:r>
-            <a:r>
-              <a:rPr sz="1500" b="0" i="0">
-                <a:solidFill>
-                  <a:srgbClr val="333333"/>
-                </a:solidFill>
-                <a:latin typeface="Calibri"/>
-              </a:rPr>
-              <a:t>, con rótulos y no párrafos. La matriz completa </a:t>
-            </a:r>
-            <a:r>
-              <a:rPr sz="1500" b="1" i="0">
-                <a:solidFill>
-                  <a:srgbClr val="333333"/>
-                </a:solidFill>
-                <a:latin typeface="Calibri"/>
-              </a:rPr>
-              <a:t>no va</a:t>
-            </a:r>
-            <a:r>
-              <a:rPr sz="1500" b="0" i="0">
-                <a:solidFill>
-                  <a:srgbClr val="333333"/>
-                </a:solidFill>
-                <a:latin typeface="Calibri"/>
-              </a:rPr>
-              <a:t>: van las dos alternativas y el ganador.</a:t>
-            </a:r>
-          </a:p>
-        </p:txBody>
-      </p:sp>
-      <p:sp>
-        <p:nvSpPr>
-          <p:cNvPr id="14" name="Rounded Rectangle 13"/>
-          <p:cNvSpPr/>
-          <p:nvPr/>
-        </p:nvSpPr>
-        <p:spPr>
-          <a:xfrm>
-            <a:off x="457200" y="2825496"/>
-            <a:ext cx="11277295" cy="566928"/>
-          </a:xfrm>
-          <a:prstGeom prst="roundRect">
-            <a:avLst>
-              <a:gd name="adj" fmla="val 12000"/>
-            </a:avLst>
-          </a:prstGeom>
-          <a:solidFill>
-            <a:srgbClr val="F2F2F2"/>
-          </a:solidFill>
-          <a:ln>
-            <a:noFill/>
-          </a:ln>
-        </p:spPr>
-        <p:style>
-          <a:lnRef idx="1">
-            <a:schemeClr val="accent1"/>
-          </a:lnRef>
-          <a:fillRef idx="3">
-            <a:schemeClr val="accent1"/>
-          </a:fillRef>
-          <a:effectRef idx="2">
-            <a:schemeClr val="accent1"/>
-          </a:effectRef>
-          <a:fontRef idx="minor">
-            <a:schemeClr val="lt1"/>
-          </a:fontRef>
-        </p:style>
-        <p:txBody>
-          <a:bodyPr rtlCol="0" anchor="ctr"/>
-          <a:lstStyle/>
-          <a:p>
-            <a:pPr algn="ctr"/>
-          </a:p>
-        </p:txBody>
-      </p:sp>
-      <p:sp>
-        <p:nvSpPr>
-          <p:cNvPr id="15" name="Rectangle 14"/>
-          <p:cNvSpPr/>
-          <p:nvPr/>
-        </p:nvSpPr>
-        <p:spPr>
-          <a:xfrm>
-            <a:off x="640080" y="2971800"/>
-            <a:ext cx="274320" cy="274320"/>
-          </a:xfrm>
-          <a:prstGeom prst="rect">
-            <a:avLst/>
-          </a:prstGeom>
-          <a:solidFill>
-            <a:srgbClr val="FFFFFF"/>
-          </a:solidFill>
-          <a:ln>
-            <a:solidFill>
-              <a:srgbClr val="333333"/>
-            </a:solidFill>
-          </a:ln>
-        </p:spPr>
-        <p:style>
-          <a:lnRef idx="1">
-            <a:schemeClr val="accent1"/>
-          </a:lnRef>
-          <a:fillRef idx="3">
-            <a:schemeClr val="accent1"/>
-          </a:fillRef>
-          <a:effectRef idx="2">
-            <a:schemeClr val="accent1"/>
-          </a:effectRef>
-          <a:fontRef idx="minor">
-            <a:schemeClr val="lt1"/>
-          </a:fontRef>
-        </p:style>
-        <p:txBody>
-          <a:bodyPr rtlCol="0" anchor="ctr"/>
-          <a:lstStyle/>
-          <a:p>
-            <a:pPr algn="ctr"/>
-          </a:p>
-        </p:txBody>
-      </p:sp>
-      <p:sp>
-        <p:nvSpPr>
-          <p:cNvPr id="16" name="Rectangle 15"/>
-          <p:cNvSpPr/>
-          <p:nvPr/>
-        </p:nvSpPr>
-        <p:spPr>
-          <a:xfrm>
-            <a:off x="640080" y="2971800"/>
-            <a:ext cx="73152" cy="274320"/>
-          </a:xfrm>
-          <a:prstGeom prst="rect">
-            <a:avLst/>
-          </a:prstGeom>
-          <a:solidFill>
-            <a:srgbClr val="269CCB"/>
-          </a:solidFill>
-          <a:ln>
-            <a:noFill/>
-          </a:ln>
-        </p:spPr>
-        <p:style>
-          <a:lnRef idx="1">
-            <a:schemeClr val="accent1"/>
-          </a:lnRef>
-          <a:fillRef idx="3">
-            <a:schemeClr val="accent1"/>
-          </a:fillRef>
-          <a:effectRef idx="2">
-            <a:schemeClr val="accent1"/>
-          </a:effectRef>
-          <a:fontRef idx="minor">
-            <a:schemeClr val="lt1"/>
-          </a:fontRef>
-        </p:style>
-        <p:txBody>
-          <a:bodyPr rtlCol="0" anchor="ctr"/>
-          <a:lstStyle/>
-          <a:p>
-            <a:pPr algn="ctr"/>
-          </a:p>
-        </p:txBody>
-      </p:sp>
-      <p:sp>
-        <p:nvSpPr>
-          <p:cNvPr id="17" name="TextBox 16"/>
-          <p:cNvSpPr txBox="1"/>
-          <p:nvPr/>
-        </p:nvSpPr>
-        <p:spPr>
-          <a:xfrm>
-            <a:off x="1097280" y="2916936"/>
-            <a:ext cx="10362895" cy="402336"/>
-          </a:xfrm>
-          <a:prstGeom prst="rect">
-            <a:avLst/>
-          </a:prstGeom>
-          <a:noFill/>
-        </p:spPr>
-        <p:txBody>
-          <a:bodyPr wrap="square" anchor="ctr"/>
-          <a:lstStyle/>
-          <a:p>
-            <a:r>
-              <a:rPr sz="1500" b="1" i="0">
-                <a:solidFill>
-                  <a:srgbClr val="333333"/>
-                </a:solidFill>
-                <a:latin typeface="Calibri"/>
-              </a:rPr>
-              <a:t>EL REPARTO ENTRE INTEGRANTES</a:t>
-            </a:r>
-            <a:r>
-              <a:rPr sz="1500" b="0" i="0">
-                <a:solidFill>
-                  <a:srgbClr val="333333"/>
-                </a:solidFill>
-                <a:latin typeface="Calibri"/>
-              </a:rPr>
-              <a:t> — Quién habla en cada tramo, y </a:t>
-            </a:r>
-            <a:r>
-              <a:rPr sz="1500" b="1" i="0">
-                <a:solidFill>
-                  <a:srgbClr val="333333"/>
-                </a:solidFill>
-                <a:latin typeface="Calibri"/>
-              </a:rPr>
-              <a:t>qué hace quien no habla</a:t>
-            </a:r>
-            <a:r>
-              <a:rPr sz="1500" b="0" i="0">
-                <a:solidFill>
-                  <a:srgbClr val="333333"/>
-                </a:solidFill>
-                <a:latin typeface="Calibri"/>
-              </a:rPr>
-              <a:t>: cronómetro, capturas del plan B, la diapositiva siguiente lista.</a:t>
-            </a:r>
-          </a:p>
-        </p:txBody>
-      </p:sp>
-      <p:sp>
-        <p:nvSpPr>
-          <p:cNvPr id="18" name="Rounded Rectangle 17"/>
-          <p:cNvSpPr/>
-          <p:nvPr/>
-        </p:nvSpPr>
-        <p:spPr>
-          <a:xfrm>
-            <a:off x="457200" y="3502152"/>
-            <a:ext cx="11277295" cy="566928"/>
-          </a:xfrm>
-          <a:prstGeom prst="roundRect">
-            <a:avLst>
-              <a:gd name="adj" fmla="val 12000"/>
-            </a:avLst>
-          </a:prstGeom>
-          <a:solidFill>
-            <a:srgbClr val="F2F2F2"/>
-          </a:solidFill>
-          <a:ln>
-            <a:noFill/>
-          </a:ln>
-        </p:spPr>
-        <p:style>
-          <a:lnRef idx="1">
-            <a:schemeClr val="accent1"/>
-          </a:lnRef>
-          <a:fillRef idx="3">
-            <a:schemeClr val="accent1"/>
-          </a:fillRef>
-          <a:effectRef idx="2">
-            <a:schemeClr val="accent1"/>
-          </a:effectRef>
-          <a:fontRef idx="minor">
-            <a:schemeClr val="lt1"/>
-          </a:fontRef>
-        </p:style>
-        <p:txBody>
-          <a:bodyPr rtlCol="0" anchor="ctr"/>
-          <a:lstStyle/>
-          <a:p>
-            <a:pPr algn="ctr"/>
-          </a:p>
-        </p:txBody>
-      </p:sp>
-      <p:sp>
-        <p:nvSpPr>
-          <p:cNvPr id="19" name="Rectangle 18"/>
-          <p:cNvSpPr/>
-          <p:nvPr/>
-        </p:nvSpPr>
-        <p:spPr>
-          <a:xfrm>
-            <a:off x="640080" y="3648456"/>
-            <a:ext cx="274320" cy="274320"/>
-          </a:xfrm>
-          <a:prstGeom prst="rect">
-            <a:avLst/>
-          </a:prstGeom>
-          <a:solidFill>
-            <a:srgbClr val="FFFFFF"/>
-          </a:solidFill>
-          <a:ln>
-            <a:solidFill>
-              <a:srgbClr val="333333"/>
-            </a:solidFill>
-          </a:ln>
-        </p:spPr>
-        <p:style>
-          <a:lnRef idx="1">
-            <a:schemeClr val="accent1"/>
-          </a:lnRef>
-          <a:fillRef idx="3">
-            <a:schemeClr val="accent1"/>
-          </a:fillRef>
-          <a:effectRef idx="2">
-            <a:schemeClr val="accent1"/>
-          </a:effectRef>
-          <a:fontRef idx="minor">
-            <a:schemeClr val="lt1"/>
-          </a:fontRef>
-        </p:style>
-        <p:txBody>
-          <a:bodyPr rtlCol="0" anchor="ctr"/>
-          <a:lstStyle/>
-          <a:p>
-            <a:pPr algn="ctr"/>
-          </a:p>
-        </p:txBody>
-      </p:sp>
-      <p:sp>
-        <p:nvSpPr>
-          <p:cNvPr id="20" name="Rectangle 19"/>
-          <p:cNvSpPr/>
-          <p:nvPr/>
-        </p:nvSpPr>
-        <p:spPr>
-          <a:xfrm>
-            <a:off x="640080" y="3648456"/>
-            <a:ext cx="73152" cy="274320"/>
-          </a:xfrm>
-          <a:prstGeom prst="rect">
-            <a:avLst/>
-          </a:prstGeom>
-          <a:solidFill>
-            <a:srgbClr val="269CCB"/>
-          </a:solidFill>
-          <a:ln>
-            <a:noFill/>
-          </a:ln>
-        </p:spPr>
-        <p:style>
-          <a:lnRef idx="1">
-            <a:schemeClr val="accent1"/>
-          </a:lnRef>
-          <a:fillRef idx="3">
-            <a:schemeClr val="accent1"/>
-          </a:fillRef>
-          <a:effectRef idx="2">
-            <a:schemeClr val="accent1"/>
-          </a:effectRef>
-          <a:fontRef idx="minor">
-            <a:schemeClr val="lt1"/>
-          </a:fontRef>
-        </p:style>
-        <p:txBody>
-          <a:bodyPr rtlCol="0" anchor="ctr"/>
-          <a:lstStyle/>
-          <a:p>
-            <a:pPr algn="ctr"/>
-          </a:p>
-        </p:txBody>
-      </p:sp>
-      <p:sp>
-        <p:nvSpPr>
-          <p:cNvPr id="21" name="TextBox 20"/>
-          <p:cNvSpPr txBox="1"/>
-          <p:nvPr/>
-        </p:nvSpPr>
-        <p:spPr>
-          <a:xfrm>
-            <a:off x="1097280" y="3593592"/>
-            <a:ext cx="10362895" cy="402336"/>
-          </a:xfrm>
-          <a:prstGeom prst="rect">
-            <a:avLst/>
-          </a:prstGeom>
-          <a:noFill/>
-        </p:spPr>
-        <p:txBody>
-          <a:bodyPr wrap="square" anchor="ctr"/>
-          <a:lstStyle/>
-          <a:p>
-            <a:r>
-              <a:rPr sz="1500" b="1" i="0">
-                <a:solidFill>
-                  <a:srgbClr val="333333"/>
-                </a:solidFill>
-                <a:latin typeface="Calibri"/>
-              </a:rPr>
-              <a:t>LA DEMOSTRACIÓN DEL PROTOTIPO</a:t>
-            </a:r>
-            <a:r>
-              <a:rPr sz="1500" b="0" i="0">
-                <a:solidFill>
-                  <a:srgbClr val="333333"/>
-                </a:solidFill>
-                <a:latin typeface="Calibri"/>
-              </a:rPr>
-              <a:t> — El recorrido de </a:t>
-            </a:r>
-            <a:r>
-              <a:rPr sz="1500" b="1" i="0">
-                <a:solidFill>
-                  <a:srgbClr val="333333"/>
-                </a:solidFill>
-                <a:latin typeface="Calibri"/>
-              </a:rPr>
-              <a:t>tres pasos</a:t>
-            </a:r>
-            <a:r>
-              <a:rPr sz="1500" b="0" i="0">
-                <a:solidFill>
-                  <a:srgbClr val="333333"/>
-                </a:solidFill>
-                <a:latin typeface="Calibri"/>
-              </a:rPr>
-              <a:t> que se va a mostrar, con </a:t>
-            </a:r>
-            <a:r>
-              <a:rPr sz="1500" b="1" i="0">
-                <a:solidFill>
-                  <a:srgbClr val="333333"/>
-                </a:solidFill>
-                <a:latin typeface="Calibri"/>
-              </a:rPr>
-              <a:t>una persona narrando y otra manejando la pantalla</a:t>
-            </a:r>
-            <a:r>
-              <a:rPr sz="1500" b="0" i="0">
-                <a:solidFill>
-                  <a:srgbClr val="333333"/>
-                </a:solidFill>
-                <a:latin typeface="Calibri"/>
-              </a:rPr>
-              <a:t>. Ensayado dos veces.</a:t>
-            </a:r>
-          </a:p>
-        </p:txBody>
-      </p:sp>
-      <p:sp>
-        <p:nvSpPr>
-          <p:cNvPr id="22" name="Rounded Rectangle 21"/>
-          <p:cNvSpPr/>
-          <p:nvPr/>
-        </p:nvSpPr>
-        <p:spPr>
-          <a:xfrm>
-            <a:off x="457200" y="4178808"/>
-            <a:ext cx="11277295" cy="566928"/>
-          </a:xfrm>
-          <a:prstGeom prst="roundRect">
-            <a:avLst>
-              <a:gd name="adj" fmla="val 12000"/>
-            </a:avLst>
-          </a:prstGeom>
-          <a:solidFill>
-            <a:srgbClr val="F2F2F2"/>
-          </a:solidFill>
-          <a:ln>
-            <a:noFill/>
-          </a:ln>
-        </p:spPr>
-        <p:style>
-          <a:lnRef idx="1">
-            <a:schemeClr val="accent1"/>
-          </a:lnRef>
-          <a:fillRef idx="3">
-            <a:schemeClr val="accent1"/>
-          </a:fillRef>
-          <a:effectRef idx="2">
-            <a:schemeClr val="accent1"/>
-          </a:effectRef>
-          <a:fontRef idx="minor">
-            <a:schemeClr val="lt1"/>
-          </a:fontRef>
-        </p:style>
-        <p:txBody>
-          <a:bodyPr rtlCol="0" anchor="ctr"/>
-          <a:lstStyle/>
-          <a:p>
-            <a:pPr algn="ctr"/>
-          </a:p>
-        </p:txBody>
-      </p:sp>
-      <p:sp>
-        <p:nvSpPr>
-          <p:cNvPr id="23" name="Rectangle 22"/>
-          <p:cNvSpPr/>
-          <p:nvPr/>
-        </p:nvSpPr>
-        <p:spPr>
-          <a:xfrm>
-            <a:off x="640080" y="4325112"/>
-            <a:ext cx="274320" cy="274320"/>
-          </a:xfrm>
-          <a:prstGeom prst="rect">
-            <a:avLst/>
-          </a:prstGeom>
-          <a:solidFill>
-            <a:srgbClr val="FFFFFF"/>
-          </a:solidFill>
-          <a:ln>
-            <a:solidFill>
-              <a:srgbClr val="333333"/>
-            </a:solidFill>
-          </a:ln>
-        </p:spPr>
-        <p:style>
-          <a:lnRef idx="1">
-            <a:schemeClr val="accent1"/>
-          </a:lnRef>
-          <a:fillRef idx="3">
-            <a:schemeClr val="accent1"/>
-          </a:fillRef>
-          <a:effectRef idx="2">
-            <a:schemeClr val="accent1"/>
-          </a:effectRef>
-          <a:fontRef idx="minor">
-            <a:schemeClr val="lt1"/>
-          </a:fontRef>
-        </p:style>
-        <p:txBody>
-          <a:bodyPr rtlCol="0" anchor="ctr"/>
-          <a:lstStyle/>
-          <a:p>
-            <a:pPr algn="ctr"/>
-          </a:p>
-        </p:txBody>
-      </p:sp>
-      <p:sp>
-        <p:nvSpPr>
-          <p:cNvPr id="24" name="Rectangle 23"/>
-          <p:cNvSpPr/>
-          <p:nvPr/>
-        </p:nvSpPr>
-        <p:spPr>
-          <a:xfrm>
-            <a:off x="640080" y="4325112"/>
-            <a:ext cx="73152" cy="274320"/>
-          </a:xfrm>
-          <a:prstGeom prst="rect">
-            <a:avLst/>
-          </a:prstGeom>
-          <a:solidFill>
-            <a:srgbClr val="269CCB"/>
-          </a:solidFill>
-          <a:ln>
-            <a:noFill/>
-          </a:ln>
-        </p:spPr>
-        <p:style>
-          <a:lnRef idx="1">
-            <a:schemeClr val="accent1"/>
-          </a:lnRef>
-          <a:fillRef idx="3">
-            <a:schemeClr val="accent1"/>
-          </a:fillRef>
-          <a:effectRef idx="2">
-            <a:schemeClr val="accent1"/>
-          </a:effectRef>
-          <a:fontRef idx="minor">
-            <a:schemeClr val="lt1"/>
-          </a:fontRef>
-        </p:style>
-        <p:txBody>
-          <a:bodyPr rtlCol="0" anchor="ctr"/>
-          <a:lstStyle/>
-          <a:p>
-            <a:pPr algn="ctr"/>
-          </a:p>
-        </p:txBody>
-      </p:sp>
-      <p:sp>
-        <p:nvSpPr>
-          <p:cNvPr id="25" name="TextBox 24"/>
-          <p:cNvSpPr txBox="1"/>
-          <p:nvPr/>
-        </p:nvSpPr>
-        <p:spPr>
-          <a:xfrm>
-            <a:off x="1097280" y="4270248"/>
-            <a:ext cx="10362895" cy="402336"/>
-          </a:xfrm>
-          <a:prstGeom prst="rect">
-            <a:avLst/>
-          </a:prstGeom>
-          <a:noFill/>
-        </p:spPr>
-        <p:txBody>
-          <a:bodyPr wrap="square" anchor="ctr"/>
-          <a:lstStyle/>
-          <a:p>
-            <a:r>
-              <a:rPr sz="1500" b="1" i="0">
-                <a:solidFill>
-                  <a:srgbClr val="333333"/>
-                </a:solidFill>
-                <a:latin typeface="Calibri"/>
-              </a:rPr>
-              <a:t>EL PLAN B TÉCNICO</a:t>
-            </a:r>
-            <a:r>
-              <a:rPr sz="1500" b="0" i="0">
-                <a:solidFill>
-                  <a:srgbClr val="333333"/>
-                </a:solidFill>
-                <a:latin typeface="Calibri"/>
-              </a:rPr>
-              <a:t> — En la carpeta del equipo: la presentación </a:t>
-            </a:r>
-            <a:r>
-              <a:rPr sz="1500" b="1" i="0">
-                <a:solidFill>
-                  <a:srgbClr val="333333"/>
-                </a:solidFill>
-                <a:latin typeface="Calibri"/>
-              </a:rPr>
-              <a:t>en PDF</a:t>
-            </a:r>
-            <a:r>
-              <a:rPr sz="1500" b="0" i="0">
-                <a:solidFill>
-                  <a:srgbClr val="333333"/>
-                </a:solidFill>
-                <a:latin typeface="Calibri"/>
-              </a:rPr>
-              <a:t>, </a:t>
-            </a:r>
-            <a:r>
-              <a:rPr sz="1500" b="1" i="0">
-                <a:solidFill>
-                  <a:srgbClr val="333333"/>
-                </a:solidFill>
-                <a:latin typeface="Calibri"/>
-              </a:rPr>
-              <a:t>capturas de cada paso</a:t>
-            </a:r>
-            <a:r>
-              <a:rPr sz="1500" b="0" i="0">
-                <a:solidFill>
-                  <a:srgbClr val="333333"/>
-                </a:solidFill>
-                <a:latin typeface="Calibri"/>
-              </a:rPr>
-              <a:t> de la demostración, y quién comparte pantalla si se cae el primero.</a:t>
-            </a:r>
-          </a:p>
-        </p:txBody>
-      </p:sp>
-      <p:sp>
-        <p:nvSpPr>
-          <p:cNvPr id="26" name="TextBox 25"/>
+            <a:pPr>
+              <a:spcAft>
+                <a:spcPts val="800"/>
+              </a:spcAft>
+            </a:pPr>
+            <a:r>
+              <a:rPr sz="2000" b="0" i="0">
+                <a:solidFill>
+                  <a:srgbClr val="333333"/>
+                </a:solidFill>
+                <a:latin typeface="Calibri"/>
+              </a:rPr>
+              <a:t>–   La apertura de hoy es una pregunta con trampa aritmética, y funciona porque la respuesta la descubren ellos: </a:t>
+            </a:r>
+            <a:r>
+              <a:rPr sz="2000" b="1" i="0">
+                <a:solidFill>
+                  <a:srgbClr val="333333"/>
+                </a:solidFill>
+                <a:latin typeface="Calibri"/>
+              </a:rPr>
+              <a:t>¿cuánto dura contar el problema, los actores y el árbol de causas?</a:t>
+            </a:r>
+            <a:r>
+              <a:rPr sz="2000" b="0" i="0">
+                <a:solidFill>
+                  <a:srgbClr val="333333"/>
+                </a:solidFill>
+                <a:latin typeface="Calibri"/>
+              </a:rPr>
+              <a:t> Más de nueve minutos.</a:t>
+            </a:r>
+          </a:p>
+          <a:p>
+            <a:pPr>
+              <a:spcAft>
+                <a:spcPts val="800"/>
+              </a:spcAft>
+            </a:pPr>
+            <a:r>
+              <a:rPr sz="2000" b="0" i="0">
+                <a:solidFill>
+                  <a:srgbClr val="333333"/>
+                </a:solidFill>
+                <a:latin typeface="Calibri"/>
+              </a:rPr>
+              <a:t>–   Solo el árbol de causas de la sesión 6, contado como lo contaron entonces, se lleva cuatro.</a:t>
+            </a:r>
+          </a:p>
+          <a:p>
+            <a:pPr>
+              <a:spcAft>
+                <a:spcPts val="800"/>
+              </a:spcAft>
+            </a:pPr>
+            <a:r>
+              <a:rPr sz="2000" b="0" i="0">
+                <a:solidFill>
+                  <a:srgbClr val="333333"/>
+                </a:solidFill>
+                <a:latin typeface="Calibri"/>
+              </a:rPr>
+              <a:t>–   De ahí sale la idea que ordena toda la sesión y que conviene decir literalmente: </a:t>
+            </a:r>
+            <a:r>
+              <a:rPr sz="2000" b="1" i="0">
+                <a:solidFill>
+                  <a:srgbClr val="333333"/>
+                </a:solidFill>
+                <a:latin typeface="Calibri"/>
+              </a:rPr>
+              <a:t>una presentación no se acorta hablando rápido, se acorta eligiendo.</a:t>
+            </a:r>
+            <a:r>
+              <a:rPr sz="2000" b="0" i="0">
+                <a:solidFill>
+                  <a:srgbClr val="333333"/>
+                </a:solidFill>
+                <a:latin typeface="Calibri"/>
+              </a:rPr>
+              <a:t> Es la misma operación del alcance mínimo de la sesión 8 aplicada al tiempo en vez del producto.</a:t>
+            </a:r>
+          </a:p>
+          <a:p>
+            <a:pPr>
+              <a:spcAft>
+                <a:spcPts val="800"/>
+              </a:spcAft>
+            </a:pPr>
+            <a:r>
+              <a:rPr sz="2000" b="0" i="0">
+                <a:solidFill>
+                  <a:srgbClr val="333333"/>
+                </a:solidFill>
+                <a:latin typeface="Calibri"/>
+              </a:rPr>
+              <a:t>–   Los equipos que fracasan en la Clase 15 no fracasan por hablar mal: fracasan porque intentaron contarlo todo y se les acabó el tiempo en el tramo 2, dejando fuera precisamente el prototipo y los hallazgos, que es lo único que el jurado no conoce.</a:t>
+            </a:r>
+          </a:p>
+        </p:txBody>
+      </p:sp>
+      <p:sp>
+        <p:nvSpPr>
+          <p:cNvPr id="6" name="TextBox 5"/>
           <p:cNvSpPr txBox="1"/>
           <p:nvPr/>
         </p:nvSpPr>
@@ -4759,7 +3824,7 @@
         <p:spPr>
           <a:xfrm>
             <a:off x="0" y="0"/>
-            <a:ext cx="12191695" cy="1170432"/>
+            <a:ext cx="12191695" cy="960120"/>
           </a:xfrm>
           <a:prstGeom prst="rect">
             <a:avLst/>
@@ -4801,7 +3866,7 @@
         </p:nvSpPr>
         <p:spPr>
           <a:xfrm>
-            <a:off x="0" y="1170432"/>
+            <a:off x="0" y="960120"/>
             <a:ext cx="12191695" cy="41148"/>
           </a:xfrm>
           <a:prstGeom prst="rect">
@@ -4845,7 +3910,7 @@
         <p:spPr>
           <a:xfrm>
             <a:off x="457200" y="164592"/>
-            <a:ext cx="11277295" cy="384048"/>
+            <a:ext cx="11277295" cy="502920"/>
           </a:xfrm>
           <a:prstGeom prst="rect">
             <a:avLst/>
@@ -4865,7 +3930,7 @@
                 </a:solidFill>
                 <a:latin typeface="Calibri"/>
               </a:rPr>
-              <a:t>Cómo se expone en 4 minutos</a:t>
+              <a:t>La pregunta de entrada: cuánto dura contarlo todo (2/2)</a:t>
             </a:r>
           </a:p>
         </p:txBody>
@@ -4878,8 +3943,8 @@
         </p:nvSpPr>
         <p:spPr>
           <a:xfrm>
-            <a:off x="457200" y="566928"/>
-            <a:ext cx="11277295" cy="411480"/>
+            <a:off x="457200" y="1170432"/>
+            <a:ext cx="11277295" cy="5230368"/>
           </a:xfrm>
           <a:prstGeom prst="rect">
             <a:avLst/>
@@ -4892,903 +3957,126 @@
           </a:bodyPr>
           <a:lstStyle/>
           <a:p>
-            <a:r>
-              <a:rPr sz="1400" b="0" i="0">
-                <a:solidFill>
-                  <a:srgbClr val="B8D8EE"/>
-                </a:solidFill>
-                <a:latin typeface="Calibri"/>
-              </a:rPr>
-              <a:t>Habla el vocero con la pantalla ya compartida · cronómetro en pantalla · se corta al llegar a cero</a:t>
-            </a:r>
-          </a:p>
-        </p:txBody>
-      </p:sp>
-      <p:sp>
-        <p:nvSpPr>
-          <p:cNvPr id="6" name="Rounded Rectangle 5"/>
-          <p:cNvSpPr/>
-          <p:nvPr/>
-        </p:nvSpPr>
-        <p:spPr>
-          <a:xfrm>
-            <a:off x="457200" y="1444752"/>
-            <a:ext cx="11277295" cy="908913"/>
-          </a:xfrm>
-          <a:prstGeom prst="roundRect">
-            <a:avLst>
-              <a:gd name="adj" fmla="val 12000"/>
-            </a:avLst>
-          </a:prstGeom>
-          <a:solidFill>
-            <a:srgbClr val="F2F2F2"/>
-          </a:solidFill>
-          <a:ln>
-            <a:noFill/>
-          </a:ln>
-        </p:spPr>
-        <p:style>
-          <a:lnRef idx="1">
-            <a:schemeClr val="accent1"/>
-          </a:lnRef>
-          <a:fillRef idx="3">
-            <a:schemeClr val="accent1"/>
-          </a:fillRef>
-          <a:effectRef idx="2">
-            <a:schemeClr val="accent1"/>
-          </a:effectRef>
-          <a:fontRef idx="minor">
-            <a:schemeClr val="lt1"/>
-          </a:fontRef>
-        </p:style>
-        <p:txBody>
-          <a:bodyPr rtlCol="0" anchor="ctr"/>
-          <a:lstStyle/>
-          <a:p>
-            <a:pPr algn="ctr"/>
-          </a:p>
-        </p:txBody>
-      </p:sp>
-      <p:sp>
-        <p:nvSpPr>
-          <p:cNvPr id="7" name="Rounded Rectangle 6"/>
-          <p:cNvSpPr/>
-          <p:nvPr/>
-        </p:nvSpPr>
-        <p:spPr>
-          <a:xfrm>
-            <a:off x="594360" y="1679752"/>
-            <a:ext cx="438912" cy="438912"/>
-          </a:xfrm>
-          <a:prstGeom prst="roundRect">
-            <a:avLst>
-              <a:gd name="adj" fmla="val 12000"/>
-            </a:avLst>
-          </a:prstGeom>
-          <a:solidFill>
-            <a:srgbClr val="095292"/>
-          </a:solidFill>
-          <a:ln>
-            <a:noFill/>
-          </a:ln>
-        </p:spPr>
-        <p:style>
-          <a:lnRef idx="1">
-            <a:schemeClr val="accent1"/>
-          </a:lnRef>
-          <a:fillRef idx="3">
-            <a:schemeClr val="accent1"/>
-          </a:fillRef>
-          <a:effectRef idx="2">
-            <a:schemeClr val="accent1"/>
-          </a:effectRef>
-          <a:fontRef idx="minor">
-            <a:schemeClr val="lt1"/>
-          </a:fontRef>
-        </p:style>
-        <p:txBody>
-          <a:bodyPr rtlCol="0" anchor="ctr"/>
-          <a:lstStyle/>
-          <a:p>
-            <a:pPr algn="ctr"/>
-          </a:p>
-        </p:txBody>
-      </p:sp>
-      <p:sp>
-        <p:nvSpPr>
-          <p:cNvPr id="8" name="TextBox 7"/>
-          <p:cNvSpPr txBox="1"/>
-          <p:nvPr/>
-        </p:nvSpPr>
-        <p:spPr>
-          <a:xfrm>
-            <a:off x="594360" y="1679752"/>
-            <a:ext cx="438912" cy="438912"/>
-          </a:xfrm>
-          <a:prstGeom prst="rect">
-            <a:avLst/>
-          </a:prstGeom>
-          <a:noFill/>
-        </p:spPr>
-        <p:txBody>
-          <a:bodyPr wrap="square" anchor="ctr"/>
-          <a:lstStyle/>
-          <a:p>
-            <a:pPr algn="ctr"/>
-            <a:r>
-              <a:rPr sz="1600" b="1" i="0">
-                <a:solidFill>
-                  <a:srgbClr val="FFFFFF"/>
-                </a:solidFill>
-                <a:latin typeface="Calibri"/>
-              </a:rPr>
-              <a:t>1</a:t>
-            </a:r>
-          </a:p>
-        </p:txBody>
-      </p:sp>
-      <p:sp>
-        <p:nvSpPr>
-          <p:cNvPr id="9" name="TextBox 8"/>
-          <p:cNvSpPr txBox="1"/>
-          <p:nvPr/>
-        </p:nvSpPr>
-        <p:spPr>
-          <a:xfrm>
-            <a:off x="1188720" y="1536192"/>
-            <a:ext cx="10271455" cy="744321"/>
-          </a:xfrm>
-          <a:prstGeom prst="rect">
-            <a:avLst/>
-          </a:prstGeom>
-          <a:noFill/>
-        </p:spPr>
-        <p:txBody>
-          <a:bodyPr wrap="square" anchor="ctr"/>
-          <a:lstStyle/>
-          <a:p>
-            <a:r>
-              <a:rPr sz="1500" b="1" i="0">
-                <a:solidFill>
-                  <a:srgbClr val="095292"/>
-                </a:solidFill>
-                <a:latin typeface="Calibri"/>
-              </a:rPr>
-              <a:t>Tramo 1 · 1 min</a:t>
-            </a:r>
-          </a:p>
-          <a:p>
             <a:pPr>
-              <a:spcBef>
-                <a:spcPts val="200"/>
-              </a:spcBef>
+              <a:spcAft>
+                <a:spcPts val="800"/>
+              </a:spcAft>
             </a:pPr>
             <a:r>
-              <a:rPr sz="1300" b="0" i="0">
-                <a:solidFill>
-                  <a:srgbClr val="333333"/>
-                </a:solidFill>
-                <a:latin typeface="Calibri"/>
-              </a:rPr>
-              <a:t>El problema con su cifra. </a:t>
-            </a:r>
-            <a:r>
-              <a:rPr sz="1300" b="1" i="0">
-                <a:solidFill>
-                  <a:srgbClr val="333333"/>
-                </a:solidFill>
-                <a:latin typeface="Calibri"/>
-              </a:rPr>
-              <a:t>Sin presentaciones personales.</a:t>
-            </a:r>
-          </a:p>
-        </p:txBody>
-      </p:sp>
-      <p:sp>
-        <p:nvSpPr>
-          <p:cNvPr id="10" name="Rounded Rectangle 9"/>
-          <p:cNvSpPr/>
-          <p:nvPr/>
-        </p:nvSpPr>
-        <p:spPr>
-          <a:xfrm>
-            <a:off x="457200" y="2445105"/>
-            <a:ext cx="11277295" cy="908913"/>
-          </a:xfrm>
-          <a:prstGeom prst="roundRect">
-            <a:avLst>
-              <a:gd name="adj" fmla="val 12000"/>
-            </a:avLst>
-          </a:prstGeom>
-          <a:solidFill>
-            <a:srgbClr val="E8F4FA"/>
-          </a:solidFill>
-          <a:ln>
-            <a:noFill/>
-          </a:ln>
-        </p:spPr>
-        <p:style>
-          <a:lnRef idx="1">
-            <a:schemeClr val="accent1"/>
-          </a:lnRef>
-          <a:fillRef idx="3">
-            <a:schemeClr val="accent1"/>
-          </a:fillRef>
-          <a:effectRef idx="2">
-            <a:schemeClr val="accent1"/>
-          </a:effectRef>
-          <a:fontRef idx="minor">
-            <a:schemeClr val="lt1"/>
-          </a:fontRef>
-        </p:style>
-        <p:txBody>
-          <a:bodyPr rtlCol="0" anchor="ctr"/>
-          <a:lstStyle/>
-          <a:p>
-            <a:pPr algn="ctr"/>
-          </a:p>
-        </p:txBody>
-      </p:sp>
-      <p:sp>
-        <p:nvSpPr>
-          <p:cNvPr id="11" name="Rounded Rectangle 10"/>
-          <p:cNvSpPr/>
-          <p:nvPr/>
-        </p:nvSpPr>
-        <p:spPr>
-          <a:xfrm>
-            <a:off x="594360" y="2680106"/>
-            <a:ext cx="438912" cy="438912"/>
-          </a:xfrm>
-          <a:prstGeom prst="roundRect">
-            <a:avLst>
-              <a:gd name="adj" fmla="val 12000"/>
-            </a:avLst>
-          </a:prstGeom>
-          <a:solidFill>
-            <a:srgbClr val="095292"/>
-          </a:solidFill>
-          <a:ln>
-            <a:noFill/>
-          </a:ln>
-        </p:spPr>
-        <p:style>
-          <a:lnRef idx="1">
-            <a:schemeClr val="accent1"/>
-          </a:lnRef>
-          <a:fillRef idx="3">
-            <a:schemeClr val="accent1"/>
-          </a:fillRef>
-          <a:effectRef idx="2">
-            <a:schemeClr val="accent1"/>
-          </a:effectRef>
-          <a:fontRef idx="minor">
-            <a:schemeClr val="lt1"/>
-          </a:fontRef>
-        </p:style>
-        <p:txBody>
-          <a:bodyPr rtlCol="0" anchor="ctr"/>
-          <a:lstStyle/>
-          <a:p>
-            <a:pPr algn="ctr"/>
-          </a:p>
-        </p:txBody>
-      </p:sp>
-      <p:sp>
-        <p:nvSpPr>
-          <p:cNvPr id="12" name="TextBox 11"/>
-          <p:cNvSpPr txBox="1"/>
-          <p:nvPr/>
-        </p:nvSpPr>
-        <p:spPr>
-          <a:xfrm>
-            <a:off x="594360" y="2680106"/>
-            <a:ext cx="438912" cy="438912"/>
-          </a:xfrm>
-          <a:prstGeom prst="rect">
-            <a:avLst/>
-          </a:prstGeom>
-          <a:noFill/>
-        </p:spPr>
-        <p:txBody>
-          <a:bodyPr wrap="square" anchor="ctr"/>
-          <a:lstStyle/>
-          <a:p>
-            <a:pPr algn="ctr"/>
-            <a:r>
-              <a:rPr sz="1600" b="1" i="0">
-                <a:solidFill>
-                  <a:srgbClr val="FFFFFF"/>
-                </a:solidFill>
-                <a:latin typeface="Calibri"/>
-              </a:rPr>
-              <a:t>2</a:t>
-            </a:r>
-          </a:p>
-        </p:txBody>
-      </p:sp>
-      <p:sp>
-        <p:nvSpPr>
-          <p:cNvPr id="13" name="TextBox 12"/>
-          <p:cNvSpPr txBox="1"/>
-          <p:nvPr/>
-        </p:nvSpPr>
-        <p:spPr>
-          <a:xfrm>
-            <a:off x="1188720" y="2536545"/>
-            <a:ext cx="10271455" cy="744321"/>
-          </a:xfrm>
-          <a:prstGeom prst="rect">
-            <a:avLst/>
-          </a:prstGeom>
-          <a:noFill/>
-        </p:spPr>
-        <p:txBody>
-          <a:bodyPr wrap="square" anchor="ctr"/>
-          <a:lstStyle/>
-          <a:p>
-            <a:r>
-              <a:rPr sz="1500" b="1" i="0">
-                <a:solidFill>
-                  <a:srgbClr val="095292"/>
-                </a:solidFill>
-                <a:latin typeface="Calibri"/>
-              </a:rPr>
-              <a:t>Tramo 2 · 2 min</a:t>
+              <a:rPr sz="2000" b="0" i="0">
+                <a:solidFill>
+                  <a:srgbClr val="333333"/>
+                </a:solidFill>
+                <a:latin typeface="Calibri"/>
+              </a:rPr>
+              <a:t>–   En el muro, cada equipo escribe </a:t>
+            </a:r>
+            <a:r>
+              <a:rPr sz="2000" b="1" i="0">
+                <a:solidFill>
+                  <a:srgbClr val="333333"/>
+                </a:solidFill>
+                <a:latin typeface="Calibri"/>
+              </a:rPr>
+              <a:t>qué va a dejar fuera</a:t>
+            </a:r>
+            <a:r>
+              <a:rPr sz="2000" b="0" i="0">
+                <a:solidFill>
+                  <a:srgbClr val="333333"/>
+                </a:solidFill>
+                <a:latin typeface="Calibri"/>
+              </a:rPr>
+              <a:t>.</a:t>
             </a:r>
           </a:p>
           <a:p>
             <a:pPr>
-              <a:spcBef>
-                <a:spcPts val="200"/>
-              </a:spcBef>
+              <a:spcAft>
+                <a:spcPts val="800"/>
+              </a:spcAft>
             </a:pPr>
             <a:r>
-              <a:rPr sz="1300" b="0" i="0">
-                <a:solidFill>
-                  <a:srgbClr val="333333"/>
-                </a:solidFill>
-                <a:latin typeface="Calibri"/>
-              </a:rPr>
-              <a:t>Los afectados y la decisión de la matriz, con lo que se sacrificó.</a:t>
-            </a:r>
-          </a:p>
-        </p:txBody>
-      </p:sp>
-      <p:sp>
-        <p:nvSpPr>
-          <p:cNvPr id="14" name="Rounded Rectangle 13"/>
-          <p:cNvSpPr/>
-          <p:nvPr/>
-        </p:nvSpPr>
-        <p:spPr>
-          <a:xfrm>
-            <a:off x="457200" y="3445459"/>
-            <a:ext cx="11277295" cy="908913"/>
-          </a:xfrm>
-          <a:prstGeom prst="roundRect">
-            <a:avLst>
-              <a:gd name="adj" fmla="val 12000"/>
-            </a:avLst>
-          </a:prstGeom>
-          <a:solidFill>
-            <a:srgbClr val="F2F2F2"/>
-          </a:solidFill>
-          <a:ln>
-            <a:noFill/>
-          </a:ln>
-        </p:spPr>
-        <p:style>
-          <a:lnRef idx="1">
-            <a:schemeClr val="accent1"/>
-          </a:lnRef>
-          <a:fillRef idx="3">
-            <a:schemeClr val="accent1"/>
-          </a:fillRef>
-          <a:effectRef idx="2">
-            <a:schemeClr val="accent1"/>
-          </a:effectRef>
-          <a:fontRef idx="minor">
-            <a:schemeClr val="lt1"/>
-          </a:fontRef>
-        </p:style>
-        <p:txBody>
-          <a:bodyPr rtlCol="0" anchor="ctr"/>
-          <a:lstStyle/>
-          <a:p>
-            <a:pPr algn="ctr"/>
-          </a:p>
-        </p:txBody>
-      </p:sp>
-      <p:sp>
-        <p:nvSpPr>
-          <p:cNvPr id="15" name="Rounded Rectangle 14"/>
-          <p:cNvSpPr/>
-          <p:nvPr/>
-        </p:nvSpPr>
-        <p:spPr>
-          <a:xfrm>
-            <a:off x="594360" y="3680460"/>
-            <a:ext cx="438912" cy="438912"/>
-          </a:xfrm>
-          <a:prstGeom prst="roundRect">
-            <a:avLst>
-              <a:gd name="adj" fmla="val 12000"/>
-            </a:avLst>
-          </a:prstGeom>
-          <a:solidFill>
-            <a:srgbClr val="095292"/>
-          </a:solidFill>
-          <a:ln>
-            <a:noFill/>
-          </a:ln>
-        </p:spPr>
-        <p:style>
-          <a:lnRef idx="1">
-            <a:schemeClr val="accent1"/>
-          </a:lnRef>
-          <a:fillRef idx="3">
-            <a:schemeClr val="accent1"/>
-          </a:fillRef>
-          <a:effectRef idx="2">
-            <a:schemeClr val="accent1"/>
-          </a:effectRef>
-          <a:fontRef idx="minor">
-            <a:schemeClr val="lt1"/>
-          </a:fontRef>
-        </p:style>
-        <p:txBody>
-          <a:bodyPr rtlCol="0" anchor="ctr"/>
-          <a:lstStyle/>
-          <a:p>
-            <a:pPr algn="ctr"/>
-          </a:p>
-        </p:txBody>
-      </p:sp>
-      <p:sp>
-        <p:nvSpPr>
-          <p:cNvPr id="16" name="TextBox 15"/>
-          <p:cNvSpPr txBox="1"/>
-          <p:nvPr/>
-        </p:nvSpPr>
-        <p:spPr>
-          <a:xfrm>
-            <a:off x="594360" y="3680460"/>
-            <a:ext cx="438912" cy="438912"/>
-          </a:xfrm>
-          <a:prstGeom prst="rect">
-            <a:avLst/>
-          </a:prstGeom>
-          <a:noFill/>
-        </p:spPr>
-        <p:txBody>
-          <a:bodyPr wrap="square" anchor="ctr"/>
-          <a:lstStyle/>
-          <a:p>
-            <a:pPr algn="ctr"/>
-            <a:r>
-              <a:rPr sz="1600" b="1" i="0">
-                <a:solidFill>
-                  <a:srgbClr val="FFFFFF"/>
-                </a:solidFill>
-                <a:latin typeface="Calibri"/>
-              </a:rPr>
-              <a:t>3</a:t>
-            </a:r>
-          </a:p>
-        </p:txBody>
-      </p:sp>
-      <p:sp>
-        <p:nvSpPr>
-          <p:cNvPr id="17" name="TextBox 16"/>
-          <p:cNvSpPr txBox="1"/>
-          <p:nvPr/>
-        </p:nvSpPr>
-        <p:spPr>
-          <a:xfrm>
-            <a:off x="1188720" y="3536899"/>
-            <a:ext cx="10271455" cy="744321"/>
-          </a:xfrm>
-          <a:prstGeom prst="rect">
-            <a:avLst/>
-          </a:prstGeom>
-          <a:noFill/>
-        </p:spPr>
-        <p:txBody>
-          <a:bodyPr wrap="square" anchor="ctr"/>
-          <a:lstStyle/>
-          <a:p>
-            <a:r>
-              <a:rPr sz="1500" b="1" i="0">
-                <a:solidFill>
-                  <a:srgbClr val="095292"/>
-                </a:solidFill>
-                <a:latin typeface="Calibri"/>
-              </a:rPr>
-              <a:t>Comienzo del tramo 3 · 1 min</a:t>
+              <a:rPr sz="2000" b="0" i="0">
+                <a:solidFill>
+                  <a:srgbClr val="333333"/>
+                </a:solidFill>
+                <a:latin typeface="Calibri"/>
+              </a:rPr>
+              <a:t>–   Es una pregunta incómoda y es exactamente el trabajo de hoy: dejar fuera el árbol de causas completo, la revisión bibliográfica extensa, la historia de cómo se conocieron, las quince filas de la matriz.</a:t>
             </a:r>
           </a:p>
           <a:p>
             <a:pPr>
-              <a:spcBef>
-                <a:spcPts val="200"/>
-              </a:spcBef>
+              <a:spcAft>
+                <a:spcPts val="800"/>
+              </a:spcAft>
             </a:pPr>
             <a:r>
-              <a:rPr sz="1300" b="0" i="0">
-                <a:solidFill>
-                  <a:srgbClr val="333333"/>
-                </a:solidFill>
-                <a:latin typeface="Calibri"/>
-              </a:rPr>
-              <a:t>Arrancar la demostración: hasta donde llegue en el minuto.</a:t>
-            </a:r>
-          </a:p>
-        </p:txBody>
-      </p:sp>
-      <p:sp>
-        <p:nvSpPr>
-          <p:cNvPr id="18" name="Rounded Rectangle 17"/>
-          <p:cNvSpPr/>
-          <p:nvPr/>
-        </p:nvSpPr>
-        <p:spPr>
-          <a:xfrm>
-            <a:off x="457200" y="4445812"/>
-            <a:ext cx="11277295" cy="908913"/>
-          </a:xfrm>
-          <a:prstGeom prst="roundRect">
-            <a:avLst>
-              <a:gd name="adj" fmla="val 12000"/>
-            </a:avLst>
-          </a:prstGeom>
-          <a:solidFill>
-            <a:srgbClr val="E8F4FA"/>
-          </a:solidFill>
-          <a:ln>
-            <a:noFill/>
-          </a:ln>
-        </p:spPr>
-        <p:style>
-          <a:lnRef idx="1">
-            <a:schemeClr val="accent1"/>
-          </a:lnRef>
-          <a:fillRef idx="3">
-            <a:schemeClr val="accent1"/>
-          </a:fillRef>
-          <a:effectRef idx="2">
-            <a:schemeClr val="accent1"/>
-          </a:effectRef>
-          <a:fontRef idx="minor">
-            <a:schemeClr val="lt1"/>
-          </a:fontRef>
-        </p:style>
-        <p:txBody>
-          <a:bodyPr rtlCol="0" anchor="ctr"/>
-          <a:lstStyle/>
-          <a:p>
-            <a:pPr algn="ctr"/>
-          </a:p>
-        </p:txBody>
-      </p:sp>
-      <p:sp>
-        <p:nvSpPr>
-          <p:cNvPr id="19" name="Rounded Rectangle 18"/>
-          <p:cNvSpPr/>
-          <p:nvPr/>
-        </p:nvSpPr>
-        <p:spPr>
-          <a:xfrm>
-            <a:off x="594360" y="4680813"/>
-            <a:ext cx="438912" cy="438912"/>
-          </a:xfrm>
-          <a:prstGeom prst="roundRect">
-            <a:avLst>
-              <a:gd name="adj" fmla="val 12000"/>
-            </a:avLst>
-          </a:prstGeom>
-          <a:solidFill>
-            <a:srgbClr val="095292"/>
-          </a:solidFill>
-          <a:ln>
-            <a:noFill/>
-          </a:ln>
-        </p:spPr>
-        <p:style>
-          <a:lnRef idx="1">
-            <a:schemeClr val="accent1"/>
-          </a:lnRef>
-          <a:fillRef idx="3">
-            <a:schemeClr val="accent1"/>
-          </a:fillRef>
-          <a:effectRef idx="2">
-            <a:schemeClr val="accent1"/>
-          </a:effectRef>
-          <a:fontRef idx="minor">
-            <a:schemeClr val="lt1"/>
-          </a:fontRef>
-        </p:style>
-        <p:txBody>
-          <a:bodyPr rtlCol="0" anchor="ctr"/>
-          <a:lstStyle/>
-          <a:p>
-            <a:pPr algn="ctr"/>
-          </a:p>
-        </p:txBody>
-      </p:sp>
-      <p:sp>
-        <p:nvSpPr>
-          <p:cNvPr id="20" name="TextBox 19"/>
-          <p:cNvSpPr txBox="1"/>
-          <p:nvPr/>
-        </p:nvSpPr>
-        <p:spPr>
-          <a:xfrm>
-            <a:off x="594360" y="4680813"/>
-            <a:ext cx="438912" cy="438912"/>
-          </a:xfrm>
-          <a:prstGeom prst="rect">
-            <a:avLst/>
-          </a:prstGeom>
-          <a:noFill/>
-        </p:spPr>
-        <p:txBody>
-          <a:bodyPr wrap="square" anchor="ctr"/>
-          <a:lstStyle/>
-          <a:p>
-            <a:pPr algn="ctr"/>
-            <a:r>
-              <a:rPr sz="1600" b="1" i="0">
-                <a:solidFill>
-                  <a:srgbClr val="FFFFFF"/>
-                </a:solidFill>
-                <a:latin typeface="Calibri"/>
-              </a:rPr>
-              <a:t>4</a:t>
-            </a:r>
-          </a:p>
-        </p:txBody>
-      </p:sp>
-      <p:sp>
-        <p:nvSpPr>
-          <p:cNvPr id="21" name="TextBox 20"/>
-          <p:cNvSpPr txBox="1"/>
-          <p:nvPr/>
-        </p:nvSpPr>
-        <p:spPr>
-          <a:xfrm>
-            <a:off x="1188720" y="4537252"/>
-            <a:ext cx="10271455" cy="744321"/>
-          </a:xfrm>
-          <a:prstGeom prst="rect">
-            <a:avLst/>
-          </a:prstGeom>
-          <a:noFill/>
-        </p:spPr>
-        <p:txBody>
-          <a:bodyPr wrap="square" anchor="ctr"/>
-          <a:lstStyle/>
-          <a:p>
-            <a:r>
-              <a:rPr sz="1500" b="1" i="0">
-                <a:solidFill>
-                  <a:srgbClr val="095292"/>
-                </a:solidFill>
-                <a:latin typeface="Calibri"/>
-              </a:rPr>
-              <a:t>Corte a los 4 min</a:t>
+              <a:rPr sz="2000" b="0" i="0">
+                <a:solidFill>
+                  <a:srgbClr val="333333"/>
+                </a:solidFill>
+                <a:latin typeface="Calibri"/>
+              </a:rPr>
+              <a:t>–   Y una advertencia de encuadre para el docente: hoy nadie expone para lucirse.</a:t>
             </a:r>
           </a:p>
           <a:p>
             <a:pPr>
-              <a:spcBef>
-                <a:spcPts val="200"/>
-              </a:spcBef>
+              <a:spcAft>
+                <a:spcPts val="800"/>
+              </a:spcAft>
             </a:pPr>
             <a:r>
-              <a:rPr sz="1300" b="0" i="0">
-                <a:solidFill>
-                  <a:srgbClr val="333333"/>
-                </a:solidFill>
-                <a:latin typeface="Calibri"/>
-              </a:rPr>
-              <a:t>Se corta en mitad de la frase. En la Clase 15 pasa igual.</a:t>
-            </a:r>
-          </a:p>
-        </p:txBody>
-      </p:sp>
-      <p:sp>
-        <p:nvSpPr>
-          <p:cNvPr id="22" name="Rounded Rectangle 21"/>
-          <p:cNvSpPr/>
-          <p:nvPr/>
-        </p:nvSpPr>
-        <p:spPr>
-          <a:xfrm>
-            <a:off x="457200" y="5446166"/>
-            <a:ext cx="11277295" cy="908913"/>
-          </a:xfrm>
-          <a:prstGeom prst="roundRect">
-            <a:avLst>
-              <a:gd name="adj" fmla="val 12000"/>
-            </a:avLst>
-          </a:prstGeom>
-          <a:solidFill>
-            <a:srgbClr val="F2F2F2"/>
-          </a:solidFill>
-          <a:ln>
-            <a:noFill/>
-          </a:ln>
-        </p:spPr>
-        <p:style>
-          <a:lnRef idx="1">
-            <a:schemeClr val="accent1"/>
-          </a:lnRef>
-          <a:fillRef idx="3">
-            <a:schemeClr val="accent1"/>
-          </a:fillRef>
-          <a:effectRef idx="2">
-            <a:schemeClr val="accent1"/>
-          </a:effectRef>
-          <a:fontRef idx="minor">
-            <a:schemeClr val="lt1"/>
-          </a:fontRef>
-        </p:style>
-        <p:txBody>
-          <a:bodyPr rtlCol="0" anchor="ctr"/>
-          <a:lstStyle/>
-          <a:p>
-            <a:pPr algn="ctr"/>
-          </a:p>
-        </p:txBody>
-      </p:sp>
-      <p:sp>
-        <p:nvSpPr>
-          <p:cNvPr id="23" name="Rounded Rectangle 22"/>
-          <p:cNvSpPr/>
-          <p:nvPr/>
-        </p:nvSpPr>
-        <p:spPr>
-          <a:xfrm>
-            <a:off x="594360" y="5681167"/>
-            <a:ext cx="438912" cy="438912"/>
-          </a:xfrm>
-          <a:prstGeom prst="roundRect">
-            <a:avLst>
-              <a:gd name="adj" fmla="val 12000"/>
-            </a:avLst>
-          </a:prstGeom>
-          <a:solidFill>
-            <a:srgbClr val="095292"/>
-          </a:solidFill>
-          <a:ln>
-            <a:noFill/>
-          </a:ln>
-        </p:spPr>
-        <p:style>
-          <a:lnRef idx="1">
-            <a:schemeClr val="accent1"/>
-          </a:lnRef>
-          <a:fillRef idx="3">
-            <a:schemeClr val="accent1"/>
-          </a:fillRef>
-          <a:effectRef idx="2">
-            <a:schemeClr val="accent1"/>
-          </a:effectRef>
-          <a:fontRef idx="minor">
-            <a:schemeClr val="lt1"/>
-          </a:fontRef>
-        </p:style>
-        <p:txBody>
-          <a:bodyPr rtlCol="0" anchor="ctr"/>
-          <a:lstStyle/>
-          <a:p>
-            <a:pPr algn="ctr"/>
-          </a:p>
-        </p:txBody>
-      </p:sp>
-      <p:sp>
-        <p:nvSpPr>
-          <p:cNvPr id="24" name="TextBox 23"/>
-          <p:cNvSpPr txBox="1"/>
-          <p:nvPr/>
-        </p:nvSpPr>
-        <p:spPr>
-          <a:xfrm>
-            <a:off x="594360" y="5681167"/>
-            <a:ext cx="438912" cy="438912"/>
-          </a:xfrm>
-          <a:prstGeom prst="rect">
-            <a:avLst/>
-          </a:prstGeom>
-          <a:noFill/>
-        </p:spPr>
-        <p:txBody>
-          <a:bodyPr wrap="square" anchor="ctr"/>
-          <a:lstStyle/>
-          <a:p>
-            <a:pPr algn="ctr"/>
-            <a:r>
-              <a:rPr sz="1600" b="1" i="0">
-                <a:solidFill>
-                  <a:srgbClr val="FFFFFF"/>
-                </a:solidFill>
-                <a:latin typeface="Calibri"/>
-              </a:rPr>
-              <a:t>5</a:t>
-            </a:r>
-          </a:p>
-        </p:txBody>
-      </p:sp>
-      <p:sp>
-        <p:nvSpPr>
-          <p:cNvPr id="25" name="TextBox 24"/>
-          <p:cNvSpPr txBox="1"/>
-          <p:nvPr/>
-        </p:nvSpPr>
-        <p:spPr>
-          <a:xfrm>
-            <a:off x="1188720" y="5537606"/>
-            <a:ext cx="10271455" cy="744321"/>
-          </a:xfrm>
-          <a:prstGeom prst="rect">
-            <a:avLst/>
-          </a:prstGeom>
-          <a:noFill/>
-        </p:spPr>
-        <p:txBody>
-          <a:bodyPr wrap="square" anchor="ctr"/>
-          <a:lstStyle/>
-          <a:p>
-            <a:r>
-              <a:rPr sz="1500" b="1" i="0">
-                <a:solidFill>
-                  <a:srgbClr val="095292"/>
-                </a:solidFill>
-                <a:latin typeface="Calibri"/>
-              </a:rPr>
-              <a:t>2 min de corrección</a:t>
+              <a:rPr sz="2000" b="0" i="0">
+                <a:solidFill>
+                  <a:srgbClr val="333333"/>
+                </a:solidFill>
+                <a:latin typeface="Calibri"/>
+              </a:rPr>
+              <a:t>–   El bloque de 30 minutos es un </a:t>
+            </a:r>
+            <a:r>
+              <a:rPr sz="2000" b="1" i="0">
+                <a:solidFill>
+                  <a:srgbClr val="333333"/>
+                </a:solidFill>
+                <a:latin typeface="Calibri"/>
+              </a:rPr>
+              <a:t>ensayo con corrección</a:t>
+            </a:r>
+            <a:r>
+              <a:rPr sz="2000" b="0" i="0">
+                <a:solidFill>
+                  <a:srgbClr val="333333"/>
+                </a:solidFill>
+                <a:latin typeface="Calibri"/>
+              </a:rPr>
+              <a:t>, y hay que decirlo al principio para que los equipos traigan lo que tienen aunque esté a medias.</a:t>
             </a:r>
           </a:p>
           <a:p>
             <a:pPr>
-              <a:spcBef>
-                <a:spcPts val="200"/>
-              </a:spcBef>
+              <a:spcAft>
+                <a:spcPts val="800"/>
+              </a:spcAft>
             </a:pPr>
             <a:r>
-              <a:rPr sz="1300" b="0" i="0">
-                <a:solidFill>
-                  <a:srgbClr val="333333"/>
-                </a:solidFill>
-                <a:latin typeface="Calibri"/>
-              </a:rPr>
-              <a:t>El docente dice </a:t>
-            </a:r>
-            <a:r>
-              <a:rPr sz="1300" b="1" i="0">
-                <a:solidFill>
-                  <a:srgbClr val="333333"/>
-                </a:solidFill>
-                <a:latin typeface="Calibri"/>
-              </a:rPr>
-              <a:t>una sola cosa</a:t>
-            </a:r>
-            <a:r>
-              <a:rPr sz="1300" b="0" i="0">
-                <a:solidFill>
-                  <a:srgbClr val="333333"/>
-                </a:solidFill>
-                <a:latin typeface="Calibri"/>
-              </a:rPr>
-              <a:t>, la que más cambie la presentación.</a:t>
-            </a:r>
-          </a:p>
-        </p:txBody>
-      </p:sp>
-      <p:sp>
-        <p:nvSpPr>
-          <p:cNvPr id="26" name="TextBox 25"/>
+              <a:rPr sz="2000" b="0" i="0">
+                <a:solidFill>
+                  <a:srgbClr val="333333"/>
+                </a:solidFill>
+                <a:latin typeface="Calibri"/>
+              </a:rPr>
+              <a:t>–   Un equipo que esconde su presentación hoy porque «no está lista» está renunciando a la única corrección antes de la nota.</a:t>
+            </a:r>
+          </a:p>
+        </p:txBody>
+      </p:sp>
+      <p:sp>
+        <p:nvSpPr>
+          <p:cNvPr id="6" name="TextBox 5"/>
           <p:cNvSpPr txBox="1"/>
           <p:nvPr/>
         </p:nvSpPr>
@@ -5962,7 +4250,7 @@
                 </a:solidFill>
                 <a:latin typeface="Calibri"/>
               </a:rPr>
-              <a:t>Para la Clase 15</a:t>
+              <a:t>Los cinco tramos, y por qué el tramo 4 es el que sube la nota (1/2)</a:t>
             </a:r>
           </a:p>
         </p:txBody>
@@ -6001,25 +4289,7 @@
                 </a:solidFill>
                 <a:latin typeface="Calibri"/>
               </a:rPr>
-              <a:t>–   </a:t>
-            </a:r>
-            <a:r>
-              <a:rPr sz="2000" b="1" i="0">
-                <a:solidFill>
-                  <a:srgbClr val="333333"/>
-                </a:solidFill>
-                <a:latin typeface="Calibri"/>
-              </a:rPr>
-              <a:t>Trabajo dirigido:</a:t>
-            </a:r>
-            <a:r>
-              <a:rPr sz="2000" b="0" i="0">
-                <a:solidFill>
-                  <a:srgbClr val="333333"/>
-                </a:solidFill>
-                <a:latin typeface="Calibri"/>
-              </a:rPr>
-              <a:t> Diseño de presentación y recursos visuales — dejar terminadas las ocho diapositivas y el guion con tiempos en la carpeta del equipo, junto con el PDF y las capturas.</a:t>
+              <a:t>–   La estructura de cinco tramos no es un formato arbitrario: es el orden en que un lector técnico necesita la información —problema, decisión, solución, evidencia, consecuencias— y coincide con la estructura de cualquier informe de ingeniería.</a:t>
             </a:r>
           </a:p>
           <a:p>
@@ -6035,7 +4305,7 @@
                 </a:solidFill>
                 <a:latin typeface="Calibri"/>
               </a:rPr>
-              <a:t>–   </a:t>
+              <a:t>–   Eso consume el minuto más valioso de los nueve. </a:t>
             </a:r>
             <a:r>
               <a:rPr sz="2000" b="1" i="0">
@@ -6044,34 +4314,7 @@
                 </a:solidFill>
                 <a:latin typeface="Calibri"/>
               </a:rPr>
-              <a:t>Trabajo independiente:</a:t>
-            </a:r>
-            <a:r>
-              <a:rPr sz="2000" b="0" i="0">
-                <a:solidFill>
-                  <a:srgbClr val="333333"/>
-                </a:solidFill>
-                <a:latin typeface="Calibri"/>
-              </a:rPr>
-              <a:t> Ensayo general: ensayar </a:t>
-            </a:r>
-            <a:r>
-              <a:rPr sz="2000" b="1" i="0">
-                <a:solidFill>
-                  <a:srgbClr val="333333"/>
-                </a:solidFill>
-                <a:latin typeface="Calibri"/>
-              </a:rPr>
-              <a:t>los nueve minutos completos, hablando y con cronómetro, al menos dos veces</a:t>
-            </a:r>
-            <a:r>
-              <a:rPr sz="2000" b="0" i="0">
-                <a:solidFill>
-                  <a:srgbClr val="333333"/>
-                </a:solidFill>
-                <a:latin typeface="Calibri"/>
-              </a:rPr>
-              <a:t>, y ajustar el guion con el tiempo real. Leerlo en silencio no cuenta: dura la mitad.</a:t>
+              <a:t>El nombre del equipo está en la diapositiva</a:t>
             </a:r>
           </a:p>
           <a:p>
@@ -6087,7 +4330,7 @@
                 </a:solidFill>
                 <a:latin typeface="Calibri"/>
               </a:rPr>
-              <a:t>–   </a:t>
+              <a:t>–   Se arranca con el problema y su número. </a:t>
             </a:r>
             <a:r>
               <a:rPr sz="2000" b="1" i="0">
@@ -6096,7 +4339,7 @@
                 </a:solidFill>
                 <a:latin typeface="Calibri"/>
               </a:rPr>
-              <a:t>Clase 15 · Exposición final de proyectos</a:t>
+              <a:t>Tramo 2 · a quién le pasa y qué decidimos, 2 minutos.</a:t>
             </a:r>
             <a:r>
               <a:rPr sz="2000" b="0" i="0">
@@ -6105,7 +4348,7 @@
                 </a:solidFill>
                 <a:latin typeface="Calibri"/>
               </a:rPr>
-              <a:t> — es la </a:t>
+              <a:t> Aquí entra un afectado que no es usuario —trabajo de la Clase 13— y, sobre todo, </a:t>
             </a:r>
             <a:r>
               <a:rPr sz="2000" b="1" i="0">
@@ -6114,7 +4357,7 @@
                 </a:solidFill>
                 <a:latin typeface="Calibri"/>
               </a:rPr>
-              <a:t>exposición final</a:t>
+              <a:t>la decisión de la matriz de la sesión 8 con lo que se sacrificó</a:t>
             </a:r>
             <a:r>
               <a:rPr sz="2000" b="0" i="0">
@@ -6123,25 +4366,7 @@
                 </a:solidFill>
                 <a:latin typeface="Calibri"/>
               </a:rPr>
-              <a:t>, con nota: nueve minutos por equipo y tres de preguntas. Vale el </a:t>
-            </a:r>
-            <a:r>
-              <a:rPr sz="2000" b="1" i="0">
-                <a:solidFill>
-                  <a:srgbClr val="333333"/>
-                </a:solidFill>
-                <a:latin typeface="Calibri"/>
-              </a:rPr>
-              <a:t>15 %</a:t>
-            </a:r>
-            <a:r>
-              <a:rPr sz="2000" b="0" i="0">
-                <a:solidFill>
-                  <a:srgbClr val="333333"/>
-                </a:solidFill>
-                <a:latin typeface="Calibri"/>
-              </a:rPr>
-              <a:t> del curso.</a:t>
+              <a:t>.</a:t>
             </a:r>
           </a:p>
           <a:p>
@@ -6157,43 +4382,7 @@
                 </a:solidFill>
                 <a:latin typeface="Calibri"/>
               </a:rPr>
-              <a:t>–   </a:t>
-            </a:r>
-            <a:r>
-              <a:rPr sz="2000" b="1" i="0">
-                <a:solidFill>
-                  <a:srgbClr val="333333"/>
-                </a:solidFill>
-                <a:latin typeface="Calibri"/>
-              </a:rPr>
-              <a:t>Aviso:</a:t>
-            </a:r>
-            <a:r>
-              <a:rPr sz="2000" b="0" i="0">
-                <a:solidFill>
-                  <a:srgbClr val="333333"/>
-                </a:solidFill>
-                <a:latin typeface="Calibri"/>
-              </a:rPr>
-              <a:t> En la Clase 15 </a:t>
-            </a:r>
-            <a:r>
-              <a:rPr sz="2000" b="1" i="0">
-                <a:solidFill>
-                  <a:srgbClr val="333333"/>
-                </a:solidFill>
-                <a:latin typeface="Calibri"/>
-              </a:rPr>
-              <a:t>se corta a los nueve minutos</a:t>
-            </a:r>
-            <a:r>
-              <a:rPr sz="2000" b="0" i="0">
-                <a:solidFill>
-                  <a:srgbClr val="333333"/>
-                </a:solidFill>
-                <a:latin typeface="Calibri"/>
-              </a:rPr>
-              <a:t>, sin excepción. Conéctense cinco minutos antes con la presentación y el prototipo ya abiertos, y con las capturas a mano. El orden de exposición se sortea al empezar, así que todos los equipos deben estar listos desde el primer minuto.</a:t>
+              <a:t>–   Decir «elegimos la lista publicada y sacrificamos tener la información al minuto» en diez segundos comunica más madurez que cinco minutos de descripción. **Tramo 3 · la solución y el prototipo en vivo</a:t>
             </a:r>
           </a:p>
           <a:p>
@@ -6209,7 +4398,7 @@
                 </a:solidFill>
                 <a:latin typeface="Calibri"/>
               </a:rPr>
-              <a:t>–   </a:t>
+              <a:t>–   3 minutos.</a:t>
             </a:r>
             <a:r>
               <a:rPr sz="2000" b="1" i="0">
@@ -6218,7 +4407,7 @@
                 </a:solidFill>
                 <a:latin typeface="Calibri"/>
               </a:rPr>
-              <a:t>Antes de salir:</a:t>
+              <a:t> Es el tramo más largo y la regla es una: </a:t>
             </a:r>
             <a:r>
               <a:rPr sz="2000" b="0" i="0">
@@ -6227,7 +4416,41 @@
                 </a:solidFill>
                 <a:latin typeface="Calibri"/>
               </a:rPr>
-              <a:t> el enlace del documento del equipo en el chat, con permiso de lectura para el docente, y el nombre del vocero de hoy.</a:t>
+              <a:t>se muestra funcionando</a:t>
+            </a:r>
+          </a:p>
+          <a:p>
+            <a:pPr>
+              <a:spcAft>
+                <a:spcPts val="800"/>
+              </a:spcAft>
+            </a:pPr>
+            <a:r>
+              <a:rPr sz="2000" b="0" i="0">
+                <a:solidFill>
+                  <a:srgbClr val="333333"/>
+                </a:solidFill>
+                <a:latin typeface="Calibri"/>
+              </a:rPr>
+              <a:t>–   No se describe.</a:t>
+            </a:r>
+            <a:r>
+              <a:rPr sz="2000" b="1" i="0">
+                <a:solidFill>
+                  <a:srgbClr val="333333"/>
+                </a:solidFill>
+                <a:latin typeface="Calibri"/>
+              </a:rPr>
+              <a:t> Un recorrido de tres pasos por la pantalla, narrado por una persona mientras otra maneja el mouse. </a:t>
+            </a:r>
+            <a:r>
+              <a:rPr sz="2000" b="0" i="0">
+                <a:solidFill>
+                  <a:srgbClr val="333333"/>
+                </a:solidFill>
+                <a:latin typeface="Calibri"/>
+              </a:rPr>
+              <a:t>Tramo 4 · lo que falló, 2 minutos.** Este es el tramo que hay que defender con insistencia</a:t>
             </a:r>
           </a:p>
         </p:txBody>
@@ -6302,7 +4525,2084 @@
         <p:spPr>
           <a:xfrm>
             <a:off x="0" y="0"/>
-            <a:ext cx="12191695" cy="164592"/>
+            <a:ext cx="12191695" cy="960120"/>
+          </a:xfrm>
+          <a:prstGeom prst="rect">
+            <a:avLst/>
+          </a:prstGeom>
+          <a:solidFill>
+            <a:srgbClr val="095292"/>
+          </a:solidFill>
+          <a:ln>
+            <a:noFill/>
+          </a:ln>
+        </p:spPr>
+        <p:style>
+          <a:lnRef idx="1">
+            <a:schemeClr val="accent1"/>
+          </a:lnRef>
+          <a:fillRef idx="3">
+            <a:schemeClr val="accent1"/>
+          </a:fillRef>
+          <a:effectRef idx="2">
+            <a:schemeClr val="accent1"/>
+          </a:effectRef>
+          <a:fontRef idx="minor">
+            <a:schemeClr val="lt1"/>
+          </a:fontRef>
+        </p:style>
+        <p:txBody>
+          <a:bodyPr rtlCol="0" anchor="ctr"/>
+          <a:lstStyle/>
+          <a:p>
+            <a:pPr algn="ctr"/>
+          </a:p>
+        </p:txBody>
+      </p:sp>
+      <p:sp>
+        <p:nvSpPr>
+          <p:cNvPr id="3" name="Rectangle 2"/>
+          <p:cNvSpPr/>
+          <p:nvPr/>
+        </p:nvSpPr>
+        <p:spPr>
+          <a:xfrm>
+            <a:off x="0" y="960120"/>
+            <a:ext cx="12191695" cy="41148"/>
+          </a:xfrm>
+          <a:prstGeom prst="rect">
+            <a:avLst/>
+          </a:prstGeom>
+          <a:solidFill>
+            <a:srgbClr val="FFD000"/>
+          </a:solidFill>
+          <a:ln>
+            <a:noFill/>
+          </a:ln>
+        </p:spPr>
+        <p:style>
+          <a:lnRef idx="1">
+            <a:schemeClr val="accent1"/>
+          </a:lnRef>
+          <a:fillRef idx="3">
+            <a:schemeClr val="accent1"/>
+          </a:fillRef>
+          <a:effectRef idx="2">
+            <a:schemeClr val="accent1"/>
+          </a:effectRef>
+          <a:fontRef idx="minor">
+            <a:schemeClr val="lt1"/>
+          </a:fontRef>
+        </p:style>
+        <p:txBody>
+          <a:bodyPr rtlCol="0" anchor="ctr"/>
+          <a:lstStyle/>
+          <a:p>
+            <a:pPr algn="ctr"/>
+          </a:p>
+        </p:txBody>
+      </p:sp>
+      <p:sp>
+        <p:nvSpPr>
+          <p:cNvPr id="4" name="TextBox 3"/>
+          <p:cNvSpPr txBox="1"/>
+          <p:nvPr/>
+        </p:nvSpPr>
+        <p:spPr>
+          <a:xfrm>
+            <a:off x="457200" y="164592"/>
+            <a:ext cx="11277295" cy="502920"/>
+          </a:xfrm>
+          <a:prstGeom prst="rect">
+            <a:avLst/>
+          </a:prstGeom>
+          <a:noFill/>
+        </p:spPr>
+        <p:txBody>
+          <a:bodyPr wrap="square">
+            <a:spAutoFit/>
+          </a:bodyPr>
+          <a:lstStyle/>
+          <a:p>
+            <a:r>
+              <a:rPr sz="2600" b="1" i="0">
+                <a:solidFill>
+                  <a:srgbClr val="FFFFFF"/>
+                </a:solidFill>
+                <a:latin typeface="Calibri"/>
+              </a:rPr>
+              <a:t>Los cinco tramos, y por qué el tramo 4 es el que sube la nota (2/2)</a:t>
+            </a:r>
+          </a:p>
+        </p:txBody>
+      </p:sp>
+      <p:sp>
+        <p:nvSpPr>
+          <p:cNvPr id="5" name="TextBox 4"/>
+          <p:cNvSpPr txBox="1"/>
+          <p:nvPr/>
+        </p:nvSpPr>
+        <p:spPr>
+          <a:xfrm>
+            <a:off x="457200" y="1170432"/>
+            <a:ext cx="11277295" cy="5230368"/>
+          </a:xfrm>
+          <a:prstGeom prst="rect">
+            <a:avLst/>
+          </a:prstGeom>
+          <a:noFill/>
+        </p:spPr>
+        <p:txBody>
+          <a:bodyPr wrap="square">
+            <a:spAutoFit/>
+          </a:bodyPr>
+          <a:lstStyle/>
+          <a:p>
+            <a:pPr>
+              <a:spcAft>
+                <a:spcPts val="800"/>
+              </a:spcAft>
+            </a:pPr>
+            <a:r>
+              <a:rPr sz="2000" b="0" i="0">
+                <a:solidFill>
+                  <a:srgbClr val="333333"/>
+                </a:solidFill>
+                <a:latin typeface="Calibri"/>
+              </a:rPr>
+              <a:t>–   Porque </a:t>
+            </a:r>
+            <a:r>
+              <a:rPr sz="2000" b="1" i="0">
+                <a:solidFill>
+                  <a:srgbClr val="333333"/>
+                </a:solidFill>
+                <a:latin typeface="Calibri"/>
+              </a:rPr>
+              <a:t>todos los equipos quieren saltárselo</a:t>
+            </a:r>
+            <a:r>
+              <a:rPr sz="2000" b="0" i="0">
+                <a:solidFill>
+                  <a:srgbClr val="333333"/>
+                </a:solidFill>
+                <a:latin typeface="Calibri"/>
+              </a:rPr>
+              <a:t> y es el que más sube la nota.</a:t>
+            </a:r>
+          </a:p>
+          <a:p>
+            <a:pPr>
+              <a:spcAft>
+                <a:spcPts val="800"/>
+              </a:spcAft>
+            </a:pPr>
+            <a:r>
+              <a:rPr sz="2000" b="0" i="0">
+                <a:solidFill>
+                  <a:srgbClr val="333333"/>
+                </a:solidFill>
+                <a:latin typeface="Calibri"/>
+              </a:rPr>
+              <a:t>–   Contar que una persona ajena abandonó la tarea, que se arregló el rótulo y que se decidió </a:t>
+            </a:r>
+            <a:r>
+              <a:rPr sz="2000" b="1" i="0">
+                <a:solidFill>
+                  <a:srgbClr val="333333"/>
+                </a:solidFill>
+                <a:latin typeface="Calibri"/>
+              </a:rPr>
+              <a:t>no</a:t>
+            </a:r>
+            <a:r>
+              <a:rPr sz="2000" b="0" i="0">
+                <a:solidFill>
+                  <a:srgbClr val="333333"/>
+                </a:solidFill>
+                <a:latin typeface="Calibri"/>
+              </a:rPr>
+              <a:t> arreglar la búsqueda tolerante, es lo que distingue un proyecto de una idea bonita.</a:t>
+            </a:r>
+          </a:p>
+          <a:p>
+            <a:pPr>
+              <a:spcAft>
+                <a:spcPts val="800"/>
+              </a:spcAft>
+            </a:pPr>
+            <a:r>
+              <a:rPr sz="2000" b="0" i="0">
+                <a:solidFill>
+                  <a:srgbClr val="333333"/>
+                </a:solidFill>
+                <a:latin typeface="Calibri"/>
+              </a:rPr>
+              <a:t>–   Un jurado técnico premia eso; un equipo que presenta todo perfecto genera desconfianza inmediata</a:t>
+            </a:r>
+          </a:p>
+          <a:p>
+            <a:pPr>
+              <a:spcAft>
+                <a:spcPts val="800"/>
+              </a:spcAft>
+            </a:pPr>
+            <a:r>
+              <a:rPr sz="2000" b="0" i="0">
+                <a:solidFill>
+                  <a:srgbClr val="333333"/>
+                </a:solidFill>
+                <a:latin typeface="Calibri"/>
+              </a:rPr>
+              <a:t>–   Porque nadie cree que un prototipo de primer semestre funcionó a la primera. </a:t>
+            </a:r>
+            <a:r>
+              <a:rPr sz="2000" b="1" i="0">
+                <a:solidFill>
+                  <a:srgbClr val="333333"/>
+                </a:solidFill>
+                <a:latin typeface="Calibri"/>
+              </a:rPr>
+              <a:t>Tramo 5 · impacto y siguiente paso, 1 minuto.</a:t>
+            </a:r>
+            <a:r>
+              <a:rPr sz="2000" b="0" i="0">
+                <a:solidFill>
+                  <a:srgbClr val="333333"/>
+                </a:solidFill>
+                <a:latin typeface="Calibri"/>
+              </a:rPr>
+              <a:t> El positivo con su número, </a:t>
+            </a:r>
+            <a:r>
+              <a:rPr sz="2000" b="1" i="0">
+                <a:solidFill>
+                  <a:srgbClr val="333333"/>
+                </a:solidFill>
+                <a:latin typeface="Calibri"/>
+              </a:rPr>
+              <a:t>el negativo con su mitigación</a:t>
+            </a:r>
+            <a:r>
+              <a:rPr sz="2000" b="0" i="0">
+                <a:solidFill>
+                  <a:srgbClr val="333333"/>
+                </a:solidFill>
+                <a:latin typeface="Calibri"/>
+              </a:rPr>
+              <a:t> —de nuevo la Clase 13— y qué haría quien continúe el proyecto.</a:t>
+            </a:r>
+          </a:p>
+          <a:p>
+            <a:pPr>
+              <a:spcAft>
+                <a:spcPts val="800"/>
+              </a:spcAft>
+            </a:pPr>
+            <a:r>
+              <a:rPr sz="2000" b="0" i="0">
+                <a:solidFill>
+                  <a:srgbClr val="333333"/>
+                </a:solidFill>
+                <a:latin typeface="Calibri"/>
+              </a:rPr>
+              <a:t>–   Cerrar con el siguiente paso deja la sensación de trabajo vivo y no de tarea entregada.</a:t>
+            </a:r>
+          </a:p>
+        </p:txBody>
+      </p:sp>
+      <p:sp>
+        <p:nvSpPr>
+          <p:cNvPr id="6" name="TextBox 5"/>
+          <p:cNvSpPr txBox="1"/>
+          <p:nvPr/>
+        </p:nvSpPr>
+        <p:spPr>
+          <a:xfrm>
+            <a:off x="11185855" y="6473952"/>
+            <a:ext cx="640080" cy="274320"/>
+          </a:xfrm>
+          <a:prstGeom prst="rect">
+            <a:avLst/>
+          </a:prstGeom>
+          <a:noFill/>
+        </p:spPr>
+        <p:txBody>
+          <a:bodyPr wrap="square">
+            <a:spAutoFit/>
+          </a:bodyPr>
+          <a:lstStyle/>
+          <a:p>
+            <a:pPr algn="r"/>
+            <a:r>
+              <a:rPr sz="1100" b="0" i="0">
+                <a:solidFill>
+                  <a:srgbClr val="666666"/>
+                </a:solidFill>
+                <a:latin typeface="Calibri"/>
+              </a:rPr>
+              <a:t>13</a:t>
+            </a:r>
+          </a:p>
+        </p:txBody>
+      </p:sp>
+    </p:spTree>
+  </p:cSld>
+  <p:clrMapOvr>
+    <a:masterClrMapping/>
+  </p:clrMapOvr>
+</p:sld>
+</file>
+
+<file path=ppt/slides/slide14.xml><?xml version="1.0" encoding="utf-8"?>
+<p:sld xmlns:a="http://schemas.openxmlformats.org/drawingml/2006/main" xmlns:p="http://schemas.openxmlformats.org/presentationml/2006/main" xmlns:r="http://schemas.openxmlformats.org/officeDocument/2006/relationships">
+  <p:cSld>
+    <p:bg>
+      <p:bgPr>
+        <a:solidFill>
+          <a:srgbClr val="FFFFFF"/>
+        </a:solidFill>
+        <a:effectLst/>
+      </p:bgPr>
+    </p:bg>
+    <p:spTree>
+      <p:nvGrpSpPr>
+        <p:cNvPr id="1" name=""/>
+        <p:cNvGrpSpPr/>
+        <p:nvPr/>
+      </p:nvGrpSpPr>
+      <p:grpSpPr/>
+      <p:sp>
+        <p:nvSpPr>
+          <p:cNvPr id="2" name="Rectangle 1"/>
+          <p:cNvSpPr/>
+          <p:nvPr/>
+        </p:nvSpPr>
+        <p:spPr>
+          <a:xfrm>
+            <a:off x="0" y="0"/>
+            <a:ext cx="12191695" cy="960120"/>
+          </a:xfrm>
+          <a:prstGeom prst="rect">
+            <a:avLst/>
+          </a:prstGeom>
+          <a:solidFill>
+            <a:srgbClr val="095292"/>
+          </a:solidFill>
+          <a:ln>
+            <a:noFill/>
+          </a:ln>
+        </p:spPr>
+        <p:style>
+          <a:lnRef idx="1">
+            <a:schemeClr val="accent1"/>
+          </a:lnRef>
+          <a:fillRef idx="3">
+            <a:schemeClr val="accent1"/>
+          </a:fillRef>
+          <a:effectRef idx="2">
+            <a:schemeClr val="accent1"/>
+          </a:effectRef>
+          <a:fontRef idx="minor">
+            <a:schemeClr val="lt1"/>
+          </a:fontRef>
+        </p:style>
+        <p:txBody>
+          <a:bodyPr rtlCol="0" anchor="ctr"/>
+          <a:lstStyle/>
+          <a:p>
+            <a:pPr algn="ctr"/>
+          </a:p>
+        </p:txBody>
+      </p:sp>
+      <p:sp>
+        <p:nvSpPr>
+          <p:cNvPr id="3" name="Rectangle 2"/>
+          <p:cNvSpPr/>
+          <p:nvPr/>
+        </p:nvSpPr>
+        <p:spPr>
+          <a:xfrm>
+            <a:off x="0" y="960120"/>
+            <a:ext cx="12191695" cy="41148"/>
+          </a:xfrm>
+          <a:prstGeom prst="rect">
+            <a:avLst/>
+          </a:prstGeom>
+          <a:solidFill>
+            <a:srgbClr val="FFD000"/>
+          </a:solidFill>
+          <a:ln>
+            <a:noFill/>
+          </a:ln>
+        </p:spPr>
+        <p:style>
+          <a:lnRef idx="1">
+            <a:schemeClr val="accent1"/>
+          </a:lnRef>
+          <a:fillRef idx="3">
+            <a:schemeClr val="accent1"/>
+          </a:fillRef>
+          <a:effectRef idx="2">
+            <a:schemeClr val="accent1"/>
+          </a:effectRef>
+          <a:fontRef idx="minor">
+            <a:schemeClr val="lt1"/>
+          </a:fontRef>
+        </p:style>
+        <p:txBody>
+          <a:bodyPr rtlCol="0" anchor="ctr"/>
+          <a:lstStyle/>
+          <a:p>
+            <a:pPr algn="ctr"/>
+          </a:p>
+        </p:txBody>
+      </p:sp>
+      <p:sp>
+        <p:nvSpPr>
+          <p:cNvPr id="4" name="TextBox 3"/>
+          <p:cNvSpPr txBox="1"/>
+          <p:nvPr/>
+        </p:nvSpPr>
+        <p:spPr>
+          <a:xfrm>
+            <a:off x="457200" y="164592"/>
+            <a:ext cx="11277295" cy="502920"/>
+          </a:xfrm>
+          <a:prstGeom prst="rect">
+            <a:avLst/>
+          </a:prstGeom>
+          <a:noFill/>
+        </p:spPr>
+        <p:txBody>
+          <a:bodyPr wrap="square">
+            <a:spAutoFit/>
+          </a:bodyPr>
+          <a:lstStyle/>
+          <a:p>
+            <a:r>
+              <a:rPr sz="2600" b="1" i="0">
+                <a:solidFill>
+                  <a:srgbClr val="FFFFFF"/>
+                </a:solidFill>
+                <a:latin typeface="Calibri"/>
+              </a:rPr>
+              <a:t>Diapositivas que se miran, y el reparto que reparte de verdad (1/2)</a:t>
+            </a:r>
+          </a:p>
+        </p:txBody>
+      </p:sp>
+      <p:sp>
+        <p:nvSpPr>
+          <p:cNvPr id="5" name="TextBox 4"/>
+          <p:cNvSpPr txBox="1"/>
+          <p:nvPr/>
+        </p:nvSpPr>
+        <p:spPr>
+          <a:xfrm>
+            <a:off x="457200" y="1170432"/>
+            <a:ext cx="11277295" cy="5230368"/>
+          </a:xfrm>
+          <a:prstGeom prst="rect">
+            <a:avLst/>
+          </a:prstGeom>
+          <a:noFill/>
+        </p:spPr>
+        <p:txBody>
+          <a:bodyPr wrap="square">
+            <a:spAutoFit/>
+          </a:bodyPr>
+          <a:lstStyle/>
+          <a:p>
+            <a:pPr>
+              <a:spcAft>
+                <a:spcPts val="800"/>
+              </a:spcAft>
+            </a:pPr>
+            <a:r>
+              <a:rPr sz="1900" b="0" i="0">
+                <a:solidFill>
+                  <a:srgbClr val="333333"/>
+                </a:solidFill>
+                <a:latin typeface="Calibri"/>
+              </a:rPr>
+              <a:t>–   El argumento central sobre diapositivas es de atención, no de estética, y hay que darlo así porque es el que convence: </a:t>
+            </a:r>
+            <a:r>
+              <a:rPr sz="1900" b="1" i="0">
+                <a:solidFill>
+                  <a:srgbClr val="333333"/>
+                </a:solidFill>
+                <a:latin typeface="Calibri"/>
+              </a:rPr>
+              <a:t>el público no puede leer y escuchar a la vez.</a:t>
+            </a:r>
+            <a:r>
+              <a:rPr sz="1900" b="0" i="0">
+                <a:solidFill>
+                  <a:srgbClr val="333333"/>
+                </a:solidFill>
+                <a:latin typeface="Calibri"/>
+              </a:rPr>
+              <a:t> Si la diapositiva tiene el texto completo</a:t>
+            </a:r>
+          </a:p>
+          <a:p>
+            <a:pPr>
+              <a:spcAft>
+                <a:spcPts val="800"/>
+              </a:spcAft>
+            </a:pPr>
+            <a:r>
+              <a:rPr sz="1900" b="0" i="0">
+                <a:solidFill>
+                  <a:srgbClr val="333333"/>
+                </a:solidFill>
+                <a:latin typeface="Calibri"/>
+              </a:rPr>
+              <a:t>–   La gente lo lee más rápido de lo que usted lo dice, termina antes, y deja de escucharlo justo cuando usted está explicando lo importante.</a:t>
+            </a:r>
+          </a:p>
+          <a:p>
+            <a:pPr>
+              <a:spcAft>
+                <a:spcPts val="800"/>
+              </a:spcAft>
+            </a:pPr>
+            <a:r>
+              <a:rPr sz="1900" b="0" i="0">
+                <a:solidFill>
+                  <a:srgbClr val="333333"/>
+                </a:solidFill>
+                <a:latin typeface="Calibri"/>
+              </a:rPr>
+              <a:t>–   La conclusión es incómoda y hay que decirla: </a:t>
+            </a:r>
+            <a:r>
+              <a:rPr sz="1900" b="1" i="0">
+                <a:solidFill>
+                  <a:srgbClr val="333333"/>
+                </a:solidFill>
+                <a:latin typeface="Calibri"/>
+              </a:rPr>
+              <a:t>si la diapositiva lo dice todo, usted está de sobra.</a:t>
+            </a:r>
+            <a:r>
+              <a:rPr sz="1900" b="0" i="0">
+                <a:solidFill>
+                  <a:srgbClr val="333333"/>
+                </a:solidFill>
+                <a:latin typeface="Calibri"/>
+              </a:rPr>
+              <a:t> De las cuatro reglas, la que más cuesta es </a:t>
+            </a:r>
+            <a:r>
+              <a:rPr sz="1900" b="1" i="0">
+                <a:solidFill>
+                  <a:srgbClr val="333333"/>
+                </a:solidFill>
+                <a:latin typeface="Calibri"/>
+              </a:rPr>
+              <a:t>una idea por diapositiva</a:t>
+            </a:r>
+            <a:r>
+              <a:rPr sz="1900" b="0" i="0">
+                <a:solidFill>
+                  <a:srgbClr val="333333"/>
+                </a:solidFill>
+                <a:latin typeface="Calibri"/>
+              </a:rPr>
+              <a:t>.</a:t>
+            </a:r>
+          </a:p>
+          <a:p>
+            <a:pPr>
+              <a:spcAft>
+                <a:spcPts val="800"/>
+              </a:spcAft>
+            </a:pPr>
+            <a:r>
+              <a:rPr sz="1900" b="0" i="0">
+                <a:solidFill>
+                  <a:srgbClr val="333333"/>
+                </a:solidFill>
+                <a:latin typeface="Calibri"/>
+              </a:rPr>
+              <a:t>–   Con ocho diapositivas para nueve minutos hay poco más de un minuto por diapositiva; si una tiene tres ideas, en realidad son tres diapositivas apuradas.</a:t>
+            </a:r>
+          </a:p>
+          <a:p>
+            <a:pPr>
+              <a:spcAft>
+                <a:spcPts val="800"/>
+              </a:spcAft>
+            </a:pPr>
+            <a:r>
+              <a:rPr sz="1900" b="0" i="0">
+                <a:solidFill>
+                  <a:srgbClr val="333333"/>
+                </a:solidFill>
+                <a:latin typeface="Calibri"/>
+              </a:rPr>
+              <a:t>–   Y la regla del tamaño de letra tiene una consecuencia práctica que conviene enunciar como ley: **si no cabe, hay que quitar contenido</a:t>
+            </a:r>
+          </a:p>
+          <a:p>
+            <a:pPr>
+              <a:spcAft>
+                <a:spcPts val="800"/>
+              </a:spcAft>
+            </a:pPr>
+            <a:r>
+              <a:rPr sz="1900" b="0" i="0">
+                <a:solidFill>
+                  <a:srgbClr val="333333"/>
+                </a:solidFill>
+                <a:latin typeface="Calibri"/>
+              </a:rPr>
+              <a:t>–   No reducir la letra.** En una pantalla compartida por video todo se ve más pequeño y más borroso de lo que se ve en el computador de quien la hizo.</a:t>
+            </a:r>
+          </a:p>
+          <a:p>
+            <a:pPr>
+              <a:spcAft>
+                <a:spcPts val="800"/>
+              </a:spcAft>
+            </a:pPr>
+            <a:r>
+              <a:rPr sz="1900" b="0" i="0">
+                <a:solidFill>
+                  <a:srgbClr val="333333"/>
+                </a:solidFill>
+                <a:latin typeface="Calibri"/>
+              </a:rPr>
+              <a:t>–   La diapositiva de antes y después es el ejercicio más eficaz de la sesión.</a:t>
+            </a:r>
+          </a:p>
+          <a:p>
+            <a:pPr>
+              <a:spcAft>
+                <a:spcPts val="800"/>
+              </a:spcAft>
+            </a:pPr>
+            <a:r>
+              <a:rPr sz="1900" b="0" i="0">
+                <a:solidFill>
+                  <a:srgbClr val="333333"/>
+                </a:solidFill>
+                <a:latin typeface="Calibri"/>
+              </a:rPr>
+              <a:t>–   La columna izquierda es literalmente lo que van a entregar si no se les enseña otra cosa; la derecha muestra el mismo contenido convertido en rótulo.</a:t>
+            </a:r>
+          </a:p>
+        </p:txBody>
+      </p:sp>
+      <p:sp>
+        <p:nvSpPr>
+          <p:cNvPr id="6" name="TextBox 5"/>
+          <p:cNvSpPr txBox="1"/>
+          <p:nvPr/>
+        </p:nvSpPr>
+        <p:spPr>
+          <a:xfrm>
+            <a:off x="11185855" y="6473952"/>
+            <a:ext cx="640080" cy="274320"/>
+          </a:xfrm>
+          <a:prstGeom prst="rect">
+            <a:avLst/>
+          </a:prstGeom>
+          <a:noFill/>
+        </p:spPr>
+        <p:txBody>
+          <a:bodyPr wrap="square">
+            <a:spAutoFit/>
+          </a:bodyPr>
+          <a:lstStyle/>
+          <a:p>
+            <a:pPr algn="r"/>
+            <a:r>
+              <a:rPr sz="1100" b="0" i="0">
+                <a:solidFill>
+                  <a:srgbClr val="666666"/>
+                </a:solidFill>
+                <a:latin typeface="Calibri"/>
+              </a:rPr>
+              <a:t>14</a:t>
+            </a:r>
+          </a:p>
+        </p:txBody>
+      </p:sp>
+    </p:spTree>
+  </p:cSld>
+  <p:clrMapOvr>
+    <a:masterClrMapping/>
+  </p:clrMapOvr>
+</p:sld>
+</file>
+
+<file path=ppt/slides/slide15.xml><?xml version="1.0" encoding="utf-8"?>
+<p:sld xmlns:a="http://schemas.openxmlformats.org/drawingml/2006/main" xmlns:p="http://schemas.openxmlformats.org/presentationml/2006/main" xmlns:r="http://schemas.openxmlformats.org/officeDocument/2006/relationships">
+  <p:cSld>
+    <p:bg>
+      <p:bgPr>
+        <a:solidFill>
+          <a:srgbClr val="FFFFFF"/>
+        </a:solidFill>
+        <a:effectLst/>
+      </p:bgPr>
+    </p:bg>
+    <p:spTree>
+      <p:nvGrpSpPr>
+        <p:cNvPr id="1" name=""/>
+        <p:cNvGrpSpPr/>
+        <p:nvPr/>
+      </p:nvGrpSpPr>
+      <p:grpSpPr/>
+      <p:sp>
+        <p:nvSpPr>
+          <p:cNvPr id="2" name="Rectangle 1"/>
+          <p:cNvSpPr/>
+          <p:nvPr/>
+        </p:nvSpPr>
+        <p:spPr>
+          <a:xfrm>
+            <a:off x="0" y="0"/>
+            <a:ext cx="12191695" cy="960120"/>
+          </a:xfrm>
+          <a:prstGeom prst="rect">
+            <a:avLst/>
+          </a:prstGeom>
+          <a:solidFill>
+            <a:srgbClr val="095292"/>
+          </a:solidFill>
+          <a:ln>
+            <a:noFill/>
+          </a:ln>
+        </p:spPr>
+        <p:style>
+          <a:lnRef idx="1">
+            <a:schemeClr val="accent1"/>
+          </a:lnRef>
+          <a:fillRef idx="3">
+            <a:schemeClr val="accent1"/>
+          </a:fillRef>
+          <a:effectRef idx="2">
+            <a:schemeClr val="accent1"/>
+          </a:effectRef>
+          <a:fontRef idx="minor">
+            <a:schemeClr val="lt1"/>
+          </a:fontRef>
+        </p:style>
+        <p:txBody>
+          <a:bodyPr rtlCol="0" anchor="ctr"/>
+          <a:lstStyle/>
+          <a:p>
+            <a:pPr algn="ctr"/>
+          </a:p>
+        </p:txBody>
+      </p:sp>
+      <p:sp>
+        <p:nvSpPr>
+          <p:cNvPr id="3" name="Rectangle 2"/>
+          <p:cNvSpPr/>
+          <p:nvPr/>
+        </p:nvSpPr>
+        <p:spPr>
+          <a:xfrm>
+            <a:off x="0" y="960120"/>
+            <a:ext cx="12191695" cy="41148"/>
+          </a:xfrm>
+          <a:prstGeom prst="rect">
+            <a:avLst/>
+          </a:prstGeom>
+          <a:solidFill>
+            <a:srgbClr val="FFD000"/>
+          </a:solidFill>
+          <a:ln>
+            <a:noFill/>
+          </a:ln>
+        </p:spPr>
+        <p:style>
+          <a:lnRef idx="1">
+            <a:schemeClr val="accent1"/>
+          </a:lnRef>
+          <a:fillRef idx="3">
+            <a:schemeClr val="accent1"/>
+          </a:fillRef>
+          <a:effectRef idx="2">
+            <a:schemeClr val="accent1"/>
+          </a:effectRef>
+          <a:fontRef idx="minor">
+            <a:schemeClr val="lt1"/>
+          </a:fontRef>
+        </p:style>
+        <p:txBody>
+          <a:bodyPr rtlCol="0" anchor="ctr"/>
+          <a:lstStyle/>
+          <a:p>
+            <a:pPr algn="ctr"/>
+          </a:p>
+        </p:txBody>
+      </p:sp>
+      <p:sp>
+        <p:nvSpPr>
+          <p:cNvPr id="4" name="TextBox 3"/>
+          <p:cNvSpPr txBox="1"/>
+          <p:nvPr/>
+        </p:nvSpPr>
+        <p:spPr>
+          <a:xfrm>
+            <a:off x="457200" y="164592"/>
+            <a:ext cx="11277295" cy="502920"/>
+          </a:xfrm>
+          <a:prstGeom prst="rect">
+            <a:avLst/>
+          </a:prstGeom>
+          <a:noFill/>
+        </p:spPr>
+        <p:txBody>
+          <a:bodyPr wrap="square">
+            <a:spAutoFit/>
+          </a:bodyPr>
+          <a:lstStyle/>
+          <a:p>
+            <a:r>
+              <a:rPr sz="2600" b="1" i="0">
+                <a:solidFill>
+                  <a:srgbClr val="FFFFFF"/>
+                </a:solidFill>
+                <a:latin typeface="Calibri"/>
+              </a:rPr>
+              <a:t>Diapositivas que se miran, y el reparto que reparte de verdad (2/2)</a:t>
+            </a:r>
+          </a:p>
+        </p:txBody>
+      </p:sp>
+      <p:sp>
+        <p:nvSpPr>
+          <p:cNvPr id="5" name="TextBox 4"/>
+          <p:cNvSpPr txBox="1"/>
+          <p:nvPr/>
+        </p:nvSpPr>
+        <p:spPr>
+          <a:xfrm>
+            <a:off x="457200" y="1170432"/>
+            <a:ext cx="11277295" cy="5230368"/>
+          </a:xfrm>
+          <a:prstGeom prst="rect">
+            <a:avLst/>
+          </a:prstGeom>
+          <a:noFill/>
+        </p:spPr>
+        <p:txBody>
+          <a:bodyPr wrap="square">
+            <a:spAutoFit/>
+          </a:bodyPr>
+          <a:lstStyle/>
+          <a:p>
+            <a:pPr>
+              <a:spcAft>
+                <a:spcPts val="800"/>
+              </a:spcAft>
+            </a:pPr>
+            <a:r>
+              <a:rPr sz="2000" b="0" i="0">
+                <a:solidFill>
+                  <a:srgbClr val="333333"/>
+                </a:solidFill>
+                <a:latin typeface="Calibri"/>
+              </a:rPr>
+              <a:t>–   Deténgase en la cuarta fila: </a:t>
+            </a:r>
+            <a:r>
+              <a:rPr sz="2000" b="1" i="0">
+                <a:solidFill>
+                  <a:srgbClr val="333333"/>
+                </a:solidFill>
+                <a:latin typeface="Calibri"/>
+              </a:rPr>
+              <a:t>la matriz de decisión completa no va en la presentación</a:t>
+            </a:r>
+            <a:r>
+              <a:rPr sz="2000" b="0" i="0">
+                <a:solidFill>
+                  <a:srgbClr val="333333"/>
+                </a:solidFill>
+                <a:latin typeface="Calibri"/>
+              </a:rPr>
+              <a:t> —van las dos alternativas y el ganador—, porque la matriz es material de informe.</a:t>
+            </a:r>
+          </a:p>
+          <a:p>
+            <a:pPr>
+              <a:spcAft>
+                <a:spcPts val="800"/>
+              </a:spcAft>
+            </a:pPr>
+            <a:r>
+              <a:rPr sz="2000" b="0" i="0">
+                <a:solidFill>
+                  <a:srgbClr val="333333"/>
+                </a:solidFill>
+                <a:latin typeface="Calibri"/>
+              </a:rPr>
+              <a:t>–   Distinguir qué va en el informe y qué va en la presentación es una habilidad profesional y es lo que más les va a servir la próxima vez.</a:t>
+            </a:r>
+          </a:p>
+          <a:p>
+            <a:pPr>
+              <a:spcAft>
+                <a:spcPts val="800"/>
+              </a:spcAft>
+            </a:pPr>
+            <a:r>
+              <a:rPr sz="2000" b="0" i="0">
+                <a:solidFill>
+                  <a:srgbClr val="333333"/>
+                </a:solidFill>
+                <a:latin typeface="Calibri"/>
+              </a:rPr>
+              <a:t>–   Sobre el reparto, hay dos exigencias que evitan los dos fracasos típicos.</a:t>
+            </a:r>
+          </a:p>
+          <a:p>
+            <a:pPr>
+              <a:spcAft>
+                <a:spcPts val="800"/>
+              </a:spcAft>
+            </a:pPr>
+            <a:r>
+              <a:rPr sz="2000" b="0" i="0">
+                <a:solidFill>
+                  <a:srgbClr val="333333"/>
+                </a:solidFill>
+                <a:latin typeface="Calibri"/>
+              </a:rPr>
+              <a:t>–   La primera: </a:t>
+            </a:r>
+            <a:r>
+              <a:rPr sz="2000" b="1" i="0">
+                <a:solidFill>
+                  <a:srgbClr val="333333"/>
+                </a:solidFill>
+                <a:latin typeface="Calibri"/>
+              </a:rPr>
+              <a:t>todos los integrantes hablan, y nadie habla menos de un minuto ni más de tres.</a:t>
+            </a:r>
+            <a:r>
+              <a:rPr sz="2000" b="0" i="0">
+                <a:solidFill>
+                  <a:srgbClr val="333333"/>
+                </a:solidFill>
+                <a:latin typeface="Calibri"/>
+              </a:rPr>
+              <a:t> Un equipo donde solo uno presenta pierde puntos y, peor, arriesga la nota entera a que esa persona tenga buena conexión ese día.</a:t>
+            </a:r>
+          </a:p>
+          <a:p>
+            <a:pPr>
+              <a:spcAft>
+                <a:spcPts val="800"/>
+              </a:spcAft>
+            </a:pPr>
+            <a:r>
+              <a:rPr sz="2000" b="0" i="0">
+                <a:solidFill>
+                  <a:srgbClr val="333333"/>
+                </a:solidFill>
+                <a:latin typeface="Calibri"/>
+              </a:rPr>
+              <a:t>–   La segunda: </a:t>
+            </a:r>
+            <a:r>
+              <a:rPr sz="2000" b="1" i="0">
+                <a:solidFill>
+                  <a:srgbClr val="333333"/>
+                </a:solidFill>
+                <a:latin typeface="Calibri"/>
+              </a:rPr>
+              <a:t>quien no habla también tiene tarea</a:t>
+            </a:r>
+            <a:r>
+              <a:rPr sz="2000" b="0" i="0">
+                <a:solidFill>
+                  <a:srgbClr val="333333"/>
+                </a:solidFill>
+                <a:latin typeface="Calibri"/>
+              </a:rPr>
+              <a:t> —cronómetro, capturas del plan B, la diapositiva siguiente lista—.</a:t>
+            </a:r>
+          </a:p>
+          <a:p>
+            <a:pPr>
+              <a:spcAft>
+                <a:spcPts val="800"/>
+              </a:spcAft>
+            </a:pPr>
+            <a:r>
+              <a:rPr sz="2000" b="0" i="0">
+                <a:solidFill>
+                  <a:srgbClr val="333333"/>
+                </a:solidFill>
+                <a:latin typeface="Calibri"/>
+              </a:rPr>
+              <a:t>–   En la demostración del tramo 3, </a:t>
+            </a:r>
+            <a:r>
+              <a:rPr sz="2000" b="1" i="0">
+                <a:solidFill>
+                  <a:srgbClr val="333333"/>
+                </a:solidFill>
+                <a:latin typeface="Calibri"/>
+              </a:rPr>
+              <a:t>narrar y manejar la pantalla no las hace la misma persona</a:t>
+            </a:r>
+            <a:r>
+              <a:rPr sz="2000" b="0" i="0">
+                <a:solidFill>
+                  <a:srgbClr val="333333"/>
+                </a:solidFill>
+                <a:latin typeface="Calibri"/>
+              </a:rPr>
+              <a:t>: intentar las dos cosas a la vez es la causa más común de que una demostración se caiga.</a:t>
+            </a:r>
+          </a:p>
+          <a:p>
+            <a:pPr>
+              <a:spcAft>
+                <a:spcPts val="800"/>
+              </a:spcAft>
+            </a:pPr>
+            <a:r>
+              <a:rPr sz="2000" b="0" i="0">
+                <a:solidFill>
+                  <a:srgbClr val="333333"/>
+                </a:solidFill>
+                <a:latin typeface="Calibri"/>
+              </a:rPr>
+              <a:t>–   Y para las preguntas, cada integrante responde de su tramo, lo cual además obliga a que todos entiendan el proyecto completo.</a:t>
+            </a:r>
+          </a:p>
+        </p:txBody>
+      </p:sp>
+      <p:sp>
+        <p:nvSpPr>
+          <p:cNvPr id="6" name="TextBox 5"/>
+          <p:cNvSpPr txBox="1"/>
+          <p:nvPr/>
+        </p:nvSpPr>
+        <p:spPr>
+          <a:xfrm>
+            <a:off x="11185855" y="6473952"/>
+            <a:ext cx="640080" cy="274320"/>
+          </a:xfrm>
+          <a:prstGeom prst="rect">
+            <a:avLst/>
+          </a:prstGeom>
+          <a:noFill/>
+        </p:spPr>
+        <p:txBody>
+          <a:bodyPr wrap="square">
+            <a:spAutoFit/>
+          </a:bodyPr>
+          <a:lstStyle/>
+          <a:p>
+            <a:pPr algn="r"/>
+            <a:r>
+              <a:rPr sz="1100" b="0" i="0">
+                <a:solidFill>
+                  <a:srgbClr val="666666"/>
+                </a:solidFill>
+                <a:latin typeface="Calibri"/>
+              </a:rPr>
+              <a:t>15</a:t>
+            </a:r>
+          </a:p>
+        </p:txBody>
+      </p:sp>
+    </p:spTree>
+  </p:cSld>
+  <p:clrMapOvr>
+    <a:masterClrMapping/>
+  </p:clrMapOvr>
+</p:sld>
+</file>
+
+<file path=ppt/slides/slide16.xml><?xml version="1.0" encoding="utf-8"?>
+<p:sld xmlns:a="http://schemas.openxmlformats.org/drawingml/2006/main" xmlns:p="http://schemas.openxmlformats.org/presentationml/2006/main" xmlns:r="http://schemas.openxmlformats.org/officeDocument/2006/relationships">
+  <p:cSld>
+    <p:bg>
+      <p:bgPr>
+        <a:solidFill>
+          <a:srgbClr val="FFFFFF"/>
+        </a:solidFill>
+        <a:effectLst/>
+      </p:bgPr>
+    </p:bg>
+    <p:spTree>
+      <p:nvGrpSpPr>
+        <p:cNvPr id="1" name=""/>
+        <p:cNvGrpSpPr/>
+        <p:nvPr/>
+      </p:nvGrpSpPr>
+      <p:grpSpPr/>
+      <p:sp>
+        <p:nvSpPr>
+          <p:cNvPr id="2" name="Rectangle 1"/>
+          <p:cNvSpPr/>
+          <p:nvPr/>
+        </p:nvSpPr>
+        <p:spPr>
+          <a:xfrm>
+            <a:off x="0" y="0"/>
+            <a:ext cx="12191695" cy="960120"/>
+          </a:xfrm>
+          <a:prstGeom prst="rect">
+            <a:avLst/>
+          </a:prstGeom>
+          <a:solidFill>
+            <a:srgbClr val="095292"/>
+          </a:solidFill>
+          <a:ln>
+            <a:noFill/>
+          </a:ln>
+        </p:spPr>
+        <p:style>
+          <a:lnRef idx="1">
+            <a:schemeClr val="accent1"/>
+          </a:lnRef>
+          <a:fillRef idx="3">
+            <a:schemeClr val="accent1"/>
+          </a:fillRef>
+          <a:effectRef idx="2">
+            <a:schemeClr val="accent1"/>
+          </a:effectRef>
+          <a:fontRef idx="minor">
+            <a:schemeClr val="lt1"/>
+          </a:fontRef>
+        </p:style>
+        <p:txBody>
+          <a:bodyPr rtlCol="0" anchor="ctr"/>
+          <a:lstStyle/>
+          <a:p>
+            <a:pPr algn="ctr"/>
+          </a:p>
+        </p:txBody>
+      </p:sp>
+      <p:sp>
+        <p:nvSpPr>
+          <p:cNvPr id="3" name="Rectangle 2"/>
+          <p:cNvSpPr/>
+          <p:nvPr/>
+        </p:nvSpPr>
+        <p:spPr>
+          <a:xfrm>
+            <a:off x="0" y="960120"/>
+            <a:ext cx="12191695" cy="41148"/>
+          </a:xfrm>
+          <a:prstGeom prst="rect">
+            <a:avLst/>
+          </a:prstGeom>
+          <a:solidFill>
+            <a:srgbClr val="FFD000"/>
+          </a:solidFill>
+          <a:ln>
+            <a:noFill/>
+          </a:ln>
+        </p:spPr>
+        <p:style>
+          <a:lnRef idx="1">
+            <a:schemeClr val="accent1"/>
+          </a:lnRef>
+          <a:fillRef idx="3">
+            <a:schemeClr val="accent1"/>
+          </a:fillRef>
+          <a:effectRef idx="2">
+            <a:schemeClr val="accent1"/>
+          </a:effectRef>
+          <a:fontRef idx="minor">
+            <a:schemeClr val="lt1"/>
+          </a:fontRef>
+        </p:style>
+        <p:txBody>
+          <a:bodyPr rtlCol="0" anchor="ctr"/>
+          <a:lstStyle/>
+          <a:p>
+            <a:pPr algn="ctr"/>
+          </a:p>
+        </p:txBody>
+      </p:sp>
+      <p:sp>
+        <p:nvSpPr>
+          <p:cNvPr id="4" name="TextBox 3"/>
+          <p:cNvSpPr txBox="1"/>
+          <p:nvPr/>
+        </p:nvSpPr>
+        <p:spPr>
+          <a:xfrm>
+            <a:off x="457200" y="164592"/>
+            <a:ext cx="11277295" cy="502920"/>
+          </a:xfrm>
+          <a:prstGeom prst="rect">
+            <a:avLst/>
+          </a:prstGeom>
+          <a:noFill/>
+        </p:spPr>
+        <p:txBody>
+          <a:bodyPr wrap="square">
+            <a:spAutoFit/>
+          </a:bodyPr>
+          <a:lstStyle/>
+          <a:p>
+            <a:r>
+              <a:rPr sz="2600" b="1" i="0">
+                <a:solidFill>
+                  <a:srgbClr val="FFFFFF"/>
+                </a:solidFill>
+                <a:latin typeface="Calibri"/>
+              </a:rPr>
+              <a:t>El plan B, el ensayo, y por qué se ensaya solo el arranque (1/2)</a:t>
+            </a:r>
+          </a:p>
+        </p:txBody>
+      </p:sp>
+      <p:sp>
+        <p:nvSpPr>
+          <p:cNvPr id="5" name="TextBox 4"/>
+          <p:cNvSpPr txBox="1"/>
+          <p:nvPr/>
+        </p:nvSpPr>
+        <p:spPr>
+          <a:xfrm>
+            <a:off x="457200" y="1170432"/>
+            <a:ext cx="11277295" cy="5230368"/>
+          </a:xfrm>
+          <a:prstGeom prst="rect">
+            <a:avLst/>
+          </a:prstGeom>
+          <a:noFill/>
+        </p:spPr>
+        <p:txBody>
+          <a:bodyPr wrap="square">
+            <a:spAutoFit/>
+          </a:bodyPr>
+          <a:lstStyle/>
+          <a:p>
+            <a:pPr>
+              <a:spcAft>
+                <a:spcPts val="800"/>
+              </a:spcAft>
+            </a:pPr>
+            <a:r>
+              <a:rPr sz="2000" b="0" i="0">
+                <a:solidFill>
+                  <a:srgbClr val="333333"/>
+                </a:solidFill>
+                <a:latin typeface="Calibri"/>
+              </a:rPr>
+              <a:t>–   </a:t>
+            </a:r>
+            <a:r>
+              <a:rPr sz="2000" b="1" i="0">
+                <a:solidFill>
+                  <a:srgbClr val="333333"/>
+                </a:solidFill>
+                <a:latin typeface="Calibri"/>
+              </a:rPr>
+              <a:t>El plan B es parte de la nota y hay que ser explícito.</a:t>
+            </a:r>
+            <a:r>
+              <a:rPr sz="2000" b="0" i="0">
+                <a:solidFill>
+                  <a:srgbClr val="333333"/>
+                </a:solidFill>
+                <a:latin typeface="Calibri"/>
+              </a:rPr>
+              <a:t> Antes de salir hoy, en la carpeta del equipo tienen que quedar tres cosas: la presentación </a:t>
+            </a:r>
+            <a:r>
+              <a:rPr sz="2000" b="1" i="0">
+                <a:solidFill>
+                  <a:srgbClr val="333333"/>
+                </a:solidFill>
+                <a:latin typeface="Calibri"/>
+              </a:rPr>
+              <a:t>descargada en PDF</a:t>
+            </a:r>
+            <a:r>
+              <a:rPr sz="2000" b="0" i="0">
+                <a:solidFill>
+                  <a:srgbClr val="333333"/>
+                </a:solidFill>
+                <a:latin typeface="Calibri"/>
+              </a:rPr>
+              <a:t>, </a:t>
+            </a:r>
+            <a:r>
+              <a:rPr sz="2000" b="1" i="0">
+                <a:solidFill>
+                  <a:srgbClr val="333333"/>
+                </a:solidFill>
+                <a:latin typeface="Calibri"/>
+              </a:rPr>
+              <a:t>capturas de cada paso</a:t>
+            </a:r>
+            <a:r>
+              <a:rPr sz="2000" b="0" i="0">
+                <a:solidFill>
+                  <a:srgbClr val="333333"/>
+                </a:solidFill>
+                <a:latin typeface="Calibri"/>
+              </a:rPr>
+              <a:t> de la demostración del prototipo</a:t>
+            </a:r>
+          </a:p>
+          <a:p>
+            <a:pPr>
+              <a:spcAft>
+                <a:spcPts val="800"/>
+              </a:spcAft>
+            </a:pPr>
+            <a:r>
+              <a:rPr sz="2000" b="0" i="0">
+                <a:solidFill>
+                  <a:srgbClr val="333333"/>
+                </a:solidFill>
+                <a:latin typeface="Calibri"/>
+              </a:rPr>
+              <a:t>–   Y un acuerdo de </a:t>
+            </a:r>
+            <a:r>
+              <a:rPr sz="2000" b="1" i="0">
+                <a:solidFill>
+                  <a:srgbClr val="333333"/>
+                </a:solidFill>
+                <a:latin typeface="Calibri"/>
+              </a:rPr>
+              <a:t>quién comparte pantalla si al primero se le cae la conexión</a:t>
+            </a:r>
+            <a:r>
+              <a:rPr sz="2000" b="0" i="0">
+                <a:solidFill>
+                  <a:srgbClr val="333333"/>
+                </a:solidFill>
+                <a:latin typeface="Calibri"/>
+              </a:rPr>
+              <a:t>.</a:t>
+            </a:r>
+          </a:p>
+          <a:p>
+            <a:pPr>
+              <a:spcAft>
+                <a:spcPts val="800"/>
+              </a:spcAft>
+            </a:pPr>
+            <a:r>
+              <a:rPr sz="2000" b="0" i="0">
+                <a:solidFill>
+                  <a:srgbClr val="333333"/>
+                </a:solidFill>
+                <a:latin typeface="Calibri"/>
+              </a:rPr>
+              <a:t>–   El argumento no es burocrático sino aritmético: la demostración es el tramo de 3 minutos, un tercio de la presentación; un equipo que no puede mostrar su prototipo porque «no cargó» perdió un tercio de su nota por algo que se prevenía en cinco minutos.</a:t>
+            </a:r>
+          </a:p>
+          <a:p>
+            <a:pPr>
+              <a:spcAft>
+                <a:spcPts val="800"/>
+              </a:spcAft>
+            </a:pPr>
+            <a:r>
+              <a:rPr sz="2000" b="0" i="0">
+                <a:solidFill>
+                  <a:srgbClr val="333333"/>
+                </a:solidFill>
+                <a:latin typeface="Calibri"/>
+              </a:rPr>
+              <a:t>–   Y en clase virtual esto no es hipotético: pasa cada semestre. </a:t>
+            </a:r>
+            <a:r>
+              <a:rPr sz="2000" b="1" i="0">
+                <a:solidFill>
+                  <a:srgbClr val="333333"/>
+                </a:solidFill>
+                <a:latin typeface="Calibri"/>
+              </a:rPr>
+              <a:t>Sobre el ensayo, la trampa principal es ensayar «mentalmente».</a:t>
+            </a:r>
+            <a:r>
+              <a:rPr sz="2000" b="0" i="0">
+                <a:solidFill>
+                  <a:srgbClr val="333333"/>
+                </a:solidFill>
+                <a:latin typeface="Calibri"/>
+              </a:rPr>
+              <a:t> Leer el guion en silencio dura aproximadamente la mitad que decirlo en voz alta</a:t>
+            </a:r>
+          </a:p>
+          <a:p>
+            <a:pPr>
+              <a:spcAft>
+                <a:spcPts val="800"/>
+              </a:spcAft>
+            </a:pPr>
+            <a:r>
+              <a:rPr sz="2000" b="0" i="0">
+                <a:solidFill>
+                  <a:srgbClr val="333333"/>
+                </a:solidFill>
+                <a:latin typeface="Calibri"/>
+              </a:rPr>
+              <a:t>–   Y por eso todos los equipos que no ensayan se pasan de tiempo — creen que su presentación dura seis minutos y dura trece.</a:t>
+            </a:r>
+          </a:p>
+        </p:txBody>
+      </p:sp>
+      <p:sp>
+        <p:nvSpPr>
+          <p:cNvPr id="6" name="TextBox 5"/>
+          <p:cNvSpPr txBox="1"/>
+          <p:nvPr/>
+        </p:nvSpPr>
+        <p:spPr>
+          <a:xfrm>
+            <a:off x="11185855" y="6473952"/>
+            <a:ext cx="640080" cy="274320"/>
+          </a:xfrm>
+          <a:prstGeom prst="rect">
+            <a:avLst/>
+          </a:prstGeom>
+          <a:noFill/>
+        </p:spPr>
+        <p:txBody>
+          <a:bodyPr wrap="square">
+            <a:spAutoFit/>
+          </a:bodyPr>
+          <a:lstStyle/>
+          <a:p>
+            <a:pPr algn="r"/>
+            <a:r>
+              <a:rPr sz="1100" b="0" i="0">
+                <a:solidFill>
+                  <a:srgbClr val="666666"/>
+                </a:solidFill>
+                <a:latin typeface="Calibri"/>
+              </a:rPr>
+              <a:t>16</a:t>
+            </a:r>
+          </a:p>
+        </p:txBody>
+      </p:sp>
+    </p:spTree>
+  </p:cSld>
+  <p:clrMapOvr>
+    <a:masterClrMapping/>
+  </p:clrMapOvr>
+</p:sld>
+</file>
+
+<file path=ppt/slides/slide17.xml><?xml version="1.0" encoding="utf-8"?>
+<p:sld xmlns:a="http://schemas.openxmlformats.org/drawingml/2006/main" xmlns:p="http://schemas.openxmlformats.org/presentationml/2006/main" xmlns:r="http://schemas.openxmlformats.org/officeDocument/2006/relationships">
+  <p:cSld>
+    <p:bg>
+      <p:bgPr>
+        <a:solidFill>
+          <a:srgbClr val="FFFFFF"/>
+        </a:solidFill>
+        <a:effectLst/>
+      </p:bgPr>
+    </p:bg>
+    <p:spTree>
+      <p:nvGrpSpPr>
+        <p:cNvPr id="1" name=""/>
+        <p:cNvGrpSpPr/>
+        <p:nvPr/>
+      </p:nvGrpSpPr>
+      <p:grpSpPr/>
+      <p:sp>
+        <p:nvSpPr>
+          <p:cNvPr id="2" name="Rectangle 1"/>
+          <p:cNvSpPr/>
+          <p:nvPr/>
+        </p:nvSpPr>
+        <p:spPr>
+          <a:xfrm>
+            <a:off x="0" y="0"/>
+            <a:ext cx="12191695" cy="960120"/>
+          </a:xfrm>
+          <a:prstGeom prst="rect">
+            <a:avLst/>
+          </a:prstGeom>
+          <a:solidFill>
+            <a:srgbClr val="095292"/>
+          </a:solidFill>
+          <a:ln>
+            <a:noFill/>
+          </a:ln>
+        </p:spPr>
+        <p:style>
+          <a:lnRef idx="1">
+            <a:schemeClr val="accent1"/>
+          </a:lnRef>
+          <a:fillRef idx="3">
+            <a:schemeClr val="accent1"/>
+          </a:fillRef>
+          <a:effectRef idx="2">
+            <a:schemeClr val="accent1"/>
+          </a:effectRef>
+          <a:fontRef idx="minor">
+            <a:schemeClr val="lt1"/>
+          </a:fontRef>
+        </p:style>
+        <p:txBody>
+          <a:bodyPr rtlCol="0" anchor="ctr"/>
+          <a:lstStyle/>
+          <a:p>
+            <a:pPr algn="ctr"/>
+          </a:p>
+        </p:txBody>
+      </p:sp>
+      <p:sp>
+        <p:nvSpPr>
+          <p:cNvPr id="3" name="Rectangle 2"/>
+          <p:cNvSpPr/>
+          <p:nvPr/>
+        </p:nvSpPr>
+        <p:spPr>
+          <a:xfrm>
+            <a:off x="0" y="960120"/>
+            <a:ext cx="12191695" cy="41148"/>
+          </a:xfrm>
+          <a:prstGeom prst="rect">
+            <a:avLst/>
+          </a:prstGeom>
+          <a:solidFill>
+            <a:srgbClr val="FFD000"/>
+          </a:solidFill>
+          <a:ln>
+            <a:noFill/>
+          </a:ln>
+        </p:spPr>
+        <p:style>
+          <a:lnRef idx="1">
+            <a:schemeClr val="accent1"/>
+          </a:lnRef>
+          <a:fillRef idx="3">
+            <a:schemeClr val="accent1"/>
+          </a:fillRef>
+          <a:effectRef idx="2">
+            <a:schemeClr val="accent1"/>
+          </a:effectRef>
+          <a:fontRef idx="minor">
+            <a:schemeClr val="lt1"/>
+          </a:fontRef>
+        </p:style>
+        <p:txBody>
+          <a:bodyPr rtlCol="0" anchor="ctr"/>
+          <a:lstStyle/>
+          <a:p>
+            <a:pPr algn="ctr"/>
+          </a:p>
+        </p:txBody>
+      </p:sp>
+      <p:sp>
+        <p:nvSpPr>
+          <p:cNvPr id="4" name="TextBox 3"/>
+          <p:cNvSpPr txBox="1"/>
+          <p:nvPr/>
+        </p:nvSpPr>
+        <p:spPr>
+          <a:xfrm>
+            <a:off x="457200" y="164592"/>
+            <a:ext cx="11277295" cy="502920"/>
+          </a:xfrm>
+          <a:prstGeom prst="rect">
+            <a:avLst/>
+          </a:prstGeom>
+          <a:noFill/>
+        </p:spPr>
+        <p:txBody>
+          <a:bodyPr wrap="square">
+            <a:spAutoFit/>
+          </a:bodyPr>
+          <a:lstStyle/>
+          <a:p>
+            <a:r>
+              <a:rPr sz="2600" b="1" i="0">
+                <a:solidFill>
+                  <a:srgbClr val="FFFFFF"/>
+                </a:solidFill>
+                <a:latin typeface="Calibri"/>
+              </a:rPr>
+              <a:t>El plan B, el ensayo, y por qué se ensaya solo el arranque (2/2)</a:t>
+            </a:r>
+          </a:p>
+        </p:txBody>
+      </p:sp>
+      <p:sp>
+        <p:nvSpPr>
+          <p:cNvPr id="5" name="TextBox 4"/>
+          <p:cNvSpPr txBox="1"/>
+          <p:nvPr/>
+        </p:nvSpPr>
+        <p:spPr>
+          <a:xfrm>
+            <a:off x="457200" y="1170432"/>
+            <a:ext cx="11277295" cy="5230368"/>
+          </a:xfrm>
+          <a:prstGeom prst="rect">
+            <a:avLst/>
+          </a:prstGeom>
+          <a:noFill/>
+        </p:spPr>
+        <p:txBody>
+          <a:bodyPr wrap="square">
+            <a:spAutoFit/>
+          </a:bodyPr>
+          <a:lstStyle/>
+          <a:p>
+            <a:pPr>
+              <a:spcAft>
+                <a:spcPts val="800"/>
+              </a:spcAft>
+            </a:pPr>
+            <a:r>
+              <a:rPr sz="2000" b="0" i="0">
+                <a:solidFill>
+                  <a:srgbClr val="333333"/>
+                </a:solidFill>
+                <a:latin typeface="Calibri"/>
+              </a:rPr>
+              <a:t>–   Las dos primeras frases se aprenden de memoria: son las que más nervios dan y las que fijan el tono de los nueve minutos.</a:t>
+            </a:r>
+          </a:p>
+          <a:p>
+            <a:pPr>
+              <a:spcAft>
+                <a:spcPts val="800"/>
+              </a:spcAft>
+            </a:pPr>
+            <a:r>
+              <a:rPr sz="2000" b="0" i="0">
+                <a:solidFill>
+                  <a:srgbClr val="333333"/>
+                </a:solidFill>
+                <a:latin typeface="Calibri"/>
+              </a:rPr>
+              <a:t>–   Es un consejo pequeño y funciona. </a:t>
+            </a:r>
+            <a:r>
+              <a:rPr sz="2000" b="1" i="0">
+                <a:solidFill>
+                  <a:srgbClr val="333333"/>
+                </a:solidFill>
+                <a:latin typeface="Calibri"/>
+              </a:rPr>
+              <a:t>Por qué hoy se ensayan solo los primeros 4 minutos</a:t>
+            </a:r>
+            <a:r>
+              <a:rPr sz="2000" b="0" i="0">
+                <a:solidFill>
+                  <a:srgbClr val="333333"/>
+                </a:solidFill>
+                <a:latin typeface="Calibri"/>
+              </a:rPr>
+              <a:t>, y conviene explicarlo para que no parezca un recorte: cinco equipos por nueve minutos son 45 minutos y no caben con corrección.</a:t>
+            </a:r>
+          </a:p>
+          <a:p>
+            <a:pPr>
+              <a:spcAft>
+                <a:spcPts val="800"/>
+              </a:spcAft>
+            </a:pPr>
+            <a:r>
+              <a:rPr sz="2000" b="0" i="0">
+                <a:solidFill>
+                  <a:srgbClr val="333333"/>
+                </a:solidFill>
+                <a:latin typeface="Calibri"/>
+              </a:rPr>
+              <a:t>–   Pero además </a:t>
+            </a:r>
+            <a:r>
+              <a:rPr sz="2000" b="1" i="0">
+                <a:solidFill>
+                  <a:srgbClr val="333333"/>
+                </a:solidFill>
+                <a:latin typeface="Calibri"/>
+              </a:rPr>
+              <a:t>el arranque es donde se pierde el tiempo</a:t>
+            </a:r>
+            <a:r>
+              <a:rPr sz="2000" b="0" i="0">
+                <a:solidFill>
+                  <a:srgbClr val="333333"/>
+                </a:solidFill>
+                <a:latin typeface="Calibri"/>
+              </a:rPr>
+              <a:t>: el equipo que controla los tramos 1 y 2 casi siempre llega bien al final, y el que se pasa en el tramo 2 ya no tiene manera de recuperarse.</a:t>
+            </a:r>
+          </a:p>
+          <a:p>
+            <a:pPr>
+              <a:spcAft>
+                <a:spcPts val="800"/>
+              </a:spcAft>
+            </a:pPr>
+            <a:r>
+              <a:rPr sz="2000" b="0" i="0">
+                <a:solidFill>
+                  <a:srgbClr val="333333"/>
+                </a:solidFill>
+                <a:latin typeface="Calibri"/>
+              </a:rPr>
+              <a:t>–   Ensayar el arranque con cronómetro es la intervención con mejor rendimiento por minuto invertido.</a:t>
+            </a:r>
+          </a:p>
+          <a:p>
+            <a:pPr>
+              <a:spcAft>
+                <a:spcPts val="800"/>
+              </a:spcAft>
+            </a:pPr>
+            <a:r>
+              <a:rPr sz="2000" b="0" i="0">
+                <a:solidFill>
+                  <a:srgbClr val="333333"/>
+                </a:solidFill>
+                <a:latin typeface="Calibri"/>
+              </a:rPr>
+              <a:t>–   El resto se ensaya en equipo, fuera de clase, y hay que decirlo con claridad: </a:t>
+            </a:r>
+            <a:r>
+              <a:rPr sz="2000" b="1" i="0">
+                <a:solidFill>
+                  <a:srgbClr val="333333"/>
+                </a:solidFill>
+                <a:latin typeface="Calibri"/>
+              </a:rPr>
+              <a:t>quien no ensaye completo antes de la Clase 15 se va a pasar de tiempo, y a los nueve minutos se corta.</a:t>
+            </a:r>
+          </a:p>
+        </p:txBody>
+      </p:sp>
+      <p:sp>
+        <p:nvSpPr>
+          <p:cNvPr id="6" name="TextBox 5"/>
+          <p:cNvSpPr txBox="1"/>
+          <p:nvPr/>
+        </p:nvSpPr>
+        <p:spPr>
+          <a:xfrm>
+            <a:off x="11185855" y="6473952"/>
+            <a:ext cx="640080" cy="274320"/>
+          </a:xfrm>
+          <a:prstGeom prst="rect">
+            <a:avLst/>
+          </a:prstGeom>
+          <a:noFill/>
+        </p:spPr>
+        <p:txBody>
+          <a:bodyPr wrap="square">
+            <a:spAutoFit/>
+          </a:bodyPr>
+          <a:lstStyle/>
+          <a:p>
+            <a:pPr algn="r"/>
+            <a:r>
+              <a:rPr sz="1100" b="0" i="0">
+                <a:solidFill>
+                  <a:srgbClr val="666666"/>
+                </a:solidFill>
+                <a:latin typeface="Calibri"/>
+              </a:rPr>
+              <a:t>17</a:t>
+            </a:r>
+          </a:p>
+        </p:txBody>
+      </p:sp>
+    </p:spTree>
+  </p:cSld>
+  <p:clrMapOvr>
+    <a:masterClrMapping/>
+  </p:clrMapOvr>
+</p:sld>
+</file>
+
+<file path=ppt/slides/slide18.xml><?xml version="1.0" encoding="utf-8"?>
+<p:sld xmlns:a="http://schemas.openxmlformats.org/drawingml/2006/main" xmlns:p="http://schemas.openxmlformats.org/presentationml/2006/main" xmlns:r="http://schemas.openxmlformats.org/officeDocument/2006/relationships">
+  <p:cSld>
+    <p:bg>
+      <p:bgPr>
+        <a:solidFill>
+          <a:srgbClr val="FFFFFF"/>
+        </a:solidFill>
+        <a:effectLst/>
+      </p:bgPr>
+    </p:bg>
+    <p:spTree>
+      <p:nvGrpSpPr>
+        <p:cNvPr id="1" name=""/>
+        <p:cNvGrpSpPr/>
+        <p:nvPr/>
+      </p:nvGrpSpPr>
+      <p:grpSpPr/>
+      <p:sp>
+        <p:nvSpPr>
+          <p:cNvPr id="2" name="Rectangle 1"/>
+          <p:cNvSpPr/>
+          <p:nvPr/>
+        </p:nvSpPr>
+        <p:spPr>
+          <a:xfrm>
+            <a:off x="0" y="0"/>
+            <a:ext cx="12191695" cy="1170432"/>
+          </a:xfrm>
+          <a:prstGeom prst="rect">
+            <a:avLst/>
+          </a:prstGeom>
+          <a:solidFill>
+            <a:srgbClr val="095292"/>
+          </a:solidFill>
+          <a:ln>
+            <a:noFill/>
+          </a:ln>
+        </p:spPr>
+        <p:style>
+          <a:lnRef idx="1">
+            <a:schemeClr val="accent1"/>
+          </a:lnRef>
+          <a:fillRef idx="3">
+            <a:schemeClr val="accent1"/>
+          </a:fillRef>
+          <a:effectRef idx="2">
+            <a:schemeClr val="accent1"/>
+          </a:effectRef>
+          <a:fontRef idx="minor">
+            <a:schemeClr val="lt1"/>
+          </a:fontRef>
+        </p:style>
+        <p:txBody>
+          <a:bodyPr rtlCol="0" anchor="ctr"/>
+          <a:lstStyle/>
+          <a:p>
+            <a:pPr algn="ctr"/>
+          </a:p>
+        </p:txBody>
+      </p:sp>
+      <p:sp>
+        <p:nvSpPr>
+          <p:cNvPr id="3" name="Rectangle 2"/>
+          <p:cNvSpPr/>
+          <p:nvPr/>
+        </p:nvSpPr>
+        <p:spPr>
+          <a:xfrm>
+            <a:off x="0" y="1170432"/>
+            <a:ext cx="12191695" cy="41148"/>
+          </a:xfrm>
+          <a:prstGeom prst="rect">
+            <a:avLst/>
+          </a:prstGeom>
+          <a:solidFill>
+            <a:srgbClr val="FFD000"/>
+          </a:solidFill>
+          <a:ln>
+            <a:noFill/>
+          </a:ln>
+        </p:spPr>
+        <p:style>
+          <a:lnRef idx="1">
+            <a:schemeClr val="accent1"/>
+          </a:lnRef>
+          <a:fillRef idx="3">
+            <a:schemeClr val="accent1"/>
+          </a:fillRef>
+          <a:effectRef idx="2">
+            <a:schemeClr val="accent1"/>
+          </a:effectRef>
+          <a:fontRef idx="minor">
+            <a:schemeClr val="lt1"/>
+          </a:fontRef>
+        </p:style>
+        <p:txBody>
+          <a:bodyPr rtlCol="0" anchor="ctr"/>
+          <a:lstStyle/>
+          <a:p>
+            <a:pPr algn="ctr"/>
+          </a:p>
+        </p:txBody>
+      </p:sp>
+      <p:sp>
+        <p:nvSpPr>
+          <p:cNvPr id="4" name="TextBox 3"/>
+          <p:cNvSpPr txBox="1"/>
+          <p:nvPr/>
+        </p:nvSpPr>
+        <p:spPr>
+          <a:xfrm>
+            <a:off x="457200" y="164592"/>
+            <a:ext cx="11277295" cy="384048"/>
+          </a:xfrm>
+          <a:prstGeom prst="rect">
+            <a:avLst/>
+          </a:prstGeom>
+          <a:noFill/>
+        </p:spPr>
+        <p:txBody>
+          <a:bodyPr wrap="square">
+            <a:spAutoFit/>
+          </a:bodyPr>
+          <a:lstStyle/>
+          <a:p>
+            <a:r>
+              <a:rPr sz="2600" b="1" i="0">
+                <a:solidFill>
+                  <a:srgbClr val="FFFFFF"/>
+                </a:solidFill>
+                <a:latin typeface="Calibri"/>
+              </a:rPr>
+              <a:t>Taller de hoy: Guion de nueve minutos y plan B</a:t>
+            </a:r>
+          </a:p>
+        </p:txBody>
+      </p:sp>
+      <p:sp>
+        <p:nvSpPr>
+          <p:cNvPr id="5" name="TextBox 4"/>
+          <p:cNvSpPr txBox="1"/>
+          <p:nvPr/>
+        </p:nvSpPr>
+        <p:spPr>
+          <a:xfrm>
+            <a:off x="457200" y="566928"/>
+            <a:ext cx="11277295" cy="411480"/>
+          </a:xfrm>
+          <a:prstGeom prst="rect">
+            <a:avLst/>
+          </a:prstGeom>
+          <a:noFill/>
+        </p:spPr>
+        <p:txBody>
+          <a:bodyPr wrap="square">
+            <a:spAutoFit/>
+          </a:bodyPr>
+          <a:lstStyle/>
+          <a:p>
+            <a:r>
+              <a:rPr sz="1400" b="0" i="0">
+                <a:solidFill>
+                  <a:srgbClr val="B8D8EE"/>
+                </a:solidFill>
+                <a:latin typeface="Calibri"/>
+              </a:rPr>
+              <a:t>27 min en equipos · 27 min: guion, diapositivas, demostración y plan B · guion con tiempos + diapositivas + PDF y capturas del plan B</a:t>
+            </a:r>
+          </a:p>
+        </p:txBody>
+      </p:sp>
+      <p:sp>
+        <p:nvSpPr>
+          <p:cNvPr id="6" name="Rounded Rectangle 5"/>
+          <p:cNvSpPr/>
+          <p:nvPr/>
+        </p:nvSpPr>
+        <p:spPr>
+          <a:xfrm>
+            <a:off x="457200" y="1472184"/>
+            <a:ext cx="11277295" cy="566928"/>
+          </a:xfrm>
+          <a:prstGeom prst="roundRect">
+            <a:avLst>
+              <a:gd name="adj" fmla="val 12000"/>
+            </a:avLst>
+          </a:prstGeom>
+          <a:solidFill>
+            <a:srgbClr val="F2F2F2"/>
+          </a:solidFill>
+          <a:ln>
+            <a:noFill/>
+          </a:ln>
+        </p:spPr>
+        <p:style>
+          <a:lnRef idx="1">
+            <a:schemeClr val="accent1"/>
+          </a:lnRef>
+          <a:fillRef idx="3">
+            <a:schemeClr val="accent1"/>
+          </a:fillRef>
+          <a:effectRef idx="2">
+            <a:schemeClr val="accent1"/>
+          </a:effectRef>
+          <a:fontRef idx="minor">
+            <a:schemeClr val="lt1"/>
+          </a:fontRef>
+        </p:style>
+        <p:txBody>
+          <a:bodyPr rtlCol="0" anchor="ctr"/>
+          <a:lstStyle/>
+          <a:p>
+            <a:pPr algn="ctr"/>
+          </a:p>
+        </p:txBody>
+      </p:sp>
+      <p:sp>
+        <p:nvSpPr>
+          <p:cNvPr id="7" name="Rectangle 6"/>
+          <p:cNvSpPr/>
+          <p:nvPr/>
+        </p:nvSpPr>
+        <p:spPr>
+          <a:xfrm>
+            <a:off x="640080" y="1618487"/>
+            <a:ext cx="274320" cy="274320"/>
+          </a:xfrm>
+          <a:prstGeom prst="rect">
+            <a:avLst/>
+          </a:prstGeom>
+          <a:solidFill>
+            <a:srgbClr val="FFFFFF"/>
+          </a:solidFill>
+          <a:ln>
+            <a:solidFill>
+              <a:srgbClr val="333333"/>
+            </a:solidFill>
+          </a:ln>
+        </p:spPr>
+        <p:style>
+          <a:lnRef idx="1">
+            <a:schemeClr val="accent1"/>
+          </a:lnRef>
+          <a:fillRef idx="3">
+            <a:schemeClr val="accent1"/>
+          </a:fillRef>
+          <a:effectRef idx="2">
+            <a:schemeClr val="accent1"/>
+          </a:effectRef>
+          <a:fontRef idx="minor">
+            <a:schemeClr val="lt1"/>
+          </a:fontRef>
+        </p:style>
+        <p:txBody>
+          <a:bodyPr rtlCol="0" anchor="ctr"/>
+          <a:lstStyle/>
+          <a:p>
+            <a:pPr algn="ctr"/>
+          </a:p>
+        </p:txBody>
+      </p:sp>
+      <p:sp>
+        <p:nvSpPr>
+          <p:cNvPr id="8" name="Rectangle 7"/>
+          <p:cNvSpPr/>
+          <p:nvPr/>
+        </p:nvSpPr>
+        <p:spPr>
+          <a:xfrm>
+            <a:off x="640080" y="1618487"/>
+            <a:ext cx="73152" cy="274320"/>
           </a:xfrm>
           <a:prstGeom prst="rect">
             <a:avLst/>
@@ -6336,40 +6636,16 @@
           </a:p>
         </p:txBody>
       </p:sp>
-      <p:pic>
-        <p:nvPicPr>
-          <p:cNvPr id="3" name="Picture 2" descr="logo_uniajc_color.png"/>
-          <p:cNvPicPr>
-            <a:picLocks noChangeAspect="1"/>
-          </p:cNvPicPr>
-          <p:nvPr/>
-        </p:nvPicPr>
-        <p:blipFill>
-          <a:blip r:embed="rId2"/>
-          <a:stretch>
-            <a:fillRect/>
-          </a:stretch>
-        </p:blipFill>
-        <p:spPr>
-          <a:xfrm>
-            <a:off x="10271455" y="5998464"/>
-            <a:ext cx="1463040" cy="643233"/>
-          </a:xfrm>
-          <a:prstGeom prst="rect">
-            <a:avLst/>
-          </a:prstGeom>
-        </p:spPr>
-      </p:pic>
-      <p:sp>
-        <p:nvSpPr>
-          <p:cNvPr id="4" name="TextBox 3"/>
+      <p:sp>
+        <p:nvSpPr>
+          <p:cNvPr id="9" name="TextBox 8"/>
           <p:cNvSpPr txBox="1"/>
           <p:nvPr/>
         </p:nvSpPr>
         <p:spPr>
           <a:xfrm>
-            <a:off x="457200" y="1737360"/>
-            <a:ext cx="11277295" cy="1097280"/>
+            <a:off x="1097280" y="1563624"/>
+            <a:ext cx="10362895" cy="402336"/>
           </a:xfrm>
           <a:prstGeom prst="rect">
             <a:avLst/>
@@ -6380,29 +6656,895 @@
           <a:bodyPr wrap="square" anchor="ctr"/>
           <a:lstStyle/>
           <a:p>
+            <a:r>
+              <a:rPr sz="1500" b="1" i="0">
+                <a:solidFill>
+                  <a:srgbClr val="333333"/>
+                </a:solidFill>
+                <a:latin typeface="Calibri"/>
+              </a:rPr>
+              <a:t>EL GUION DE LOS CINCO TRAMOS</a:t>
+            </a:r>
+            <a:r>
+              <a:rPr sz="1500" b="0" i="0">
+                <a:solidFill>
+                  <a:srgbClr val="333333"/>
+                </a:solidFill>
+                <a:latin typeface="Calibri"/>
+              </a:rPr>
+              <a:t> — Los cinco tramos con </a:t>
+            </a:r>
+            <a:r>
+              <a:rPr sz="1500" b="1" i="0">
+                <a:solidFill>
+                  <a:srgbClr val="333333"/>
+                </a:solidFill>
+                <a:latin typeface="Calibri"/>
+              </a:rPr>
+              <a:t>el tiempo asignado a cada uno</a:t>
+            </a:r>
+            <a:r>
+              <a:rPr sz="1500" b="0" i="0">
+                <a:solidFill>
+                  <a:srgbClr val="333333"/>
+                </a:solidFill>
+                <a:latin typeface="Calibri"/>
+              </a:rPr>
+              <a:t> —que sume nueve minutos— y </a:t>
+            </a:r>
+            <a:r>
+              <a:rPr sz="1500" b="1" i="0">
+                <a:solidFill>
+                  <a:srgbClr val="333333"/>
+                </a:solidFill>
+                <a:latin typeface="Calibri"/>
+              </a:rPr>
+              <a:t>quién habla</a:t>
+            </a:r>
+            <a:r>
+              <a:rPr sz="1500" b="0" i="0">
+                <a:solidFill>
+                  <a:srgbClr val="333333"/>
+                </a:solidFill>
+                <a:latin typeface="Calibri"/>
+              </a:rPr>
+              <a:t> en cada uno.</a:t>
+            </a:r>
+          </a:p>
+        </p:txBody>
+      </p:sp>
+      <p:sp>
+        <p:nvSpPr>
+          <p:cNvPr id="10" name="Rounded Rectangle 9"/>
+          <p:cNvSpPr/>
+          <p:nvPr/>
+        </p:nvSpPr>
+        <p:spPr>
+          <a:xfrm>
+            <a:off x="457200" y="2148839"/>
+            <a:ext cx="11277295" cy="566928"/>
+          </a:xfrm>
+          <a:prstGeom prst="roundRect">
+            <a:avLst>
+              <a:gd name="adj" fmla="val 12000"/>
+            </a:avLst>
+          </a:prstGeom>
+          <a:solidFill>
+            <a:srgbClr val="F2F2F2"/>
+          </a:solidFill>
+          <a:ln>
+            <a:noFill/>
+          </a:ln>
+        </p:spPr>
+        <p:style>
+          <a:lnRef idx="1">
+            <a:schemeClr val="accent1"/>
+          </a:lnRef>
+          <a:fillRef idx="3">
+            <a:schemeClr val="accent1"/>
+          </a:fillRef>
+          <a:effectRef idx="2">
+            <a:schemeClr val="accent1"/>
+          </a:effectRef>
+          <a:fontRef idx="minor">
+            <a:schemeClr val="lt1"/>
+          </a:fontRef>
+        </p:style>
+        <p:txBody>
+          <a:bodyPr rtlCol="0" anchor="ctr"/>
+          <a:lstStyle/>
+          <a:p>
             <a:pPr algn="ctr"/>
-            <a:r>
-              <a:rPr sz="3400" b="1" i="0">
-                <a:solidFill>
-                  <a:srgbClr val="095292"/>
-                </a:solidFill>
-                <a:latin typeface="Calibri"/>
-              </a:rPr>
-              <a:t>Nos vemos en la Clase 15</a:t>
-            </a:r>
-          </a:p>
-        </p:txBody>
-      </p:sp>
-      <p:sp>
-        <p:nvSpPr>
-          <p:cNvPr id="5" name="TextBox 4"/>
+          </a:p>
+        </p:txBody>
+      </p:sp>
+      <p:sp>
+        <p:nvSpPr>
+          <p:cNvPr id="11" name="Rectangle 10"/>
+          <p:cNvSpPr/>
+          <p:nvPr/>
+        </p:nvSpPr>
+        <p:spPr>
+          <a:xfrm>
+            <a:off x="640080" y="2295144"/>
+            <a:ext cx="274320" cy="274320"/>
+          </a:xfrm>
+          <a:prstGeom prst="rect">
+            <a:avLst/>
+          </a:prstGeom>
+          <a:solidFill>
+            <a:srgbClr val="FFFFFF"/>
+          </a:solidFill>
+          <a:ln>
+            <a:solidFill>
+              <a:srgbClr val="333333"/>
+            </a:solidFill>
+          </a:ln>
+        </p:spPr>
+        <p:style>
+          <a:lnRef idx="1">
+            <a:schemeClr val="accent1"/>
+          </a:lnRef>
+          <a:fillRef idx="3">
+            <a:schemeClr val="accent1"/>
+          </a:fillRef>
+          <a:effectRef idx="2">
+            <a:schemeClr val="accent1"/>
+          </a:effectRef>
+          <a:fontRef idx="minor">
+            <a:schemeClr val="lt1"/>
+          </a:fontRef>
+        </p:style>
+        <p:txBody>
+          <a:bodyPr rtlCol="0" anchor="ctr"/>
+          <a:lstStyle/>
+          <a:p>
+            <a:pPr algn="ctr"/>
+          </a:p>
+        </p:txBody>
+      </p:sp>
+      <p:sp>
+        <p:nvSpPr>
+          <p:cNvPr id="12" name="Rectangle 11"/>
+          <p:cNvSpPr/>
+          <p:nvPr/>
+        </p:nvSpPr>
+        <p:spPr>
+          <a:xfrm>
+            <a:off x="640080" y="2295144"/>
+            <a:ext cx="73152" cy="274320"/>
+          </a:xfrm>
+          <a:prstGeom prst="rect">
+            <a:avLst/>
+          </a:prstGeom>
+          <a:solidFill>
+            <a:srgbClr val="269CCB"/>
+          </a:solidFill>
+          <a:ln>
+            <a:noFill/>
+          </a:ln>
+        </p:spPr>
+        <p:style>
+          <a:lnRef idx="1">
+            <a:schemeClr val="accent1"/>
+          </a:lnRef>
+          <a:fillRef idx="3">
+            <a:schemeClr val="accent1"/>
+          </a:fillRef>
+          <a:effectRef idx="2">
+            <a:schemeClr val="accent1"/>
+          </a:effectRef>
+          <a:fontRef idx="minor">
+            <a:schemeClr val="lt1"/>
+          </a:fontRef>
+        </p:style>
+        <p:txBody>
+          <a:bodyPr rtlCol="0" anchor="ctr"/>
+          <a:lstStyle/>
+          <a:p>
+            <a:pPr algn="ctr"/>
+          </a:p>
+        </p:txBody>
+      </p:sp>
+      <p:sp>
+        <p:nvSpPr>
+          <p:cNvPr id="13" name="TextBox 12"/>
           <p:cNvSpPr txBox="1"/>
           <p:nvPr/>
         </p:nvSpPr>
         <p:spPr>
           <a:xfrm>
-            <a:off x="457200" y="3017520"/>
-            <a:ext cx="11277295" cy="1645920"/>
+            <a:off x="1097280" y="2240279"/>
+            <a:ext cx="10362895" cy="402336"/>
+          </a:xfrm>
+          <a:prstGeom prst="rect">
+            <a:avLst/>
+          </a:prstGeom>
+          <a:noFill/>
+        </p:spPr>
+        <p:txBody>
+          <a:bodyPr wrap="square" anchor="ctr"/>
+          <a:lstStyle/>
+          <a:p>
+            <a:r>
+              <a:rPr sz="1500" b="1" i="0">
+                <a:solidFill>
+                  <a:srgbClr val="333333"/>
+                </a:solidFill>
+                <a:latin typeface="Calibri"/>
+              </a:rPr>
+              <a:t>LAS OCHO DIAPOSITIVAS</a:t>
+            </a:r>
+            <a:r>
+              <a:rPr sz="1500" b="0" i="0">
+                <a:solidFill>
+                  <a:srgbClr val="333333"/>
+                </a:solidFill>
+                <a:latin typeface="Calibri"/>
+              </a:rPr>
+              <a:t> — Máximo ocho, </a:t>
+            </a:r>
+            <a:r>
+              <a:rPr sz="1500" b="1" i="0">
+                <a:solidFill>
+                  <a:srgbClr val="333333"/>
+                </a:solidFill>
+                <a:latin typeface="Calibri"/>
+              </a:rPr>
+              <a:t>una idea cada una</a:t>
+            </a:r>
+            <a:r>
+              <a:rPr sz="1500" b="0" i="0">
+                <a:solidFill>
+                  <a:srgbClr val="333333"/>
+                </a:solidFill>
+                <a:latin typeface="Calibri"/>
+              </a:rPr>
+              <a:t>, con rótulos y no párrafos. La matriz completa </a:t>
+            </a:r>
+            <a:r>
+              <a:rPr sz="1500" b="1" i="0">
+                <a:solidFill>
+                  <a:srgbClr val="333333"/>
+                </a:solidFill>
+                <a:latin typeface="Calibri"/>
+              </a:rPr>
+              <a:t>no va</a:t>
+            </a:r>
+            <a:r>
+              <a:rPr sz="1500" b="0" i="0">
+                <a:solidFill>
+                  <a:srgbClr val="333333"/>
+                </a:solidFill>
+                <a:latin typeface="Calibri"/>
+              </a:rPr>
+              <a:t>: van las dos alternativas y el ganador.</a:t>
+            </a:r>
+          </a:p>
+        </p:txBody>
+      </p:sp>
+      <p:sp>
+        <p:nvSpPr>
+          <p:cNvPr id="14" name="Rounded Rectangle 13"/>
+          <p:cNvSpPr/>
+          <p:nvPr/>
+        </p:nvSpPr>
+        <p:spPr>
+          <a:xfrm>
+            <a:off x="457200" y="2825496"/>
+            <a:ext cx="11277295" cy="566928"/>
+          </a:xfrm>
+          <a:prstGeom prst="roundRect">
+            <a:avLst>
+              <a:gd name="adj" fmla="val 12000"/>
+            </a:avLst>
+          </a:prstGeom>
+          <a:solidFill>
+            <a:srgbClr val="F2F2F2"/>
+          </a:solidFill>
+          <a:ln>
+            <a:noFill/>
+          </a:ln>
+        </p:spPr>
+        <p:style>
+          <a:lnRef idx="1">
+            <a:schemeClr val="accent1"/>
+          </a:lnRef>
+          <a:fillRef idx="3">
+            <a:schemeClr val="accent1"/>
+          </a:fillRef>
+          <a:effectRef idx="2">
+            <a:schemeClr val="accent1"/>
+          </a:effectRef>
+          <a:fontRef idx="minor">
+            <a:schemeClr val="lt1"/>
+          </a:fontRef>
+        </p:style>
+        <p:txBody>
+          <a:bodyPr rtlCol="0" anchor="ctr"/>
+          <a:lstStyle/>
+          <a:p>
+            <a:pPr algn="ctr"/>
+          </a:p>
+        </p:txBody>
+      </p:sp>
+      <p:sp>
+        <p:nvSpPr>
+          <p:cNvPr id="15" name="Rectangle 14"/>
+          <p:cNvSpPr/>
+          <p:nvPr/>
+        </p:nvSpPr>
+        <p:spPr>
+          <a:xfrm>
+            <a:off x="640080" y="2971800"/>
+            <a:ext cx="274320" cy="274320"/>
+          </a:xfrm>
+          <a:prstGeom prst="rect">
+            <a:avLst/>
+          </a:prstGeom>
+          <a:solidFill>
+            <a:srgbClr val="FFFFFF"/>
+          </a:solidFill>
+          <a:ln>
+            <a:solidFill>
+              <a:srgbClr val="333333"/>
+            </a:solidFill>
+          </a:ln>
+        </p:spPr>
+        <p:style>
+          <a:lnRef idx="1">
+            <a:schemeClr val="accent1"/>
+          </a:lnRef>
+          <a:fillRef idx="3">
+            <a:schemeClr val="accent1"/>
+          </a:fillRef>
+          <a:effectRef idx="2">
+            <a:schemeClr val="accent1"/>
+          </a:effectRef>
+          <a:fontRef idx="minor">
+            <a:schemeClr val="lt1"/>
+          </a:fontRef>
+        </p:style>
+        <p:txBody>
+          <a:bodyPr rtlCol="0" anchor="ctr"/>
+          <a:lstStyle/>
+          <a:p>
+            <a:pPr algn="ctr"/>
+          </a:p>
+        </p:txBody>
+      </p:sp>
+      <p:sp>
+        <p:nvSpPr>
+          <p:cNvPr id="16" name="Rectangle 15"/>
+          <p:cNvSpPr/>
+          <p:nvPr/>
+        </p:nvSpPr>
+        <p:spPr>
+          <a:xfrm>
+            <a:off x="640080" y="2971800"/>
+            <a:ext cx="73152" cy="274320"/>
+          </a:xfrm>
+          <a:prstGeom prst="rect">
+            <a:avLst/>
+          </a:prstGeom>
+          <a:solidFill>
+            <a:srgbClr val="269CCB"/>
+          </a:solidFill>
+          <a:ln>
+            <a:noFill/>
+          </a:ln>
+        </p:spPr>
+        <p:style>
+          <a:lnRef idx="1">
+            <a:schemeClr val="accent1"/>
+          </a:lnRef>
+          <a:fillRef idx="3">
+            <a:schemeClr val="accent1"/>
+          </a:fillRef>
+          <a:effectRef idx="2">
+            <a:schemeClr val="accent1"/>
+          </a:effectRef>
+          <a:fontRef idx="minor">
+            <a:schemeClr val="lt1"/>
+          </a:fontRef>
+        </p:style>
+        <p:txBody>
+          <a:bodyPr rtlCol="0" anchor="ctr"/>
+          <a:lstStyle/>
+          <a:p>
+            <a:pPr algn="ctr"/>
+          </a:p>
+        </p:txBody>
+      </p:sp>
+      <p:sp>
+        <p:nvSpPr>
+          <p:cNvPr id="17" name="TextBox 16"/>
+          <p:cNvSpPr txBox="1"/>
+          <p:nvPr/>
+        </p:nvSpPr>
+        <p:spPr>
+          <a:xfrm>
+            <a:off x="1097280" y="2916936"/>
+            <a:ext cx="10362895" cy="402336"/>
+          </a:xfrm>
+          <a:prstGeom prst="rect">
+            <a:avLst/>
+          </a:prstGeom>
+          <a:noFill/>
+        </p:spPr>
+        <p:txBody>
+          <a:bodyPr wrap="square" anchor="ctr"/>
+          <a:lstStyle/>
+          <a:p>
+            <a:r>
+              <a:rPr sz="1500" b="1" i="0">
+                <a:solidFill>
+                  <a:srgbClr val="333333"/>
+                </a:solidFill>
+                <a:latin typeface="Calibri"/>
+              </a:rPr>
+              <a:t>EL REPARTO ENTRE INTEGRANTES</a:t>
+            </a:r>
+            <a:r>
+              <a:rPr sz="1500" b="0" i="0">
+                <a:solidFill>
+                  <a:srgbClr val="333333"/>
+                </a:solidFill>
+                <a:latin typeface="Calibri"/>
+              </a:rPr>
+              <a:t> — Quién habla en cada tramo, y </a:t>
+            </a:r>
+            <a:r>
+              <a:rPr sz="1500" b="1" i="0">
+                <a:solidFill>
+                  <a:srgbClr val="333333"/>
+                </a:solidFill>
+                <a:latin typeface="Calibri"/>
+              </a:rPr>
+              <a:t>qué hace quien no habla</a:t>
+            </a:r>
+            <a:r>
+              <a:rPr sz="1500" b="0" i="0">
+                <a:solidFill>
+                  <a:srgbClr val="333333"/>
+                </a:solidFill>
+                <a:latin typeface="Calibri"/>
+              </a:rPr>
+              <a:t>: cronómetro, capturas del plan B, la diapositiva siguiente lista.</a:t>
+            </a:r>
+          </a:p>
+        </p:txBody>
+      </p:sp>
+      <p:sp>
+        <p:nvSpPr>
+          <p:cNvPr id="18" name="Rounded Rectangle 17"/>
+          <p:cNvSpPr/>
+          <p:nvPr/>
+        </p:nvSpPr>
+        <p:spPr>
+          <a:xfrm>
+            <a:off x="457200" y="3502152"/>
+            <a:ext cx="11277295" cy="566928"/>
+          </a:xfrm>
+          <a:prstGeom prst="roundRect">
+            <a:avLst>
+              <a:gd name="adj" fmla="val 12000"/>
+            </a:avLst>
+          </a:prstGeom>
+          <a:solidFill>
+            <a:srgbClr val="F2F2F2"/>
+          </a:solidFill>
+          <a:ln>
+            <a:noFill/>
+          </a:ln>
+        </p:spPr>
+        <p:style>
+          <a:lnRef idx="1">
+            <a:schemeClr val="accent1"/>
+          </a:lnRef>
+          <a:fillRef idx="3">
+            <a:schemeClr val="accent1"/>
+          </a:fillRef>
+          <a:effectRef idx="2">
+            <a:schemeClr val="accent1"/>
+          </a:effectRef>
+          <a:fontRef idx="minor">
+            <a:schemeClr val="lt1"/>
+          </a:fontRef>
+        </p:style>
+        <p:txBody>
+          <a:bodyPr rtlCol="0" anchor="ctr"/>
+          <a:lstStyle/>
+          <a:p>
+            <a:pPr algn="ctr"/>
+          </a:p>
+        </p:txBody>
+      </p:sp>
+      <p:sp>
+        <p:nvSpPr>
+          <p:cNvPr id="19" name="Rectangle 18"/>
+          <p:cNvSpPr/>
+          <p:nvPr/>
+        </p:nvSpPr>
+        <p:spPr>
+          <a:xfrm>
+            <a:off x="640080" y="3648456"/>
+            <a:ext cx="274320" cy="274320"/>
+          </a:xfrm>
+          <a:prstGeom prst="rect">
+            <a:avLst/>
+          </a:prstGeom>
+          <a:solidFill>
+            <a:srgbClr val="FFFFFF"/>
+          </a:solidFill>
+          <a:ln>
+            <a:solidFill>
+              <a:srgbClr val="333333"/>
+            </a:solidFill>
+          </a:ln>
+        </p:spPr>
+        <p:style>
+          <a:lnRef idx="1">
+            <a:schemeClr val="accent1"/>
+          </a:lnRef>
+          <a:fillRef idx="3">
+            <a:schemeClr val="accent1"/>
+          </a:fillRef>
+          <a:effectRef idx="2">
+            <a:schemeClr val="accent1"/>
+          </a:effectRef>
+          <a:fontRef idx="minor">
+            <a:schemeClr val="lt1"/>
+          </a:fontRef>
+        </p:style>
+        <p:txBody>
+          <a:bodyPr rtlCol="0" anchor="ctr"/>
+          <a:lstStyle/>
+          <a:p>
+            <a:pPr algn="ctr"/>
+          </a:p>
+        </p:txBody>
+      </p:sp>
+      <p:sp>
+        <p:nvSpPr>
+          <p:cNvPr id="20" name="Rectangle 19"/>
+          <p:cNvSpPr/>
+          <p:nvPr/>
+        </p:nvSpPr>
+        <p:spPr>
+          <a:xfrm>
+            <a:off x="640080" y="3648456"/>
+            <a:ext cx="73152" cy="274320"/>
+          </a:xfrm>
+          <a:prstGeom prst="rect">
+            <a:avLst/>
+          </a:prstGeom>
+          <a:solidFill>
+            <a:srgbClr val="269CCB"/>
+          </a:solidFill>
+          <a:ln>
+            <a:noFill/>
+          </a:ln>
+        </p:spPr>
+        <p:style>
+          <a:lnRef idx="1">
+            <a:schemeClr val="accent1"/>
+          </a:lnRef>
+          <a:fillRef idx="3">
+            <a:schemeClr val="accent1"/>
+          </a:fillRef>
+          <a:effectRef idx="2">
+            <a:schemeClr val="accent1"/>
+          </a:effectRef>
+          <a:fontRef idx="minor">
+            <a:schemeClr val="lt1"/>
+          </a:fontRef>
+        </p:style>
+        <p:txBody>
+          <a:bodyPr rtlCol="0" anchor="ctr"/>
+          <a:lstStyle/>
+          <a:p>
+            <a:pPr algn="ctr"/>
+          </a:p>
+        </p:txBody>
+      </p:sp>
+      <p:sp>
+        <p:nvSpPr>
+          <p:cNvPr id="21" name="TextBox 20"/>
+          <p:cNvSpPr txBox="1"/>
+          <p:nvPr/>
+        </p:nvSpPr>
+        <p:spPr>
+          <a:xfrm>
+            <a:off x="1097280" y="3593592"/>
+            <a:ext cx="10362895" cy="402336"/>
+          </a:xfrm>
+          <a:prstGeom prst="rect">
+            <a:avLst/>
+          </a:prstGeom>
+          <a:noFill/>
+        </p:spPr>
+        <p:txBody>
+          <a:bodyPr wrap="square" anchor="ctr"/>
+          <a:lstStyle/>
+          <a:p>
+            <a:r>
+              <a:rPr sz="1500" b="1" i="0">
+                <a:solidFill>
+                  <a:srgbClr val="333333"/>
+                </a:solidFill>
+                <a:latin typeface="Calibri"/>
+              </a:rPr>
+              <a:t>LA DEMOSTRACIÓN DEL PROTOTIPO</a:t>
+            </a:r>
+            <a:r>
+              <a:rPr sz="1500" b="0" i="0">
+                <a:solidFill>
+                  <a:srgbClr val="333333"/>
+                </a:solidFill>
+                <a:latin typeface="Calibri"/>
+              </a:rPr>
+              <a:t> — El recorrido de </a:t>
+            </a:r>
+            <a:r>
+              <a:rPr sz="1500" b="1" i="0">
+                <a:solidFill>
+                  <a:srgbClr val="333333"/>
+                </a:solidFill>
+                <a:latin typeface="Calibri"/>
+              </a:rPr>
+              <a:t>tres pasos</a:t>
+            </a:r>
+            <a:r>
+              <a:rPr sz="1500" b="0" i="0">
+                <a:solidFill>
+                  <a:srgbClr val="333333"/>
+                </a:solidFill>
+                <a:latin typeface="Calibri"/>
+              </a:rPr>
+              <a:t> que se va a mostrar, con </a:t>
+            </a:r>
+            <a:r>
+              <a:rPr sz="1500" b="1" i="0">
+                <a:solidFill>
+                  <a:srgbClr val="333333"/>
+                </a:solidFill>
+                <a:latin typeface="Calibri"/>
+              </a:rPr>
+              <a:t>una persona narrando y otra manejando la pantalla</a:t>
+            </a:r>
+            <a:r>
+              <a:rPr sz="1500" b="0" i="0">
+                <a:solidFill>
+                  <a:srgbClr val="333333"/>
+                </a:solidFill>
+                <a:latin typeface="Calibri"/>
+              </a:rPr>
+              <a:t>. Ensayado dos veces.</a:t>
+            </a:r>
+          </a:p>
+        </p:txBody>
+      </p:sp>
+      <p:sp>
+        <p:nvSpPr>
+          <p:cNvPr id="22" name="Rounded Rectangle 21"/>
+          <p:cNvSpPr/>
+          <p:nvPr/>
+        </p:nvSpPr>
+        <p:spPr>
+          <a:xfrm>
+            <a:off x="457200" y="4178808"/>
+            <a:ext cx="11277295" cy="566928"/>
+          </a:xfrm>
+          <a:prstGeom prst="roundRect">
+            <a:avLst>
+              <a:gd name="adj" fmla="val 12000"/>
+            </a:avLst>
+          </a:prstGeom>
+          <a:solidFill>
+            <a:srgbClr val="F2F2F2"/>
+          </a:solidFill>
+          <a:ln>
+            <a:noFill/>
+          </a:ln>
+        </p:spPr>
+        <p:style>
+          <a:lnRef idx="1">
+            <a:schemeClr val="accent1"/>
+          </a:lnRef>
+          <a:fillRef idx="3">
+            <a:schemeClr val="accent1"/>
+          </a:fillRef>
+          <a:effectRef idx="2">
+            <a:schemeClr val="accent1"/>
+          </a:effectRef>
+          <a:fontRef idx="minor">
+            <a:schemeClr val="lt1"/>
+          </a:fontRef>
+        </p:style>
+        <p:txBody>
+          <a:bodyPr rtlCol="0" anchor="ctr"/>
+          <a:lstStyle/>
+          <a:p>
+            <a:pPr algn="ctr"/>
+          </a:p>
+        </p:txBody>
+      </p:sp>
+      <p:sp>
+        <p:nvSpPr>
+          <p:cNvPr id="23" name="Rectangle 22"/>
+          <p:cNvSpPr/>
+          <p:nvPr/>
+        </p:nvSpPr>
+        <p:spPr>
+          <a:xfrm>
+            <a:off x="640080" y="4325112"/>
+            <a:ext cx="274320" cy="274320"/>
+          </a:xfrm>
+          <a:prstGeom prst="rect">
+            <a:avLst/>
+          </a:prstGeom>
+          <a:solidFill>
+            <a:srgbClr val="FFFFFF"/>
+          </a:solidFill>
+          <a:ln>
+            <a:solidFill>
+              <a:srgbClr val="333333"/>
+            </a:solidFill>
+          </a:ln>
+        </p:spPr>
+        <p:style>
+          <a:lnRef idx="1">
+            <a:schemeClr val="accent1"/>
+          </a:lnRef>
+          <a:fillRef idx="3">
+            <a:schemeClr val="accent1"/>
+          </a:fillRef>
+          <a:effectRef idx="2">
+            <a:schemeClr val="accent1"/>
+          </a:effectRef>
+          <a:fontRef idx="minor">
+            <a:schemeClr val="lt1"/>
+          </a:fontRef>
+        </p:style>
+        <p:txBody>
+          <a:bodyPr rtlCol="0" anchor="ctr"/>
+          <a:lstStyle/>
+          <a:p>
+            <a:pPr algn="ctr"/>
+          </a:p>
+        </p:txBody>
+      </p:sp>
+      <p:sp>
+        <p:nvSpPr>
+          <p:cNvPr id="24" name="Rectangle 23"/>
+          <p:cNvSpPr/>
+          <p:nvPr/>
+        </p:nvSpPr>
+        <p:spPr>
+          <a:xfrm>
+            <a:off x="640080" y="4325112"/>
+            <a:ext cx="73152" cy="274320"/>
+          </a:xfrm>
+          <a:prstGeom prst="rect">
+            <a:avLst/>
+          </a:prstGeom>
+          <a:solidFill>
+            <a:srgbClr val="269CCB"/>
+          </a:solidFill>
+          <a:ln>
+            <a:noFill/>
+          </a:ln>
+        </p:spPr>
+        <p:style>
+          <a:lnRef idx="1">
+            <a:schemeClr val="accent1"/>
+          </a:lnRef>
+          <a:fillRef idx="3">
+            <a:schemeClr val="accent1"/>
+          </a:fillRef>
+          <a:effectRef idx="2">
+            <a:schemeClr val="accent1"/>
+          </a:effectRef>
+          <a:fontRef idx="minor">
+            <a:schemeClr val="lt1"/>
+          </a:fontRef>
+        </p:style>
+        <p:txBody>
+          <a:bodyPr rtlCol="0" anchor="ctr"/>
+          <a:lstStyle/>
+          <a:p>
+            <a:pPr algn="ctr"/>
+          </a:p>
+        </p:txBody>
+      </p:sp>
+      <p:sp>
+        <p:nvSpPr>
+          <p:cNvPr id="25" name="TextBox 24"/>
+          <p:cNvSpPr txBox="1"/>
+          <p:nvPr/>
+        </p:nvSpPr>
+        <p:spPr>
+          <a:xfrm>
+            <a:off x="1097280" y="4270248"/>
+            <a:ext cx="10362895" cy="402336"/>
+          </a:xfrm>
+          <a:prstGeom prst="rect">
+            <a:avLst/>
+          </a:prstGeom>
+          <a:noFill/>
+        </p:spPr>
+        <p:txBody>
+          <a:bodyPr wrap="square" anchor="ctr"/>
+          <a:lstStyle/>
+          <a:p>
+            <a:r>
+              <a:rPr sz="1500" b="1" i="0">
+                <a:solidFill>
+                  <a:srgbClr val="333333"/>
+                </a:solidFill>
+                <a:latin typeface="Calibri"/>
+              </a:rPr>
+              <a:t>EL PLAN B TÉCNICO</a:t>
+            </a:r>
+            <a:r>
+              <a:rPr sz="1500" b="0" i="0">
+                <a:solidFill>
+                  <a:srgbClr val="333333"/>
+                </a:solidFill>
+                <a:latin typeface="Calibri"/>
+              </a:rPr>
+              <a:t> — En la carpeta del equipo: la presentación </a:t>
+            </a:r>
+            <a:r>
+              <a:rPr sz="1500" b="1" i="0">
+                <a:solidFill>
+                  <a:srgbClr val="333333"/>
+                </a:solidFill>
+                <a:latin typeface="Calibri"/>
+              </a:rPr>
+              <a:t>en PDF</a:t>
+            </a:r>
+            <a:r>
+              <a:rPr sz="1500" b="0" i="0">
+                <a:solidFill>
+                  <a:srgbClr val="333333"/>
+                </a:solidFill>
+                <a:latin typeface="Calibri"/>
+              </a:rPr>
+              <a:t>, </a:t>
+            </a:r>
+            <a:r>
+              <a:rPr sz="1500" b="1" i="0">
+                <a:solidFill>
+                  <a:srgbClr val="333333"/>
+                </a:solidFill>
+                <a:latin typeface="Calibri"/>
+              </a:rPr>
+              <a:t>capturas de cada paso</a:t>
+            </a:r>
+            <a:r>
+              <a:rPr sz="1500" b="0" i="0">
+                <a:solidFill>
+                  <a:srgbClr val="333333"/>
+                </a:solidFill>
+                <a:latin typeface="Calibri"/>
+              </a:rPr>
+              <a:t> de la demostración, y quién comparte pantalla si se cae el primero.</a:t>
+            </a:r>
+          </a:p>
+        </p:txBody>
+      </p:sp>
+      <p:sp>
+        <p:nvSpPr>
+          <p:cNvPr id="26" name="TextBox 25"/>
+          <p:cNvSpPr txBox="1"/>
+          <p:nvPr/>
+        </p:nvSpPr>
+        <p:spPr>
+          <a:xfrm>
+            <a:off x="11185855" y="6473952"/>
+            <a:ext cx="640080" cy="274320"/>
           </a:xfrm>
           <a:prstGeom prst="rect">
             <a:avLst/>
@@ -6415,49 +7557,141 @@
           </a:bodyPr>
           <a:lstStyle/>
           <a:p>
-            <a:pPr algn="ctr">
-              <a:spcAft>
-                <a:spcPts val="600"/>
-              </a:spcAft>
-            </a:pPr>
-            <a:r>
-              <a:rPr sz="1600" b="0" i="0">
-                <a:solidFill>
-                  <a:srgbClr val="333333"/>
-                </a:solidFill>
-                <a:latin typeface="Calibri"/>
-              </a:rPr>
-              <a:t>Preparación de la presentación final · Clase 14</a:t>
-            </a:r>
-          </a:p>
-          <a:p>
-            <a:pPr algn="ctr">
-              <a:spcAft>
-                <a:spcPts val="600"/>
-              </a:spcAft>
-            </a:pPr>
-            <a:r>
-              <a:rPr sz="1600" b="0" i="0">
-                <a:solidFill>
-                  <a:srgbClr val="333333"/>
-                </a:solidFill>
-                <a:latin typeface="Calibri"/>
-              </a:rPr>
-              <a:t>FI300101 · UNIAJC · Ingeniería de Sistemas</a:t>
-            </a:r>
-          </a:p>
-        </p:txBody>
-      </p:sp>
-      <p:sp>
-        <p:nvSpPr>
-          <p:cNvPr id="6" name="TextBox 5"/>
+            <a:pPr algn="r"/>
+            <a:r>
+              <a:rPr sz="1100" b="0" i="0">
+                <a:solidFill>
+                  <a:srgbClr val="666666"/>
+                </a:solidFill>
+                <a:latin typeface="Calibri"/>
+              </a:rPr>
+              <a:t>18</a:t>
+            </a:r>
+          </a:p>
+        </p:txBody>
+      </p:sp>
+    </p:spTree>
+  </p:cSld>
+  <p:clrMapOvr>
+    <a:masterClrMapping/>
+  </p:clrMapOvr>
+</p:sld>
+</file>
+
+<file path=ppt/slides/slide19.xml><?xml version="1.0" encoding="utf-8"?>
+<p:sld xmlns:a="http://schemas.openxmlformats.org/drawingml/2006/main" xmlns:p="http://schemas.openxmlformats.org/presentationml/2006/main" xmlns:r="http://schemas.openxmlformats.org/officeDocument/2006/relationships">
+  <p:cSld>
+    <p:bg>
+      <p:bgPr>
+        <a:solidFill>
+          <a:srgbClr val="FFFFFF"/>
+        </a:solidFill>
+        <a:effectLst/>
+      </p:bgPr>
+    </p:bg>
+    <p:spTree>
+      <p:nvGrpSpPr>
+        <p:cNvPr id="1" name=""/>
+        <p:cNvGrpSpPr/>
+        <p:nvPr/>
+      </p:nvGrpSpPr>
+      <p:grpSpPr/>
+      <p:sp>
+        <p:nvSpPr>
+          <p:cNvPr id="2" name="Rectangle 1"/>
+          <p:cNvSpPr/>
+          <p:nvPr/>
+        </p:nvSpPr>
+        <p:spPr>
+          <a:xfrm>
+            <a:off x="0" y="0"/>
+            <a:ext cx="12191695" cy="1170432"/>
+          </a:xfrm>
+          <a:prstGeom prst="rect">
+            <a:avLst/>
+          </a:prstGeom>
+          <a:solidFill>
+            <a:srgbClr val="095292"/>
+          </a:solidFill>
+          <a:ln>
+            <a:noFill/>
+          </a:ln>
+        </p:spPr>
+        <p:style>
+          <a:lnRef idx="1">
+            <a:schemeClr val="accent1"/>
+          </a:lnRef>
+          <a:fillRef idx="3">
+            <a:schemeClr val="accent1"/>
+          </a:fillRef>
+          <a:effectRef idx="2">
+            <a:schemeClr val="accent1"/>
+          </a:effectRef>
+          <a:fontRef idx="minor">
+            <a:schemeClr val="lt1"/>
+          </a:fontRef>
+        </p:style>
+        <p:txBody>
+          <a:bodyPr rtlCol="0" anchor="ctr"/>
+          <a:lstStyle/>
+          <a:p>
+            <a:pPr algn="ctr"/>
+          </a:p>
+        </p:txBody>
+      </p:sp>
+      <p:sp>
+        <p:nvSpPr>
+          <p:cNvPr id="3" name="Rectangle 2"/>
+          <p:cNvSpPr/>
+          <p:nvPr/>
+        </p:nvSpPr>
+        <p:spPr>
+          <a:xfrm>
+            <a:off x="0" y="1170432"/>
+            <a:ext cx="12191695" cy="41148"/>
+          </a:xfrm>
+          <a:prstGeom prst="rect">
+            <a:avLst/>
+          </a:prstGeom>
+          <a:solidFill>
+            <a:srgbClr val="FFD000"/>
+          </a:solidFill>
+          <a:ln>
+            <a:noFill/>
+          </a:ln>
+        </p:spPr>
+        <p:style>
+          <a:lnRef idx="1">
+            <a:schemeClr val="accent1"/>
+          </a:lnRef>
+          <a:fillRef idx="3">
+            <a:schemeClr val="accent1"/>
+          </a:fillRef>
+          <a:effectRef idx="2">
+            <a:schemeClr val="accent1"/>
+          </a:effectRef>
+          <a:fontRef idx="minor">
+            <a:schemeClr val="lt1"/>
+          </a:fontRef>
+        </p:style>
+        <p:txBody>
+          <a:bodyPr rtlCol="0" anchor="ctr"/>
+          <a:lstStyle/>
+          <a:p>
+            <a:pPr algn="ctr"/>
+          </a:p>
+        </p:txBody>
+      </p:sp>
+      <p:sp>
+        <p:nvSpPr>
+          <p:cNvPr id="4" name="TextBox 3"/>
           <p:cNvSpPr txBox="1"/>
           <p:nvPr/>
         </p:nvSpPr>
         <p:spPr>
           <a:xfrm>
-            <a:off x="457200" y="4754880"/>
-            <a:ext cx="11277295" cy="640080"/>
+            <a:off x="457200" y="164592"/>
+            <a:ext cx="11277295" cy="384048"/>
           </a:xfrm>
           <a:prstGeom prst="rect">
             <a:avLst/>
@@ -6470,15 +7704,965 @@
           </a:bodyPr>
           <a:lstStyle/>
           <a:p>
+            <a:r>
+              <a:rPr sz="2600" b="1" i="0">
+                <a:solidFill>
+                  <a:srgbClr val="FFFFFF"/>
+                </a:solidFill>
+                <a:latin typeface="Calibri"/>
+              </a:rPr>
+              <a:t>Cómo se expone en 4 minutos</a:t>
+            </a:r>
+          </a:p>
+        </p:txBody>
+      </p:sp>
+      <p:sp>
+        <p:nvSpPr>
+          <p:cNvPr id="5" name="TextBox 4"/>
+          <p:cNvSpPr txBox="1"/>
+          <p:nvPr/>
+        </p:nvSpPr>
+        <p:spPr>
+          <a:xfrm>
+            <a:off x="457200" y="566928"/>
+            <a:ext cx="11277295" cy="411480"/>
+          </a:xfrm>
+          <a:prstGeom prst="rect">
+            <a:avLst/>
+          </a:prstGeom>
+          <a:noFill/>
+        </p:spPr>
+        <p:txBody>
+          <a:bodyPr wrap="square">
+            <a:spAutoFit/>
+          </a:bodyPr>
+          <a:lstStyle/>
+          <a:p>
+            <a:r>
+              <a:rPr sz="1400" b="0" i="0">
+                <a:solidFill>
+                  <a:srgbClr val="B8D8EE"/>
+                </a:solidFill>
+                <a:latin typeface="Calibri"/>
+              </a:rPr>
+              <a:t>Habla el vocero con la pantalla ya compartida · cronómetro en pantalla · se corta al llegar a cero</a:t>
+            </a:r>
+          </a:p>
+        </p:txBody>
+      </p:sp>
+      <p:sp>
+        <p:nvSpPr>
+          <p:cNvPr id="6" name="Rounded Rectangle 5"/>
+          <p:cNvSpPr/>
+          <p:nvPr/>
+        </p:nvSpPr>
+        <p:spPr>
+          <a:xfrm>
+            <a:off x="457200" y="1444752"/>
+            <a:ext cx="11277295" cy="908913"/>
+          </a:xfrm>
+          <a:prstGeom prst="roundRect">
+            <a:avLst>
+              <a:gd name="adj" fmla="val 12000"/>
+            </a:avLst>
+          </a:prstGeom>
+          <a:solidFill>
+            <a:srgbClr val="F2F2F2"/>
+          </a:solidFill>
+          <a:ln>
+            <a:noFill/>
+          </a:ln>
+        </p:spPr>
+        <p:style>
+          <a:lnRef idx="1">
+            <a:schemeClr val="accent1"/>
+          </a:lnRef>
+          <a:fillRef idx="3">
+            <a:schemeClr val="accent1"/>
+          </a:fillRef>
+          <a:effectRef idx="2">
+            <a:schemeClr val="accent1"/>
+          </a:effectRef>
+          <a:fontRef idx="minor">
+            <a:schemeClr val="lt1"/>
+          </a:fontRef>
+        </p:style>
+        <p:txBody>
+          <a:bodyPr rtlCol="0" anchor="ctr"/>
+          <a:lstStyle/>
+          <a:p>
             <a:pPr algn="ctr"/>
-            <a:r>
-              <a:rPr sz="2000" b="1" i="0">
-                <a:solidFill>
-                  <a:srgbClr val="269CCB"/>
-                </a:solidFill>
-                <a:latin typeface="Calibri"/>
-              </a:rPr>
-              <a:t>Una presentación no se acorta hablando rápido: se acorta eligiendo</a:t>
+          </a:p>
+        </p:txBody>
+      </p:sp>
+      <p:sp>
+        <p:nvSpPr>
+          <p:cNvPr id="7" name="Rounded Rectangle 6"/>
+          <p:cNvSpPr/>
+          <p:nvPr/>
+        </p:nvSpPr>
+        <p:spPr>
+          <a:xfrm>
+            <a:off x="594360" y="1679752"/>
+            <a:ext cx="438912" cy="438912"/>
+          </a:xfrm>
+          <a:prstGeom prst="roundRect">
+            <a:avLst>
+              <a:gd name="adj" fmla="val 12000"/>
+            </a:avLst>
+          </a:prstGeom>
+          <a:solidFill>
+            <a:srgbClr val="095292"/>
+          </a:solidFill>
+          <a:ln>
+            <a:noFill/>
+          </a:ln>
+        </p:spPr>
+        <p:style>
+          <a:lnRef idx="1">
+            <a:schemeClr val="accent1"/>
+          </a:lnRef>
+          <a:fillRef idx="3">
+            <a:schemeClr val="accent1"/>
+          </a:fillRef>
+          <a:effectRef idx="2">
+            <a:schemeClr val="accent1"/>
+          </a:effectRef>
+          <a:fontRef idx="minor">
+            <a:schemeClr val="lt1"/>
+          </a:fontRef>
+        </p:style>
+        <p:txBody>
+          <a:bodyPr rtlCol="0" anchor="ctr"/>
+          <a:lstStyle/>
+          <a:p>
+            <a:pPr algn="ctr"/>
+          </a:p>
+        </p:txBody>
+      </p:sp>
+      <p:sp>
+        <p:nvSpPr>
+          <p:cNvPr id="8" name="TextBox 7"/>
+          <p:cNvSpPr txBox="1"/>
+          <p:nvPr/>
+        </p:nvSpPr>
+        <p:spPr>
+          <a:xfrm>
+            <a:off x="594360" y="1679752"/>
+            <a:ext cx="438912" cy="438912"/>
+          </a:xfrm>
+          <a:prstGeom prst="rect">
+            <a:avLst/>
+          </a:prstGeom>
+          <a:noFill/>
+        </p:spPr>
+        <p:txBody>
+          <a:bodyPr wrap="square" anchor="ctr"/>
+          <a:lstStyle/>
+          <a:p>
+            <a:pPr algn="ctr"/>
+            <a:r>
+              <a:rPr sz="1600" b="1" i="0">
+                <a:solidFill>
+                  <a:srgbClr val="FFFFFF"/>
+                </a:solidFill>
+                <a:latin typeface="Calibri"/>
+              </a:rPr>
+              <a:t>1</a:t>
+            </a:r>
+          </a:p>
+        </p:txBody>
+      </p:sp>
+      <p:sp>
+        <p:nvSpPr>
+          <p:cNvPr id="9" name="TextBox 8"/>
+          <p:cNvSpPr txBox="1"/>
+          <p:nvPr/>
+        </p:nvSpPr>
+        <p:spPr>
+          <a:xfrm>
+            <a:off x="1188720" y="1536192"/>
+            <a:ext cx="10271455" cy="744321"/>
+          </a:xfrm>
+          <a:prstGeom prst="rect">
+            <a:avLst/>
+          </a:prstGeom>
+          <a:noFill/>
+        </p:spPr>
+        <p:txBody>
+          <a:bodyPr wrap="square" anchor="ctr"/>
+          <a:lstStyle/>
+          <a:p>
+            <a:r>
+              <a:rPr sz="1500" b="1" i="0">
+                <a:solidFill>
+                  <a:srgbClr val="095292"/>
+                </a:solidFill>
+                <a:latin typeface="Calibri"/>
+              </a:rPr>
+              <a:t>Tramo 1 · 1 min</a:t>
+            </a:r>
+          </a:p>
+          <a:p>
+            <a:pPr>
+              <a:spcBef>
+                <a:spcPts val="200"/>
+              </a:spcBef>
+            </a:pPr>
+            <a:r>
+              <a:rPr sz="1300" b="0" i="0">
+                <a:solidFill>
+                  <a:srgbClr val="333333"/>
+                </a:solidFill>
+                <a:latin typeface="Calibri"/>
+              </a:rPr>
+              <a:t>El problema con su cifra. </a:t>
+            </a:r>
+            <a:r>
+              <a:rPr sz="1300" b="1" i="0">
+                <a:solidFill>
+                  <a:srgbClr val="333333"/>
+                </a:solidFill>
+                <a:latin typeface="Calibri"/>
+              </a:rPr>
+              <a:t>Sin presentaciones personales.</a:t>
+            </a:r>
+          </a:p>
+        </p:txBody>
+      </p:sp>
+      <p:sp>
+        <p:nvSpPr>
+          <p:cNvPr id="10" name="Rounded Rectangle 9"/>
+          <p:cNvSpPr/>
+          <p:nvPr/>
+        </p:nvSpPr>
+        <p:spPr>
+          <a:xfrm>
+            <a:off x="457200" y="2445105"/>
+            <a:ext cx="11277295" cy="908913"/>
+          </a:xfrm>
+          <a:prstGeom prst="roundRect">
+            <a:avLst>
+              <a:gd name="adj" fmla="val 12000"/>
+            </a:avLst>
+          </a:prstGeom>
+          <a:solidFill>
+            <a:srgbClr val="E8F4FA"/>
+          </a:solidFill>
+          <a:ln>
+            <a:noFill/>
+          </a:ln>
+        </p:spPr>
+        <p:style>
+          <a:lnRef idx="1">
+            <a:schemeClr val="accent1"/>
+          </a:lnRef>
+          <a:fillRef idx="3">
+            <a:schemeClr val="accent1"/>
+          </a:fillRef>
+          <a:effectRef idx="2">
+            <a:schemeClr val="accent1"/>
+          </a:effectRef>
+          <a:fontRef idx="minor">
+            <a:schemeClr val="lt1"/>
+          </a:fontRef>
+        </p:style>
+        <p:txBody>
+          <a:bodyPr rtlCol="0" anchor="ctr"/>
+          <a:lstStyle/>
+          <a:p>
+            <a:pPr algn="ctr"/>
+          </a:p>
+        </p:txBody>
+      </p:sp>
+      <p:sp>
+        <p:nvSpPr>
+          <p:cNvPr id="11" name="Rounded Rectangle 10"/>
+          <p:cNvSpPr/>
+          <p:nvPr/>
+        </p:nvSpPr>
+        <p:spPr>
+          <a:xfrm>
+            <a:off x="594360" y="2680106"/>
+            <a:ext cx="438912" cy="438912"/>
+          </a:xfrm>
+          <a:prstGeom prst="roundRect">
+            <a:avLst>
+              <a:gd name="adj" fmla="val 12000"/>
+            </a:avLst>
+          </a:prstGeom>
+          <a:solidFill>
+            <a:srgbClr val="095292"/>
+          </a:solidFill>
+          <a:ln>
+            <a:noFill/>
+          </a:ln>
+        </p:spPr>
+        <p:style>
+          <a:lnRef idx="1">
+            <a:schemeClr val="accent1"/>
+          </a:lnRef>
+          <a:fillRef idx="3">
+            <a:schemeClr val="accent1"/>
+          </a:fillRef>
+          <a:effectRef idx="2">
+            <a:schemeClr val="accent1"/>
+          </a:effectRef>
+          <a:fontRef idx="minor">
+            <a:schemeClr val="lt1"/>
+          </a:fontRef>
+        </p:style>
+        <p:txBody>
+          <a:bodyPr rtlCol="0" anchor="ctr"/>
+          <a:lstStyle/>
+          <a:p>
+            <a:pPr algn="ctr"/>
+          </a:p>
+        </p:txBody>
+      </p:sp>
+      <p:sp>
+        <p:nvSpPr>
+          <p:cNvPr id="12" name="TextBox 11"/>
+          <p:cNvSpPr txBox="1"/>
+          <p:nvPr/>
+        </p:nvSpPr>
+        <p:spPr>
+          <a:xfrm>
+            <a:off x="594360" y="2680106"/>
+            <a:ext cx="438912" cy="438912"/>
+          </a:xfrm>
+          <a:prstGeom prst="rect">
+            <a:avLst/>
+          </a:prstGeom>
+          <a:noFill/>
+        </p:spPr>
+        <p:txBody>
+          <a:bodyPr wrap="square" anchor="ctr"/>
+          <a:lstStyle/>
+          <a:p>
+            <a:pPr algn="ctr"/>
+            <a:r>
+              <a:rPr sz="1600" b="1" i="0">
+                <a:solidFill>
+                  <a:srgbClr val="FFFFFF"/>
+                </a:solidFill>
+                <a:latin typeface="Calibri"/>
+              </a:rPr>
+              <a:t>2</a:t>
+            </a:r>
+          </a:p>
+        </p:txBody>
+      </p:sp>
+      <p:sp>
+        <p:nvSpPr>
+          <p:cNvPr id="13" name="TextBox 12"/>
+          <p:cNvSpPr txBox="1"/>
+          <p:nvPr/>
+        </p:nvSpPr>
+        <p:spPr>
+          <a:xfrm>
+            <a:off x="1188720" y="2536545"/>
+            <a:ext cx="10271455" cy="744321"/>
+          </a:xfrm>
+          <a:prstGeom prst="rect">
+            <a:avLst/>
+          </a:prstGeom>
+          <a:noFill/>
+        </p:spPr>
+        <p:txBody>
+          <a:bodyPr wrap="square" anchor="ctr"/>
+          <a:lstStyle/>
+          <a:p>
+            <a:r>
+              <a:rPr sz="1500" b="1" i="0">
+                <a:solidFill>
+                  <a:srgbClr val="095292"/>
+                </a:solidFill>
+                <a:latin typeface="Calibri"/>
+              </a:rPr>
+              <a:t>Tramo 2 · 2 min</a:t>
+            </a:r>
+          </a:p>
+          <a:p>
+            <a:pPr>
+              <a:spcBef>
+                <a:spcPts val="200"/>
+              </a:spcBef>
+            </a:pPr>
+            <a:r>
+              <a:rPr sz="1300" b="0" i="0">
+                <a:solidFill>
+                  <a:srgbClr val="333333"/>
+                </a:solidFill>
+                <a:latin typeface="Calibri"/>
+              </a:rPr>
+              <a:t>Los afectados y la decisión de la matriz, con lo que se sacrificó.</a:t>
+            </a:r>
+          </a:p>
+        </p:txBody>
+      </p:sp>
+      <p:sp>
+        <p:nvSpPr>
+          <p:cNvPr id="14" name="Rounded Rectangle 13"/>
+          <p:cNvSpPr/>
+          <p:nvPr/>
+        </p:nvSpPr>
+        <p:spPr>
+          <a:xfrm>
+            <a:off x="457200" y="3445459"/>
+            <a:ext cx="11277295" cy="908913"/>
+          </a:xfrm>
+          <a:prstGeom prst="roundRect">
+            <a:avLst>
+              <a:gd name="adj" fmla="val 12000"/>
+            </a:avLst>
+          </a:prstGeom>
+          <a:solidFill>
+            <a:srgbClr val="F2F2F2"/>
+          </a:solidFill>
+          <a:ln>
+            <a:noFill/>
+          </a:ln>
+        </p:spPr>
+        <p:style>
+          <a:lnRef idx="1">
+            <a:schemeClr val="accent1"/>
+          </a:lnRef>
+          <a:fillRef idx="3">
+            <a:schemeClr val="accent1"/>
+          </a:fillRef>
+          <a:effectRef idx="2">
+            <a:schemeClr val="accent1"/>
+          </a:effectRef>
+          <a:fontRef idx="minor">
+            <a:schemeClr val="lt1"/>
+          </a:fontRef>
+        </p:style>
+        <p:txBody>
+          <a:bodyPr rtlCol="0" anchor="ctr"/>
+          <a:lstStyle/>
+          <a:p>
+            <a:pPr algn="ctr"/>
+          </a:p>
+        </p:txBody>
+      </p:sp>
+      <p:sp>
+        <p:nvSpPr>
+          <p:cNvPr id="15" name="Rounded Rectangle 14"/>
+          <p:cNvSpPr/>
+          <p:nvPr/>
+        </p:nvSpPr>
+        <p:spPr>
+          <a:xfrm>
+            <a:off x="594360" y="3680460"/>
+            <a:ext cx="438912" cy="438912"/>
+          </a:xfrm>
+          <a:prstGeom prst="roundRect">
+            <a:avLst>
+              <a:gd name="adj" fmla="val 12000"/>
+            </a:avLst>
+          </a:prstGeom>
+          <a:solidFill>
+            <a:srgbClr val="095292"/>
+          </a:solidFill>
+          <a:ln>
+            <a:noFill/>
+          </a:ln>
+        </p:spPr>
+        <p:style>
+          <a:lnRef idx="1">
+            <a:schemeClr val="accent1"/>
+          </a:lnRef>
+          <a:fillRef idx="3">
+            <a:schemeClr val="accent1"/>
+          </a:fillRef>
+          <a:effectRef idx="2">
+            <a:schemeClr val="accent1"/>
+          </a:effectRef>
+          <a:fontRef idx="minor">
+            <a:schemeClr val="lt1"/>
+          </a:fontRef>
+        </p:style>
+        <p:txBody>
+          <a:bodyPr rtlCol="0" anchor="ctr"/>
+          <a:lstStyle/>
+          <a:p>
+            <a:pPr algn="ctr"/>
+          </a:p>
+        </p:txBody>
+      </p:sp>
+      <p:sp>
+        <p:nvSpPr>
+          <p:cNvPr id="16" name="TextBox 15"/>
+          <p:cNvSpPr txBox="1"/>
+          <p:nvPr/>
+        </p:nvSpPr>
+        <p:spPr>
+          <a:xfrm>
+            <a:off x="594360" y="3680460"/>
+            <a:ext cx="438912" cy="438912"/>
+          </a:xfrm>
+          <a:prstGeom prst="rect">
+            <a:avLst/>
+          </a:prstGeom>
+          <a:noFill/>
+        </p:spPr>
+        <p:txBody>
+          <a:bodyPr wrap="square" anchor="ctr"/>
+          <a:lstStyle/>
+          <a:p>
+            <a:pPr algn="ctr"/>
+            <a:r>
+              <a:rPr sz="1600" b="1" i="0">
+                <a:solidFill>
+                  <a:srgbClr val="FFFFFF"/>
+                </a:solidFill>
+                <a:latin typeface="Calibri"/>
+              </a:rPr>
+              <a:t>3</a:t>
+            </a:r>
+          </a:p>
+        </p:txBody>
+      </p:sp>
+      <p:sp>
+        <p:nvSpPr>
+          <p:cNvPr id="17" name="TextBox 16"/>
+          <p:cNvSpPr txBox="1"/>
+          <p:nvPr/>
+        </p:nvSpPr>
+        <p:spPr>
+          <a:xfrm>
+            <a:off x="1188720" y="3536899"/>
+            <a:ext cx="10271455" cy="744321"/>
+          </a:xfrm>
+          <a:prstGeom prst="rect">
+            <a:avLst/>
+          </a:prstGeom>
+          <a:noFill/>
+        </p:spPr>
+        <p:txBody>
+          <a:bodyPr wrap="square" anchor="ctr"/>
+          <a:lstStyle/>
+          <a:p>
+            <a:r>
+              <a:rPr sz="1500" b="1" i="0">
+                <a:solidFill>
+                  <a:srgbClr val="095292"/>
+                </a:solidFill>
+                <a:latin typeface="Calibri"/>
+              </a:rPr>
+              <a:t>Comienzo del tramo 3 · 1 min</a:t>
+            </a:r>
+          </a:p>
+          <a:p>
+            <a:pPr>
+              <a:spcBef>
+                <a:spcPts val="200"/>
+              </a:spcBef>
+            </a:pPr>
+            <a:r>
+              <a:rPr sz="1300" b="0" i="0">
+                <a:solidFill>
+                  <a:srgbClr val="333333"/>
+                </a:solidFill>
+                <a:latin typeface="Calibri"/>
+              </a:rPr>
+              <a:t>Arrancar la demostración: hasta donde llegue en el minuto.</a:t>
+            </a:r>
+          </a:p>
+        </p:txBody>
+      </p:sp>
+      <p:sp>
+        <p:nvSpPr>
+          <p:cNvPr id="18" name="Rounded Rectangle 17"/>
+          <p:cNvSpPr/>
+          <p:nvPr/>
+        </p:nvSpPr>
+        <p:spPr>
+          <a:xfrm>
+            <a:off x="457200" y="4445812"/>
+            <a:ext cx="11277295" cy="908913"/>
+          </a:xfrm>
+          <a:prstGeom prst="roundRect">
+            <a:avLst>
+              <a:gd name="adj" fmla="val 12000"/>
+            </a:avLst>
+          </a:prstGeom>
+          <a:solidFill>
+            <a:srgbClr val="E8F4FA"/>
+          </a:solidFill>
+          <a:ln>
+            <a:noFill/>
+          </a:ln>
+        </p:spPr>
+        <p:style>
+          <a:lnRef idx="1">
+            <a:schemeClr val="accent1"/>
+          </a:lnRef>
+          <a:fillRef idx="3">
+            <a:schemeClr val="accent1"/>
+          </a:fillRef>
+          <a:effectRef idx="2">
+            <a:schemeClr val="accent1"/>
+          </a:effectRef>
+          <a:fontRef idx="minor">
+            <a:schemeClr val="lt1"/>
+          </a:fontRef>
+        </p:style>
+        <p:txBody>
+          <a:bodyPr rtlCol="0" anchor="ctr"/>
+          <a:lstStyle/>
+          <a:p>
+            <a:pPr algn="ctr"/>
+          </a:p>
+        </p:txBody>
+      </p:sp>
+      <p:sp>
+        <p:nvSpPr>
+          <p:cNvPr id="19" name="Rounded Rectangle 18"/>
+          <p:cNvSpPr/>
+          <p:nvPr/>
+        </p:nvSpPr>
+        <p:spPr>
+          <a:xfrm>
+            <a:off x="594360" y="4680813"/>
+            <a:ext cx="438912" cy="438912"/>
+          </a:xfrm>
+          <a:prstGeom prst="roundRect">
+            <a:avLst>
+              <a:gd name="adj" fmla="val 12000"/>
+            </a:avLst>
+          </a:prstGeom>
+          <a:solidFill>
+            <a:srgbClr val="095292"/>
+          </a:solidFill>
+          <a:ln>
+            <a:noFill/>
+          </a:ln>
+        </p:spPr>
+        <p:style>
+          <a:lnRef idx="1">
+            <a:schemeClr val="accent1"/>
+          </a:lnRef>
+          <a:fillRef idx="3">
+            <a:schemeClr val="accent1"/>
+          </a:fillRef>
+          <a:effectRef idx="2">
+            <a:schemeClr val="accent1"/>
+          </a:effectRef>
+          <a:fontRef idx="minor">
+            <a:schemeClr val="lt1"/>
+          </a:fontRef>
+        </p:style>
+        <p:txBody>
+          <a:bodyPr rtlCol="0" anchor="ctr"/>
+          <a:lstStyle/>
+          <a:p>
+            <a:pPr algn="ctr"/>
+          </a:p>
+        </p:txBody>
+      </p:sp>
+      <p:sp>
+        <p:nvSpPr>
+          <p:cNvPr id="20" name="TextBox 19"/>
+          <p:cNvSpPr txBox="1"/>
+          <p:nvPr/>
+        </p:nvSpPr>
+        <p:spPr>
+          <a:xfrm>
+            <a:off x="594360" y="4680813"/>
+            <a:ext cx="438912" cy="438912"/>
+          </a:xfrm>
+          <a:prstGeom prst="rect">
+            <a:avLst/>
+          </a:prstGeom>
+          <a:noFill/>
+        </p:spPr>
+        <p:txBody>
+          <a:bodyPr wrap="square" anchor="ctr"/>
+          <a:lstStyle/>
+          <a:p>
+            <a:pPr algn="ctr"/>
+            <a:r>
+              <a:rPr sz="1600" b="1" i="0">
+                <a:solidFill>
+                  <a:srgbClr val="FFFFFF"/>
+                </a:solidFill>
+                <a:latin typeface="Calibri"/>
+              </a:rPr>
+              <a:t>4</a:t>
+            </a:r>
+          </a:p>
+        </p:txBody>
+      </p:sp>
+      <p:sp>
+        <p:nvSpPr>
+          <p:cNvPr id="21" name="TextBox 20"/>
+          <p:cNvSpPr txBox="1"/>
+          <p:nvPr/>
+        </p:nvSpPr>
+        <p:spPr>
+          <a:xfrm>
+            <a:off x="1188720" y="4537252"/>
+            <a:ext cx="10271455" cy="744321"/>
+          </a:xfrm>
+          <a:prstGeom prst="rect">
+            <a:avLst/>
+          </a:prstGeom>
+          <a:noFill/>
+        </p:spPr>
+        <p:txBody>
+          <a:bodyPr wrap="square" anchor="ctr"/>
+          <a:lstStyle/>
+          <a:p>
+            <a:r>
+              <a:rPr sz="1500" b="1" i="0">
+                <a:solidFill>
+                  <a:srgbClr val="095292"/>
+                </a:solidFill>
+                <a:latin typeface="Calibri"/>
+              </a:rPr>
+              <a:t>Corte a los 4 min</a:t>
+            </a:r>
+          </a:p>
+          <a:p>
+            <a:pPr>
+              <a:spcBef>
+                <a:spcPts val="200"/>
+              </a:spcBef>
+            </a:pPr>
+            <a:r>
+              <a:rPr sz="1300" b="0" i="0">
+                <a:solidFill>
+                  <a:srgbClr val="333333"/>
+                </a:solidFill>
+                <a:latin typeface="Calibri"/>
+              </a:rPr>
+              <a:t>Se corta en mitad de la frase. En la Clase 15 pasa igual.</a:t>
+            </a:r>
+          </a:p>
+        </p:txBody>
+      </p:sp>
+      <p:sp>
+        <p:nvSpPr>
+          <p:cNvPr id="22" name="Rounded Rectangle 21"/>
+          <p:cNvSpPr/>
+          <p:nvPr/>
+        </p:nvSpPr>
+        <p:spPr>
+          <a:xfrm>
+            <a:off x="457200" y="5446166"/>
+            <a:ext cx="11277295" cy="908913"/>
+          </a:xfrm>
+          <a:prstGeom prst="roundRect">
+            <a:avLst>
+              <a:gd name="adj" fmla="val 12000"/>
+            </a:avLst>
+          </a:prstGeom>
+          <a:solidFill>
+            <a:srgbClr val="F2F2F2"/>
+          </a:solidFill>
+          <a:ln>
+            <a:noFill/>
+          </a:ln>
+        </p:spPr>
+        <p:style>
+          <a:lnRef idx="1">
+            <a:schemeClr val="accent1"/>
+          </a:lnRef>
+          <a:fillRef idx="3">
+            <a:schemeClr val="accent1"/>
+          </a:fillRef>
+          <a:effectRef idx="2">
+            <a:schemeClr val="accent1"/>
+          </a:effectRef>
+          <a:fontRef idx="minor">
+            <a:schemeClr val="lt1"/>
+          </a:fontRef>
+        </p:style>
+        <p:txBody>
+          <a:bodyPr rtlCol="0" anchor="ctr"/>
+          <a:lstStyle/>
+          <a:p>
+            <a:pPr algn="ctr"/>
+          </a:p>
+        </p:txBody>
+      </p:sp>
+      <p:sp>
+        <p:nvSpPr>
+          <p:cNvPr id="23" name="Rounded Rectangle 22"/>
+          <p:cNvSpPr/>
+          <p:nvPr/>
+        </p:nvSpPr>
+        <p:spPr>
+          <a:xfrm>
+            <a:off x="594360" y="5681167"/>
+            <a:ext cx="438912" cy="438912"/>
+          </a:xfrm>
+          <a:prstGeom prst="roundRect">
+            <a:avLst>
+              <a:gd name="adj" fmla="val 12000"/>
+            </a:avLst>
+          </a:prstGeom>
+          <a:solidFill>
+            <a:srgbClr val="095292"/>
+          </a:solidFill>
+          <a:ln>
+            <a:noFill/>
+          </a:ln>
+        </p:spPr>
+        <p:style>
+          <a:lnRef idx="1">
+            <a:schemeClr val="accent1"/>
+          </a:lnRef>
+          <a:fillRef idx="3">
+            <a:schemeClr val="accent1"/>
+          </a:fillRef>
+          <a:effectRef idx="2">
+            <a:schemeClr val="accent1"/>
+          </a:effectRef>
+          <a:fontRef idx="minor">
+            <a:schemeClr val="lt1"/>
+          </a:fontRef>
+        </p:style>
+        <p:txBody>
+          <a:bodyPr rtlCol="0" anchor="ctr"/>
+          <a:lstStyle/>
+          <a:p>
+            <a:pPr algn="ctr"/>
+          </a:p>
+        </p:txBody>
+      </p:sp>
+      <p:sp>
+        <p:nvSpPr>
+          <p:cNvPr id="24" name="TextBox 23"/>
+          <p:cNvSpPr txBox="1"/>
+          <p:nvPr/>
+        </p:nvSpPr>
+        <p:spPr>
+          <a:xfrm>
+            <a:off x="594360" y="5681167"/>
+            <a:ext cx="438912" cy="438912"/>
+          </a:xfrm>
+          <a:prstGeom prst="rect">
+            <a:avLst/>
+          </a:prstGeom>
+          <a:noFill/>
+        </p:spPr>
+        <p:txBody>
+          <a:bodyPr wrap="square" anchor="ctr"/>
+          <a:lstStyle/>
+          <a:p>
+            <a:pPr algn="ctr"/>
+            <a:r>
+              <a:rPr sz="1600" b="1" i="0">
+                <a:solidFill>
+                  <a:srgbClr val="FFFFFF"/>
+                </a:solidFill>
+                <a:latin typeface="Calibri"/>
+              </a:rPr>
+              <a:t>5</a:t>
+            </a:r>
+          </a:p>
+        </p:txBody>
+      </p:sp>
+      <p:sp>
+        <p:nvSpPr>
+          <p:cNvPr id="25" name="TextBox 24"/>
+          <p:cNvSpPr txBox="1"/>
+          <p:nvPr/>
+        </p:nvSpPr>
+        <p:spPr>
+          <a:xfrm>
+            <a:off x="1188720" y="5537606"/>
+            <a:ext cx="10271455" cy="744321"/>
+          </a:xfrm>
+          <a:prstGeom prst="rect">
+            <a:avLst/>
+          </a:prstGeom>
+          <a:noFill/>
+        </p:spPr>
+        <p:txBody>
+          <a:bodyPr wrap="square" anchor="ctr"/>
+          <a:lstStyle/>
+          <a:p>
+            <a:r>
+              <a:rPr sz="1500" b="1" i="0">
+                <a:solidFill>
+                  <a:srgbClr val="095292"/>
+                </a:solidFill>
+                <a:latin typeface="Calibri"/>
+              </a:rPr>
+              <a:t>2 min de corrección</a:t>
+            </a:r>
+          </a:p>
+          <a:p>
+            <a:pPr>
+              <a:spcBef>
+                <a:spcPts val="200"/>
+              </a:spcBef>
+            </a:pPr>
+            <a:r>
+              <a:rPr sz="1300" b="0" i="0">
+                <a:solidFill>
+                  <a:srgbClr val="333333"/>
+                </a:solidFill>
+                <a:latin typeface="Calibri"/>
+              </a:rPr>
+              <a:t>El docente dice </a:t>
+            </a:r>
+            <a:r>
+              <a:rPr sz="1300" b="1" i="0">
+                <a:solidFill>
+                  <a:srgbClr val="333333"/>
+                </a:solidFill>
+                <a:latin typeface="Calibri"/>
+              </a:rPr>
+              <a:t>una sola cosa</a:t>
+            </a:r>
+            <a:r>
+              <a:rPr sz="1300" b="0" i="0">
+                <a:solidFill>
+                  <a:srgbClr val="333333"/>
+                </a:solidFill>
+                <a:latin typeface="Calibri"/>
+              </a:rPr>
+              <a:t>, la que más cambie la presentación.</a:t>
+            </a:r>
+          </a:p>
+        </p:txBody>
+      </p:sp>
+      <p:sp>
+        <p:nvSpPr>
+          <p:cNvPr id="26" name="TextBox 25"/>
+          <p:cNvSpPr txBox="1"/>
+          <p:nvPr/>
+        </p:nvSpPr>
+        <p:spPr>
+          <a:xfrm>
+            <a:off x="11185855" y="6473952"/>
+            <a:ext cx="640080" cy="274320"/>
+          </a:xfrm>
+          <a:prstGeom prst="rect">
+            <a:avLst/>
+          </a:prstGeom>
+          <a:noFill/>
+        </p:spPr>
+        <p:txBody>
+          <a:bodyPr wrap="square">
+            <a:spAutoFit/>
+          </a:bodyPr>
+          <a:lstStyle/>
+          <a:p>
+            <a:pPr algn="r"/>
+            <a:r>
+              <a:rPr sz="1100" b="0" i="0">
+                <a:solidFill>
+                  <a:srgbClr val="666666"/>
+                </a:solidFill>
+                <a:latin typeface="Calibri"/>
+              </a:rPr>
+              <a:t>19</a:t>
             </a:r>
           </a:p>
         </p:txBody>
@@ -7392,6 +9576,668 @@
                 <a:latin typeface="Calibri"/>
               </a:rPr>
               <a:t>2</a:t>
+            </a:r>
+          </a:p>
+        </p:txBody>
+      </p:sp>
+    </p:spTree>
+  </p:cSld>
+  <p:clrMapOvr>
+    <a:masterClrMapping/>
+  </p:clrMapOvr>
+</p:sld>
+</file>
+
+<file path=ppt/slides/slide20.xml><?xml version="1.0" encoding="utf-8"?>
+<p:sld xmlns:a="http://schemas.openxmlformats.org/drawingml/2006/main" xmlns:p="http://schemas.openxmlformats.org/presentationml/2006/main" xmlns:r="http://schemas.openxmlformats.org/officeDocument/2006/relationships">
+  <p:cSld>
+    <p:bg>
+      <p:bgPr>
+        <a:solidFill>
+          <a:srgbClr val="FFFFFF"/>
+        </a:solidFill>
+        <a:effectLst/>
+      </p:bgPr>
+    </p:bg>
+    <p:spTree>
+      <p:nvGrpSpPr>
+        <p:cNvPr id="1" name=""/>
+        <p:cNvGrpSpPr/>
+        <p:nvPr/>
+      </p:nvGrpSpPr>
+      <p:grpSpPr/>
+      <p:sp>
+        <p:nvSpPr>
+          <p:cNvPr id="2" name="Rectangle 1"/>
+          <p:cNvSpPr/>
+          <p:nvPr/>
+        </p:nvSpPr>
+        <p:spPr>
+          <a:xfrm>
+            <a:off x="0" y="0"/>
+            <a:ext cx="12191695" cy="960120"/>
+          </a:xfrm>
+          <a:prstGeom prst="rect">
+            <a:avLst/>
+          </a:prstGeom>
+          <a:solidFill>
+            <a:srgbClr val="095292"/>
+          </a:solidFill>
+          <a:ln>
+            <a:noFill/>
+          </a:ln>
+        </p:spPr>
+        <p:style>
+          <a:lnRef idx="1">
+            <a:schemeClr val="accent1"/>
+          </a:lnRef>
+          <a:fillRef idx="3">
+            <a:schemeClr val="accent1"/>
+          </a:fillRef>
+          <a:effectRef idx="2">
+            <a:schemeClr val="accent1"/>
+          </a:effectRef>
+          <a:fontRef idx="minor">
+            <a:schemeClr val="lt1"/>
+          </a:fontRef>
+        </p:style>
+        <p:txBody>
+          <a:bodyPr rtlCol="0" anchor="ctr"/>
+          <a:lstStyle/>
+          <a:p>
+            <a:pPr algn="ctr"/>
+          </a:p>
+        </p:txBody>
+      </p:sp>
+      <p:sp>
+        <p:nvSpPr>
+          <p:cNvPr id="3" name="Rectangle 2"/>
+          <p:cNvSpPr/>
+          <p:nvPr/>
+        </p:nvSpPr>
+        <p:spPr>
+          <a:xfrm>
+            <a:off x="0" y="960120"/>
+            <a:ext cx="12191695" cy="41148"/>
+          </a:xfrm>
+          <a:prstGeom prst="rect">
+            <a:avLst/>
+          </a:prstGeom>
+          <a:solidFill>
+            <a:srgbClr val="FFD000"/>
+          </a:solidFill>
+          <a:ln>
+            <a:noFill/>
+          </a:ln>
+        </p:spPr>
+        <p:style>
+          <a:lnRef idx="1">
+            <a:schemeClr val="accent1"/>
+          </a:lnRef>
+          <a:fillRef idx="3">
+            <a:schemeClr val="accent1"/>
+          </a:fillRef>
+          <a:effectRef idx="2">
+            <a:schemeClr val="accent1"/>
+          </a:effectRef>
+          <a:fontRef idx="minor">
+            <a:schemeClr val="lt1"/>
+          </a:fontRef>
+        </p:style>
+        <p:txBody>
+          <a:bodyPr rtlCol="0" anchor="ctr"/>
+          <a:lstStyle/>
+          <a:p>
+            <a:pPr algn="ctr"/>
+          </a:p>
+        </p:txBody>
+      </p:sp>
+      <p:sp>
+        <p:nvSpPr>
+          <p:cNvPr id="4" name="TextBox 3"/>
+          <p:cNvSpPr txBox="1"/>
+          <p:nvPr/>
+        </p:nvSpPr>
+        <p:spPr>
+          <a:xfrm>
+            <a:off x="457200" y="164592"/>
+            <a:ext cx="11277295" cy="502920"/>
+          </a:xfrm>
+          <a:prstGeom prst="rect">
+            <a:avLst/>
+          </a:prstGeom>
+          <a:noFill/>
+        </p:spPr>
+        <p:txBody>
+          <a:bodyPr wrap="square">
+            <a:spAutoFit/>
+          </a:bodyPr>
+          <a:lstStyle/>
+          <a:p>
+            <a:r>
+              <a:rPr sz="2600" b="1" i="0">
+                <a:solidFill>
+                  <a:srgbClr val="FFFFFF"/>
+                </a:solidFill>
+                <a:latin typeface="Calibri"/>
+              </a:rPr>
+              <a:t>Para la Clase 15</a:t>
+            </a:r>
+          </a:p>
+        </p:txBody>
+      </p:sp>
+      <p:sp>
+        <p:nvSpPr>
+          <p:cNvPr id="5" name="TextBox 4"/>
+          <p:cNvSpPr txBox="1"/>
+          <p:nvPr/>
+        </p:nvSpPr>
+        <p:spPr>
+          <a:xfrm>
+            <a:off x="457200" y="1170432"/>
+            <a:ext cx="11277295" cy="5230368"/>
+          </a:xfrm>
+          <a:prstGeom prst="rect">
+            <a:avLst/>
+          </a:prstGeom>
+          <a:noFill/>
+        </p:spPr>
+        <p:txBody>
+          <a:bodyPr wrap="square">
+            <a:spAutoFit/>
+          </a:bodyPr>
+          <a:lstStyle/>
+          <a:p>
+            <a:pPr>
+              <a:spcAft>
+                <a:spcPts val="800"/>
+              </a:spcAft>
+            </a:pPr>
+            <a:r>
+              <a:rPr sz="2000" b="0" i="0">
+                <a:solidFill>
+                  <a:srgbClr val="333333"/>
+                </a:solidFill>
+                <a:latin typeface="Calibri"/>
+              </a:rPr>
+              <a:t>–   </a:t>
+            </a:r>
+            <a:r>
+              <a:rPr sz="2000" b="1" i="0">
+                <a:solidFill>
+                  <a:srgbClr val="333333"/>
+                </a:solidFill>
+                <a:latin typeface="Calibri"/>
+              </a:rPr>
+              <a:t>Trabajo dirigido:</a:t>
+            </a:r>
+            <a:r>
+              <a:rPr sz="2000" b="0" i="0">
+                <a:solidFill>
+                  <a:srgbClr val="333333"/>
+                </a:solidFill>
+                <a:latin typeface="Calibri"/>
+              </a:rPr>
+              <a:t> Diseño de presentación y recursos visuales — dejar terminadas las ocho diapositivas y el guion con tiempos en la carpeta del equipo, junto con el PDF y las capturas.</a:t>
+            </a:r>
+          </a:p>
+          <a:p>
+            <a:pPr>
+              <a:spcAft>
+                <a:spcPts val="800"/>
+              </a:spcAft>
+            </a:pPr>
+            <a:r>
+              <a:rPr sz="2000" b="0" i="0">
+                <a:solidFill>
+                  <a:srgbClr val="333333"/>
+                </a:solidFill>
+                <a:latin typeface="Calibri"/>
+              </a:rPr>
+              <a:t>–   </a:t>
+            </a:r>
+            <a:r>
+              <a:rPr sz="2000" b="1" i="0">
+                <a:solidFill>
+                  <a:srgbClr val="333333"/>
+                </a:solidFill>
+                <a:latin typeface="Calibri"/>
+              </a:rPr>
+              <a:t>Trabajo independiente:</a:t>
+            </a:r>
+            <a:r>
+              <a:rPr sz="2000" b="0" i="0">
+                <a:solidFill>
+                  <a:srgbClr val="333333"/>
+                </a:solidFill>
+                <a:latin typeface="Calibri"/>
+              </a:rPr>
+              <a:t> Ensayo general: ensayar </a:t>
+            </a:r>
+            <a:r>
+              <a:rPr sz="2000" b="1" i="0">
+                <a:solidFill>
+                  <a:srgbClr val="333333"/>
+                </a:solidFill>
+                <a:latin typeface="Calibri"/>
+              </a:rPr>
+              <a:t>los nueve minutos completos, hablando y con cronómetro, al menos dos veces</a:t>
+            </a:r>
+            <a:r>
+              <a:rPr sz="2000" b="0" i="0">
+                <a:solidFill>
+                  <a:srgbClr val="333333"/>
+                </a:solidFill>
+                <a:latin typeface="Calibri"/>
+              </a:rPr>
+              <a:t>, y ajustar el guion con el tiempo real. Leerlo en silencio no cuenta: dura la mitad.</a:t>
+            </a:r>
+          </a:p>
+          <a:p>
+            <a:pPr>
+              <a:spcAft>
+                <a:spcPts val="800"/>
+              </a:spcAft>
+            </a:pPr>
+            <a:r>
+              <a:rPr sz="2000" b="0" i="0">
+                <a:solidFill>
+                  <a:srgbClr val="333333"/>
+                </a:solidFill>
+                <a:latin typeface="Calibri"/>
+              </a:rPr>
+              <a:t>–   </a:t>
+            </a:r>
+            <a:r>
+              <a:rPr sz="2000" b="1" i="0">
+                <a:solidFill>
+                  <a:srgbClr val="333333"/>
+                </a:solidFill>
+                <a:latin typeface="Calibri"/>
+              </a:rPr>
+              <a:t>Clase 15 · Exposición final de proyectos</a:t>
+            </a:r>
+            <a:r>
+              <a:rPr sz="2000" b="0" i="0">
+                <a:solidFill>
+                  <a:srgbClr val="333333"/>
+                </a:solidFill>
+                <a:latin typeface="Calibri"/>
+              </a:rPr>
+              <a:t> — es la </a:t>
+            </a:r>
+            <a:r>
+              <a:rPr sz="2000" b="1" i="0">
+                <a:solidFill>
+                  <a:srgbClr val="333333"/>
+                </a:solidFill>
+                <a:latin typeface="Calibri"/>
+              </a:rPr>
+              <a:t>exposición final</a:t>
+            </a:r>
+            <a:r>
+              <a:rPr sz="2000" b="0" i="0">
+                <a:solidFill>
+                  <a:srgbClr val="333333"/>
+                </a:solidFill>
+                <a:latin typeface="Calibri"/>
+              </a:rPr>
+              <a:t>, con nota: nueve minutos por equipo y tres de preguntas. Vale el </a:t>
+            </a:r>
+            <a:r>
+              <a:rPr sz="2000" b="1" i="0">
+                <a:solidFill>
+                  <a:srgbClr val="333333"/>
+                </a:solidFill>
+                <a:latin typeface="Calibri"/>
+              </a:rPr>
+              <a:t>15 %</a:t>
+            </a:r>
+            <a:r>
+              <a:rPr sz="2000" b="0" i="0">
+                <a:solidFill>
+                  <a:srgbClr val="333333"/>
+                </a:solidFill>
+                <a:latin typeface="Calibri"/>
+              </a:rPr>
+              <a:t> del curso.</a:t>
+            </a:r>
+          </a:p>
+          <a:p>
+            <a:pPr>
+              <a:spcAft>
+                <a:spcPts val="800"/>
+              </a:spcAft>
+            </a:pPr>
+            <a:r>
+              <a:rPr sz="2000" b="0" i="0">
+                <a:solidFill>
+                  <a:srgbClr val="333333"/>
+                </a:solidFill>
+                <a:latin typeface="Calibri"/>
+              </a:rPr>
+              <a:t>–   </a:t>
+            </a:r>
+            <a:r>
+              <a:rPr sz="2000" b="1" i="0">
+                <a:solidFill>
+                  <a:srgbClr val="333333"/>
+                </a:solidFill>
+                <a:latin typeface="Calibri"/>
+              </a:rPr>
+              <a:t>Aviso:</a:t>
+            </a:r>
+            <a:r>
+              <a:rPr sz="2000" b="0" i="0">
+                <a:solidFill>
+                  <a:srgbClr val="333333"/>
+                </a:solidFill>
+                <a:latin typeface="Calibri"/>
+              </a:rPr>
+              <a:t> En la Clase 15 </a:t>
+            </a:r>
+            <a:r>
+              <a:rPr sz="2000" b="1" i="0">
+                <a:solidFill>
+                  <a:srgbClr val="333333"/>
+                </a:solidFill>
+                <a:latin typeface="Calibri"/>
+              </a:rPr>
+              <a:t>se corta a los nueve minutos</a:t>
+            </a:r>
+            <a:r>
+              <a:rPr sz="2000" b="0" i="0">
+                <a:solidFill>
+                  <a:srgbClr val="333333"/>
+                </a:solidFill>
+                <a:latin typeface="Calibri"/>
+              </a:rPr>
+              <a:t>, sin excepción. Conéctense cinco minutos antes con la presentación y el prototipo ya abiertos, y con las capturas a mano. El orden de exposición se sortea al empezar, así que todos los equipos deben estar listos desde el primer minuto.</a:t>
+            </a:r>
+          </a:p>
+          <a:p>
+            <a:pPr>
+              <a:spcAft>
+                <a:spcPts val="800"/>
+              </a:spcAft>
+            </a:pPr>
+            <a:r>
+              <a:rPr sz="2000" b="0" i="0">
+                <a:solidFill>
+                  <a:srgbClr val="333333"/>
+                </a:solidFill>
+                <a:latin typeface="Calibri"/>
+              </a:rPr>
+              <a:t>–   </a:t>
+            </a:r>
+            <a:r>
+              <a:rPr sz="2000" b="1" i="0">
+                <a:solidFill>
+                  <a:srgbClr val="333333"/>
+                </a:solidFill>
+                <a:latin typeface="Calibri"/>
+              </a:rPr>
+              <a:t>Antes de salir:</a:t>
+            </a:r>
+            <a:r>
+              <a:rPr sz="2000" b="0" i="0">
+                <a:solidFill>
+                  <a:srgbClr val="333333"/>
+                </a:solidFill>
+                <a:latin typeface="Calibri"/>
+              </a:rPr>
+              <a:t> el enlace del documento del equipo en el chat, con permiso de lectura para el docente, y el nombre del vocero de hoy.</a:t>
+            </a:r>
+          </a:p>
+        </p:txBody>
+      </p:sp>
+      <p:sp>
+        <p:nvSpPr>
+          <p:cNvPr id="6" name="TextBox 5"/>
+          <p:cNvSpPr txBox="1"/>
+          <p:nvPr/>
+        </p:nvSpPr>
+        <p:spPr>
+          <a:xfrm>
+            <a:off x="11185855" y="6473952"/>
+            <a:ext cx="640080" cy="274320"/>
+          </a:xfrm>
+          <a:prstGeom prst="rect">
+            <a:avLst/>
+          </a:prstGeom>
+          <a:noFill/>
+        </p:spPr>
+        <p:txBody>
+          <a:bodyPr wrap="square">
+            <a:spAutoFit/>
+          </a:bodyPr>
+          <a:lstStyle/>
+          <a:p>
+            <a:pPr algn="r"/>
+            <a:r>
+              <a:rPr sz="1100" b="0" i="0">
+                <a:solidFill>
+                  <a:srgbClr val="666666"/>
+                </a:solidFill>
+                <a:latin typeface="Calibri"/>
+              </a:rPr>
+              <a:t>20</a:t>
+            </a:r>
+          </a:p>
+        </p:txBody>
+      </p:sp>
+    </p:spTree>
+  </p:cSld>
+  <p:clrMapOvr>
+    <a:masterClrMapping/>
+  </p:clrMapOvr>
+</p:sld>
+</file>
+
+<file path=ppt/slides/slide21.xml><?xml version="1.0" encoding="utf-8"?>
+<p:sld xmlns:a="http://schemas.openxmlformats.org/drawingml/2006/main" xmlns:p="http://schemas.openxmlformats.org/presentationml/2006/main" xmlns:r="http://schemas.openxmlformats.org/officeDocument/2006/relationships">
+  <p:cSld>
+    <p:bg>
+      <p:bgPr>
+        <a:solidFill>
+          <a:srgbClr val="FFFFFF"/>
+        </a:solidFill>
+        <a:effectLst/>
+      </p:bgPr>
+    </p:bg>
+    <p:spTree>
+      <p:nvGrpSpPr>
+        <p:cNvPr id="1" name=""/>
+        <p:cNvGrpSpPr/>
+        <p:nvPr/>
+      </p:nvGrpSpPr>
+      <p:grpSpPr/>
+      <p:sp>
+        <p:nvSpPr>
+          <p:cNvPr id="2" name="Rectangle 1"/>
+          <p:cNvSpPr/>
+          <p:nvPr/>
+        </p:nvSpPr>
+        <p:spPr>
+          <a:xfrm>
+            <a:off x="0" y="0"/>
+            <a:ext cx="12191695" cy="164592"/>
+          </a:xfrm>
+          <a:prstGeom prst="rect">
+            <a:avLst/>
+          </a:prstGeom>
+          <a:solidFill>
+            <a:srgbClr val="269CCB"/>
+          </a:solidFill>
+          <a:ln>
+            <a:noFill/>
+          </a:ln>
+        </p:spPr>
+        <p:style>
+          <a:lnRef idx="1">
+            <a:schemeClr val="accent1"/>
+          </a:lnRef>
+          <a:fillRef idx="3">
+            <a:schemeClr val="accent1"/>
+          </a:fillRef>
+          <a:effectRef idx="2">
+            <a:schemeClr val="accent1"/>
+          </a:effectRef>
+          <a:fontRef idx="minor">
+            <a:schemeClr val="lt1"/>
+          </a:fontRef>
+        </p:style>
+        <p:txBody>
+          <a:bodyPr rtlCol="0" anchor="ctr"/>
+          <a:lstStyle/>
+          <a:p>
+            <a:pPr algn="ctr"/>
+          </a:p>
+        </p:txBody>
+      </p:sp>
+      <p:pic>
+        <p:nvPicPr>
+          <p:cNvPr id="3" name="Picture 2" descr="logo_uniajc_color.png"/>
+          <p:cNvPicPr>
+            <a:picLocks noChangeAspect="1"/>
+          </p:cNvPicPr>
+          <p:nvPr/>
+        </p:nvPicPr>
+        <p:blipFill>
+          <a:blip r:embed="rId2"/>
+          <a:stretch>
+            <a:fillRect/>
+          </a:stretch>
+        </p:blipFill>
+        <p:spPr>
+          <a:xfrm>
+            <a:off x="10271455" y="5998464"/>
+            <a:ext cx="1463040" cy="643233"/>
+          </a:xfrm>
+          <a:prstGeom prst="rect">
+            <a:avLst/>
+          </a:prstGeom>
+        </p:spPr>
+      </p:pic>
+      <p:sp>
+        <p:nvSpPr>
+          <p:cNvPr id="4" name="TextBox 3"/>
+          <p:cNvSpPr txBox="1"/>
+          <p:nvPr/>
+        </p:nvSpPr>
+        <p:spPr>
+          <a:xfrm>
+            <a:off x="457200" y="1737360"/>
+            <a:ext cx="11277295" cy="1097280"/>
+          </a:xfrm>
+          <a:prstGeom prst="rect">
+            <a:avLst/>
+          </a:prstGeom>
+          <a:noFill/>
+        </p:spPr>
+        <p:txBody>
+          <a:bodyPr wrap="square" anchor="ctr"/>
+          <a:lstStyle/>
+          <a:p>
+            <a:pPr algn="ctr"/>
+            <a:r>
+              <a:rPr sz="3400" b="1" i="0">
+                <a:solidFill>
+                  <a:srgbClr val="095292"/>
+                </a:solidFill>
+                <a:latin typeface="Calibri"/>
+              </a:rPr>
+              <a:t>Nos vemos en la Clase 15</a:t>
+            </a:r>
+          </a:p>
+        </p:txBody>
+      </p:sp>
+      <p:sp>
+        <p:nvSpPr>
+          <p:cNvPr id="5" name="TextBox 4"/>
+          <p:cNvSpPr txBox="1"/>
+          <p:nvPr/>
+        </p:nvSpPr>
+        <p:spPr>
+          <a:xfrm>
+            <a:off x="457200" y="3017520"/>
+            <a:ext cx="11277295" cy="1645920"/>
+          </a:xfrm>
+          <a:prstGeom prst="rect">
+            <a:avLst/>
+          </a:prstGeom>
+          <a:noFill/>
+        </p:spPr>
+        <p:txBody>
+          <a:bodyPr wrap="square">
+            <a:spAutoFit/>
+          </a:bodyPr>
+          <a:lstStyle/>
+          <a:p>
+            <a:pPr algn="ctr">
+              <a:spcAft>
+                <a:spcPts val="600"/>
+              </a:spcAft>
+            </a:pPr>
+            <a:r>
+              <a:rPr sz="1600" b="0" i="0">
+                <a:solidFill>
+                  <a:srgbClr val="333333"/>
+                </a:solidFill>
+                <a:latin typeface="Calibri"/>
+              </a:rPr>
+              <a:t>Preparación de la presentación final · Clase 14</a:t>
+            </a:r>
+          </a:p>
+          <a:p>
+            <a:pPr algn="ctr">
+              <a:spcAft>
+                <a:spcPts val="600"/>
+              </a:spcAft>
+            </a:pPr>
+            <a:r>
+              <a:rPr sz="1600" b="0" i="0">
+                <a:solidFill>
+                  <a:srgbClr val="333333"/>
+                </a:solidFill>
+                <a:latin typeface="Calibri"/>
+              </a:rPr>
+              <a:t>FI300101 · UNIAJC · Ingeniería de Sistemas</a:t>
+            </a:r>
+          </a:p>
+        </p:txBody>
+      </p:sp>
+      <p:sp>
+        <p:nvSpPr>
+          <p:cNvPr id="6" name="TextBox 5"/>
+          <p:cNvSpPr txBox="1"/>
+          <p:nvPr/>
+        </p:nvSpPr>
+        <p:spPr>
+          <a:xfrm>
+            <a:off x="457200" y="4754880"/>
+            <a:ext cx="11277295" cy="640080"/>
+          </a:xfrm>
+          <a:prstGeom prst="rect">
+            <a:avLst/>
+          </a:prstGeom>
+          <a:noFill/>
+        </p:spPr>
+        <p:txBody>
+          <a:bodyPr wrap="square">
+            <a:spAutoFit/>
+          </a:bodyPr>
+          <a:lstStyle/>
+          <a:p>
+            <a:pPr algn="ctr"/>
+            <a:r>
+              <a:rPr sz="2000" b="1" i="0">
+                <a:solidFill>
+                  <a:srgbClr val="269CCB"/>
+                </a:solidFill>
+                <a:latin typeface="Calibri"/>
+              </a:rPr>
+              <a:t>Una presentación no se acorta hablando rápido: se acorta eligiendo</a:t>
             </a:r>
           </a:p>
         </p:txBody>

--- a/Introduccion a la Ingenieria/Clases/Clase 14 - Preparacion de la presentacion final/Presentacion.pptx
+++ b/Introduccion a la Ingenieria/Clases/Clase 14 - Preparacion de la presentacion final/Presentacion.pptx
@@ -26,6 +26,8 @@
     <p:sldId id="274" r:id="rId25"/>
     <p:sldId id="275" r:id="rId26"/>
     <p:sldId id="276" r:id="rId27"/>
+    <p:sldId id="277" r:id="rId28"/>
+    <p:sldId id="278" r:id="rId29"/>
   </p:sldIdLst>
   <p:sldSz cx="12191695" cy="6858000" type="screen4x3"/>
   <p:notesSz cx="6858000" cy="9144000"/>
@@ -3969,25 +3971,7 @@
                 </a:solidFill>
                 <a:latin typeface="Calibri"/>
               </a:rPr>
-              <a:t>–   En el muro, cada equipo escribe </a:t>
-            </a:r>
-            <a:r>
-              <a:rPr sz="2000" b="1" i="0">
-                <a:solidFill>
-                  <a:srgbClr val="333333"/>
-                </a:solidFill>
-                <a:latin typeface="Calibri"/>
-              </a:rPr>
-              <a:t>qué va a dejar fuera</a:t>
-            </a:r>
-            <a:r>
-              <a:rPr sz="2000" b="0" i="0">
-                <a:solidFill>
-                  <a:srgbClr val="333333"/>
-                </a:solidFill>
-                <a:latin typeface="Calibri"/>
-              </a:rPr>
-              <a:t>.</a:t>
+              <a:t>–   Es una pregunta incómoda y es exactamente el trabajo de hoy: dejar fuera el árbol de causas completo, la revisión bibliográfica extensa, la historia de cómo se conocieron, las quince filas de la matriz.</a:t>
             </a:r>
           </a:p>
           <a:p>
@@ -4003,7 +3987,7 @@
                 </a:solidFill>
                 <a:latin typeface="Calibri"/>
               </a:rPr>
-              <a:t>–   Es una pregunta incómoda y es exactamente el trabajo de hoy: dejar fuera el árbol de causas completo, la revisión bibliográfica extensa, la historia de cómo se conocieron, las quince filas de la matriz.</a:t>
+              <a:t>–   Y una advertencia de encuadre para el docente: hoy nadie expone para lucirse.</a:t>
             </a:r>
           </a:p>
           <a:p>
@@ -4019,15 +4003,17 @@
                 </a:solidFill>
                 <a:latin typeface="Calibri"/>
               </a:rPr>
-              <a:t>–   Y una advertencia de encuadre para el docente: hoy nadie expone para lucirse.</a:t>
-            </a:r>
-          </a:p>
-          <a:p>
-            <a:pPr>
-              <a:spcAft>
-                <a:spcPts val="800"/>
-              </a:spcAft>
-            </a:pPr>
+              <a:t>–   El bloque de 30 minutos es un </a:t>
+            </a:r>
+            <a:r>
+              <a:rPr sz="2000" b="1" i="0">
+                <a:solidFill>
+                  <a:srgbClr val="333333"/>
+                </a:solidFill>
+                <a:latin typeface="Calibri"/>
+              </a:rPr>
+              <a:t>ensayo con corrección</a:t>
+            </a:r>
             <a:r>
               <a:rPr sz="2000" b="0" i="0">
                 <a:solidFill>
@@ -4035,41 +4021,7 @@
                 </a:solidFill>
                 <a:latin typeface="Calibri"/>
               </a:rPr>
-              <a:t>–   El bloque de 30 minutos es un </a:t>
-            </a:r>
-            <a:r>
-              <a:rPr sz="2000" b="1" i="0">
-                <a:solidFill>
-                  <a:srgbClr val="333333"/>
-                </a:solidFill>
-                <a:latin typeface="Calibri"/>
-              </a:rPr>
-              <a:t>ensayo con corrección</a:t>
-            </a:r>
-            <a:r>
-              <a:rPr sz="2000" b="0" i="0">
-                <a:solidFill>
-                  <a:srgbClr val="333333"/>
-                </a:solidFill>
-                <a:latin typeface="Calibri"/>
-              </a:rPr>
               <a:t>, y hay que decirlo al principio para que los equipos traigan lo que tienen aunque esté a medias.</a:t>
-            </a:r>
-          </a:p>
-          <a:p>
-            <a:pPr>
-              <a:spcAft>
-                <a:spcPts val="800"/>
-              </a:spcAft>
-            </a:pPr>
-            <a:r>
-              <a:rPr sz="2000" b="0" i="0">
-                <a:solidFill>
-                  <a:srgbClr val="333333"/>
-                </a:solidFill>
-                <a:latin typeface="Calibri"/>
-              </a:rPr>
-              <a:t>–   Un equipo que esconde su presentación hoy porque «no está lista» está renunciando a la única corrección antes de la nota.</a:t>
             </a:r>
           </a:p>
         </p:txBody>
@@ -4305,83 +4257,6 @@
                 </a:solidFill>
                 <a:latin typeface="Calibri"/>
               </a:rPr>
-              <a:t>–   Eso consume el minuto más valioso de los nueve. </a:t>
-            </a:r>
-            <a:r>
-              <a:rPr sz="2000" b="1" i="0">
-                <a:solidFill>
-                  <a:srgbClr val="333333"/>
-                </a:solidFill>
-                <a:latin typeface="Calibri"/>
-              </a:rPr>
-              <a:t>El nombre del equipo está en la diapositiva</a:t>
-            </a:r>
-          </a:p>
-          <a:p>
-            <a:pPr>
-              <a:spcAft>
-                <a:spcPts val="800"/>
-              </a:spcAft>
-            </a:pPr>
-            <a:r>
-              <a:rPr sz="2000" b="0" i="0">
-                <a:solidFill>
-                  <a:srgbClr val="333333"/>
-                </a:solidFill>
-                <a:latin typeface="Calibri"/>
-              </a:rPr>
-              <a:t>–   Se arranca con el problema y su número. </a:t>
-            </a:r>
-            <a:r>
-              <a:rPr sz="2000" b="1" i="0">
-                <a:solidFill>
-                  <a:srgbClr val="333333"/>
-                </a:solidFill>
-                <a:latin typeface="Calibri"/>
-              </a:rPr>
-              <a:t>Tramo 2 · a quién le pasa y qué decidimos, 2 minutos.</a:t>
-            </a:r>
-            <a:r>
-              <a:rPr sz="2000" b="0" i="0">
-                <a:solidFill>
-                  <a:srgbClr val="333333"/>
-                </a:solidFill>
-                <a:latin typeface="Calibri"/>
-              </a:rPr>
-              <a:t> Aquí entra un afectado que no es usuario —trabajo de la Clase 13— y, sobre todo, </a:t>
-            </a:r>
-            <a:r>
-              <a:rPr sz="2000" b="1" i="0">
-                <a:solidFill>
-                  <a:srgbClr val="333333"/>
-                </a:solidFill>
-                <a:latin typeface="Calibri"/>
-              </a:rPr>
-              <a:t>la decisión de la matriz de la sesión 8 con lo que se sacrificó</a:t>
-            </a:r>
-            <a:r>
-              <a:rPr sz="2000" b="0" i="0">
-                <a:solidFill>
-                  <a:srgbClr val="333333"/>
-                </a:solidFill>
-                <a:latin typeface="Calibri"/>
-              </a:rPr>
-              <a:t>.</a:t>
-            </a:r>
-          </a:p>
-          <a:p>
-            <a:pPr>
-              <a:spcAft>
-                <a:spcPts val="800"/>
-              </a:spcAft>
-            </a:pPr>
-            <a:r>
-              <a:rPr sz="2000" b="0" i="0">
-                <a:solidFill>
-                  <a:srgbClr val="333333"/>
-                </a:solidFill>
-                <a:latin typeface="Calibri"/>
-              </a:rPr>
               <a:t>–   Decir «elegimos la lista publicada y sacrificamos tener la información al minuto» en diez segundos comunica más madurez que cinco minutos de descripción. **Tramo 3 · la solución y el prototipo en vivo</a:t>
             </a:r>
           </a:p>
@@ -4793,22 +4668,6 @@
               <a:t> —de nuevo la Clase 13— y qué haría quien continúe el proyecto.</a:t>
             </a:r>
           </a:p>
-          <a:p>
-            <a:pPr>
-              <a:spcAft>
-                <a:spcPts val="800"/>
-              </a:spcAft>
-            </a:pPr>
-            <a:r>
-              <a:rPr sz="2000" b="0" i="0">
-                <a:solidFill>
-                  <a:srgbClr val="333333"/>
-                </a:solidFill>
-                <a:latin typeface="Calibri"/>
-              </a:rPr>
-              <a:t>–   Cerrar con el siguiente paso deja la sensación de trabajo vivo y no de tarea entregada.</a:t>
-            </a:r>
-          </a:p>
         </p:txBody>
       </p:sp>
       <p:sp>
@@ -4987,7 +4846,7 @@
                 </a:solidFill>
                 <a:latin typeface="Calibri"/>
               </a:rPr>
-              <a:t>Diapositivas que se miran, y el reparto que reparte de verdad (1/2)</a:t>
+              <a:t>Diapositivas que se miran, y el reparto que reparte de verdad (1/3)</a:t>
             </a:r>
           </a:p>
         </p:txBody>
@@ -5020,7 +4879,7 @@
               </a:spcAft>
             </a:pPr>
             <a:r>
-              <a:rPr sz="1900" b="0" i="0">
+              <a:rPr sz="2000" b="0" i="0">
                 <a:solidFill>
                   <a:srgbClr val="333333"/>
                 </a:solidFill>
@@ -5029,7 +4888,7 @@
               <a:t>–   El argumento central sobre diapositivas es de atención, no de estética, y hay que darlo así porque es el que convence: </a:t>
             </a:r>
             <a:r>
-              <a:rPr sz="1900" b="1" i="0">
+              <a:rPr sz="2000" b="1" i="0">
                 <a:solidFill>
                   <a:srgbClr val="333333"/>
                 </a:solidFill>
@@ -5038,7 +4897,7 @@
               <a:t>el público no puede leer y escuchar a la vez.</a:t>
             </a:r>
             <a:r>
-              <a:rPr sz="1900" b="0" i="0">
+              <a:rPr sz="2000" b="0" i="0">
                 <a:solidFill>
                   <a:srgbClr val="333333"/>
                 </a:solidFill>
@@ -5054,7 +4913,7 @@
               </a:spcAft>
             </a:pPr>
             <a:r>
-              <a:rPr sz="1900" b="0" i="0">
+              <a:rPr sz="2000" b="0" i="0">
                 <a:solidFill>
                   <a:srgbClr val="333333"/>
                 </a:solidFill>
@@ -5070,7 +4929,7 @@
               </a:spcAft>
             </a:pPr>
             <a:r>
-              <a:rPr sz="1900" b="0" i="0">
+              <a:rPr sz="2000" b="0" i="0">
                 <a:solidFill>
                   <a:srgbClr val="333333"/>
                 </a:solidFill>
@@ -5079,7 +4938,7 @@
               <a:t>–   La conclusión es incómoda y hay que decirla: </a:t>
             </a:r>
             <a:r>
-              <a:rPr sz="1900" b="1" i="0">
+              <a:rPr sz="2000" b="1" i="0">
                 <a:solidFill>
                   <a:srgbClr val="333333"/>
                 </a:solidFill>
@@ -5088,7 +4947,7 @@
               <a:t>si la diapositiva lo dice todo, usted está de sobra.</a:t>
             </a:r>
             <a:r>
-              <a:rPr sz="1900" b="0" i="0">
+              <a:rPr sz="2000" b="0" i="0">
                 <a:solidFill>
                   <a:srgbClr val="333333"/>
                 </a:solidFill>
@@ -5097,7 +4956,7 @@
               <a:t> De las cuatro reglas, la que más cuesta es </a:t>
             </a:r>
             <a:r>
-              <a:rPr sz="1900" b="1" i="0">
+              <a:rPr sz="2000" b="1" i="0">
                 <a:solidFill>
                   <a:srgbClr val="333333"/>
                 </a:solidFill>
@@ -5106,7 +4965,7 @@
               <a:t>una idea por diapositiva</a:t>
             </a:r>
             <a:r>
-              <a:rPr sz="1900" b="0" i="0">
+              <a:rPr sz="2000" b="0" i="0">
                 <a:solidFill>
                   <a:srgbClr val="333333"/>
                 </a:solidFill>
@@ -5122,77 +4981,13 @@
               </a:spcAft>
             </a:pPr>
             <a:r>
-              <a:rPr sz="1900" b="0" i="0">
+              <a:rPr sz="2000" b="0" i="0">
                 <a:solidFill>
                   <a:srgbClr val="333333"/>
                 </a:solidFill>
                 <a:latin typeface="Calibri"/>
               </a:rPr>
               <a:t>–   Con ocho diapositivas para nueve minutos hay poco más de un minuto por diapositiva; si una tiene tres ideas, en realidad son tres diapositivas apuradas.</a:t>
-            </a:r>
-          </a:p>
-          <a:p>
-            <a:pPr>
-              <a:spcAft>
-                <a:spcPts val="800"/>
-              </a:spcAft>
-            </a:pPr>
-            <a:r>
-              <a:rPr sz="1900" b="0" i="0">
-                <a:solidFill>
-                  <a:srgbClr val="333333"/>
-                </a:solidFill>
-                <a:latin typeface="Calibri"/>
-              </a:rPr>
-              <a:t>–   Y la regla del tamaño de letra tiene una consecuencia práctica que conviene enunciar como ley: **si no cabe, hay que quitar contenido</a:t>
-            </a:r>
-          </a:p>
-          <a:p>
-            <a:pPr>
-              <a:spcAft>
-                <a:spcPts val="800"/>
-              </a:spcAft>
-            </a:pPr>
-            <a:r>
-              <a:rPr sz="1900" b="0" i="0">
-                <a:solidFill>
-                  <a:srgbClr val="333333"/>
-                </a:solidFill>
-                <a:latin typeface="Calibri"/>
-              </a:rPr>
-              <a:t>–   No reducir la letra.** En una pantalla compartida por video todo se ve más pequeño y más borroso de lo que se ve en el computador de quien la hizo.</a:t>
-            </a:r>
-          </a:p>
-          <a:p>
-            <a:pPr>
-              <a:spcAft>
-                <a:spcPts val="800"/>
-              </a:spcAft>
-            </a:pPr>
-            <a:r>
-              <a:rPr sz="1900" b="0" i="0">
-                <a:solidFill>
-                  <a:srgbClr val="333333"/>
-                </a:solidFill>
-                <a:latin typeface="Calibri"/>
-              </a:rPr>
-              <a:t>–   La diapositiva de antes y después es el ejercicio más eficaz de la sesión.</a:t>
-            </a:r>
-          </a:p>
-          <a:p>
-            <a:pPr>
-              <a:spcAft>
-                <a:spcPts val="800"/>
-              </a:spcAft>
-            </a:pPr>
-            <a:r>
-              <a:rPr sz="1900" b="0" i="0">
-                <a:solidFill>
-                  <a:srgbClr val="333333"/>
-                </a:solidFill>
-                <a:latin typeface="Calibri"/>
-              </a:rPr>
-              <a:t>–   La columna izquierda es literalmente lo que van a entregar si no se les enseña otra cosa; la derecha muestra el mismo contenido convertido en rótulo.</a:t>
             </a:r>
           </a:p>
         </p:txBody>
@@ -5373,7 +5168,7 @@
                 </a:solidFill>
                 <a:latin typeface="Calibri"/>
               </a:rPr>
-              <a:t>Diapositivas que se miran, y el reparto que reparte de verdad (2/2)</a:t>
+              <a:t>Diapositivas que se miran, y el reparto que reparte de verdad (2/3)</a:t>
             </a:r>
           </a:p>
         </p:txBody>
@@ -5412,25 +5207,7 @@
                 </a:solidFill>
                 <a:latin typeface="Calibri"/>
               </a:rPr>
-              <a:t>–   Deténgase en la cuarta fila: </a:t>
-            </a:r>
-            <a:r>
-              <a:rPr sz="2000" b="1" i="0">
-                <a:solidFill>
-                  <a:srgbClr val="333333"/>
-                </a:solidFill>
-                <a:latin typeface="Calibri"/>
-              </a:rPr>
-              <a:t>la matriz de decisión completa no va en la presentación</a:t>
-            </a:r>
-            <a:r>
-              <a:rPr sz="2000" b="0" i="0">
-                <a:solidFill>
-                  <a:srgbClr val="333333"/>
-                </a:solidFill>
-                <a:latin typeface="Calibri"/>
-              </a:rPr>
-              <a:t> —van las dos alternativas y el ganador—, porque la matriz es material de informe.</a:t>
+              <a:t>–   Y la regla del tamaño de letra tiene una consecuencia práctica que conviene enunciar como ley: **si no cabe, hay que quitar contenido</a:t>
             </a:r>
           </a:p>
           <a:p>
@@ -5446,7 +5223,7 @@
                 </a:solidFill>
                 <a:latin typeface="Calibri"/>
               </a:rPr>
-              <a:t>–   Distinguir qué va en el informe y qué va en la presentación es una habilidad profesional y es lo que más les va a servir la próxima vez.</a:t>
+              <a:t>–   No reducir la letra.** En una pantalla compartida por video todo se ve más pequeño y más borroso de lo que se ve en el computador de quien la hizo.</a:t>
             </a:r>
           </a:p>
           <a:p>
@@ -5462,7 +5239,7 @@
                 </a:solidFill>
                 <a:latin typeface="Calibri"/>
               </a:rPr>
-              <a:t>–   Sobre el reparto, hay dos exigencias que evitan los dos fracasos típicos.</a:t>
+              <a:t>–   La diapositiva de antes y después es el ejercicio más eficaz de la sesión.</a:t>
             </a:r>
           </a:p>
           <a:p>
@@ -5478,25 +5255,7 @@
                 </a:solidFill>
                 <a:latin typeface="Calibri"/>
               </a:rPr>
-              <a:t>–   La primera: </a:t>
-            </a:r>
-            <a:r>
-              <a:rPr sz="2000" b="1" i="0">
-                <a:solidFill>
-                  <a:srgbClr val="333333"/>
-                </a:solidFill>
-                <a:latin typeface="Calibri"/>
-              </a:rPr>
-              <a:t>todos los integrantes hablan, y nadie habla menos de un minuto ni más de tres.</a:t>
-            </a:r>
-            <a:r>
-              <a:rPr sz="2000" b="0" i="0">
-                <a:solidFill>
-                  <a:srgbClr val="333333"/>
-                </a:solidFill>
-                <a:latin typeface="Calibri"/>
-              </a:rPr>
-              <a:t> Un equipo donde solo uno presenta pierde puntos y, peor, arriesga la nota entera a que esa persona tenga buena conexión ese día.</a:t>
+              <a:t>–   La columna izquierda es literalmente lo que van a entregar si no se les enseña otra cosa; la derecha muestra el mismo contenido convertido en rótulo.</a:t>
             </a:r>
           </a:p>
           <a:p>
@@ -5512,7 +5271,7 @@
                 </a:solidFill>
                 <a:latin typeface="Calibri"/>
               </a:rPr>
-              <a:t>–   La segunda: </a:t>
+              <a:t>–   Deténgase en la cuarta fila: </a:t>
             </a:r>
             <a:r>
               <a:rPr sz="2000" b="1" i="0">
@@ -5521,7 +5280,7 @@
                 </a:solidFill>
                 <a:latin typeface="Calibri"/>
               </a:rPr>
-              <a:t>quien no habla también tiene tarea</a:t>
+              <a:t>la matriz de decisión completa no va en la presentación</a:t>
             </a:r>
             <a:r>
               <a:rPr sz="2000" b="0" i="0">
@@ -5530,57 +5289,7 @@
                 </a:solidFill>
                 <a:latin typeface="Calibri"/>
               </a:rPr>
-              <a:t> —cronómetro, capturas del plan B, la diapositiva siguiente lista—.</a:t>
-            </a:r>
-          </a:p>
-          <a:p>
-            <a:pPr>
-              <a:spcAft>
-                <a:spcPts val="800"/>
-              </a:spcAft>
-            </a:pPr>
-            <a:r>
-              <a:rPr sz="2000" b="0" i="0">
-                <a:solidFill>
-                  <a:srgbClr val="333333"/>
-                </a:solidFill>
-                <a:latin typeface="Calibri"/>
-              </a:rPr>
-              <a:t>–   En la demostración del tramo 3, </a:t>
-            </a:r>
-            <a:r>
-              <a:rPr sz="2000" b="1" i="0">
-                <a:solidFill>
-                  <a:srgbClr val="333333"/>
-                </a:solidFill>
-                <a:latin typeface="Calibri"/>
-              </a:rPr>
-              <a:t>narrar y manejar la pantalla no las hace la misma persona</a:t>
-            </a:r>
-            <a:r>
-              <a:rPr sz="2000" b="0" i="0">
-                <a:solidFill>
-                  <a:srgbClr val="333333"/>
-                </a:solidFill>
-                <a:latin typeface="Calibri"/>
-              </a:rPr>
-              <a:t>: intentar las dos cosas a la vez es la causa más común de que una demostración se caiga.</a:t>
-            </a:r>
-          </a:p>
-          <a:p>
-            <a:pPr>
-              <a:spcAft>
-                <a:spcPts val="800"/>
-              </a:spcAft>
-            </a:pPr>
-            <a:r>
-              <a:rPr sz="2000" b="0" i="0">
-                <a:solidFill>
-                  <a:srgbClr val="333333"/>
-                </a:solidFill>
-                <a:latin typeface="Calibri"/>
-              </a:rPr>
-              <a:t>–   Y para las preguntas, cada integrante responde de su tramo, lo cual además obliga a que todos entiendan el proyecto completo.</a:t>
+              <a:t> —van las dos alternativas y el ganador—, porque la matriz es material de informe.</a:t>
             </a:r>
           </a:p>
         </p:txBody>
@@ -5761,7 +5470,7 @@
                 </a:solidFill>
                 <a:latin typeface="Calibri"/>
               </a:rPr>
-              <a:t>El plan B, el ensayo, y por qué se ensaya solo el arranque (1/2)</a:t>
+              <a:t>Diapositivas que se miran, y el reparto que reparte de verdad (3/3)</a:t>
             </a:r>
           </a:p>
         </p:txBody>
@@ -5800,61 +5509,7 @@
                 </a:solidFill>
                 <a:latin typeface="Calibri"/>
               </a:rPr>
-              <a:t>–   </a:t>
-            </a:r>
-            <a:r>
-              <a:rPr sz="2000" b="1" i="0">
-                <a:solidFill>
-                  <a:srgbClr val="333333"/>
-                </a:solidFill>
-                <a:latin typeface="Calibri"/>
-              </a:rPr>
-              <a:t>El plan B es parte de la nota y hay que ser explícito.</a:t>
-            </a:r>
-            <a:r>
-              <a:rPr sz="2000" b="0" i="0">
-                <a:solidFill>
-                  <a:srgbClr val="333333"/>
-                </a:solidFill>
-                <a:latin typeface="Calibri"/>
-              </a:rPr>
-              <a:t> Antes de salir hoy, en la carpeta del equipo tienen que quedar tres cosas: la presentación </a:t>
-            </a:r>
-            <a:r>
-              <a:rPr sz="2000" b="1" i="0">
-                <a:solidFill>
-                  <a:srgbClr val="333333"/>
-                </a:solidFill>
-                <a:latin typeface="Calibri"/>
-              </a:rPr>
-              <a:t>descargada en PDF</a:t>
-            </a:r>
-            <a:r>
-              <a:rPr sz="2000" b="0" i="0">
-                <a:solidFill>
-                  <a:srgbClr val="333333"/>
-                </a:solidFill>
-                <a:latin typeface="Calibri"/>
-              </a:rPr>
-              <a:t>, </a:t>
-            </a:r>
-            <a:r>
-              <a:rPr sz="2000" b="1" i="0">
-                <a:solidFill>
-                  <a:srgbClr val="333333"/>
-                </a:solidFill>
-                <a:latin typeface="Calibri"/>
-              </a:rPr>
-              <a:t>capturas de cada paso</a:t>
-            </a:r>
-            <a:r>
-              <a:rPr sz="2000" b="0" i="0">
-                <a:solidFill>
-                  <a:srgbClr val="333333"/>
-                </a:solidFill>
-                <a:latin typeface="Calibri"/>
-              </a:rPr>
-              <a:t> de la demostración del prototipo</a:t>
+              <a:t>–   Distinguir qué va en el informe y qué va en la presentación es una habilidad profesional y es lo que más les va a servir la próxima vez.</a:t>
             </a:r>
           </a:p>
           <a:p>
@@ -5870,7 +5525,7 @@
                 </a:solidFill>
                 <a:latin typeface="Calibri"/>
               </a:rPr>
-              <a:t>–   Y un acuerdo de </a:t>
+              <a:t>–   La primera: </a:t>
             </a:r>
             <a:r>
               <a:rPr sz="2000" b="1" i="0">
@@ -5879,7 +5534,7 @@
                 </a:solidFill>
                 <a:latin typeface="Calibri"/>
               </a:rPr>
-              <a:t>quién comparte pantalla si al primero se le cae la conexión</a:t>
+              <a:t>todos los integrantes hablan, y nadie habla menos de un minuto ni más de tres.</a:t>
             </a:r>
             <a:r>
               <a:rPr sz="2000" b="0" i="0">
@@ -5888,7 +5543,7 @@
                 </a:solidFill>
                 <a:latin typeface="Calibri"/>
               </a:rPr>
-              <a:t>.</a:t>
+              <a:t> Un equipo donde solo uno presenta pierde puntos y, peor, arriesga la nota entera a que esa persona tenga buena conexión ese día.</a:t>
             </a:r>
           </a:p>
           <a:p>
@@ -5904,7 +5559,25 @@
                 </a:solidFill>
                 <a:latin typeface="Calibri"/>
               </a:rPr>
-              <a:t>–   El argumento no es burocrático sino aritmético: la demostración es el tramo de 3 minutos, un tercio de la presentación; un equipo que no puede mostrar su prototipo porque «no cargó» perdió un tercio de su nota por algo que se prevenía en cinco minutos.</a:t>
+              <a:t>–   La segunda: </a:t>
+            </a:r>
+            <a:r>
+              <a:rPr sz="2000" b="1" i="0">
+                <a:solidFill>
+                  <a:srgbClr val="333333"/>
+                </a:solidFill>
+                <a:latin typeface="Calibri"/>
+              </a:rPr>
+              <a:t>quien no habla también tiene tarea</a:t>
+            </a:r>
+            <a:r>
+              <a:rPr sz="2000" b="0" i="0">
+                <a:solidFill>
+                  <a:srgbClr val="333333"/>
+                </a:solidFill>
+                <a:latin typeface="Calibri"/>
+              </a:rPr>
+              <a:t> —cronómetro, capturas del plan B, la diapositiva siguiente lista—.</a:t>
             </a:r>
           </a:p>
           <a:p>
@@ -5920,7 +5593,7 @@
                 </a:solidFill>
                 <a:latin typeface="Calibri"/>
               </a:rPr>
-              <a:t>–   Y en clase virtual esto no es hipotético: pasa cada semestre. </a:t>
+              <a:t>–   En la demostración del tramo 3, </a:t>
             </a:r>
             <a:r>
               <a:rPr sz="2000" b="1" i="0">
@@ -5929,7 +5602,7 @@
                 </a:solidFill>
                 <a:latin typeface="Calibri"/>
               </a:rPr>
-              <a:t>Sobre el ensayo, la trampa principal es ensayar «mentalmente».</a:t>
+              <a:t>narrar y manejar la pantalla no las hace la misma persona</a:t>
             </a:r>
             <a:r>
               <a:rPr sz="2000" b="0" i="0">
@@ -5938,23 +5611,7 @@
                 </a:solidFill>
                 <a:latin typeface="Calibri"/>
               </a:rPr>
-              <a:t> Leer el guion en silencio dura aproximadamente la mitad que decirlo en voz alta</a:t>
-            </a:r>
-          </a:p>
-          <a:p>
-            <a:pPr>
-              <a:spcAft>
-                <a:spcPts val="800"/>
-              </a:spcAft>
-            </a:pPr>
-            <a:r>
-              <a:rPr sz="2000" b="0" i="0">
-                <a:solidFill>
-                  <a:srgbClr val="333333"/>
-                </a:solidFill>
-                <a:latin typeface="Calibri"/>
-              </a:rPr>
-              <a:t>–   Y por eso todos los equipos que no ensayan se pasan de tiempo — creen que su presentación dura seis minutos y dura trece.</a:t>
+              <a:t>: intentar las dos cosas a la vez es la causa más común de que una demostración se caiga.</a:t>
             </a:r>
           </a:p>
         </p:txBody>
@@ -6135,7 +5792,7 @@
                 </a:solidFill>
                 <a:latin typeface="Calibri"/>
               </a:rPr>
-              <a:t>El plan B, el ensayo, y por qué se ensaya solo el arranque (2/2)</a:t>
+              <a:t>El plan B, el ensayo, y por qué se ensaya solo el arranque (1/3)</a:t>
             </a:r>
           </a:p>
         </p:txBody>
@@ -6174,7 +5831,61 @@
                 </a:solidFill>
                 <a:latin typeface="Calibri"/>
               </a:rPr>
-              <a:t>–   Las dos primeras frases se aprenden de memoria: son las que más nervios dan y las que fijan el tono de los nueve minutos.</a:t>
+              <a:t>–   </a:t>
+            </a:r>
+            <a:r>
+              <a:rPr sz="2000" b="1" i="0">
+                <a:solidFill>
+                  <a:srgbClr val="333333"/>
+                </a:solidFill>
+                <a:latin typeface="Calibri"/>
+              </a:rPr>
+              <a:t>El plan B es parte de la nota y hay que ser explícito.</a:t>
+            </a:r>
+            <a:r>
+              <a:rPr sz="2000" b="0" i="0">
+                <a:solidFill>
+                  <a:srgbClr val="333333"/>
+                </a:solidFill>
+                <a:latin typeface="Calibri"/>
+              </a:rPr>
+              <a:t> Antes de salir hoy, en la carpeta del equipo tienen que quedar tres cosas: la presentación </a:t>
+            </a:r>
+            <a:r>
+              <a:rPr sz="2000" b="1" i="0">
+                <a:solidFill>
+                  <a:srgbClr val="333333"/>
+                </a:solidFill>
+                <a:latin typeface="Calibri"/>
+              </a:rPr>
+              <a:t>descargada en PDF</a:t>
+            </a:r>
+            <a:r>
+              <a:rPr sz="2000" b="0" i="0">
+                <a:solidFill>
+                  <a:srgbClr val="333333"/>
+                </a:solidFill>
+                <a:latin typeface="Calibri"/>
+              </a:rPr>
+              <a:t>, </a:t>
+            </a:r>
+            <a:r>
+              <a:rPr sz="2000" b="1" i="0">
+                <a:solidFill>
+                  <a:srgbClr val="333333"/>
+                </a:solidFill>
+                <a:latin typeface="Calibri"/>
+              </a:rPr>
+              <a:t>capturas de cada paso</a:t>
+            </a:r>
+            <a:r>
+              <a:rPr sz="2000" b="0" i="0">
+                <a:solidFill>
+                  <a:srgbClr val="333333"/>
+                </a:solidFill>
+                <a:latin typeface="Calibri"/>
+              </a:rPr>
+              <a:t> de la demostración del prototipo</a:t>
             </a:r>
           </a:p>
           <a:p>
@@ -6190,7 +5901,7 @@
                 </a:solidFill>
                 <a:latin typeface="Calibri"/>
               </a:rPr>
-              <a:t>–   Es un consejo pequeño y funciona. </a:t>
+              <a:t>–   Y un acuerdo de </a:t>
             </a:r>
             <a:r>
               <a:rPr sz="2000" b="1" i="0">
@@ -6199,7 +5910,7 @@
                 </a:solidFill>
                 <a:latin typeface="Calibri"/>
               </a:rPr>
-              <a:t>Por qué hoy se ensayan solo los primeros 4 minutos</a:t>
+              <a:t>quién comparte pantalla si al primero se le cae la conexión</a:t>
             </a:r>
             <a:r>
               <a:rPr sz="2000" b="0" i="0">
@@ -6208,7 +5919,7 @@
                 </a:solidFill>
                 <a:latin typeface="Calibri"/>
               </a:rPr>
-              <a:t>, y conviene explicarlo para que no parezca un recorte: cinco equipos por nueve minutos son 45 minutos y no caben con corrección.</a:t>
+              <a:t>.</a:t>
             </a:r>
           </a:p>
           <a:p>
@@ -6224,25 +5935,7 @@
                 </a:solidFill>
                 <a:latin typeface="Calibri"/>
               </a:rPr>
-              <a:t>–   Pero además </a:t>
-            </a:r>
-            <a:r>
-              <a:rPr sz="2000" b="1" i="0">
-                <a:solidFill>
-                  <a:srgbClr val="333333"/>
-                </a:solidFill>
-                <a:latin typeface="Calibri"/>
-              </a:rPr>
-              <a:t>el arranque es donde se pierde el tiempo</a:t>
-            </a:r>
-            <a:r>
-              <a:rPr sz="2000" b="0" i="0">
-                <a:solidFill>
-                  <a:srgbClr val="333333"/>
-                </a:solidFill>
-                <a:latin typeface="Calibri"/>
-              </a:rPr>
-              <a:t>: el equipo que controla los tramos 1 y 2 casi siempre llega bien al final, y el que se pasa en el tramo 2 ya no tiene manera de recuperarse.</a:t>
+              <a:t>–   El argumento no es burocrático sino aritmético: la demostración es el tramo de 3 minutos, un tercio de la presentación; un equipo que no puede mostrar su prototipo porque «no cargó» perdió un tercio de su nota por algo que se prevenía en cinco minutos.</a:t>
             </a:r>
           </a:p>
           <a:p>
@@ -6258,15 +5951,17 @@
                 </a:solidFill>
                 <a:latin typeface="Calibri"/>
               </a:rPr>
-              <a:t>–   Ensayar el arranque con cronómetro es la intervención con mejor rendimiento por minuto invertido.</a:t>
-            </a:r>
-          </a:p>
-          <a:p>
-            <a:pPr>
-              <a:spcAft>
-                <a:spcPts val="800"/>
-              </a:spcAft>
-            </a:pPr>
+              <a:t>–   Y en clase virtual esto no es hipotético: pasa cada semestre. </a:t>
+            </a:r>
+            <a:r>
+              <a:rPr sz="2000" b="1" i="0">
+                <a:solidFill>
+                  <a:srgbClr val="333333"/>
+                </a:solidFill>
+                <a:latin typeface="Calibri"/>
+              </a:rPr>
+              <a:t>Sobre el ensayo, la trampa principal es ensayar «mentalmente».</a:t>
+            </a:r>
             <a:r>
               <a:rPr sz="2000" b="0" i="0">
                 <a:solidFill>
@@ -6274,16 +5969,7 @@
                 </a:solidFill>
                 <a:latin typeface="Calibri"/>
               </a:rPr>
-              <a:t>–   El resto se ensaya en equipo, fuera de clase, y hay que decirlo con claridad: </a:t>
-            </a:r>
-            <a:r>
-              <a:rPr sz="2000" b="1" i="0">
-                <a:solidFill>
-                  <a:srgbClr val="333333"/>
-                </a:solidFill>
-                <a:latin typeface="Calibri"/>
-              </a:rPr>
-              <a:t>quien no ensaye completo antes de la Clase 15 se va a pasar de tiempo, y a los nueve minutos se corta.</a:t>
+              <a:t> Leer el guion en silencio dura aproximadamente la mitad que decirlo en voz alta</a:t>
             </a:r>
           </a:p>
         </p:txBody>
@@ -6358,7 +6044,7 @@
         <p:spPr>
           <a:xfrm>
             <a:off x="0" y="0"/>
-            <a:ext cx="12191695" cy="1170432"/>
+            <a:ext cx="12191695" cy="960120"/>
           </a:xfrm>
           <a:prstGeom prst="rect">
             <a:avLst/>
@@ -6400,7 +6086,7 @@
         </p:nvSpPr>
         <p:spPr>
           <a:xfrm>
-            <a:off x="0" y="1170432"/>
+            <a:off x="0" y="960120"/>
             <a:ext cx="12191695" cy="41148"/>
           </a:xfrm>
           <a:prstGeom prst="rect">
@@ -6444,7 +6130,7 @@
         <p:spPr>
           <a:xfrm>
             <a:off x="457200" y="164592"/>
-            <a:ext cx="11277295" cy="384048"/>
+            <a:ext cx="11277295" cy="502920"/>
           </a:xfrm>
           <a:prstGeom prst="rect">
             <a:avLst/>
@@ -6464,7 +6150,7 @@
                 </a:solidFill>
                 <a:latin typeface="Calibri"/>
               </a:rPr>
-              <a:t>Taller de hoy: Guion de nueve minutos y plan B</a:t>
+              <a:t>El plan B, el ensayo, y por qué se ensaya solo el arranque (2/3)</a:t>
             </a:r>
           </a:p>
         </p:txBody>
@@ -6477,8 +6163,8 @@
         </p:nvSpPr>
         <p:spPr>
           <a:xfrm>
-            <a:off x="457200" y="566928"/>
-            <a:ext cx="11277295" cy="411480"/>
+            <a:off x="457200" y="1170432"/>
+            <a:ext cx="11277295" cy="5230368"/>
           </a:xfrm>
           <a:prstGeom prst="rect">
             <a:avLst/>
@@ -6491,1053 +6177,110 @@
           </a:bodyPr>
           <a:lstStyle/>
           <a:p>
-            <a:r>
-              <a:rPr sz="1400" b="0" i="0">
-                <a:solidFill>
-                  <a:srgbClr val="B8D8EE"/>
-                </a:solidFill>
-                <a:latin typeface="Calibri"/>
-              </a:rPr>
-              <a:t>27 min en equipos · 27 min: guion, diapositivas, demostración y plan B · guion con tiempos + diapositivas + PDF y capturas del plan B</a:t>
-            </a:r>
-          </a:p>
-        </p:txBody>
-      </p:sp>
-      <p:sp>
-        <p:nvSpPr>
-          <p:cNvPr id="6" name="Rounded Rectangle 5"/>
-          <p:cNvSpPr/>
-          <p:nvPr/>
-        </p:nvSpPr>
-        <p:spPr>
-          <a:xfrm>
-            <a:off x="457200" y="1472184"/>
-            <a:ext cx="11277295" cy="566928"/>
-          </a:xfrm>
-          <a:prstGeom prst="roundRect">
-            <a:avLst>
-              <a:gd name="adj" fmla="val 12000"/>
-            </a:avLst>
-          </a:prstGeom>
-          <a:solidFill>
-            <a:srgbClr val="F2F2F2"/>
-          </a:solidFill>
-          <a:ln>
-            <a:noFill/>
-          </a:ln>
-        </p:spPr>
-        <p:style>
-          <a:lnRef idx="1">
-            <a:schemeClr val="accent1"/>
-          </a:lnRef>
-          <a:fillRef idx="3">
-            <a:schemeClr val="accent1"/>
-          </a:fillRef>
-          <a:effectRef idx="2">
-            <a:schemeClr val="accent1"/>
-          </a:effectRef>
-          <a:fontRef idx="minor">
-            <a:schemeClr val="lt1"/>
-          </a:fontRef>
-        </p:style>
-        <p:txBody>
-          <a:bodyPr rtlCol="0" anchor="ctr"/>
-          <a:lstStyle/>
-          <a:p>
-            <a:pPr algn="ctr"/>
-          </a:p>
-        </p:txBody>
-      </p:sp>
-      <p:sp>
-        <p:nvSpPr>
-          <p:cNvPr id="7" name="Rectangle 6"/>
-          <p:cNvSpPr/>
-          <p:nvPr/>
-        </p:nvSpPr>
-        <p:spPr>
-          <a:xfrm>
-            <a:off x="640080" y="1618487"/>
-            <a:ext cx="274320" cy="274320"/>
-          </a:xfrm>
-          <a:prstGeom prst="rect">
-            <a:avLst/>
-          </a:prstGeom>
-          <a:solidFill>
-            <a:srgbClr val="FFFFFF"/>
-          </a:solidFill>
-          <a:ln>
-            <a:solidFill>
-              <a:srgbClr val="333333"/>
-            </a:solidFill>
-          </a:ln>
-        </p:spPr>
-        <p:style>
-          <a:lnRef idx="1">
-            <a:schemeClr val="accent1"/>
-          </a:lnRef>
-          <a:fillRef idx="3">
-            <a:schemeClr val="accent1"/>
-          </a:fillRef>
-          <a:effectRef idx="2">
-            <a:schemeClr val="accent1"/>
-          </a:effectRef>
-          <a:fontRef idx="minor">
-            <a:schemeClr val="lt1"/>
-          </a:fontRef>
-        </p:style>
-        <p:txBody>
-          <a:bodyPr rtlCol="0" anchor="ctr"/>
-          <a:lstStyle/>
-          <a:p>
-            <a:pPr algn="ctr"/>
-          </a:p>
-        </p:txBody>
-      </p:sp>
-      <p:sp>
-        <p:nvSpPr>
-          <p:cNvPr id="8" name="Rectangle 7"/>
-          <p:cNvSpPr/>
-          <p:nvPr/>
-        </p:nvSpPr>
-        <p:spPr>
-          <a:xfrm>
-            <a:off x="640080" y="1618487"/>
-            <a:ext cx="73152" cy="274320"/>
-          </a:xfrm>
-          <a:prstGeom prst="rect">
-            <a:avLst/>
-          </a:prstGeom>
-          <a:solidFill>
-            <a:srgbClr val="269CCB"/>
-          </a:solidFill>
-          <a:ln>
-            <a:noFill/>
-          </a:ln>
-        </p:spPr>
-        <p:style>
-          <a:lnRef idx="1">
-            <a:schemeClr val="accent1"/>
-          </a:lnRef>
-          <a:fillRef idx="3">
-            <a:schemeClr val="accent1"/>
-          </a:fillRef>
-          <a:effectRef idx="2">
-            <a:schemeClr val="accent1"/>
-          </a:effectRef>
-          <a:fontRef idx="minor">
-            <a:schemeClr val="lt1"/>
-          </a:fontRef>
-        </p:style>
-        <p:txBody>
-          <a:bodyPr rtlCol="0" anchor="ctr"/>
-          <a:lstStyle/>
-          <a:p>
-            <a:pPr algn="ctr"/>
-          </a:p>
-        </p:txBody>
-      </p:sp>
-      <p:sp>
-        <p:nvSpPr>
-          <p:cNvPr id="9" name="TextBox 8"/>
-          <p:cNvSpPr txBox="1"/>
-          <p:nvPr/>
-        </p:nvSpPr>
-        <p:spPr>
-          <a:xfrm>
-            <a:off x="1097280" y="1563624"/>
-            <a:ext cx="10362895" cy="402336"/>
-          </a:xfrm>
-          <a:prstGeom prst="rect">
-            <a:avLst/>
-          </a:prstGeom>
-          <a:noFill/>
-        </p:spPr>
-        <p:txBody>
-          <a:bodyPr wrap="square" anchor="ctr"/>
-          <a:lstStyle/>
-          <a:p>
-            <a:r>
-              <a:rPr sz="1500" b="1" i="0">
-                <a:solidFill>
-                  <a:srgbClr val="333333"/>
-                </a:solidFill>
-                <a:latin typeface="Calibri"/>
-              </a:rPr>
-              <a:t>EL GUION DE LOS CINCO TRAMOS</a:t>
-            </a:r>
-            <a:r>
-              <a:rPr sz="1500" b="0" i="0">
-                <a:solidFill>
-                  <a:srgbClr val="333333"/>
-                </a:solidFill>
-                <a:latin typeface="Calibri"/>
-              </a:rPr>
-              <a:t> — Los cinco tramos con </a:t>
-            </a:r>
-            <a:r>
-              <a:rPr sz="1500" b="1" i="0">
-                <a:solidFill>
-                  <a:srgbClr val="333333"/>
-                </a:solidFill>
-                <a:latin typeface="Calibri"/>
-              </a:rPr>
-              <a:t>el tiempo asignado a cada uno</a:t>
-            </a:r>
-            <a:r>
-              <a:rPr sz="1500" b="0" i="0">
-                <a:solidFill>
-                  <a:srgbClr val="333333"/>
-                </a:solidFill>
-                <a:latin typeface="Calibri"/>
-              </a:rPr>
-              <a:t> —que sume nueve minutos— y </a:t>
-            </a:r>
-            <a:r>
-              <a:rPr sz="1500" b="1" i="0">
-                <a:solidFill>
-                  <a:srgbClr val="333333"/>
-                </a:solidFill>
-                <a:latin typeface="Calibri"/>
-              </a:rPr>
-              <a:t>quién habla</a:t>
-            </a:r>
-            <a:r>
-              <a:rPr sz="1500" b="0" i="0">
-                <a:solidFill>
-                  <a:srgbClr val="333333"/>
-                </a:solidFill>
-                <a:latin typeface="Calibri"/>
-              </a:rPr>
-              <a:t> en cada uno.</a:t>
-            </a:r>
-          </a:p>
-        </p:txBody>
-      </p:sp>
-      <p:sp>
-        <p:nvSpPr>
-          <p:cNvPr id="10" name="Rounded Rectangle 9"/>
-          <p:cNvSpPr/>
-          <p:nvPr/>
-        </p:nvSpPr>
-        <p:spPr>
-          <a:xfrm>
-            <a:off x="457200" y="2148839"/>
-            <a:ext cx="11277295" cy="566928"/>
-          </a:xfrm>
-          <a:prstGeom prst="roundRect">
-            <a:avLst>
-              <a:gd name="adj" fmla="val 12000"/>
-            </a:avLst>
-          </a:prstGeom>
-          <a:solidFill>
-            <a:srgbClr val="F2F2F2"/>
-          </a:solidFill>
-          <a:ln>
-            <a:noFill/>
-          </a:ln>
-        </p:spPr>
-        <p:style>
-          <a:lnRef idx="1">
-            <a:schemeClr val="accent1"/>
-          </a:lnRef>
-          <a:fillRef idx="3">
-            <a:schemeClr val="accent1"/>
-          </a:fillRef>
-          <a:effectRef idx="2">
-            <a:schemeClr val="accent1"/>
-          </a:effectRef>
-          <a:fontRef idx="minor">
-            <a:schemeClr val="lt1"/>
-          </a:fontRef>
-        </p:style>
-        <p:txBody>
-          <a:bodyPr rtlCol="0" anchor="ctr"/>
-          <a:lstStyle/>
-          <a:p>
-            <a:pPr algn="ctr"/>
-          </a:p>
-        </p:txBody>
-      </p:sp>
-      <p:sp>
-        <p:nvSpPr>
-          <p:cNvPr id="11" name="Rectangle 10"/>
-          <p:cNvSpPr/>
-          <p:nvPr/>
-        </p:nvSpPr>
-        <p:spPr>
-          <a:xfrm>
-            <a:off x="640080" y="2295144"/>
-            <a:ext cx="274320" cy="274320"/>
-          </a:xfrm>
-          <a:prstGeom prst="rect">
-            <a:avLst/>
-          </a:prstGeom>
-          <a:solidFill>
-            <a:srgbClr val="FFFFFF"/>
-          </a:solidFill>
-          <a:ln>
-            <a:solidFill>
-              <a:srgbClr val="333333"/>
-            </a:solidFill>
-          </a:ln>
-        </p:spPr>
-        <p:style>
-          <a:lnRef idx="1">
-            <a:schemeClr val="accent1"/>
-          </a:lnRef>
-          <a:fillRef idx="3">
-            <a:schemeClr val="accent1"/>
-          </a:fillRef>
-          <a:effectRef idx="2">
-            <a:schemeClr val="accent1"/>
-          </a:effectRef>
-          <a:fontRef idx="minor">
-            <a:schemeClr val="lt1"/>
-          </a:fontRef>
-        </p:style>
-        <p:txBody>
-          <a:bodyPr rtlCol="0" anchor="ctr"/>
-          <a:lstStyle/>
-          <a:p>
-            <a:pPr algn="ctr"/>
-          </a:p>
-        </p:txBody>
-      </p:sp>
-      <p:sp>
-        <p:nvSpPr>
-          <p:cNvPr id="12" name="Rectangle 11"/>
-          <p:cNvSpPr/>
-          <p:nvPr/>
-        </p:nvSpPr>
-        <p:spPr>
-          <a:xfrm>
-            <a:off x="640080" y="2295144"/>
-            <a:ext cx="73152" cy="274320"/>
-          </a:xfrm>
-          <a:prstGeom prst="rect">
-            <a:avLst/>
-          </a:prstGeom>
-          <a:solidFill>
-            <a:srgbClr val="269CCB"/>
-          </a:solidFill>
-          <a:ln>
-            <a:noFill/>
-          </a:ln>
-        </p:spPr>
-        <p:style>
-          <a:lnRef idx="1">
-            <a:schemeClr val="accent1"/>
-          </a:lnRef>
-          <a:fillRef idx="3">
-            <a:schemeClr val="accent1"/>
-          </a:fillRef>
-          <a:effectRef idx="2">
-            <a:schemeClr val="accent1"/>
-          </a:effectRef>
-          <a:fontRef idx="minor">
-            <a:schemeClr val="lt1"/>
-          </a:fontRef>
-        </p:style>
-        <p:txBody>
-          <a:bodyPr rtlCol="0" anchor="ctr"/>
-          <a:lstStyle/>
-          <a:p>
-            <a:pPr algn="ctr"/>
-          </a:p>
-        </p:txBody>
-      </p:sp>
-      <p:sp>
-        <p:nvSpPr>
-          <p:cNvPr id="13" name="TextBox 12"/>
-          <p:cNvSpPr txBox="1"/>
-          <p:nvPr/>
-        </p:nvSpPr>
-        <p:spPr>
-          <a:xfrm>
-            <a:off x="1097280" y="2240279"/>
-            <a:ext cx="10362895" cy="402336"/>
-          </a:xfrm>
-          <a:prstGeom prst="rect">
-            <a:avLst/>
-          </a:prstGeom>
-          <a:noFill/>
-        </p:spPr>
-        <p:txBody>
-          <a:bodyPr wrap="square" anchor="ctr"/>
-          <a:lstStyle/>
-          <a:p>
-            <a:r>
-              <a:rPr sz="1500" b="1" i="0">
-                <a:solidFill>
-                  <a:srgbClr val="333333"/>
-                </a:solidFill>
-                <a:latin typeface="Calibri"/>
-              </a:rPr>
-              <a:t>LAS OCHO DIAPOSITIVAS</a:t>
-            </a:r>
-            <a:r>
-              <a:rPr sz="1500" b="0" i="0">
-                <a:solidFill>
-                  <a:srgbClr val="333333"/>
-                </a:solidFill>
-                <a:latin typeface="Calibri"/>
-              </a:rPr>
-              <a:t> — Máximo ocho, </a:t>
-            </a:r>
-            <a:r>
-              <a:rPr sz="1500" b="1" i="0">
-                <a:solidFill>
-                  <a:srgbClr val="333333"/>
-                </a:solidFill>
-                <a:latin typeface="Calibri"/>
-              </a:rPr>
-              <a:t>una idea cada una</a:t>
-            </a:r>
-            <a:r>
-              <a:rPr sz="1500" b="0" i="0">
-                <a:solidFill>
-                  <a:srgbClr val="333333"/>
-                </a:solidFill>
-                <a:latin typeface="Calibri"/>
-              </a:rPr>
-              <a:t>, con rótulos y no párrafos. La matriz completa </a:t>
-            </a:r>
-            <a:r>
-              <a:rPr sz="1500" b="1" i="0">
-                <a:solidFill>
-                  <a:srgbClr val="333333"/>
-                </a:solidFill>
-                <a:latin typeface="Calibri"/>
-              </a:rPr>
-              <a:t>no va</a:t>
-            </a:r>
-            <a:r>
-              <a:rPr sz="1500" b="0" i="0">
-                <a:solidFill>
-                  <a:srgbClr val="333333"/>
-                </a:solidFill>
-                <a:latin typeface="Calibri"/>
-              </a:rPr>
-              <a:t>: van las dos alternativas y el ganador.</a:t>
-            </a:r>
-          </a:p>
-        </p:txBody>
-      </p:sp>
-      <p:sp>
-        <p:nvSpPr>
-          <p:cNvPr id="14" name="Rounded Rectangle 13"/>
-          <p:cNvSpPr/>
-          <p:nvPr/>
-        </p:nvSpPr>
-        <p:spPr>
-          <a:xfrm>
-            <a:off x="457200" y="2825496"/>
-            <a:ext cx="11277295" cy="566928"/>
-          </a:xfrm>
-          <a:prstGeom prst="roundRect">
-            <a:avLst>
-              <a:gd name="adj" fmla="val 12000"/>
-            </a:avLst>
-          </a:prstGeom>
-          <a:solidFill>
-            <a:srgbClr val="F2F2F2"/>
-          </a:solidFill>
-          <a:ln>
-            <a:noFill/>
-          </a:ln>
-        </p:spPr>
-        <p:style>
-          <a:lnRef idx="1">
-            <a:schemeClr val="accent1"/>
-          </a:lnRef>
-          <a:fillRef idx="3">
-            <a:schemeClr val="accent1"/>
-          </a:fillRef>
-          <a:effectRef idx="2">
-            <a:schemeClr val="accent1"/>
-          </a:effectRef>
-          <a:fontRef idx="minor">
-            <a:schemeClr val="lt1"/>
-          </a:fontRef>
-        </p:style>
-        <p:txBody>
-          <a:bodyPr rtlCol="0" anchor="ctr"/>
-          <a:lstStyle/>
-          <a:p>
-            <a:pPr algn="ctr"/>
-          </a:p>
-        </p:txBody>
-      </p:sp>
-      <p:sp>
-        <p:nvSpPr>
-          <p:cNvPr id="15" name="Rectangle 14"/>
-          <p:cNvSpPr/>
-          <p:nvPr/>
-        </p:nvSpPr>
-        <p:spPr>
-          <a:xfrm>
-            <a:off x="640080" y="2971800"/>
-            <a:ext cx="274320" cy="274320"/>
-          </a:xfrm>
-          <a:prstGeom prst="rect">
-            <a:avLst/>
-          </a:prstGeom>
-          <a:solidFill>
-            <a:srgbClr val="FFFFFF"/>
-          </a:solidFill>
-          <a:ln>
-            <a:solidFill>
-              <a:srgbClr val="333333"/>
-            </a:solidFill>
-          </a:ln>
-        </p:spPr>
-        <p:style>
-          <a:lnRef idx="1">
-            <a:schemeClr val="accent1"/>
-          </a:lnRef>
-          <a:fillRef idx="3">
-            <a:schemeClr val="accent1"/>
-          </a:fillRef>
-          <a:effectRef idx="2">
-            <a:schemeClr val="accent1"/>
-          </a:effectRef>
-          <a:fontRef idx="minor">
-            <a:schemeClr val="lt1"/>
-          </a:fontRef>
-        </p:style>
-        <p:txBody>
-          <a:bodyPr rtlCol="0" anchor="ctr"/>
-          <a:lstStyle/>
-          <a:p>
-            <a:pPr algn="ctr"/>
-          </a:p>
-        </p:txBody>
-      </p:sp>
-      <p:sp>
-        <p:nvSpPr>
-          <p:cNvPr id="16" name="Rectangle 15"/>
-          <p:cNvSpPr/>
-          <p:nvPr/>
-        </p:nvSpPr>
-        <p:spPr>
-          <a:xfrm>
-            <a:off x="640080" y="2971800"/>
-            <a:ext cx="73152" cy="274320"/>
-          </a:xfrm>
-          <a:prstGeom prst="rect">
-            <a:avLst/>
-          </a:prstGeom>
-          <a:solidFill>
-            <a:srgbClr val="269CCB"/>
-          </a:solidFill>
-          <a:ln>
-            <a:noFill/>
-          </a:ln>
-        </p:spPr>
-        <p:style>
-          <a:lnRef idx="1">
-            <a:schemeClr val="accent1"/>
-          </a:lnRef>
-          <a:fillRef idx="3">
-            <a:schemeClr val="accent1"/>
-          </a:fillRef>
-          <a:effectRef idx="2">
-            <a:schemeClr val="accent1"/>
-          </a:effectRef>
-          <a:fontRef idx="minor">
-            <a:schemeClr val="lt1"/>
-          </a:fontRef>
-        </p:style>
-        <p:txBody>
-          <a:bodyPr rtlCol="0" anchor="ctr"/>
-          <a:lstStyle/>
-          <a:p>
-            <a:pPr algn="ctr"/>
-          </a:p>
-        </p:txBody>
-      </p:sp>
-      <p:sp>
-        <p:nvSpPr>
-          <p:cNvPr id="17" name="TextBox 16"/>
-          <p:cNvSpPr txBox="1"/>
-          <p:nvPr/>
-        </p:nvSpPr>
-        <p:spPr>
-          <a:xfrm>
-            <a:off x="1097280" y="2916936"/>
-            <a:ext cx="10362895" cy="402336"/>
-          </a:xfrm>
-          <a:prstGeom prst="rect">
-            <a:avLst/>
-          </a:prstGeom>
-          <a:noFill/>
-        </p:spPr>
-        <p:txBody>
-          <a:bodyPr wrap="square" anchor="ctr"/>
-          <a:lstStyle/>
-          <a:p>
-            <a:r>
-              <a:rPr sz="1500" b="1" i="0">
-                <a:solidFill>
-                  <a:srgbClr val="333333"/>
-                </a:solidFill>
-                <a:latin typeface="Calibri"/>
-              </a:rPr>
-              <a:t>EL REPARTO ENTRE INTEGRANTES</a:t>
-            </a:r>
-            <a:r>
-              <a:rPr sz="1500" b="0" i="0">
-                <a:solidFill>
-                  <a:srgbClr val="333333"/>
-                </a:solidFill>
-                <a:latin typeface="Calibri"/>
-              </a:rPr>
-              <a:t> — Quién habla en cada tramo, y </a:t>
-            </a:r>
-            <a:r>
-              <a:rPr sz="1500" b="1" i="0">
-                <a:solidFill>
-                  <a:srgbClr val="333333"/>
-                </a:solidFill>
-                <a:latin typeface="Calibri"/>
-              </a:rPr>
-              <a:t>qué hace quien no habla</a:t>
-            </a:r>
-            <a:r>
-              <a:rPr sz="1500" b="0" i="0">
-                <a:solidFill>
-                  <a:srgbClr val="333333"/>
-                </a:solidFill>
-                <a:latin typeface="Calibri"/>
-              </a:rPr>
-              <a:t>: cronómetro, capturas del plan B, la diapositiva siguiente lista.</a:t>
-            </a:r>
-          </a:p>
-        </p:txBody>
-      </p:sp>
-      <p:sp>
-        <p:nvSpPr>
-          <p:cNvPr id="18" name="Rounded Rectangle 17"/>
-          <p:cNvSpPr/>
-          <p:nvPr/>
-        </p:nvSpPr>
-        <p:spPr>
-          <a:xfrm>
-            <a:off x="457200" y="3502152"/>
-            <a:ext cx="11277295" cy="566928"/>
-          </a:xfrm>
-          <a:prstGeom prst="roundRect">
-            <a:avLst>
-              <a:gd name="adj" fmla="val 12000"/>
-            </a:avLst>
-          </a:prstGeom>
-          <a:solidFill>
-            <a:srgbClr val="F2F2F2"/>
-          </a:solidFill>
-          <a:ln>
-            <a:noFill/>
-          </a:ln>
-        </p:spPr>
-        <p:style>
-          <a:lnRef idx="1">
-            <a:schemeClr val="accent1"/>
-          </a:lnRef>
-          <a:fillRef idx="3">
-            <a:schemeClr val="accent1"/>
-          </a:fillRef>
-          <a:effectRef idx="2">
-            <a:schemeClr val="accent1"/>
-          </a:effectRef>
-          <a:fontRef idx="minor">
-            <a:schemeClr val="lt1"/>
-          </a:fontRef>
-        </p:style>
-        <p:txBody>
-          <a:bodyPr rtlCol="0" anchor="ctr"/>
-          <a:lstStyle/>
-          <a:p>
-            <a:pPr algn="ctr"/>
-          </a:p>
-        </p:txBody>
-      </p:sp>
-      <p:sp>
-        <p:nvSpPr>
-          <p:cNvPr id="19" name="Rectangle 18"/>
-          <p:cNvSpPr/>
-          <p:nvPr/>
-        </p:nvSpPr>
-        <p:spPr>
-          <a:xfrm>
-            <a:off x="640080" y="3648456"/>
-            <a:ext cx="274320" cy="274320"/>
-          </a:xfrm>
-          <a:prstGeom prst="rect">
-            <a:avLst/>
-          </a:prstGeom>
-          <a:solidFill>
-            <a:srgbClr val="FFFFFF"/>
-          </a:solidFill>
-          <a:ln>
-            <a:solidFill>
-              <a:srgbClr val="333333"/>
-            </a:solidFill>
-          </a:ln>
-        </p:spPr>
-        <p:style>
-          <a:lnRef idx="1">
-            <a:schemeClr val="accent1"/>
-          </a:lnRef>
-          <a:fillRef idx="3">
-            <a:schemeClr val="accent1"/>
-          </a:fillRef>
-          <a:effectRef idx="2">
-            <a:schemeClr val="accent1"/>
-          </a:effectRef>
-          <a:fontRef idx="minor">
-            <a:schemeClr val="lt1"/>
-          </a:fontRef>
-        </p:style>
-        <p:txBody>
-          <a:bodyPr rtlCol="0" anchor="ctr"/>
-          <a:lstStyle/>
-          <a:p>
-            <a:pPr algn="ctr"/>
-          </a:p>
-        </p:txBody>
-      </p:sp>
-      <p:sp>
-        <p:nvSpPr>
-          <p:cNvPr id="20" name="Rectangle 19"/>
-          <p:cNvSpPr/>
-          <p:nvPr/>
-        </p:nvSpPr>
-        <p:spPr>
-          <a:xfrm>
-            <a:off x="640080" y="3648456"/>
-            <a:ext cx="73152" cy="274320"/>
-          </a:xfrm>
-          <a:prstGeom prst="rect">
-            <a:avLst/>
-          </a:prstGeom>
-          <a:solidFill>
-            <a:srgbClr val="269CCB"/>
-          </a:solidFill>
-          <a:ln>
-            <a:noFill/>
-          </a:ln>
-        </p:spPr>
-        <p:style>
-          <a:lnRef idx="1">
-            <a:schemeClr val="accent1"/>
-          </a:lnRef>
-          <a:fillRef idx="3">
-            <a:schemeClr val="accent1"/>
-          </a:fillRef>
-          <a:effectRef idx="2">
-            <a:schemeClr val="accent1"/>
-          </a:effectRef>
-          <a:fontRef idx="minor">
-            <a:schemeClr val="lt1"/>
-          </a:fontRef>
-        </p:style>
-        <p:txBody>
-          <a:bodyPr rtlCol="0" anchor="ctr"/>
-          <a:lstStyle/>
-          <a:p>
-            <a:pPr algn="ctr"/>
-          </a:p>
-        </p:txBody>
-      </p:sp>
-      <p:sp>
-        <p:nvSpPr>
-          <p:cNvPr id="21" name="TextBox 20"/>
-          <p:cNvSpPr txBox="1"/>
-          <p:nvPr/>
-        </p:nvSpPr>
-        <p:spPr>
-          <a:xfrm>
-            <a:off x="1097280" y="3593592"/>
-            <a:ext cx="10362895" cy="402336"/>
-          </a:xfrm>
-          <a:prstGeom prst="rect">
-            <a:avLst/>
-          </a:prstGeom>
-          <a:noFill/>
-        </p:spPr>
-        <p:txBody>
-          <a:bodyPr wrap="square" anchor="ctr"/>
-          <a:lstStyle/>
-          <a:p>
-            <a:r>
-              <a:rPr sz="1500" b="1" i="0">
-                <a:solidFill>
-                  <a:srgbClr val="333333"/>
-                </a:solidFill>
-                <a:latin typeface="Calibri"/>
-              </a:rPr>
-              <a:t>LA DEMOSTRACIÓN DEL PROTOTIPO</a:t>
-            </a:r>
-            <a:r>
-              <a:rPr sz="1500" b="0" i="0">
-                <a:solidFill>
-                  <a:srgbClr val="333333"/>
-                </a:solidFill>
-                <a:latin typeface="Calibri"/>
-              </a:rPr>
-              <a:t> — El recorrido de </a:t>
-            </a:r>
-            <a:r>
-              <a:rPr sz="1500" b="1" i="0">
-                <a:solidFill>
-                  <a:srgbClr val="333333"/>
-                </a:solidFill>
-                <a:latin typeface="Calibri"/>
-              </a:rPr>
-              <a:t>tres pasos</a:t>
-            </a:r>
-            <a:r>
-              <a:rPr sz="1500" b="0" i="0">
-                <a:solidFill>
-                  <a:srgbClr val="333333"/>
-                </a:solidFill>
-                <a:latin typeface="Calibri"/>
-              </a:rPr>
-              <a:t> que se va a mostrar, con </a:t>
-            </a:r>
-            <a:r>
-              <a:rPr sz="1500" b="1" i="0">
-                <a:solidFill>
-                  <a:srgbClr val="333333"/>
-                </a:solidFill>
-                <a:latin typeface="Calibri"/>
-              </a:rPr>
-              <a:t>una persona narrando y otra manejando la pantalla</a:t>
-            </a:r>
-            <a:r>
-              <a:rPr sz="1500" b="0" i="0">
-                <a:solidFill>
-                  <a:srgbClr val="333333"/>
-                </a:solidFill>
-                <a:latin typeface="Calibri"/>
-              </a:rPr>
-              <a:t>. Ensayado dos veces.</a:t>
-            </a:r>
-          </a:p>
-        </p:txBody>
-      </p:sp>
-      <p:sp>
-        <p:nvSpPr>
-          <p:cNvPr id="22" name="Rounded Rectangle 21"/>
-          <p:cNvSpPr/>
-          <p:nvPr/>
-        </p:nvSpPr>
-        <p:spPr>
-          <a:xfrm>
-            <a:off x="457200" y="4178808"/>
-            <a:ext cx="11277295" cy="566928"/>
-          </a:xfrm>
-          <a:prstGeom prst="roundRect">
-            <a:avLst>
-              <a:gd name="adj" fmla="val 12000"/>
-            </a:avLst>
-          </a:prstGeom>
-          <a:solidFill>
-            <a:srgbClr val="F2F2F2"/>
-          </a:solidFill>
-          <a:ln>
-            <a:noFill/>
-          </a:ln>
-        </p:spPr>
-        <p:style>
-          <a:lnRef idx="1">
-            <a:schemeClr val="accent1"/>
-          </a:lnRef>
-          <a:fillRef idx="3">
-            <a:schemeClr val="accent1"/>
-          </a:fillRef>
-          <a:effectRef idx="2">
-            <a:schemeClr val="accent1"/>
-          </a:effectRef>
-          <a:fontRef idx="minor">
-            <a:schemeClr val="lt1"/>
-          </a:fontRef>
-        </p:style>
-        <p:txBody>
-          <a:bodyPr rtlCol="0" anchor="ctr"/>
-          <a:lstStyle/>
-          <a:p>
-            <a:pPr algn="ctr"/>
-          </a:p>
-        </p:txBody>
-      </p:sp>
-      <p:sp>
-        <p:nvSpPr>
-          <p:cNvPr id="23" name="Rectangle 22"/>
-          <p:cNvSpPr/>
-          <p:nvPr/>
-        </p:nvSpPr>
-        <p:spPr>
-          <a:xfrm>
-            <a:off x="640080" y="4325112"/>
-            <a:ext cx="274320" cy="274320"/>
-          </a:xfrm>
-          <a:prstGeom prst="rect">
-            <a:avLst/>
-          </a:prstGeom>
-          <a:solidFill>
-            <a:srgbClr val="FFFFFF"/>
-          </a:solidFill>
-          <a:ln>
-            <a:solidFill>
-              <a:srgbClr val="333333"/>
-            </a:solidFill>
-          </a:ln>
-        </p:spPr>
-        <p:style>
-          <a:lnRef idx="1">
-            <a:schemeClr val="accent1"/>
-          </a:lnRef>
-          <a:fillRef idx="3">
-            <a:schemeClr val="accent1"/>
-          </a:fillRef>
-          <a:effectRef idx="2">
-            <a:schemeClr val="accent1"/>
-          </a:effectRef>
-          <a:fontRef idx="minor">
-            <a:schemeClr val="lt1"/>
-          </a:fontRef>
-        </p:style>
-        <p:txBody>
-          <a:bodyPr rtlCol="0" anchor="ctr"/>
-          <a:lstStyle/>
-          <a:p>
-            <a:pPr algn="ctr"/>
-          </a:p>
-        </p:txBody>
-      </p:sp>
-      <p:sp>
-        <p:nvSpPr>
-          <p:cNvPr id="24" name="Rectangle 23"/>
-          <p:cNvSpPr/>
-          <p:nvPr/>
-        </p:nvSpPr>
-        <p:spPr>
-          <a:xfrm>
-            <a:off x="640080" y="4325112"/>
-            <a:ext cx="73152" cy="274320"/>
-          </a:xfrm>
-          <a:prstGeom prst="rect">
-            <a:avLst/>
-          </a:prstGeom>
-          <a:solidFill>
-            <a:srgbClr val="269CCB"/>
-          </a:solidFill>
-          <a:ln>
-            <a:noFill/>
-          </a:ln>
-        </p:spPr>
-        <p:style>
-          <a:lnRef idx="1">
-            <a:schemeClr val="accent1"/>
-          </a:lnRef>
-          <a:fillRef idx="3">
-            <a:schemeClr val="accent1"/>
-          </a:fillRef>
-          <a:effectRef idx="2">
-            <a:schemeClr val="accent1"/>
-          </a:effectRef>
-          <a:fontRef idx="minor">
-            <a:schemeClr val="lt1"/>
-          </a:fontRef>
-        </p:style>
-        <p:txBody>
-          <a:bodyPr rtlCol="0" anchor="ctr"/>
-          <a:lstStyle/>
-          <a:p>
-            <a:pPr algn="ctr"/>
-          </a:p>
-        </p:txBody>
-      </p:sp>
-      <p:sp>
-        <p:nvSpPr>
-          <p:cNvPr id="25" name="TextBox 24"/>
-          <p:cNvSpPr txBox="1"/>
-          <p:nvPr/>
-        </p:nvSpPr>
-        <p:spPr>
-          <a:xfrm>
-            <a:off x="1097280" y="4270248"/>
-            <a:ext cx="10362895" cy="402336"/>
-          </a:xfrm>
-          <a:prstGeom prst="rect">
-            <a:avLst/>
-          </a:prstGeom>
-          <a:noFill/>
-        </p:spPr>
-        <p:txBody>
-          <a:bodyPr wrap="square" anchor="ctr"/>
-          <a:lstStyle/>
-          <a:p>
-            <a:r>
-              <a:rPr sz="1500" b="1" i="0">
-                <a:solidFill>
-                  <a:srgbClr val="333333"/>
-                </a:solidFill>
-                <a:latin typeface="Calibri"/>
-              </a:rPr>
-              <a:t>EL PLAN B TÉCNICO</a:t>
-            </a:r>
-            <a:r>
-              <a:rPr sz="1500" b="0" i="0">
-                <a:solidFill>
-                  <a:srgbClr val="333333"/>
-                </a:solidFill>
-                <a:latin typeface="Calibri"/>
-              </a:rPr>
-              <a:t> — En la carpeta del equipo: la presentación </a:t>
-            </a:r>
-            <a:r>
-              <a:rPr sz="1500" b="1" i="0">
-                <a:solidFill>
-                  <a:srgbClr val="333333"/>
-                </a:solidFill>
-                <a:latin typeface="Calibri"/>
-              </a:rPr>
-              <a:t>en PDF</a:t>
-            </a:r>
-            <a:r>
-              <a:rPr sz="1500" b="0" i="0">
-                <a:solidFill>
-                  <a:srgbClr val="333333"/>
-                </a:solidFill>
-                <a:latin typeface="Calibri"/>
-              </a:rPr>
-              <a:t>, </a:t>
-            </a:r>
-            <a:r>
-              <a:rPr sz="1500" b="1" i="0">
-                <a:solidFill>
-                  <a:srgbClr val="333333"/>
-                </a:solidFill>
-                <a:latin typeface="Calibri"/>
-              </a:rPr>
-              <a:t>capturas de cada paso</a:t>
-            </a:r>
-            <a:r>
-              <a:rPr sz="1500" b="0" i="0">
-                <a:solidFill>
-                  <a:srgbClr val="333333"/>
-                </a:solidFill>
-                <a:latin typeface="Calibri"/>
-              </a:rPr>
-              <a:t> de la demostración, y quién comparte pantalla si se cae el primero.</a:t>
-            </a:r>
-          </a:p>
-        </p:txBody>
-      </p:sp>
-      <p:sp>
-        <p:nvSpPr>
-          <p:cNvPr id="26" name="TextBox 25"/>
+            <a:pPr>
+              <a:spcAft>
+                <a:spcPts val="800"/>
+              </a:spcAft>
+            </a:pPr>
+            <a:r>
+              <a:rPr sz="2000" b="0" i="0">
+                <a:solidFill>
+                  <a:srgbClr val="333333"/>
+                </a:solidFill>
+                <a:latin typeface="Calibri"/>
+              </a:rPr>
+              <a:t>–   Y por eso todos los equipos que no ensayan se pasan de tiempo — creen que su presentación dura seis minutos y dura trece.</a:t>
+            </a:r>
+          </a:p>
+          <a:p>
+            <a:pPr>
+              <a:spcAft>
+                <a:spcPts val="800"/>
+              </a:spcAft>
+            </a:pPr>
+            <a:r>
+              <a:rPr sz="2000" b="0" i="0">
+                <a:solidFill>
+                  <a:srgbClr val="333333"/>
+                </a:solidFill>
+                <a:latin typeface="Calibri"/>
+              </a:rPr>
+              <a:t>–   Las dos primeras frases se aprenden de memoria: son las que más nervios dan y las que fijan el tono de los nueve minutos.</a:t>
+            </a:r>
+          </a:p>
+          <a:p>
+            <a:pPr>
+              <a:spcAft>
+                <a:spcPts val="800"/>
+              </a:spcAft>
+            </a:pPr>
+            <a:r>
+              <a:rPr sz="2000" b="0" i="0">
+                <a:solidFill>
+                  <a:srgbClr val="333333"/>
+                </a:solidFill>
+                <a:latin typeface="Calibri"/>
+              </a:rPr>
+              <a:t>–   Es un consejo pequeño y funciona. </a:t>
+            </a:r>
+            <a:r>
+              <a:rPr sz="2000" b="1" i="0">
+                <a:solidFill>
+                  <a:srgbClr val="333333"/>
+                </a:solidFill>
+                <a:latin typeface="Calibri"/>
+              </a:rPr>
+              <a:t>Por qué hoy se ensayan solo los primeros 4 minutos</a:t>
+            </a:r>
+            <a:r>
+              <a:rPr sz="2000" b="0" i="0">
+                <a:solidFill>
+                  <a:srgbClr val="333333"/>
+                </a:solidFill>
+                <a:latin typeface="Calibri"/>
+              </a:rPr>
+              <a:t>, y conviene explicarlo para que no parezca un recorte: cinco equipos por nueve minutos son 45 minutos y no caben con corrección.</a:t>
+            </a:r>
+          </a:p>
+          <a:p>
+            <a:pPr>
+              <a:spcAft>
+                <a:spcPts val="800"/>
+              </a:spcAft>
+            </a:pPr>
+            <a:r>
+              <a:rPr sz="2000" b="0" i="0">
+                <a:solidFill>
+                  <a:srgbClr val="333333"/>
+                </a:solidFill>
+                <a:latin typeface="Calibri"/>
+              </a:rPr>
+              <a:t>–   Pero además </a:t>
+            </a:r>
+            <a:r>
+              <a:rPr sz="2000" b="1" i="0">
+                <a:solidFill>
+                  <a:srgbClr val="333333"/>
+                </a:solidFill>
+                <a:latin typeface="Calibri"/>
+              </a:rPr>
+              <a:t>el arranque es donde se pierde el tiempo</a:t>
+            </a:r>
+            <a:r>
+              <a:rPr sz="2000" b="0" i="0">
+                <a:solidFill>
+                  <a:srgbClr val="333333"/>
+                </a:solidFill>
+                <a:latin typeface="Calibri"/>
+              </a:rPr>
+              <a:t>: el equipo que controla los tramos 1 y 2 casi siempre llega bien al final, y el que se pasa en el tramo 2 ya no tiene manera de recuperarse.</a:t>
+            </a:r>
+          </a:p>
+        </p:txBody>
+      </p:sp>
+      <p:sp>
+        <p:nvSpPr>
+          <p:cNvPr id="6" name="TextBox 5"/>
           <p:cNvSpPr txBox="1"/>
           <p:nvPr/>
         </p:nvSpPr>
@@ -7605,7 +6348,7 @@
         <p:spPr>
           <a:xfrm>
             <a:off x="0" y="0"/>
-            <a:ext cx="12191695" cy="1170432"/>
+            <a:ext cx="12191695" cy="960120"/>
           </a:xfrm>
           <a:prstGeom prst="rect">
             <a:avLst/>
@@ -7647,7 +6390,7 @@
         </p:nvSpPr>
         <p:spPr>
           <a:xfrm>
-            <a:off x="0" y="1170432"/>
+            <a:off x="0" y="960120"/>
             <a:ext cx="12191695" cy="41148"/>
           </a:xfrm>
           <a:prstGeom prst="rect">
@@ -7691,7 +6434,7 @@
         <p:spPr>
           <a:xfrm>
             <a:off x="457200" y="164592"/>
-            <a:ext cx="11277295" cy="384048"/>
+            <a:ext cx="11277295" cy="502920"/>
           </a:xfrm>
           <a:prstGeom prst="rect">
             <a:avLst/>
@@ -7711,7 +6454,7 @@
                 </a:solidFill>
                 <a:latin typeface="Calibri"/>
               </a:rPr>
-              <a:t>Cómo se expone en 4 minutos</a:t>
+              <a:t>El plan B, el ensayo, y por qué se ensaya solo el arranque (3/3)</a:t>
             </a:r>
           </a:p>
         </p:txBody>
@@ -7724,8 +6467,8 @@
         </p:nvSpPr>
         <p:spPr>
           <a:xfrm>
-            <a:off x="457200" y="566928"/>
-            <a:ext cx="11277295" cy="411480"/>
+            <a:off x="457200" y="1170432"/>
+            <a:ext cx="11277295" cy="5230368"/>
           </a:xfrm>
           <a:prstGeom prst="rect">
             <a:avLst/>
@@ -7738,903 +6481,51 @@
           </a:bodyPr>
           <a:lstStyle/>
           <a:p>
-            <a:r>
-              <a:rPr sz="1400" b="0" i="0">
-                <a:solidFill>
-                  <a:srgbClr val="B8D8EE"/>
-                </a:solidFill>
-                <a:latin typeface="Calibri"/>
-              </a:rPr>
-              <a:t>Habla el vocero con la pantalla ya compartida · cronómetro en pantalla · se corta al llegar a cero</a:t>
-            </a:r>
-          </a:p>
-        </p:txBody>
-      </p:sp>
-      <p:sp>
-        <p:nvSpPr>
-          <p:cNvPr id="6" name="Rounded Rectangle 5"/>
-          <p:cNvSpPr/>
-          <p:nvPr/>
-        </p:nvSpPr>
-        <p:spPr>
-          <a:xfrm>
-            <a:off x="457200" y="1444752"/>
-            <a:ext cx="11277295" cy="908913"/>
-          </a:xfrm>
-          <a:prstGeom prst="roundRect">
-            <a:avLst>
-              <a:gd name="adj" fmla="val 12000"/>
-            </a:avLst>
-          </a:prstGeom>
-          <a:solidFill>
-            <a:srgbClr val="F2F2F2"/>
-          </a:solidFill>
-          <a:ln>
-            <a:noFill/>
-          </a:ln>
-        </p:spPr>
-        <p:style>
-          <a:lnRef idx="1">
-            <a:schemeClr val="accent1"/>
-          </a:lnRef>
-          <a:fillRef idx="3">
-            <a:schemeClr val="accent1"/>
-          </a:fillRef>
-          <a:effectRef idx="2">
-            <a:schemeClr val="accent1"/>
-          </a:effectRef>
-          <a:fontRef idx="minor">
-            <a:schemeClr val="lt1"/>
-          </a:fontRef>
-        </p:style>
-        <p:txBody>
-          <a:bodyPr rtlCol="0" anchor="ctr"/>
-          <a:lstStyle/>
-          <a:p>
-            <a:pPr algn="ctr"/>
-          </a:p>
-        </p:txBody>
-      </p:sp>
-      <p:sp>
-        <p:nvSpPr>
-          <p:cNvPr id="7" name="Rounded Rectangle 6"/>
-          <p:cNvSpPr/>
-          <p:nvPr/>
-        </p:nvSpPr>
-        <p:spPr>
-          <a:xfrm>
-            <a:off x="594360" y="1679752"/>
-            <a:ext cx="438912" cy="438912"/>
-          </a:xfrm>
-          <a:prstGeom prst="roundRect">
-            <a:avLst>
-              <a:gd name="adj" fmla="val 12000"/>
-            </a:avLst>
-          </a:prstGeom>
-          <a:solidFill>
-            <a:srgbClr val="095292"/>
-          </a:solidFill>
-          <a:ln>
-            <a:noFill/>
-          </a:ln>
-        </p:spPr>
-        <p:style>
-          <a:lnRef idx="1">
-            <a:schemeClr val="accent1"/>
-          </a:lnRef>
-          <a:fillRef idx="3">
-            <a:schemeClr val="accent1"/>
-          </a:fillRef>
-          <a:effectRef idx="2">
-            <a:schemeClr val="accent1"/>
-          </a:effectRef>
-          <a:fontRef idx="minor">
-            <a:schemeClr val="lt1"/>
-          </a:fontRef>
-        </p:style>
-        <p:txBody>
-          <a:bodyPr rtlCol="0" anchor="ctr"/>
-          <a:lstStyle/>
-          <a:p>
-            <a:pPr algn="ctr"/>
-          </a:p>
-        </p:txBody>
-      </p:sp>
-      <p:sp>
-        <p:nvSpPr>
-          <p:cNvPr id="8" name="TextBox 7"/>
-          <p:cNvSpPr txBox="1"/>
-          <p:nvPr/>
-        </p:nvSpPr>
-        <p:spPr>
-          <a:xfrm>
-            <a:off x="594360" y="1679752"/>
-            <a:ext cx="438912" cy="438912"/>
-          </a:xfrm>
-          <a:prstGeom prst="rect">
-            <a:avLst/>
-          </a:prstGeom>
-          <a:noFill/>
-        </p:spPr>
-        <p:txBody>
-          <a:bodyPr wrap="square" anchor="ctr"/>
-          <a:lstStyle/>
-          <a:p>
-            <a:pPr algn="ctr"/>
-            <a:r>
-              <a:rPr sz="1600" b="1" i="0">
-                <a:solidFill>
-                  <a:srgbClr val="FFFFFF"/>
-                </a:solidFill>
-                <a:latin typeface="Calibri"/>
-              </a:rPr>
-              <a:t>1</a:t>
-            </a:r>
-          </a:p>
-        </p:txBody>
-      </p:sp>
-      <p:sp>
-        <p:nvSpPr>
-          <p:cNvPr id="9" name="TextBox 8"/>
-          <p:cNvSpPr txBox="1"/>
-          <p:nvPr/>
-        </p:nvSpPr>
-        <p:spPr>
-          <a:xfrm>
-            <a:off x="1188720" y="1536192"/>
-            <a:ext cx="10271455" cy="744321"/>
-          </a:xfrm>
-          <a:prstGeom prst="rect">
-            <a:avLst/>
-          </a:prstGeom>
-          <a:noFill/>
-        </p:spPr>
-        <p:txBody>
-          <a:bodyPr wrap="square" anchor="ctr"/>
-          <a:lstStyle/>
-          <a:p>
-            <a:r>
-              <a:rPr sz="1500" b="1" i="0">
-                <a:solidFill>
-                  <a:srgbClr val="095292"/>
-                </a:solidFill>
-                <a:latin typeface="Calibri"/>
-              </a:rPr>
-              <a:t>Tramo 1 · 1 min</a:t>
-            </a:r>
-          </a:p>
-          <a:p>
             <a:pPr>
-              <a:spcBef>
-                <a:spcPts val="200"/>
-              </a:spcBef>
+              <a:spcAft>
+                <a:spcPts val="800"/>
+              </a:spcAft>
             </a:pPr>
             <a:r>
-              <a:rPr sz="1300" b="0" i="0">
-                <a:solidFill>
-                  <a:srgbClr val="333333"/>
-                </a:solidFill>
-                <a:latin typeface="Calibri"/>
-              </a:rPr>
-              <a:t>El problema con su cifra. </a:t>
-            </a:r>
-            <a:r>
-              <a:rPr sz="1300" b="1" i="0">
-                <a:solidFill>
-                  <a:srgbClr val="333333"/>
-                </a:solidFill>
-                <a:latin typeface="Calibri"/>
-              </a:rPr>
-              <a:t>Sin presentaciones personales.</a:t>
-            </a:r>
-          </a:p>
-        </p:txBody>
-      </p:sp>
-      <p:sp>
-        <p:nvSpPr>
-          <p:cNvPr id="10" name="Rounded Rectangle 9"/>
-          <p:cNvSpPr/>
-          <p:nvPr/>
-        </p:nvSpPr>
-        <p:spPr>
-          <a:xfrm>
-            <a:off x="457200" y="2445105"/>
-            <a:ext cx="11277295" cy="908913"/>
-          </a:xfrm>
-          <a:prstGeom prst="roundRect">
-            <a:avLst>
-              <a:gd name="adj" fmla="val 12000"/>
-            </a:avLst>
-          </a:prstGeom>
-          <a:solidFill>
-            <a:srgbClr val="E8F4FA"/>
-          </a:solidFill>
-          <a:ln>
-            <a:noFill/>
-          </a:ln>
-        </p:spPr>
-        <p:style>
-          <a:lnRef idx="1">
-            <a:schemeClr val="accent1"/>
-          </a:lnRef>
-          <a:fillRef idx="3">
-            <a:schemeClr val="accent1"/>
-          </a:fillRef>
-          <a:effectRef idx="2">
-            <a:schemeClr val="accent1"/>
-          </a:effectRef>
-          <a:fontRef idx="minor">
-            <a:schemeClr val="lt1"/>
-          </a:fontRef>
-        </p:style>
-        <p:txBody>
-          <a:bodyPr rtlCol="0" anchor="ctr"/>
-          <a:lstStyle/>
-          <a:p>
-            <a:pPr algn="ctr"/>
-          </a:p>
-        </p:txBody>
-      </p:sp>
-      <p:sp>
-        <p:nvSpPr>
-          <p:cNvPr id="11" name="Rounded Rectangle 10"/>
-          <p:cNvSpPr/>
-          <p:nvPr/>
-        </p:nvSpPr>
-        <p:spPr>
-          <a:xfrm>
-            <a:off x="594360" y="2680106"/>
-            <a:ext cx="438912" cy="438912"/>
-          </a:xfrm>
-          <a:prstGeom prst="roundRect">
-            <a:avLst>
-              <a:gd name="adj" fmla="val 12000"/>
-            </a:avLst>
-          </a:prstGeom>
-          <a:solidFill>
-            <a:srgbClr val="095292"/>
-          </a:solidFill>
-          <a:ln>
-            <a:noFill/>
-          </a:ln>
-        </p:spPr>
-        <p:style>
-          <a:lnRef idx="1">
-            <a:schemeClr val="accent1"/>
-          </a:lnRef>
-          <a:fillRef idx="3">
-            <a:schemeClr val="accent1"/>
-          </a:fillRef>
-          <a:effectRef idx="2">
-            <a:schemeClr val="accent1"/>
-          </a:effectRef>
-          <a:fontRef idx="minor">
-            <a:schemeClr val="lt1"/>
-          </a:fontRef>
-        </p:style>
-        <p:txBody>
-          <a:bodyPr rtlCol="0" anchor="ctr"/>
-          <a:lstStyle/>
-          <a:p>
-            <a:pPr algn="ctr"/>
-          </a:p>
-        </p:txBody>
-      </p:sp>
-      <p:sp>
-        <p:nvSpPr>
-          <p:cNvPr id="12" name="TextBox 11"/>
-          <p:cNvSpPr txBox="1"/>
-          <p:nvPr/>
-        </p:nvSpPr>
-        <p:spPr>
-          <a:xfrm>
-            <a:off x="594360" y="2680106"/>
-            <a:ext cx="438912" cy="438912"/>
-          </a:xfrm>
-          <a:prstGeom prst="rect">
-            <a:avLst/>
-          </a:prstGeom>
-          <a:noFill/>
-        </p:spPr>
-        <p:txBody>
-          <a:bodyPr wrap="square" anchor="ctr"/>
-          <a:lstStyle/>
-          <a:p>
-            <a:pPr algn="ctr"/>
-            <a:r>
-              <a:rPr sz="1600" b="1" i="0">
-                <a:solidFill>
-                  <a:srgbClr val="FFFFFF"/>
-                </a:solidFill>
-                <a:latin typeface="Calibri"/>
-              </a:rPr>
-              <a:t>2</a:t>
-            </a:r>
-          </a:p>
-        </p:txBody>
-      </p:sp>
-      <p:sp>
-        <p:nvSpPr>
-          <p:cNvPr id="13" name="TextBox 12"/>
-          <p:cNvSpPr txBox="1"/>
-          <p:nvPr/>
-        </p:nvSpPr>
-        <p:spPr>
-          <a:xfrm>
-            <a:off x="1188720" y="2536545"/>
-            <a:ext cx="10271455" cy="744321"/>
-          </a:xfrm>
-          <a:prstGeom prst="rect">
-            <a:avLst/>
-          </a:prstGeom>
-          <a:noFill/>
-        </p:spPr>
-        <p:txBody>
-          <a:bodyPr wrap="square" anchor="ctr"/>
-          <a:lstStyle/>
-          <a:p>
-            <a:r>
-              <a:rPr sz="1500" b="1" i="0">
-                <a:solidFill>
-                  <a:srgbClr val="095292"/>
-                </a:solidFill>
-                <a:latin typeface="Calibri"/>
-              </a:rPr>
-              <a:t>Tramo 2 · 2 min</a:t>
+              <a:rPr sz="2000" b="0" i="0">
+                <a:solidFill>
+                  <a:srgbClr val="333333"/>
+                </a:solidFill>
+                <a:latin typeface="Calibri"/>
+              </a:rPr>
+              <a:t>–   Ensayar el arranque con cronómetro es la intervención con mejor rendimiento por minuto invertido.</a:t>
             </a:r>
           </a:p>
           <a:p>
             <a:pPr>
-              <a:spcBef>
-                <a:spcPts val="200"/>
-              </a:spcBef>
+              <a:spcAft>
+                <a:spcPts val="800"/>
+              </a:spcAft>
             </a:pPr>
             <a:r>
-              <a:rPr sz="1300" b="0" i="0">
-                <a:solidFill>
-                  <a:srgbClr val="333333"/>
-                </a:solidFill>
-                <a:latin typeface="Calibri"/>
-              </a:rPr>
-              <a:t>Los afectados y la decisión de la matriz, con lo que se sacrificó.</a:t>
-            </a:r>
-          </a:p>
-        </p:txBody>
-      </p:sp>
-      <p:sp>
-        <p:nvSpPr>
-          <p:cNvPr id="14" name="Rounded Rectangle 13"/>
-          <p:cNvSpPr/>
-          <p:nvPr/>
-        </p:nvSpPr>
-        <p:spPr>
-          <a:xfrm>
-            <a:off x="457200" y="3445459"/>
-            <a:ext cx="11277295" cy="908913"/>
-          </a:xfrm>
-          <a:prstGeom prst="roundRect">
-            <a:avLst>
-              <a:gd name="adj" fmla="val 12000"/>
-            </a:avLst>
-          </a:prstGeom>
-          <a:solidFill>
-            <a:srgbClr val="F2F2F2"/>
-          </a:solidFill>
-          <a:ln>
-            <a:noFill/>
-          </a:ln>
-        </p:spPr>
-        <p:style>
-          <a:lnRef idx="1">
-            <a:schemeClr val="accent1"/>
-          </a:lnRef>
-          <a:fillRef idx="3">
-            <a:schemeClr val="accent1"/>
-          </a:fillRef>
-          <a:effectRef idx="2">
-            <a:schemeClr val="accent1"/>
-          </a:effectRef>
-          <a:fontRef idx="minor">
-            <a:schemeClr val="lt1"/>
-          </a:fontRef>
-        </p:style>
-        <p:txBody>
-          <a:bodyPr rtlCol="0" anchor="ctr"/>
-          <a:lstStyle/>
-          <a:p>
-            <a:pPr algn="ctr"/>
-          </a:p>
-        </p:txBody>
-      </p:sp>
-      <p:sp>
-        <p:nvSpPr>
-          <p:cNvPr id="15" name="Rounded Rectangle 14"/>
-          <p:cNvSpPr/>
-          <p:nvPr/>
-        </p:nvSpPr>
-        <p:spPr>
-          <a:xfrm>
-            <a:off x="594360" y="3680460"/>
-            <a:ext cx="438912" cy="438912"/>
-          </a:xfrm>
-          <a:prstGeom prst="roundRect">
-            <a:avLst>
-              <a:gd name="adj" fmla="val 12000"/>
-            </a:avLst>
-          </a:prstGeom>
-          <a:solidFill>
-            <a:srgbClr val="095292"/>
-          </a:solidFill>
-          <a:ln>
-            <a:noFill/>
-          </a:ln>
-        </p:spPr>
-        <p:style>
-          <a:lnRef idx="1">
-            <a:schemeClr val="accent1"/>
-          </a:lnRef>
-          <a:fillRef idx="3">
-            <a:schemeClr val="accent1"/>
-          </a:fillRef>
-          <a:effectRef idx="2">
-            <a:schemeClr val="accent1"/>
-          </a:effectRef>
-          <a:fontRef idx="minor">
-            <a:schemeClr val="lt1"/>
-          </a:fontRef>
-        </p:style>
-        <p:txBody>
-          <a:bodyPr rtlCol="0" anchor="ctr"/>
-          <a:lstStyle/>
-          <a:p>
-            <a:pPr algn="ctr"/>
-          </a:p>
-        </p:txBody>
-      </p:sp>
-      <p:sp>
-        <p:nvSpPr>
-          <p:cNvPr id="16" name="TextBox 15"/>
-          <p:cNvSpPr txBox="1"/>
-          <p:nvPr/>
-        </p:nvSpPr>
-        <p:spPr>
-          <a:xfrm>
-            <a:off x="594360" y="3680460"/>
-            <a:ext cx="438912" cy="438912"/>
-          </a:xfrm>
-          <a:prstGeom prst="rect">
-            <a:avLst/>
-          </a:prstGeom>
-          <a:noFill/>
-        </p:spPr>
-        <p:txBody>
-          <a:bodyPr wrap="square" anchor="ctr"/>
-          <a:lstStyle/>
-          <a:p>
-            <a:pPr algn="ctr"/>
-            <a:r>
-              <a:rPr sz="1600" b="1" i="0">
-                <a:solidFill>
-                  <a:srgbClr val="FFFFFF"/>
-                </a:solidFill>
-                <a:latin typeface="Calibri"/>
-              </a:rPr>
-              <a:t>3</a:t>
-            </a:r>
-          </a:p>
-        </p:txBody>
-      </p:sp>
-      <p:sp>
-        <p:nvSpPr>
-          <p:cNvPr id="17" name="TextBox 16"/>
-          <p:cNvSpPr txBox="1"/>
-          <p:nvPr/>
-        </p:nvSpPr>
-        <p:spPr>
-          <a:xfrm>
-            <a:off x="1188720" y="3536899"/>
-            <a:ext cx="10271455" cy="744321"/>
-          </a:xfrm>
-          <a:prstGeom prst="rect">
-            <a:avLst/>
-          </a:prstGeom>
-          <a:noFill/>
-        </p:spPr>
-        <p:txBody>
-          <a:bodyPr wrap="square" anchor="ctr"/>
-          <a:lstStyle/>
-          <a:p>
-            <a:r>
-              <a:rPr sz="1500" b="1" i="0">
-                <a:solidFill>
-                  <a:srgbClr val="095292"/>
-                </a:solidFill>
-                <a:latin typeface="Calibri"/>
-              </a:rPr>
-              <a:t>Comienzo del tramo 3 · 1 min</a:t>
-            </a:r>
-          </a:p>
-          <a:p>
-            <a:pPr>
-              <a:spcBef>
-                <a:spcPts val="200"/>
-              </a:spcBef>
-            </a:pPr>
-            <a:r>
-              <a:rPr sz="1300" b="0" i="0">
-                <a:solidFill>
-                  <a:srgbClr val="333333"/>
-                </a:solidFill>
-                <a:latin typeface="Calibri"/>
-              </a:rPr>
-              <a:t>Arrancar la demostración: hasta donde llegue en el minuto.</a:t>
-            </a:r>
-          </a:p>
-        </p:txBody>
-      </p:sp>
-      <p:sp>
-        <p:nvSpPr>
-          <p:cNvPr id="18" name="Rounded Rectangle 17"/>
-          <p:cNvSpPr/>
-          <p:nvPr/>
-        </p:nvSpPr>
-        <p:spPr>
-          <a:xfrm>
-            <a:off x="457200" y="4445812"/>
-            <a:ext cx="11277295" cy="908913"/>
-          </a:xfrm>
-          <a:prstGeom prst="roundRect">
-            <a:avLst>
-              <a:gd name="adj" fmla="val 12000"/>
-            </a:avLst>
-          </a:prstGeom>
-          <a:solidFill>
-            <a:srgbClr val="E8F4FA"/>
-          </a:solidFill>
-          <a:ln>
-            <a:noFill/>
-          </a:ln>
-        </p:spPr>
-        <p:style>
-          <a:lnRef idx="1">
-            <a:schemeClr val="accent1"/>
-          </a:lnRef>
-          <a:fillRef idx="3">
-            <a:schemeClr val="accent1"/>
-          </a:fillRef>
-          <a:effectRef idx="2">
-            <a:schemeClr val="accent1"/>
-          </a:effectRef>
-          <a:fontRef idx="minor">
-            <a:schemeClr val="lt1"/>
-          </a:fontRef>
-        </p:style>
-        <p:txBody>
-          <a:bodyPr rtlCol="0" anchor="ctr"/>
-          <a:lstStyle/>
-          <a:p>
-            <a:pPr algn="ctr"/>
-          </a:p>
-        </p:txBody>
-      </p:sp>
-      <p:sp>
-        <p:nvSpPr>
-          <p:cNvPr id="19" name="Rounded Rectangle 18"/>
-          <p:cNvSpPr/>
-          <p:nvPr/>
-        </p:nvSpPr>
-        <p:spPr>
-          <a:xfrm>
-            <a:off x="594360" y="4680813"/>
-            <a:ext cx="438912" cy="438912"/>
-          </a:xfrm>
-          <a:prstGeom prst="roundRect">
-            <a:avLst>
-              <a:gd name="adj" fmla="val 12000"/>
-            </a:avLst>
-          </a:prstGeom>
-          <a:solidFill>
-            <a:srgbClr val="095292"/>
-          </a:solidFill>
-          <a:ln>
-            <a:noFill/>
-          </a:ln>
-        </p:spPr>
-        <p:style>
-          <a:lnRef idx="1">
-            <a:schemeClr val="accent1"/>
-          </a:lnRef>
-          <a:fillRef idx="3">
-            <a:schemeClr val="accent1"/>
-          </a:fillRef>
-          <a:effectRef idx="2">
-            <a:schemeClr val="accent1"/>
-          </a:effectRef>
-          <a:fontRef idx="minor">
-            <a:schemeClr val="lt1"/>
-          </a:fontRef>
-        </p:style>
-        <p:txBody>
-          <a:bodyPr rtlCol="0" anchor="ctr"/>
-          <a:lstStyle/>
-          <a:p>
-            <a:pPr algn="ctr"/>
-          </a:p>
-        </p:txBody>
-      </p:sp>
-      <p:sp>
-        <p:nvSpPr>
-          <p:cNvPr id="20" name="TextBox 19"/>
-          <p:cNvSpPr txBox="1"/>
-          <p:nvPr/>
-        </p:nvSpPr>
-        <p:spPr>
-          <a:xfrm>
-            <a:off x="594360" y="4680813"/>
-            <a:ext cx="438912" cy="438912"/>
-          </a:xfrm>
-          <a:prstGeom prst="rect">
-            <a:avLst/>
-          </a:prstGeom>
-          <a:noFill/>
-        </p:spPr>
-        <p:txBody>
-          <a:bodyPr wrap="square" anchor="ctr"/>
-          <a:lstStyle/>
-          <a:p>
-            <a:pPr algn="ctr"/>
-            <a:r>
-              <a:rPr sz="1600" b="1" i="0">
-                <a:solidFill>
-                  <a:srgbClr val="FFFFFF"/>
-                </a:solidFill>
-                <a:latin typeface="Calibri"/>
-              </a:rPr>
-              <a:t>4</a:t>
-            </a:r>
-          </a:p>
-        </p:txBody>
-      </p:sp>
-      <p:sp>
-        <p:nvSpPr>
-          <p:cNvPr id="21" name="TextBox 20"/>
-          <p:cNvSpPr txBox="1"/>
-          <p:nvPr/>
-        </p:nvSpPr>
-        <p:spPr>
-          <a:xfrm>
-            <a:off x="1188720" y="4537252"/>
-            <a:ext cx="10271455" cy="744321"/>
-          </a:xfrm>
-          <a:prstGeom prst="rect">
-            <a:avLst/>
-          </a:prstGeom>
-          <a:noFill/>
-        </p:spPr>
-        <p:txBody>
-          <a:bodyPr wrap="square" anchor="ctr"/>
-          <a:lstStyle/>
-          <a:p>
-            <a:r>
-              <a:rPr sz="1500" b="1" i="0">
-                <a:solidFill>
-                  <a:srgbClr val="095292"/>
-                </a:solidFill>
-                <a:latin typeface="Calibri"/>
-              </a:rPr>
-              <a:t>Corte a los 4 min</a:t>
-            </a:r>
-          </a:p>
-          <a:p>
-            <a:pPr>
-              <a:spcBef>
-                <a:spcPts val="200"/>
-              </a:spcBef>
-            </a:pPr>
-            <a:r>
-              <a:rPr sz="1300" b="0" i="0">
-                <a:solidFill>
-                  <a:srgbClr val="333333"/>
-                </a:solidFill>
-                <a:latin typeface="Calibri"/>
-              </a:rPr>
-              <a:t>Se corta en mitad de la frase. En la Clase 15 pasa igual.</a:t>
-            </a:r>
-          </a:p>
-        </p:txBody>
-      </p:sp>
-      <p:sp>
-        <p:nvSpPr>
-          <p:cNvPr id="22" name="Rounded Rectangle 21"/>
-          <p:cNvSpPr/>
-          <p:nvPr/>
-        </p:nvSpPr>
-        <p:spPr>
-          <a:xfrm>
-            <a:off x="457200" y="5446166"/>
-            <a:ext cx="11277295" cy="908913"/>
-          </a:xfrm>
-          <a:prstGeom prst="roundRect">
-            <a:avLst>
-              <a:gd name="adj" fmla="val 12000"/>
-            </a:avLst>
-          </a:prstGeom>
-          <a:solidFill>
-            <a:srgbClr val="F2F2F2"/>
-          </a:solidFill>
-          <a:ln>
-            <a:noFill/>
-          </a:ln>
-        </p:spPr>
-        <p:style>
-          <a:lnRef idx="1">
-            <a:schemeClr val="accent1"/>
-          </a:lnRef>
-          <a:fillRef idx="3">
-            <a:schemeClr val="accent1"/>
-          </a:fillRef>
-          <a:effectRef idx="2">
-            <a:schemeClr val="accent1"/>
-          </a:effectRef>
-          <a:fontRef idx="minor">
-            <a:schemeClr val="lt1"/>
-          </a:fontRef>
-        </p:style>
-        <p:txBody>
-          <a:bodyPr rtlCol="0" anchor="ctr"/>
-          <a:lstStyle/>
-          <a:p>
-            <a:pPr algn="ctr"/>
-          </a:p>
-        </p:txBody>
-      </p:sp>
-      <p:sp>
-        <p:nvSpPr>
-          <p:cNvPr id="23" name="Rounded Rectangle 22"/>
-          <p:cNvSpPr/>
-          <p:nvPr/>
-        </p:nvSpPr>
-        <p:spPr>
-          <a:xfrm>
-            <a:off x="594360" y="5681167"/>
-            <a:ext cx="438912" cy="438912"/>
-          </a:xfrm>
-          <a:prstGeom prst="roundRect">
-            <a:avLst>
-              <a:gd name="adj" fmla="val 12000"/>
-            </a:avLst>
-          </a:prstGeom>
-          <a:solidFill>
-            <a:srgbClr val="095292"/>
-          </a:solidFill>
-          <a:ln>
-            <a:noFill/>
-          </a:ln>
-        </p:spPr>
-        <p:style>
-          <a:lnRef idx="1">
-            <a:schemeClr val="accent1"/>
-          </a:lnRef>
-          <a:fillRef idx="3">
-            <a:schemeClr val="accent1"/>
-          </a:fillRef>
-          <a:effectRef idx="2">
-            <a:schemeClr val="accent1"/>
-          </a:effectRef>
-          <a:fontRef idx="minor">
-            <a:schemeClr val="lt1"/>
-          </a:fontRef>
-        </p:style>
-        <p:txBody>
-          <a:bodyPr rtlCol="0" anchor="ctr"/>
-          <a:lstStyle/>
-          <a:p>
-            <a:pPr algn="ctr"/>
-          </a:p>
-        </p:txBody>
-      </p:sp>
-      <p:sp>
-        <p:nvSpPr>
-          <p:cNvPr id="24" name="TextBox 23"/>
-          <p:cNvSpPr txBox="1"/>
-          <p:nvPr/>
-        </p:nvSpPr>
-        <p:spPr>
-          <a:xfrm>
-            <a:off x="594360" y="5681167"/>
-            <a:ext cx="438912" cy="438912"/>
-          </a:xfrm>
-          <a:prstGeom prst="rect">
-            <a:avLst/>
-          </a:prstGeom>
-          <a:noFill/>
-        </p:spPr>
-        <p:txBody>
-          <a:bodyPr wrap="square" anchor="ctr"/>
-          <a:lstStyle/>
-          <a:p>
-            <a:pPr algn="ctr"/>
-            <a:r>
-              <a:rPr sz="1600" b="1" i="0">
-                <a:solidFill>
-                  <a:srgbClr val="FFFFFF"/>
-                </a:solidFill>
-                <a:latin typeface="Calibri"/>
-              </a:rPr>
-              <a:t>5</a:t>
-            </a:r>
-          </a:p>
-        </p:txBody>
-      </p:sp>
-      <p:sp>
-        <p:nvSpPr>
-          <p:cNvPr id="25" name="TextBox 24"/>
-          <p:cNvSpPr txBox="1"/>
-          <p:nvPr/>
-        </p:nvSpPr>
-        <p:spPr>
-          <a:xfrm>
-            <a:off x="1188720" y="5537606"/>
-            <a:ext cx="10271455" cy="744321"/>
-          </a:xfrm>
-          <a:prstGeom prst="rect">
-            <a:avLst/>
-          </a:prstGeom>
-          <a:noFill/>
-        </p:spPr>
-        <p:txBody>
-          <a:bodyPr wrap="square" anchor="ctr"/>
-          <a:lstStyle/>
-          <a:p>
-            <a:r>
-              <a:rPr sz="1500" b="1" i="0">
-                <a:solidFill>
-                  <a:srgbClr val="095292"/>
-                </a:solidFill>
-                <a:latin typeface="Calibri"/>
-              </a:rPr>
-              <a:t>2 min de corrección</a:t>
-            </a:r>
-          </a:p>
-          <a:p>
-            <a:pPr>
-              <a:spcBef>
-                <a:spcPts val="200"/>
-              </a:spcBef>
-            </a:pPr>
-            <a:r>
-              <a:rPr sz="1300" b="0" i="0">
-                <a:solidFill>
-                  <a:srgbClr val="333333"/>
-                </a:solidFill>
-                <a:latin typeface="Calibri"/>
-              </a:rPr>
-              <a:t>El docente dice </a:t>
-            </a:r>
-            <a:r>
-              <a:rPr sz="1300" b="1" i="0">
-                <a:solidFill>
-                  <a:srgbClr val="333333"/>
-                </a:solidFill>
-                <a:latin typeface="Calibri"/>
-              </a:rPr>
-              <a:t>una sola cosa</a:t>
-            </a:r>
-            <a:r>
-              <a:rPr sz="1300" b="0" i="0">
-                <a:solidFill>
-                  <a:srgbClr val="333333"/>
-                </a:solidFill>
-                <a:latin typeface="Calibri"/>
-              </a:rPr>
-              <a:t>, la que más cambie la presentación.</a:t>
-            </a:r>
-          </a:p>
-        </p:txBody>
-      </p:sp>
-      <p:sp>
-        <p:nvSpPr>
-          <p:cNvPr id="26" name="TextBox 25"/>
+              <a:rPr sz="2000" b="0" i="0">
+                <a:solidFill>
+                  <a:srgbClr val="333333"/>
+                </a:solidFill>
+                <a:latin typeface="Calibri"/>
+              </a:rPr>
+              <a:t>–   El resto se ensaya en equipo, fuera de clase, y hay que decirlo con claridad: </a:t>
+            </a:r>
+            <a:r>
+              <a:rPr sz="2000" b="1" i="0">
+                <a:solidFill>
+                  <a:srgbClr val="333333"/>
+                </a:solidFill>
+                <a:latin typeface="Calibri"/>
+              </a:rPr>
+              <a:t>quien no ensaye completo antes de la Clase 15 se va a pasar de tiempo, y a los nueve minutos se corta.</a:t>
+            </a:r>
+          </a:p>
+        </p:txBody>
+      </p:sp>
+      <p:sp>
+        <p:nvSpPr>
+          <p:cNvPr id="6" name="TextBox 5"/>
           <p:cNvSpPr txBox="1"/>
           <p:nvPr/>
         </p:nvSpPr>
@@ -9615,7 +7506,7 @@
         <p:spPr>
           <a:xfrm>
             <a:off x="0" y="0"/>
-            <a:ext cx="12191695" cy="960120"/>
+            <a:ext cx="12191695" cy="1170432"/>
           </a:xfrm>
           <a:prstGeom prst="rect">
             <a:avLst/>
@@ -9657,7 +7548,7 @@
         </p:nvSpPr>
         <p:spPr>
           <a:xfrm>
-            <a:off x="0" y="960120"/>
+            <a:off x="0" y="1170432"/>
             <a:ext cx="12191695" cy="41148"/>
           </a:xfrm>
           <a:prstGeom prst="rect">
@@ -9701,7 +7592,7 @@
         <p:spPr>
           <a:xfrm>
             <a:off x="457200" y="164592"/>
-            <a:ext cx="11277295" cy="502920"/>
+            <a:ext cx="11277295" cy="384048"/>
           </a:xfrm>
           <a:prstGeom prst="rect">
             <a:avLst/>
@@ -9721,7 +7612,7 @@
                 </a:solidFill>
                 <a:latin typeface="Calibri"/>
               </a:rPr>
-              <a:t>Para la Clase 15</a:t>
+              <a:t>Taller de hoy: Guion de nueve minutos y plan B</a:t>
             </a:r>
           </a:p>
         </p:txBody>
@@ -9734,8 +7625,8 @@
         </p:nvSpPr>
         <p:spPr>
           <a:xfrm>
-            <a:off x="457200" y="1170432"/>
-            <a:ext cx="11277295" cy="5230368"/>
+            <a:off x="457200" y="566928"/>
+            <a:ext cx="11277295" cy="411480"/>
           </a:xfrm>
           <a:prstGeom prst="rect">
             <a:avLst/>
@@ -9748,252 +7639,1053 @@
           </a:bodyPr>
           <a:lstStyle/>
           <a:p>
-            <a:pPr>
-              <a:spcAft>
-                <a:spcPts val="800"/>
-              </a:spcAft>
-            </a:pPr>
-            <a:r>
-              <a:rPr sz="2000" b="0" i="0">
-                <a:solidFill>
-                  <a:srgbClr val="333333"/>
-                </a:solidFill>
-                <a:latin typeface="Calibri"/>
-              </a:rPr>
-              <a:t>–   </a:t>
-            </a:r>
-            <a:r>
-              <a:rPr sz="2000" b="1" i="0">
-                <a:solidFill>
-                  <a:srgbClr val="333333"/>
-                </a:solidFill>
-                <a:latin typeface="Calibri"/>
-              </a:rPr>
-              <a:t>Trabajo dirigido:</a:t>
-            </a:r>
-            <a:r>
-              <a:rPr sz="2000" b="0" i="0">
-                <a:solidFill>
-                  <a:srgbClr val="333333"/>
-                </a:solidFill>
-                <a:latin typeface="Calibri"/>
-              </a:rPr>
-              <a:t> Diseño de presentación y recursos visuales — dejar terminadas las ocho diapositivas y el guion con tiempos en la carpeta del equipo, junto con el PDF y las capturas.</a:t>
-            </a:r>
-          </a:p>
-          <a:p>
-            <a:pPr>
-              <a:spcAft>
-                <a:spcPts val="800"/>
-              </a:spcAft>
-            </a:pPr>
-            <a:r>
-              <a:rPr sz="2000" b="0" i="0">
-                <a:solidFill>
-                  <a:srgbClr val="333333"/>
-                </a:solidFill>
-                <a:latin typeface="Calibri"/>
-              </a:rPr>
-              <a:t>–   </a:t>
-            </a:r>
-            <a:r>
-              <a:rPr sz="2000" b="1" i="0">
-                <a:solidFill>
-                  <a:srgbClr val="333333"/>
-                </a:solidFill>
-                <a:latin typeface="Calibri"/>
-              </a:rPr>
-              <a:t>Trabajo independiente:</a:t>
-            </a:r>
-            <a:r>
-              <a:rPr sz="2000" b="0" i="0">
-                <a:solidFill>
-                  <a:srgbClr val="333333"/>
-                </a:solidFill>
-                <a:latin typeface="Calibri"/>
-              </a:rPr>
-              <a:t> Ensayo general: ensayar </a:t>
-            </a:r>
-            <a:r>
-              <a:rPr sz="2000" b="1" i="0">
-                <a:solidFill>
-                  <a:srgbClr val="333333"/>
-                </a:solidFill>
-                <a:latin typeface="Calibri"/>
-              </a:rPr>
-              <a:t>los nueve minutos completos, hablando y con cronómetro, al menos dos veces</a:t>
-            </a:r>
-            <a:r>
-              <a:rPr sz="2000" b="0" i="0">
-                <a:solidFill>
-                  <a:srgbClr val="333333"/>
-                </a:solidFill>
-                <a:latin typeface="Calibri"/>
-              </a:rPr>
-              <a:t>, y ajustar el guion con el tiempo real. Leerlo en silencio no cuenta: dura la mitad.</a:t>
-            </a:r>
-          </a:p>
-          <a:p>
-            <a:pPr>
-              <a:spcAft>
-                <a:spcPts val="800"/>
-              </a:spcAft>
-            </a:pPr>
-            <a:r>
-              <a:rPr sz="2000" b="0" i="0">
-                <a:solidFill>
-                  <a:srgbClr val="333333"/>
-                </a:solidFill>
-                <a:latin typeface="Calibri"/>
-              </a:rPr>
-              <a:t>–   </a:t>
-            </a:r>
-            <a:r>
-              <a:rPr sz="2000" b="1" i="0">
-                <a:solidFill>
-                  <a:srgbClr val="333333"/>
-                </a:solidFill>
-                <a:latin typeface="Calibri"/>
-              </a:rPr>
-              <a:t>Clase 15 · Exposición final de proyectos</a:t>
-            </a:r>
-            <a:r>
-              <a:rPr sz="2000" b="0" i="0">
-                <a:solidFill>
-                  <a:srgbClr val="333333"/>
-                </a:solidFill>
-                <a:latin typeface="Calibri"/>
-              </a:rPr>
-              <a:t> — es la </a:t>
-            </a:r>
-            <a:r>
-              <a:rPr sz="2000" b="1" i="0">
-                <a:solidFill>
-                  <a:srgbClr val="333333"/>
-                </a:solidFill>
-                <a:latin typeface="Calibri"/>
-              </a:rPr>
-              <a:t>exposición final</a:t>
-            </a:r>
-            <a:r>
-              <a:rPr sz="2000" b="0" i="0">
-                <a:solidFill>
-                  <a:srgbClr val="333333"/>
-                </a:solidFill>
-                <a:latin typeface="Calibri"/>
-              </a:rPr>
-              <a:t>, con nota: nueve minutos por equipo y tres de preguntas. Vale el </a:t>
-            </a:r>
-            <a:r>
-              <a:rPr sz="2000" b="1" i="0">
-                <a:solidFill>
-                  <a:srgbClr val="333333"/>
-                </a:solidFill>
-                <a:latin typeface="Calibri"/>
-              </a:rPr>
-              <a:t>15 %</a:t>
-            </a:r>
-            <a:r>
-              <a:rPr sz="2000" b="0" i="0">
-                <a:solidFill>
-                  <a:srgbClr val="333333"/>
-                </a:solidFill>
-                <a:latin typeface="Calibri"/>
-              </a:rPr>
-              <a:t> del curso.</a:t>
-            </a:r>
-          </a:p>
-          <a:p>
-            <a:pPr>
-              <a:spcAft>
-                <a:spcPts val="800"/>
-              </a:spcAft>
-            </a:pPr>
-            <a:r>
-              <a:rPr sz="2000" b="0" i="0">
-                <a:solidFill>
-                  <a:srgbClr val="333333"/>
-                </a:solidFill>
-                <a:latin typeface="Calibri"/>
-              </a:rPr>
-              <a:t>–   </a:t>
-            </a:r>
-            <a:r>
-              <a:rPr sz="2000" b="1" i="0">
-                <a:solidFill>
-                  <a:srgbClr val="333333"/>
-                </a:solidFill>
-                <a:latin typeface="Calibri"/>
-              </a:rPr>
-              <a:t>Aviso:</a:t>
-            </a:r>
-            <a:r>
-              <a:rPr sz="2000" b="0" i="0">
-                <a:solidFill>
-                  <a:srgbClr val="333333"/>
-                </a:solidFill>
-                <a:latin typeface="Calibri"/>
-              </a:rPr>
-              <a:t> En la Clase 15 </a:t>
-            </a:r>
-            <a:r>
-              <a:rPr sz="2000" b="1" i="0">
-                <a:solidFill>
-                  <a:srgbClr val="333333"/>
-                </a:solidFill>
-                <a:latin typeface="Calibri"/>
-              </a:rPr>
-              <a:t>se corta a los nueve minutos</a:t>
-            </a:r>
-            <a:r>
-              <a:rPr sz="2000" b="0" i="0">
-                <a:solidFill>
-                  <a:srgbClr val="333333"/>
-                </a:solidFill>
-                <a:latin typeface="Calibri"/>
-              </a:rPr>
-              <a:t>, sin excepción. Conéctense cinco minutos antes con la presentación y el prototipo ya abiertos, y con las capturas a mano. El orden de exposición se sortea al empezar, así que todos los equipos deben estar listos desde el primer minuto.</a:t>
-            </a:r>
-          </a:p>
-          <a:p>
-            <a:pPr>
-              <a:spcAft>
-                <a:spcPts val="800"/>
-              </a:spcAft>
-            </a:pPr>
-            <a:r>
-              <a:rPr sz="2000" b="0" i="0">
-                <a:solidFill>
-                  <a:srgbClr val="333333"/>
-                </a:solidFill>
-                <a:latin typeface="Calibri"/>
-              </a:rPr>
-              <a:t>–   </a:t>
-            </a:r>
-            <a:r>
-              <a:rPr sz="2000" b="1" i="0">
-                <a:solidFill>
-                  <a:srgbClr val="333333"/>
-                </a:solidFill>
-                <a:latin typeface="Calibri"/>
-              </a:rPr>
-              <a:t>Antes de salir:</a:t>
-            </a:r>
-            <a:r>
-              <a:rPr sz="2000" b="0" i="0">
-                <a:solidFill>
-                  <a:srgbClr val="333333"/>
-                </a:solidFill>
-                <a:latin typeface="Calibri"/>
-              </a:rPr>
-              <a:t> el enlace del documento del equipo en el chat, con permiso de lectura para el docente, y el nombre del vocero de hoy.</a:t>
-            </a:r>
-          </a:p>
-        </p:txBody>
-      </p:sp>
-      <p:sp>
-        <p:nvSpPr>
-          <p:cNvPr id="6" name="TextBox 5"/>
+            <a:r>
+              <a:rPr sz="1400" b="0" i="0">
+                <a:solidFill>
+                  <a:srgbClr val="B8D8EE"/>
+                </a:solidFill>
+                <a:latin typeface="Calibri"/>
+              </a:rPr>
+              <a:t>27 min en equipos · 27 min: guion, diapositivas, demostración y plan B · guion con tiempos + diapositivas + PDF y capturas del plan B</a:t>
+            </a:r>
+          </a:p>
+        </p:txBody>
+      </p:sp>
+      <p:sp>
+        <p:nvSpPr>
+          <p:cNvPr id="6" name="Rounded Rectangle 5"/>
+          <p:cNvSpPr/>
+          <p:nvPr/>
+        </p:nvSpPr>
+        <p:spPr>
+          <a:xfrm>
+            <a:off x="457200" y="1472184"/>
+            <a:ext cx="11277295" cy="566928"/>
+          </a:xfrm>
+          <a:prstGeom prst="roundRect">
+            <a:avLst>
+              <a:gd name="adj" fmla="val 12000"/>
+            </a:avLst>
+          </a:prstGeom>
+          <a:solidFill>
+            <a:srgbClr val="F2F2F2"/>
+          </a:solidFill>
+          <a:ln>
+            <a:noFill/>
+          </a:ln>
+        </p:spPr>
+        <p:style>
+          <a:lnRef idx="1">
+            <a:schemeClr val="accent1"/>
+          </a:lnRef>
+          <a:fillRef idx="3">
+            <a:schemeClr val="accent1"/>
+          </a:fillRef>
+          <a:effectRef idx="2">
+            <a:schemeClr val="accent1"/>
+          </a:effectRef>
+          <a:fontRef idx="minor">
+            <a:schemeClr val="lt1"/>
+          </a:fontRef>
+        </p:style>
+        <p:txBody>
+          <a:bodyPr rtlCol="0" anchor="ctr"/>
+          <a:lstStyle/>
+          <a:p>
+            <a:pPr algn="ctr"/>
+          </a:p>
+        </p:txBody>
+      </p:sp>
+      <p:sp>
+        <p:nvSpPr>
+          <p:cNvPr id="7" name="Rectangle 6"/>
+          <p:cNvSpPr/>
+          <p:nvPr/>
+        </p:nvSpPr>
+        <p:spPr>
+          <a:xfrm>
+            <a:off x="640080" y="1618487"/>
+            <a:ext cx="274320" cy="274320"/>
+          </a:xfrm>
+          <a:prstGeom prst="rect">
+            <a:avLst/>
+          </a:prstGeom>
+          <a:solidFill>
+            <a:srgbClr val="FFFFFF"/>
+          </a:solidFill>
+          <a:ln>
+            <a:solidFill>
+              <a:srgbClr val="333333"/>
+            </a:solidFill>
+          </a:ln>
+        </p:spPr>
+        <p:style>
+          <a:lnRef idx="1">
+            <a:schemeClr val="accent1"/>
+          </a:lnRef>
+          <a:fillRef idx="3">
+            <a:schemeClr val="accent1"/>
+          </a:fillRef>
+          <a:effectRef idx="2">
+            <a:schemeClr val="accent1"/>
+          </a:effectRef>
+          <a:fontRef idx="minor">
+            <a:schemeClr val="lt1"/>
+          </a:fontRef>
+        </p:style>
+        <p:txBody>
+          <a:bodyPr rtlCol="0" anchor="ctr"/>
+          <a:lstStyle/>
+          <a:p>
+            <a:pPr algn="ctr"/>
+          </a:p>
+        </p:txBody>
+      </p:sp>
+      <p:sp>
+        <p:nvSpPr>
+          <p:cNvPr id="8" name="Rectangle 7"/>
+          <p:cNvSpPr/>
+          <p:nvPr/>
+        </p:nvSpPr>
+        <p:spPr>
+          <a:xfrm>
+            <a:off x="640080" y="1618487"/>
+            <a:ext cx="73152" cy="274320"/>
+          </a:xfrm>
+          <a:prstGeom prst="rect">
+            <a:avLst/>
+          </a:prstGeom>
+          <a:solidFill>
+            <a:srgbClr val="269CCB"/>
+          </a:solidFill>
+          <a:ln>
+            <a:noFill/>
+          </a:ln>
+        </p:spPr>
+        <p:style>
+          <a:lnRef idx="1">
+            <a:schemeClr val="accent1"/>
+          </a:lnRef>
+          <a:fillRef idx="3">
+            <a:schemeClr val="accent1"/>
+          </a:fillRef>
+          <a:effectRef idx="2">
+            <a:schemeClr val="accent1"/>
+          </a:effectRef>
+          <a:fontRef idx="minor">
+            <a:schemeClr val="lt1"/>
+          </a:fontRef>
+        </p:style>
+        <p:txBody>
+          <a:bodyPr rtlCol="0" anchor="ctr"/>
+          <a:lstStyle/>
+          <a:p>
+            <a:pPr algn="ctr"/>
+          </a:p>
+        </p:txBody>
+      </p:sp>
+      <p:sp>
+        <p:nvSpPr>
+          <p:cNvPr id="9" name="TextBox 8"/>
+          <p:cNvSpPr txBox="1"/>
+          <p:nvPr/>
+        </p:nvSpPr>
+        <p:spPr>
+          <a:xfrm>
+            <a:off x="1097280" y="1563624"/>
+            <a:ext cx="10362895" cy="402336"/>
+          </a:xfrm>
+          <a:prstGeom prst="rect">
+            <a:avLst/>
+          </a:prstGeom>
+          <a:noFill/>
+        </p:spPr>
+        <p:txBody>
+          <a:bodyPr wrap="square" anchor="ctr"/>
+          <a:lstStyle/>
+          <a:p>
+            <a:r>
+              <a:rPr sz="1500" b="1" i="0">
+                <a:solidFill>
+                  <a:srgbClr val="333333"/>
+                </a:solidFill>
+                <a:latin typeface="Calibri"/>
+              </a:rPr>
+              <a:t>EL GUION DE LOS CINCO TRAMOS</a:t>
+            </a:r>
+            <a:r>
+              <a:rPr sz="1500" b="0" i="0">
+                <a:solidFill>
+                  <a:srgbClr val="333333"/>
+                </a:solidFill>
+                <a:latin typeface="Calibri"/>
+              </a:rPr>
+              <a:t> — Los cinco tramos con </a:t>
+            </a:r>
+            <a:r>
+              <a:rPr sz="1500" b="1" i="0">
+                <a:solidFill>
+                  <a:srgbClr val="333333"/>
+                </a:solidFill>
+                <a:latin typeface="Calibri"/>
+              </a:rPr>
+              <a:t>el tiempo asignado a cada uno</a:t>
+            </a:r>
+            <a:r>
+              <a:rPr sz="1500" b="0" i="0">
+                <a:solidFill>
+                  <a:srgbClr val="333333"/>
+                </a:solidFill>
+                <a:latin typeface="Calibri"/>
+              </a:rPr>
+              <a:t> —que sume nueve minutos— y </a:t>
+            </a:r>
+            <a:r>
+              <a:rPr sz="1500" b="1" i="0">
+                <a:solidFill>
+                  <a:srgbClr val="333333"/>
+                </a:solidFill>
+                <a:latin typeface="Calibri"/>
+              </a:rPr>
+              <a:t>quién habla</a:t>
+            </a:r>
+            <a:r>
+              <a:rPr sz="1500" b="0" i="0">
+                <a:solidFill>
+                  <a:srgbClr val="333333"/>
+                </a:solidFill>
+                <a:latin typeface="Calibri"/>
+              </a:rPr>
+              <a:t> en cada uno.</a:t>
+            </a:r>
+          </a:p>
+        </p:txBody>
+      </p:sp>
+      <p:sp>
+        <p:nvSpPr>
+          <p:cNvPr id="10" name="Rounded Rectangle 9"/>
+          <p:cNvSpPr/>
+          <p:nvPr/>
+        </p:nvSpPr>
+        <p:spPr>
+          <a:xfrm>
+            <a:off x="457200" y="2148839"/>
+            <a:ext cx="11277295" cy="566928"/>
+          </a:xfrm>
+          <a:prstGeom prst="roundRect">
+            <a:avLst>
+              <a:gd name="adj" fmla="val 12000"/>
+            </a:avLst>
+          </a:prstGeom>
+          <a:solidFill>
+            <a:srgbClr val="F2F2F2"/>
+          </a:solidFill>
+          <a:ln>
+            <a:noFill/>
+          </a:ln>
+        </p:spPr>
+        <p:style>
+          <a:lnRef idx="1">
+            <a:schemeClr val="accent1"/>
+          </a:lnRef>
+          <a:fillRef idx="3">
+            <a:schemeClr val="accent1"/>
+          </a:fillRef>
+          <a:effectRef idx="2">
+            <a:schemeClr val="accent1"/>
+          </a:effectRef>
+          <a:fontRef idx="minor">
+            <a:schemeClr val="lt1"/>
+          </a:fontRef>
+        </p:style>
+        <p:txBody>
+          <a:bodyPr rtlCol="0" anchor="ctr"/>
+          <a:lstStyle/>
+          <a:p>
+            <a:pPr algn="ctr"/>
+          </a:p>
+        </p:txBody>
+      </p:sp>
+      <p:sp>
+        <p:nvSpPr>
+          <p:cNvPr id="11" name="Rectangle 10"/>
+          <p:cNvSpPr/>
+          <p:nvPr/>
+        </p:nvSpPr>
+        <p:spPr>
+          <a:xfrm>
+            <a:off x="640080" y="2295144"/>
+            <a:ext cx="274320" cy="274320"/>
+          </a:xfrm>
+          <a:prstGeom prst="rect">
+            <a:avLst/>
+          </a:prstGeom>
+          <a:solidFill>
+            <a:srgbClr val="FFFFFF"/>
+          </a:solidFill>
+          <a:ln>
+            <a:solidFill>
+              <a:srgbClr val="333333"/>
+            </a:solidFill>
+          </a:ln>
+        </p:spPr>
+        <p:style>
+          <a:lnRef idx="1">
+            <a:schemeClr val="accent1"/>
+          </a:lnRef>
+          <a:fillRef idx="3">
+            <a:schemeClr val="accent1"/>
+          </a:fillRef>
+          <a:effectRef idx="2">
+            <a:schemeClr val="accent1"/>
+          </a:effectRef>
+          <a:fontRef idx="minor">
+            <a:schemeClr val="lt1"/>
+          </a:fontRef>
+        </p:style>
+        <p:txBody>
+          <a:bodyPr rtlCol="0" anchor="ctr"/>
+          <a:lstStyle/>
+          <a:p>
+            <a:pPr algn="ctr"/>
+          </a:p>
+        </p:txBody>
+      </p:sp>
+      <p:sp>
+        <p:nvSpPr>
+          <p:cNvPr id="12" name="Rectangle 11"/>
+          <p:cNvSpPr/>
+          <p:nvPr/>
+        </p:nvSpPr>
+        <p:spPr>
+          <a:xfrm>
+            <a:off x="640080" y="2295144"/>
+            <a:ext cx="73152" cy="274320"/>
+          </a:xfrm>
+          <a:prstGeom prst="rect">
+            <a:avLst/>
+          </a:prstGeom>
+          <a:solidFill>
+            <a:srgbClr val="269CCB"/>
+          </a:solidFill>
+          <a:ln>
+            <a:noFill/>
+          </a:ln>
+        </p:spPr>
+        <p:style>
+          <a:lnRef idx="1">
+            <a:schemeClr val="accent1"/>
+          </a:lnRef>
+          <a:fillRef idx="3">
+            <a:schemeClr val="accent1"/>
+          </a:fillRef>
+          <a:effectRef idx="2">
+            <a:schemeClr val="accent1"/>
+          </a:effectRef>
+          <a:fontRef idx="minor">
+            <a:schemeClr val="lt1"/>
+          </a:fontRef>
+        </p:style>
+        <p:txBody>
+          <a:bodyPr rtlCol="0" anchor="ctr"/>
+          <a:lstStyle/>
+          <a:p>
+            <a:pPr algn="ctr"/>
+          </a:p>
+        </p:txBody>
+      </p:sp>
+      <p:sp>
+        <p:nvSpPr>
+          <p:cNvPr id="13" name="TextBox 12"/>
+          <p:cNvSpPr txBox="1"/>
+          <p:nvPr/>
+        </p:nvSpPr>
+        <p:spPr>
+          <a:xfrm>
+            <a:off x="1097280" y="2240279"/>
+            <a:ext cx="10362895" cy="402336"/>
+          </a:xfrm>
+          <a:prstGeom prst="rect">
+            <a:avLst/>
+          </a:prstGeom>
+          <a:noFill/>
+        </p:spPr>
+        <p:txBody>
+          <a:bodyPr wrap="square" anchor="ctr"/>
+          <a:lstStyle/>
+          <a:p>
+            <a:r>
+              <a:rPr sz="1500" b="1" i="0">
+                <a:solidFill>
+                  <a:srgbClr val="333333"/>
+                </a:solidFill>
+                <a:latin typeface="Calibri"/>
+              </a:rPr>
+              <a:t>LAS OCHO DIAPOSITIVAS</a:t>
+            </a:r>
+            <a:r>
+              <a:rPr sz="1500" b="0" i="0">
+                <a:solidFill>
+                  <a:srgbClr val="333333"/>
+                </a:solidFill>
+                <a:latin typeface="Calibri"/>
+              </a:rPr>
+              <a:t> — Máximo ocho, </a:t>
+            </a:r>
+            <a:r>
+              <a:rPr sz="1500" b="1" i="0">
+                <a:solidFill>
+                  <a:srgbClr val="333333"/>
+                </a:solidFill>
+                <a:latin typeface="Calibri"/>
+              </a:rPr>
+              <a:t>una idea cada una</a:t>
+            </a:r>
+            <a:r>
+              <a:rPr sz="1500" b="0" i="0">
+                <a:solidFill>
+                  <a:srgbClr val="333333"/>
+                </a:solidFill>
+                <a:latin typeface="Calibri"/>
+              </a:rPr>
+              <a:t>, con rótulos y no párrafos. La matriz completa </a:t>
+            </a:r>
+            <a:r>
+              <a:rPr sz="1500" b="1" i="0">
+                <a:solidFill>
+                  <a:srgbClr val="333333"/>
+                </a:solidFill>
+                <a:latin typeface="Calibri"/>
+              </a:rPr>
+              <a:t>no va</a:t>
+            </a:r>
+            <a:r>
+              <a:rPr sz="1500" b="0" i="0">
+                <a:solidFill>
+                  <a:srgbClr val="333333"/>
+                </a:solidFill>
+                <a:latin typeface="Calibri"/>
+              </a:rPr>
+              <a:t>: van las dos alternativas y el ganador.</a:t>
+            </a:r>
+          </a:p>
+        </p:txBody>
+      </p:sp>
+      <p:sp>
+        <p:nvSpPr>
+          <p:cNvPr id="14" name="Rounded Rectangle 13"/>
+          <p:cNvSpPr/>
+          <p:nvPr/>
+        </p:nvSpPr>
+        <p:spPr>
+          <a:xfrm>
+            <a:off x="457200" y="2825496"/>
+            <a:ext cx="11277295" cy="566928"/>
+          </a:xfrm>
+          <a:prstGeom prst="roundRect">
+            <a:avLst>
+              <a:gd name="adj" fmla="val 12000"/>
+            </a:avLst>
+          </a:prstGeom>
+          <a:solidFill>
+            <a:srgbClr val="F2F2F2"/>
+          </a:solidFill>
+          <a:ln>
+            <a:noFill/>
+          </a:ln>
+        </p:spPr>
+        <p:style>
+          <a:lnRef idx="1">
+            <a:schemeClr val="accent1"/>
+          </a:lnRef>
+          <a:fillRef idx="3">
+            <a:schemeClr val="accent1"/>
+          </a:fillRef>
+          <a:effectRef idx="2">
+            <a:schemeClr val="accent1"/>
+          </a:effectRef>
+          <a:fontRef idx="minor">
+            <a:schemeClr val="lt1"/>
+          </a:fontRef>
+        </p:style>
+        <p:txBody>
+          <a:bodyPr rtlCol="0" anchor="ctr"/>
+          <a:lstStyle/>
+          <a:p>
+            <a:pPr algn="ctr"/>
+          </a:p>
+        </p:txBody>
+      </p:sp>
+      <p:sp>
+        <p:nvSpPr>
+          <p:cNvPr id="15" name="Rectangle 14"/>
+          <p:cNvSpPr/>
+          <p:nvPr/>
+        </p:nvSpPr>
+        <p:spPr>
+          <a:xfrm>
+            <a:off x="640080" y="2971800"/>
+            <a:ext cx="274320" cy="274320"/>
+          </a:xfrm>
+          <a:prstGeom prst="rect">
+            <a:avLst/>
+          </a:prstGeom>
+          <a:solidFill>
+            <a:srgbClr val="FFFFFF"/>
+          </a:solidFill>
+          <a:ln>
+            <a:solidFill>
+              <a:srgbClr val="333333"/>
+            </a:solidFill>
+          </a:ln>
+        </p:spPr>
+        <p:style>
+          <a:lnRef idx="1">
+            <a:schemeClr val="accent1"/>
+          </a:lnRef>
+          <a:fillRef idx="3">
+            <a:schemeClr val="accent1"/>
+          </a:fillRef>
+          <a:effectRef idx="2">
+            <a:schemeClr val="accent1"/>
+          </a:effectRef>
+          <a:fontRef idx="minor">
+            <a:schemeClr val="lt1"/>
+          </a:fontRef>
+        </p:style>
+        <p:txBody>
+          <a:bodyPr rtlCol="0" anchor="ctr"/>
+          <a:lstStyle/>
+          <a:p>
+            <a:pPr algn="ctr"/>
+          </a:p>
+        </p:txBody>
+      </p:sp>
+      <p:sp>
+        <p:nvSpPr>
+          <p:cNvPr id="16" name="Rectangle 15"/>
+          <p:cNvSpPr/>
+          <p:nvPr/>
+        </p:nvSpPr>
+        <p:spPr>
+          <a:xfrm>
+            <a:off x="640080" y="2971800"/>
+            <a:ext cx="73152" cy="274320"/>
+          </a:xfrm>
+          <a:prstGeom prst="rect">
+            <a:avLst/>
+          </a:prstGeom>
+          <a:solidFill>
+            <a:srgbClr val="269CCB"/>
+          </a:solidFill>
+          <a:ln>
+            <a:noFill/>
+          </a:ln>
+        </p:spPr>
+        <p:style>
+          <a:lnRef idx="1">
+            <a:schemeClr val="accent1"/>
+          </a:lnRef>
+          <a:fillRef idx="3">
+            <a:schemeClr val="accent1"/>
+          </a:fillRef>
+          <a:effectRef idx="2">
+            <a:schemeClr val="accent1"/>
+          </a:effectRef>
+          <a:fontRef idx="minor">
+            <a:schemeClr val="lt1"/>
+          </a:fontRef>
+        </p:style>
+        <p:txBody>
+          <a:bodyPr rtlCol="0" anchor="ctr"/>
+          <a:lstStyle/>
+          <a:p>
+            <a:pPr algn="ctr"/>
+          </a:p>
+        </p:txBody>
+      </p:sp>
+      <p:sp>
+        <p:nvSpPr>
+          <p:cNvPr id="17" name="TextBox 16"/>
+          <p:cNvSpPr txBox="1"/>
+          <p:nvPr/>
+        </p:nvSpPr>
+        <p:spPr>
+          <a:xfrm>
+            <a:off x="1097280" y="2916936"/>
+            <a:ext cx="10362895" cy="402336"/>
+          </a:xfrm>
+          <a:prstGeom prst="rect">
+            <a:avLst/>
+          </a:prstGeom>
+          <a:noFill/>
+        </p:spPr>
+        <p:txBody>
+          <a:bodyPr wrap="square" anchor="ctr"/>
+          <a:lstStyle/>
+          <a:p>
+            <a:r>
+              <a:rPr sz="1500" b="1" i="0">
+                <a:solidFill>
+                  <a:srgbClr val="333333"/>
+                </a:solidFill>
+                <a:latin typeface="Calibri"/>
+              </a:rPr>
+              <a:t>EL REPARTO ENTRE INTEGRANTES</a:t>
+            </a:r>
+            <a:r>
+              <a:rPr sz="1500" b="0" i="0">
+                <a:solidFill>
+                  <a:srgbClr val="333333"/>
+                </a:solidFill>
+                <a:latin typeface="Calibri"/>
+              </a:rPr>
+              <a:t> — Quién habla en cada tramo, y </a:t>
+            </a:r>
+            <a:r>
+              <a:rPr sz="1500" b="1" i="0">
+                <a:solidFill>
+                  <a:srgbClr val="333333"/>
+                </a:solidFill>
+                <a:latin typeface="Calibri"/>
+              </a:rPr>
+              <a:t>qué hace quien no habla</a:t>
+            </a:r>
+            <a:r>
+              <a:rPr sz="1500" b="0" i="0">
+                <a:solidFill>
+                  <a:srgbClr val="333333"/>
+                </a:solidFill>
+                <a:latin typeface="Calibri"/>
+              </a:rPr>
+              <a:t>: cronómetro, capturas del plan B, la diapositiva siguiente lista.</a:t>
+            </a:r>
+          </a:p>
+        </p:txBody>
+      </p:sp>
+      <p:sp>
+        <p:nvSpPr>
+          <p:cNvPr id="18" name="Rounded Rectangle 17"/>
+          <p:cNvSpPr/>
+          <p:nvPr/>
+        </p:nvSpPr>
+        <p:spPr>
+          <a:xfrm>
+            <a:off x="457200" y="3502152"/>
+            <a:ext cx="11277295" cy="566928"/>
+          </a:xfrm>
+          <a:prstGeom prst="roundRect">
+            <a:avLst>
+              <a:gd name="adj" fmla="val 12000"/>
+            </a:avLst>
+          </a:prstGeom>
+          <a:solidFill>
+            <a:srgbClr val="F2F2F2"/>
+          </a:solidFill>
+          <a:ln>
+            <a:noFill/>
+          </a:ln>
+        </p:spPr>
+        <p:style>
+          <a:lnRef idx="1">
+            <a:schemeClr val="accent1"/>
+          </a:lnRef>
+          <a:fillRef idx="3">
+            <a:schemeClr val="accent1"/>
+          </a:fillRef>
+          <a:effectRef idx="2">
+            <a:schemeClr val="accent1"/>
+          </a:effectRef>
+          <a:fontRef idx="minor">
+            <a:schemeClr val="lt1"/>
+          </a:fontRef>
+        </p:style>
+        <p:txBody>
+          <a:bodyPr rtlCol="0" anchor="ctr"/>
+          <a:lstStyle/>
+          <a:p>
+            <a:pPr algn="ctr"/>
+          </a:p>
+        </p:txBody>
+      </p:sp>
+      <p:sp>
+        <p:nvSpPr>
+          <p:cNvPr id="19" name="Rectangle 18"/>
+          <p:cNvSpPr/>
+          <p:nvPr/>
+        </p:nvSpPr>
+        <p:spPr>
+          <a:xfrm>
+            <a:off x="640080" y="3648456"/>
+            <a:ext cx="274320" cy="274320"/>
+          </a:xfrm>
+          <a:prstGeom prst="rect">
+            <a:avLst/>
+          </a:prstGeom>
+          <a:solidFill>
+            <a:srgbClr val="FFFFFF"/>
+          </a:solidFill>
+          <a:ln>
+            <a:solidFill>
+              <a:srgbClr val="333333"/>
+            </a:solidFill>
+          </a:ln>
+        </p:spPr>
+        <p:style>
+          <a:lnRef idx="1">
+            <a:schemeClr val="accent1"/>
+          </a:lnRef>
+          <a:fillRef idx="3">
+            <a:schemeClr val="accent1"/>
+          </a:fillRef>
+          <a:effectRef idx="2">
+            <a:schemeClr val="accent1"/>
+          </a:effectRef>
+          <a:fontRef idx="minor">
+            <a:schemeClr val="lt1"/>
+          </a:fontRef>
+        </p:style>
+        <p:txBody>
+          <a:bodyPr rtlCol="0" anchor="ctr"/>
+          <a:lstStyle/>
+          <a:p>
+            <a:pPr algn="ctr"/>
+          </a:p>
+        </p:txBody>
+      </p:sp>
+      <p:sp>
+        <p:nvSpPr>
+          <p:cNvPr id="20" name="Rectangle 19"/>
+          <p:cNvSpPr/>
+          <p:nvPr/>
+        </p:nvSpPr>
+        <p:spPr>
+          <a:xfrm>
+            <a:off x="640080" y="3648456"/>
+            <a:ext cx="73152" cy="274320"/>
+          </a:xfrm>
+          <a:prstGeom prst="rect">
+            <a:avLst/>
+          </a:prstGeom>
+          <a:solidFill>
+            <a:srgbClr val="269CCB"/>
+          </a:solidFill>
+          <a:ln>
+            <a:noFill/>
+          </a:ln>
+        </p:spPr>
+        <p:style>
+          <a:lnRef idx="1">
+            <a:schemeClr val="accent1"/>
+          </a:lnRef>
+          <a:fillRef idx="3">
+            <a:schemeClr val="accent1"/>
+          </a:fillRef>
+          <a:effectRef idx="2">
+            <a:schemeClr val="accent1"/>
+          </a:effectRef>
+          <a:fontRef idx="minor">
+            <a:schemeClr val="lt1"/>
+          </a:fontRef>
+        </p:style>
+        <p:txBody>
+          <a:bodyPr rtlCol="0" anchor="ctr"/>
+          <a:lstStyle/>
+          <a:p>
+            <a:pPr algn="ctr"/>
+          </a:p>
+        </p:txBody>
+      </p:sp>
+      <p:sp>
+        <p:nvSpPr>
+          <p:cNvPr id="21" name="TextBox 20"/>
+          <p:cNvSpPr txBox="1"/>
+          <p:nvPr/>
+        </p:nvSpPr>
+        <p:spPr>
+          <a:xfrm>
+            <a:off x="1097280" y="3593592"/>
+            <a:ext cx="10362895" cy="402336"/>
+          </a:xfrm>
+          <a:prstGeom prst="rect">
+            <a:avLst/>
+          </a:prstGeom>
+          <a:noFill/>
+        </p:spPr>
+        <p:txBody>
+          <a:bodyPr wrap="square" anchor="ctr"/>
+          <a:lstStyle/>
+          <a:p>
+            <a:r>
+              <a:rPr sz="1500" b="1" i="0">
+                <a:solidFill>
+                  <a:srgbClr val="333333"/>
+                </a:solidFill>
+                <a:latin typeface="Calibri"/>
+              </a:rPr>
+              <a:t>LA DEMOSTRACIÓN DEL PROTOTIPO</a:t>
+            </a:r>
+            <a:r>
+              <a:rPr sz="1500" b="0" i="0">
+                <a:solidFill>
+                  <a:srgbClr val="333333"/>
+                </a:solidFill>
+                <a:latin typeface="Calibri"/>
+              </a:rPr>
+              <a:t> — El recorrido de </a:t>
+            </a:r>
+            <a:r>
+              <a:rPr sz="1500" b="1" i="0">
+                <a:solidFill>
+                  <a:srgbClr val="333333"/>
+                </a:solidFill>
+                <a:latin typeface="Calibri"/>
+              </a:rPr>
+              <a:t>tres pasos</a:t>
+            </a:r>
+            <a:r>
+              <a:rPr sz="1500" b="0" i="0">
+                <a:solidFill>
+                  <a:srgbClr val="333333"/>
+                </a:solidFill>
+                <a:latin typeface="Calibri"/>
+              </a:rPr>
+              <a:t> que se va a mostrar, con </a:t>
+            </a:r>
+            <a:r>
+              <a:rPr sz="1500" b="1" i="0">
+                <a:solidFill>
+                  <a:srgbClr val="333333"/>
+                </a:solidFill>
+                <a:latin typeface="Calibri"/>
+              </a:rPr>
+              <a:t>una persona narrando y otra manejando la pantalla</a:t>
+            </a:r>
+            <a:r>
+              <a:rPr sz="1500" b="0" i="0">
+                <a:solidFill>
+                  <a:srgbClr val="333333"/>
+                </a:solidFill>
+                <a:latin typeface="Calibri"/>
+              </a:rPr>
+              <a:t>. Ensayado dos veces.</a:t>
+            </a:r>
+          </a:p>
+        </p:txBody>
+      </p:sp>
+      <p:sp>
+        <p:nvSpPr>
+          <p:cNvPr id="22" name="Rounded Rectangle 21"/>
+          <p:cNvSpPr/>
+          <p:nvPr/>
+        </p:nvSpPr>
+        <p:spPr>
+          <a:xfrm>
+            <a:off x="457200" y="4178808"/>
+            <a:ext cx="11277295" cy="566928"/>
+          </a:xfrm>
+          <a:prstGeom prst="roundRect">
+            <a:avLst>
+              <a:gd name="adj" fmla="val 12000"/>
+            </a:avLst>
+          </a:prstGeom>
+          <a:solidFill>
+            <a:srgbClr val="F2F2F2"/>
+          </a:solidFill>
+          <a:ln>
+            <a:noFill/>
+          </a:ln>
+        </p:spPr>
+        <p:style>
+          <a:lnRef idx="1">
+            <a:schemeClr val="accent1"/>
+          </a:lnRef>
+          <a:fillRef idx="3">
+            <a:schemeClr val="accent1"/>
+          </a:fillRef>
+          <a:effectRef idx="2">
+            <a:schemeClr val="accent1"/>
+          </a:effectRef>
+          <a:fontRef idx="minor">
+            <a:schemeClr val="lt1"/>
+          </a:fontRef>
+        </p:style>
+        <p:txBody>
+          <a:bodyPr rtlCol="0" anchor="ctr"/>
+          <a:lstStyle/>
+          <a:p>
+            <a:pPr algn="ctr"/>
+          </a:p>
+        </p:txBody>
+      </p:sp>
+      <p:sp>
+        <p:nvSpPr>
+          <p:cNvPr id="23" name="Rectangle 22"/>
+          <p:cNvSpPr/>
+          <p:nvPr/>
+        </p:nvSpPr>
+        <p:spPr>
+          <a:xfrm>
+            <a:off x="640080" y="4325112"/>
+            <a:ext cx="274320" cy="274320"/>
+          </a:xfrm>
+          <a:prstGeom prst="rect">
+            <a:avLst/>
+          </a:prstGeom>
+          <a:solidFill>
+            <a:srgbClr val="FFFFFF"/>
+          </a:solidFill>
+          <a:ln>
+            <a:solidFill>
+              <a:srgbClr val="333333"/>
+            </a:solidFill>
+          </a:ln>
+        </p:spPr>
+        <p:style>
+          <a:lnRef idx="1">
+            <a:schemeClr val="accent1"/>
+          </a:lnRef>
+          <a:fillRef idx="3">
+            <a:schemeClr val="accent1"/>
+          </a:fillRef>
+          <a:effectRef idx="2">
+            <a:schemeClr val="accent1"/>
+          </a:effectRef>
+          <a:fontRef idx="minor">
+            <a:schemeClr val="lt1"/>
+          </a:fontRef>
+        </p:style>
+        <p:txBody>
+          <a:bodyPr rtlCol="0" anchor="ctr"/>
+          <a:lstStyle/>
+          <a:p>
+            <a:pPr algn="ctr"/>
+          </a:p>
+        </p:txBody>
+      </p:sp>
+      <p:sp>
+        <p:nvSpPr>
+          <p:cNvPr id="24" name="Rectangle 23"/>
+          <p:cNvSpPr/>
+          <p:nvPr/>
+        </p:nvSpPr>
+        <p:spPr>
+          <a:xfrm>
+            <a:off x="640080" y="4325112"/>
+            <a:ext cx="73152" cy="274320"/>
+          </a:xfrm>
+          <a:prstGeom prst="rect">
+            <a:avLst/>
+          </a:prstGeom>
+          <a:solidFill>
+            <a:srgbClr val="269CCB"/>
+          </a:solidFill>
+          <a:ln>
+            <a:noFill/>
+          </a:ln>
+        </p:spPr>
+        <p:style>
+          <a:lnRef idx="1">
+            <a:schemeClr val="accent1"/>
+          </a:lnRef>
+          <a:fillRef idx="3">
+            <a:schemeClr val="accent1"/>
+          </a:fillRef>
+          <a:effectRef idx="2">
+            <a:schemeClr val="accent1"/>
+          </a:effectRef>
+          <a:fontRef idx="minor">
+            <a:schemeClr val="lt1"/>
+          </a:fontRef>
+        </p:style>
+        <p:txBody>
+          <a:bodyPr rtlCol="0" anchor="ctr"/>
+          <a:lstStyle/>
+          <a:p>
+            <a:pPr algn="ctr"/>
+          </a:p>
+        </p:txBody>
+      </p:sp>
+      <p:sp>
+        <p:nvSpPr>
+          <p:cNvPr id="25" name="TextBox 24"/>
+          <p:cNvSpPr txBox="1"/>
+          <p:nvPr/>
+        </p:nvSpPr>
+        <p:spPr>
+          <a:xfrm>
+            <a:off x="1097280" y="4270248"/>
+            <a:ext cx="10362895" cy="402336"/>
+          </a:xfrm>
+          <a:prstGeom prst="rect">
+            <a:avLst/>
+          </a:prstGeom>
+          <a:noFill/>
+        </p:spPr>
+        <p:txBody>
+          <a:bodyPr wrap="square" anchor="ctr"/>
+          <a:lstStyle/>
+          <a:p>
+            <a:r>
+              <a:rPr sz="1500" b="1" i="0">
+                <a:solidFill>
+                  <a:srgbClr val="333333"/>
+                </a:solidFill>
+                <a:latin typeface="Calibri"/>
+              </a:rPr>
+              <a:t>EL PLAN B TÉCNICO</a:t>
+            </a:r>
+            <a:r>
+              <a:rPr sz="1500" b="0" i="0">
+                <a:solidFill>
+                  <a:srgbClr val="333333"/>
+                </a:solidFill>
+                <a:latin typeface="Calibri"/>
+              </a:rPr>
+              <a:t> — En la carpeta del equipo: la presentación </a:t>
+            </a:r>
+            <a:r>
+              <a:rPr sz="1500" b="1" i="0">
+                <a:solidFill>
+                  <a:srgbClr val="333333"/>
+                </a:solidFill>
+                <a:latin typeface="Calibri"/>
+              </a:rPr>
+              <a:t>en PDF</a:t>
+            </a:r>
+            <a:r>
+              <a:rPr sz="1500" b="0" i="0">
+                <a:solidFill>
+                  <a:srgbClr val="333333"/>
+                </a:solidFill>
+                <a:latin typeface="Calibri"/>
+              </a:rPr>
+              <a:t>, </a:t>
+            </a:r>
+            <a:r>
+              <a:rPr sz="1500" b="1" i="0">
+                <a:solidFill>
+                  <a:srgbClr val="333333"/>
+                </a:solidFill>
+                <a:latin typeface="Calibri"/>
+              </a:rPr>
+              <a:t>capturas de cada paso</a:t>
+            </a:r>
+            <a:r>
+              <a:rPr sz="1500" b="0" i="0">
+                <a:solidFill>
+                  <a:srgbClr val="333333"/>
+                </a:solidFill>
+                <a:latin typeface="Calibri"/>
+              </a:rPr>
+              <a:t> de la demostración, y quién comparte pantalla si se cae el primero.</a:t>
+            </a:r>
+          </a:p>
+        </p:txBody>
+      </p:sp>
+      <p:sp>
+        <p:nvSpPr>
+          <p:cNvPr id="26" name="TextBox 25"/>
           <p:cNvSpPr txBox="1"/>
           <p:nvPr/>
         </p:nvSpPr>
@@ -10035,6 +8727,1549 @@
 </file>
 
 <file path=ppt/slides/slide21.xml><?xml version="1.0" encoding="utf-8"?>
+<p:sld xmlns:a="http://schemas.openxmlformats.org/drawingml/2006/main" xmlns:p="http://schemas.openxmlformats.org/presentationml/2006/main" xmlns:r="http://schemas.openxmlformats.org/officeDocument/2006/relationships">
+  <p:cSld>
+    <p:bg>
+      <p:bgPr>
+        <a:solidFill>
+          <a:srgbClr val="FFFFFF"/>
+        </a:solidFill>
+        <a:effectLst/>
+      </p:bgPr>
+    </p:bg>
+    <p:spTree>
+      <p:nvGrpSpPr>
+        <p:cNvPr id="1" name=""/>
+        <p:cNvGrpSpPr/>
+        <p:nvPr/>
+      </p:nvGrpSpPr>
+      <p:grpSpPr/>
+      <p:sp>
+        <p:nvSpPr>
+          <p:cNvPr id="2" name="Rectangle 1"/>
+          <p:cNvSpPr/>
+          <p:nvPr/>
+        </p:nvSpPr>
+        <p:spPr>
+          <a:xfrm>
+            <a:off x="0" y="0"/>
+            <a:ext cx="12191695" cy="1170432"/>
+          </a:xfrm>
+          <a:prstGeom prst="rect">
+            <a:avLst/>
+          </a:prstGeom>
+          <a:solidFill>
+            <a:srgbClr val="095292"/>
+          </a:solidFill>
+          <a:ln>
+            <a:noFill/>
+          </a:ln>
+        </p:spPr>
+        <p:style>
+          <a:lnRef idx="1">
+            <a:schemeClr val="accent1"/>
+          </a:lnRef>
+          <a:fillRef idx="3">
+            <a:schemeClr val="accent1"/>
+          </a:fillRef>
+          <a:effectRef idx="2">
+            <a:schemeClr val="accent1"/>
+          </a:effectRef>
+          <a:fontRef idx="minor">
+            <a:schemeClr val="lt1"/>
+          </a:fontRef>
+        </p:style>
+        <p:txBody>
+          <a:bodyPr rtlCol="0" anchor="ctr"/>
+          <a:lstStyle/>
+          <a:p>
+            <a:pPr algn="ctr"/>
+          </a:p>
+        </p:txBody>
+      </p:sp>
+      <p:sp>
+        <p:nvSpPr>
+          <p:cNvPr id="3" name="Rectangle 2"/>
+          <p:cNvSpPr/>
+          <p:nvPr/>
+        </p:nvSpPr>
+        <p:spPr>
+          <a:xfrm>
+            <a:off x="0" y="1170432"/>
+            <a:ext cx="12191695" cy="41148"/>
+          </a:xfrm>
+          <a:prstGeom prst="rect">
+            <a:avLst/>
+          </a:prstGeom>
+          <a:solidFill>
+            <a:srgbClr val="FFD000"/>
+          </a:solidFill>
+          <a:ln>
+            <a:noFill/>
+          </a:ln>
+        </p:spPr>
+        <p:style>
+          <a:lnRef idx="1">
+            <a:schemeClr val="accent1"/>
+          </a:lnRef>
+          <a:fillRef idx="3">
+            <a:schemeClr val="accent1"/>
+          </a:fillRef>
+          <a:effectRef idx="2">
+            <a:schemeClr val="accent1"/>
+          </a:effectRef>
+          <a:fontRef idx="minor">
+            <a:schemeClr val="lt1"/>
+          </a:fontRef>
+        </p:style>
+        <p:txBody>
+          <a:bodyPr rtlCol="0" anchor="ctr"/>
+          <a:lstStyle/>
+          <a:p>
+            <a:pPr algn="ctr"/>
+          </a:p>
+        </p:txBody>
+      </p:sp>
+      <p:sp>
+        <p:nvSpPr>
+          <p:cNvPr id="4" name="TextBox 3"/>
+          <p:cNvSpPr txBox="1"/>
+          <p:nvPr/>
+        </p:nvSpPr>
+        <p:spPr>
+          <a:xfrm>
+            <a:off x="457200" y="164592"/>
+            <a:ext cx="11277295" cy="384048"/>
+          </a:xfrm>
+          <a:prstGeom prst="rect">
+            <a:avLst/>
+          </a:prstGeom>
+          <a:noFill/>
+        </p:spPr>
+        <p:txBody>
+          <a:bodyPr wrap="square">
+            <a:spAutoFit/>
+          </a:bodyPr>
+          <a:lstStyle/>
+          <a:p>
+            <a:r>
+              <a:rPr sz="2600" b="1" i="0">
+                <a:solidFill>
+                  <a:srgbClr val="FFFFFF"/>
+                </a:solidFill>
+                <a:latin typeface="Calibri"/>
+              </a:rPr>
+              <a:t>Cómo se expone en 4 minutos</a:t>
+            </a:r>
+          </a:p>
+        </p:txBody>
+      </p:sp>
+      <p:sp>
+        <p:nvSpPr>
+          <p:cNvPr id="5" name="TextBox 4"/>
+          <p:cNvSpPr txBox="1"/>
+          <p:nvPr/>
+        </p:nvSpPr>
+        <p:spPr>
+          <a:xfrm>
+            <a:off x="457200" y="566928"/>
+            <a:ext cx="11277295" cy="411480"/>
+          </a:xfrm>
+          <a:prstGeom prst="rect">
+            <a:avLst/>
+          </a:prstGeom>
+          <a:noFill/>
+        </p:spPr>
+        <p:txBody>
+          <a:bodyPr wrap="square">
+            <a:spAutoFit/>
+          </a:bodyPr>
+          <a:lstStyle/>
+          <a:p>
+            <a:r>
+              <a:rPr sz="1400" b="0" i="0">
+                <a:solidFill>
+                  <a:srgbClr val="B8D8EE"/>
+                </a:solidFill>
+                <a:latin typeface="Calibri"/>
+              </a:rPr>
+              <a:t>Habla el vocero con la pantalla ya compartida · cronómetro en pantalla · se corta al llegar a cero</a:t>
+            </a:r>
+          </a:p>
+        </p:txBody>
+      </p:sp>
+      <p:sp>
+        <p:nvSpPr>
+          <p:cNvPr id="6" name="Rounded Rectangle 5"/>
+          <p:cNvSpPr/>
+          <p:nvPr/>
+        </p:nvSpPr>
+        <p:spPr>
+          <a:xfrm>
+            <a:off x="457200" y="1444752"/>
+            <a:ext cx="11277295" cy="908913"/>
+          </a:xfrm>
+          <a:prstGeom prst="roundRect">
+            <a:avLst>
+              <a:gd name="adj" fmla="val 12000"/>
+            </a:avLst>
+          </a:prstGeom>
+          <a:solidFill>
+            <a:srgbClr val="F2F2F2"/>
+          </a:solidFill>
+          <a:ln>
+            <a:noFill/>
+          </a:ln>
+        </p:spPr>
+        <p:style>
+          <a:lnRef idx="1">
+            <a:schemeClr val="accent1"/>
+          </a:lnRef>
+          <a:fillRef idx="3">
+            <a:schemeClr val="accent1"/>
+          </a:fillRef>
+          <a:effectRef idx="2">
+            <a:schemeClr val="accent1"/>
+          </a:effectRef>
+          <a:fontRef idx="minor">
+            <a:schemeClr val="lt1"/>
+          </a:fontRef>
+        </p:style>
+        <p:txBody>
+          <a:bodyPr rtlCol="0" anchor="ctr"/>
+          <a:lstStyle/>
+          <a:p>
+            <a:pPr algn="ctr"/>
+          </a:p>
+        </p:txBody>
+      </p:sp>
+      <p:sp>
+        <p:nvSpPr>
+          <p:cNvPr id="7" name="Rounded Rectangle 6"/>
+          <p:cNvSpPr/>
+          <p:nvPr/>
+        </p:nvSpPr>
+        <p:spPr>
+          <a:xfrm>
+            <a:off x="594360" y="1679752"/>
+            <a:ext cx="438912" cy="438912"/>
+          </a:xfrm>
+          <a:prstGeom prst="roundRect">
+            <a:avLst>
+              <a:gd name="adj" fmla="val 12000"/>
+            </a:avLst>
+          </a:prstGeom>
+          <a:solidFill>
+            <a:srgbClr val="095292"/>
+          </a:solidFill>
+          <a:ln>
+            <a:noFill/>
+          </a:ln>
+        </p:spPr>
+        <p:style>
+          <a:lnRef idx="1">
+            <a:schemeClr val="accent1"/>
+          </a:lnRef>
+          <a:fillRef idx="3">
+            <a:schemeClr val="accent1"/>
+          </a:fillRef>
+          <a:effectRef idx="2">
+            <a:schemeClr val="accent1"/>
+          </a:effectRef>
+          <a:fontRef idx="minor">
+            <a:schemeClr val="lt1"/>
+          </a:fontRef>
+        </p:style>
+        <p:txBody>
+          <a:bodyPr rtlCol="0" anchor="ctr"/>
+          <a:lstStyle/>
+          <a:p>
+            <a:pPr algn="ctr"/>
+          </a:p>
+        </p:txBody>
+      </p:sp>
+      <p:sp>
+        <p:nvSpPr>
+          <p:cNvPr id="8" name="TextBox 7"/>
+          <p:cNvSpPr txBox="1"/>
+          <p:nvPr/>
+        </p:nvSpPr>
+        <p:spPr>
+          <a:xfrm>
+            <a:off x="594360" y="1679752"/>
+            <a:ext cx="438912" cy="438912"/>
+          </a:xfrm>
+          <a:prstGeom prst="rect">
+            <a:avLst/>
+          </a:prstGeom>
+          <a:noFill/>
+        </p:spPr>
+        <p:txBody>
+          <a:bodyPr wrap="square" anchor="ctr"/>
+          <a:lstStyle/>
+          <a:p>
+            <a:pPr algn="ctr"/>
+            <a:r>
+              <a:rPr sz="1600" b="1" i="0">
+                <a:solidFill>
+                  <a:srgbClr val="FFFFFF"/>
+                </a:solidFill>
+                <a:latin typeface="Calibri"/>
+              </a:rPr>
+              <a:t>1</a:t>
+            </a:r>
+          </a:p>
+        </p:txBody>
+      </p:sp>
+      <p:sp>
+        <p:nvSpPr>
+          <p:cNvPr id="9" name="TextBox 8"/>
+          <p:cNvSpPr txBox="1"/>
+          <p:nvPr/>
+        </p:nvSpPr>
+        <p:spPr>
+          <a:xfrm>
+            <a:off x="1188720" y="1536192"/>
+            <a:ext cx="10271455" cy="744321"/>
+          </a:xfrm>
+          <a:prstGeom prst="rect">
+            <a:avLst/>
+          </a:prstGeom>
+          <a:noFill/>
+        </p:spPr>
+        <p:txBody>
+          <a:bodyPr wrap="square" anchor="ctr"/>
+          <a:lstStyle/>
+          <a:p>
+            <a:r>
+              <a:rPr sz="1500" b="1" i="0">
+                <a:solidFill>
+                  <a:srgbClr val="095292"/>
+                </a:solidFill>
+                <a:latin typeface="Calibri"/>
+              </a:rPr>
+              <a:t>Tramo 1 · 1 min</a:t>
+            </a:r>
+          </a:p>
+          <a:p>
+            <a:pPr>
+              <a:spcBef>
+                <a:spcPts val="200"/>
+              </a:spcBef>
+            </a:pPr>
+            <a:r>
+              <a:rPr sz="1300" b="0" i="0">
+                <a:solidFill>
+                  <a:srgbClr val="333333"/>
+                </a:solidFill>
+                <a:latin typeface="Calibri"/>
+              </a:rPr>
+              <a:t>El problema con su cifra. </a:t>
+            </a:r>
+            <a:r>
+              <a:rPr sz="1300" b="1" i="0">
+                <a:solidFill>
+                  <a:srgbClr val="333333"/>
+                </a:solidFill>
+                <a:latin typeface="Calibri"/>
+              </a:rPr>
+              <a:t>Sin presentaciones personales.</a:t>
+            </a:r>
+          </a:p>
+        </p:txBody>
+      </p:sp>
+      <p:sp>
+        <p:nvSpPr>
+          <p:cNvPr id="10" name="Rounded Rectangle 9"/>
+          <p:cNvSpPr/>
+          <p:nvPr/>
+        </p:nvSpPr>
+        <p:spPr>
+          <a:xfrm>
+            <a:off x="457200" y="2445105"/>
+            <a:ext cx="11277295" cy="908913"/>
+          </a:xfrm>
+          <a:prstGeom prst="roundRect">
+            <a:avLst>
+              <a:gd name="adj" fmla="val 12000"/>
+            </a:avLst>
+          </a:prstGeom>
+          <a:solidFill>
+            <a:srgbClr val="E8F4FA"/>
+          </a:solidFill>
+          <a:ln>
+            <a:noFill/>
+          </a:ln>
+        </p:spPr>
+        <p:style>
+          <a:lnRef idx="1">
+            <a:schemeClr val="accent1"/>
+          </a:lnRef>
+          <a:fillRef idx="3">
+            <a:schemeClr val="accent1"/>
+          </a:fillRef>
+          <a:effectRef idx="2">
+            <a:schemeClr val="accent1"/>
+          </a:effectRef>
+          <a:fontRef idx="minor">
+            <a:schemeClr val="lt1"/>
+          </a:fontRef>
+        </p:style>
+        <p:txBody>
+          <a:bodyPr rtlCol="0" anchor="ctr"/>
+          <a:lstStyle/>
+          <a:p>
+            <a:pPr algn="ctr"/>
+          </a:p>
+        </p:txBody>
+      </p:sp>
+      <p:sp>
+        <p:nvSpPr>
+          <p:cNvPr id="11" name="Rounded Rectangle 10"/>
+          <p:cNvSpPr/>
+          <p:nvPr/>
+        </p:nvSpPr>
+        <p:spPr>
+          <a:xfrm>
+            <a:off x="594360" y="2680106"/>
+            <a:ext cx="438912" cy="438912"/>
+          </a:xfrm>
+          <a:prstGeom prst="roundRect">
+            <a:avLst>
+              <a:gd name="adj" fmla="val 12000"/>
+            </a:avLst>
+          </a:prstGeom>
+          <a:solidFill>
+            <a:srgbClr val="095292"/>
+          </a:solidFill>
+          <a:ln>
+            <a:noFill/>
+          </a:ln>
+        </p:spPr>
+        <p:style>
+          <a:lnRef idx="1">
+            <a:schemeClr val="accent1"/>
+          </a:lnRef>
+          <a:fillRef idx="3">
+            <a:schemeClr val="accent1"/>
+          </a:fillRef>
+          <a:effectRef idx="2">
+            <a:schemeClr val="accent1"/>
+          </a:effectRef>
+          <a:fontRef idx="minor">
+            <a:schemeClr val="lt1"/>
+          </a:fontRef>
+        </p:style>
+        <p:txBody>
+          <a:bodyPr rtlCol="0" anchor="ctr"/>
+          <a:lstStyle/>
+          <a:p>
+            <a:pPr algn="ctr"/>
+          </a:p>
+        </p:txBody>
+      </p:sp>
+      <p:sp>
+        <p:nvSpPr>
+          <p:cNvPr id="12" name="TextBox 11"/>
+          <p:cNvSpPr txBox="1"/>
+          <p:nvPr/>
+        </p:nvSpPr>
+        <p:spPr>
+          <a:xfrm>
+            <a:off x="594360" y="2680106"/>
+            <a:ext cx="438912" cy="438912"/>
+          </a:xfrm>
+          <a:prstGeom prst="rect">
+            <a:avLst/>
+          </a:prstGeom>
+          <a:noFill/>
+        </p:spPr>
+        <p:txBody>
+          <a:bodyPr wrap="square" anchor="ctr"/>
+          <a:lstStyle/>
+          <a:p>
+            <a:pPr algn="ctr"/>
+            <a:r>
+              <a:rPr sz="1600" b="1" i="0">
+                <a:solidFill>
+                  <a:srgbClr val="FFFFFF"/>
+                </a:solidFill>
+                <a:latin typeface="Calibri"/>
+              </a:rPr>
+              <a:t>2</a:t>
+            </a:r>
+          </a:p>
+        </p:txBody>
+      </p:sp>
+      <p:sp>
+        <p:nvSpPr>
+          <p:cNvPr id="13" name="TextBox 12"/>
+          <p:cNvSpPr txBox="1"/>
+          <p:nvPr/>
+        </p:nvSpPr>
+        <p:spPr>
+          <a:xfrm>
+            <a:off x="1188720" y="2536545"/>
+            <a:ext cx="10271455" cy="744321"/>
+          </a:xfrm>
+          <a:prstGeom prst="rect">
+            <a:avLst/>
+          </a:prstGeom>
+          <a:noFill/>
+        </p:spPr>
+        <p:txBody>
+          <a:bodyPr wrap="square" anchor="ctr"/>
+          <a:lstStyle/>
+          <a:p>
+            <a:r>
+              <a:rPr sz="1500" b="1" i="0">
+                <a:solidFill>
+                  <a:srgbClr val="095292"/>
+                </a:solidFill>
+                <a:latin typeface="Calibri"/>
+              </a:rPr>
+              <a:t>Tramo 2 · 2 min</a:t>
+            </a:r>
+          </a:p>
+          <a:p>
+            <a:pPr>
+              <a:spcBef>
+                <a:spcPts val="200"/>
+              </a:spcBef>
+            </a:pPr>
+            <a:r>
+              <a:rPr sz="1300" b="0" i="0">
+                <a:solidFill>
+                  <a:srgbClr val="333333"/>
+                </a:solidFill>
+                <a:latin typeface="Calibri"/>
+              </a:rPr>
+              <a:t>Los afectados y la decisión de la matriz, con lo que se sacrificó.</a:t>
+            </a:r>
+          </a:p>
+        </p:txBody>
+      </p:sp>
+      <p:sp>
+        <p:nvSpPr>
+          <p:cNvPr id="14" name="Rounded Rectangle 13"/>
+          <p:cNvSpPr/>
+          <p:nvPr/>
+        </p:nvSpPr>
+        <p:spPr>
+          <a:xfrm>
+            <a:off x="457200" y="3445459"/>
+            <a:ext cx="11277295" cy="908913"/>
+          </a:xfrm>
+          <a:prstGeom prst="roundRect">
+            <a:avLst>
+              <a:gd name="adj" fmla="val 12000"/>
+            </a:avLst>
+          </a:prstGeom>
+          <a:solidFill>
+            <a:srgbClr val="F2F2F2"/>
+          </a:solidFill>
+          <a:ln>
+            <a:noFill/>
+          </a:ln>
+        </p:spPr>
+        <p:style>
+          <a:lnRef idx="1">
+            <a:schemeClr val="accent1"/>
+          </a:lnRef>
+          <a:fillRef idx="3">
+            <a:schemeClr val="accent1"/>
+          </a:fillRef>
+          <a:effectRef idx="2">
+            <a:schemeClr val="accent1"/>
+          </a:effectRef>
+          <a:fontRef idx="minor">
+            <a:schemeClr val="lt1"/>
+          </a:fontRef>
+        </p:style>
+        <p:txBody>
+          <a:bodyPr rtlCol="0" anchor="ctr"/>
+          <a:lstStyle/>
+          <a:p>
+            <a:pPr algn="ctr"/>
+          </a:p>
+        </p:txBody>
+      </p:sp>
+      <p:sp>
+        <p:nvSpPr>
+          <p:cNvPr id="15" name="Rounded Rectangle 14"/>
+          <p:cNvSpPr/>
+          <p:nvPr/>
+        </p:nvSpPr>
+        <p:spPr>
+          <a:xfrm>
+            <a:off x="594360" y="3680460"/>
+            <a:ext cx="438912" cy="438912"/>
+          </a:xfrm>
+          <a:prstGeom prst="roundRect">
+            <a:avLst>
+              <a:gd name="adj" fmla="val 12000"/>
+            </a:avLst>
+          </a:prstGeom>
+          <a:solidFill>
+            <a:srgbClr val="095292"/>
+          </a:solidFill>
+          <a:ln>
+            <a:noFill/>
+          </a:ln>
+        </p:spPr>
+        <p:style>
+          <a:lnRef idx="1">
+            <a:schemeClr val="accent1"/>
+          </a:lnRef>
+          <a:fillRef idx="3">
+            <a:schemeClr val="accent1"/>
+          </a:fillRef>
+          <a:effectRef idx="2">
+            <a:schemeClr val="accent1"/>
+          </a:effectRef>
+          <a:fontRef idx="minor">
+            <a:schemeClr val="lt1"/>
+          </a:fontRef>
+        </p:style>
+        <p:txBody>
+          <a:bodyPr rtlCol="0" anchor="ctr"/>
+          <a:lstStyle/>
+          <a:p>
+            <a:pPr algn="ctr"/>
+          </a:p>
+        </p:txBody>
+      </p:sp>
+      <p:sp>
+        <p:nvSpPr>
+          <p:cNvPr id="16" name="TextBox 15"/>
+          <p:cNvSpPr txBox="1"/>
+          <p:nvPr/>
+        </p:nvSpPr>
+        <p:spPr>
+          <a:xfrm>
+            <a:off x="594360" y="3680460"/>
+            <a:ext cx="438912" cy="438912"/>
+          </a:xfrm>
+          <a:prstGeom prst="rect">
+            <a:avLst/>
+          </a:prstGeom>
+          <a:noFill/>
+        </p:spPr>
+        <p:txBody>
+          <a:bodyPr wrap="square" anchor="ctr"/>
+          <a:lstStyle/>
+          <a:p>
+            <a:pPr algn="ctr"/>
+            <a:r>
+              <a:rPr sz="1600" b="1" i="0">
+                <a:solidFill>
+                  <a:srgbClr val="FFFFFF"/>
+                </a:solidFill>
+                <a:latin typeface="Calibri"/>
+              </a:rPr>
+              <a:t>3</a:t>
+            </a:r>
+          </a:p>
+        </p:txBody>
+      </p:sp>
+      <p:sp>
+        <p:nvSpPr>
+          <p:cNvPr id="17" name="TextBox 16"/>
+          <p:cNvSpPr txBox="1"/>
+          <p:nvPr/>
+        </p:nvSpPr>
+        <p:spPr>
+          <a:xfrm>
+            <a:off x="1188720" y="3536899"/>
+            <a:ext cx="10271455" cy="744321"/>
+          </a:xfrm>
+          <a:prstGeom prst="rect">
+            <a:avLst/>
+          </a:prstGeom>
+          <a:noFill/>
+        </p:spPr>
+        <p:txBody>
+          <a:bodyPr wrap="square" anchor="ctr"/>
+          <a:lstStyle/>
+          <a:p>
+            <a:r>
+              <a:rPr sz="1500" b="1" i="0">
+                <a:solidFill>
+                  <a:srgbClr val="095292"/>
+                </a:solidFill>
+                <a:latin typeface="Calibri"/>
+              </a:rPr>
+              <a:t>Comienzo del tramo 3 · 1 min</a:t>
+            </a:r>
+          </a:p>
+          <a:p>
+            <a:pPr>
+              <a:spcBef>
+                <a:spcPts val="200"/>
+              </a:spcBef>
+            </a:pPr>
+            <a:r>
+              <a:rPr sz="1300" b="0" i="0">
+                <a:solidFill>
+                  <a:srgbClr val="333333"/>
+                </a:solidFill>
+                <a:latin typeface="Calibri"/>
+              </a:rPr>
+              <a:t>Arrancar la demostración: hasta donde llegue en el minuto.</a:t>
+            </a:r>
+          </a:p>
+        </p:txBody>
+      </p:sp>
+      <p:sp>
+        <p:nvSpPr>
+          <p:cNvPr id="18" name="Rounded Rectangle 17"/>
+          <p:cNvSpPr/>
+          <p:nvPr/>
+        </p:nvSpPr>
+        <p:spPr>
+          <a:xfrm>
+            <a:off x="457200" y="4445812"/>
+            <a:ext cx="11277295" cy="908913"/>
+          </a:xfrm>
+          <a:prstGeom prst="roundRect">
+            <a:avLst>
+              <a:gd name="adj" fmla="val 12000"/>
+            </a:avLst>
+          </a:prstGeom>
+          <a:solidFill>
+            <a:srgbClr val="E8F4FA"/>
+          </a:solidFill>
+          <a:ln>
+            <a:noFill/>
+          </a:ln>
+        </p:spPr>
+        <p:style>
+          <a:lnRef idx="1">
+            <a:schemeClr val="accent1"/>
+          </a:lnRef>
+          <a:fillRef idx="3">
+            <a:schemeClr val="accent1"/>
+          </a:fillRef>
+          <a:effectRef idx="2">
+            <a:schemeClr val="accent1"/>
+          </a:effectRef>
+          <a:fontRef idx="minor">
+            <a:schemeClr val="lt1"/>
+          </a:fontRef>
+        </p:style>
+        <p:txBody>
+          <a:bodyPr rtlCol="0" anchor="ctr"/>
+          <a:lstStyle/>
+          <a:p>
+            <a:pPr algn="ctr"/>
+          </a:p>
+        </p:txBody>
+      </p:sp>
+      <p:sp>
+        <p:nvSpPr>
+          <p:cNvPr id="19" name="Rounded Rectangle 18"/>
+          <p:cNvSpPr/>
+          <p:nvPr/>
+        </p:nvSpPr>
+        <p:spPr>
+          <a:xfrm>
+            <a:off x="594360" y="4680813"/>
+            <a:ext cx="438912" cy="438912"/>
+          </a:xfrm>
+          <a:prstGeom prst="roundRect">
+            <a:avLst>
+              <a:gd name="adj" fmla="val 12000"/>
+            </a:avLst>
+          </a:prstGeom>
+          <a:solidFill>
+            <a:srgbClr val="095292"/>
+          </a:solidFill>
+          <a:ln>
+            <a:noFill/>
+          </a:ln>
+        </p:spPr>
+        <p:style>
+          <a:lnRef idx="1">
+            <a:schemeClr val="accent1"/>
+          </a:lnRef>
+          <a:fillRef idx="3">
+            <a:schemeClr val="accent1"/>
+          </a:fillRef>
+          <a:effectRef idx="2">
+            <a:schemeClr val="accent1"/>
+          </a:effectRef>
+          <a:fontRef idx="minor">
+            <a:schemeClr val="lt1"/>
+          </a:fontRef>
+        </p:style>
+        <p:txBody>
+          <a:bodyPr rtlCol="0" anchor="ctr"/>
+          <a:lstStyle/>
+          <a:p>
+            <a:pPr algn="ctr"/>
+          </a:p>
+        </p:txBody>
+      </p:sp>
+      <p:sp>
+        <p:nvSpPr>
+          <p:cNvPr id="20" name="TextBox 19"/>
+          <p:cNvSpPr txBox="1"/>
+          <p:nvPr/>
+        </p:nvSpPr>
+        <p:spPr>
+          <a:xfrm>
+            <a:off x="594360" y="4680813"/>
+            <a:ext cx="438912" cy="438912"/>
+          </a:xfrm>
+          <a:prstGeom prst="rect">
+            <a:avLst/>
+          </a:prstGeom>
+          <a:noFill/>
+        </p:spPr>
+        <p:txBody>
+          <a:bodyPr wrap="square" anchor="ctr"/>
+          <a:lstStyle/>
+          <a:p>
+            <a:pPr algn="ctr"/>
+            <a:r>
+              <a:rPr sz="1600" b="1" i="0">
+                <a:solidFill>
+                  <a:srgbClr val="FFFFFF"/>
+                </a:solidFill>
+                <a:latin typeface="Calibri"/>
+              </a:rPr>
+              <a:t>4</a:t>
+            </a:r>
+          </a:p>
+        </p:txBody>
+      </p:sp>
+      <p:sp>
+        <p:nvSpPr>
+          <p:cNvPr id="21" name="TextBox 20"/>
+          <p:cNvSpPr txBox="1"/>
+          <p:nvPr/>
+        </p:nvSpPr>
+        <p:spPr>
+          <a:xfrm>
+            <a:off x="1188720" y="4537252"/>
+            <a:ext cx="10271455" cy="744321"/>
+          </a:xfrm>
+          <a:prstGeom prst="rect">
+            <a:avLst/>
+          </a:prstGeom>
+          <a:noFill/>
+        </p:spPr>
+        <p:txBody>
+          <a:bodyPr wrap="square" anchor="ctr"/>
+          <a:lstStyle/>
+          <a:p>
+            <a:r>
+              <a:rPr sz="1500" b="1" i="0">
+                <a:solidFill>
+                  <a:srgbClr val="095292"/>
+                </a:solidFill>
+                <a:latin typeface="Calibri"/>
+              </a:rPr>
+              <a:t>Corte a los 4 min</a:t>
+            </a:r>
+          </a:p>
+          <a:p>
+            <a:pPr>
+              <a:spcBef>
+                <a:spcPts val="200"/>
+              </a:spcBef>
+            </a:pPr>
+            <a:r>
+              <a:rPr sz="1300" b="0" i="0">
+                <a:solidFill>
+                  <a:srgbClr val="333333"/>
+                </a:solidFill>
+                <a:latin typeface="Calibri"/>
+              </a:rPr>
+              <a:t>Se corta en mitad de la frase. En la Clase 15 pasa igual.</a:t>
+            </a:r>
+          </a:p>
+        </p:txBody>
+      </p:sp>
+      <p:sp>
+        <p:nvSpPr>
+          <p:cNvPr id="22" name="Rounded Rectangle 21"/>
+          <p:cNvSpPr/>
+          <p:nvPr/>
+        </p:nvSpPr>
+        <p:spPr>
+          <a:xfrm>
+            <a:off x="457200" y="5446166"/>
+            <a:ext cx="11277295" cy="908913"/>
+          </a:xfrm>
+          <a:prstGeom prst="roundRect">
+            <a:avLst>
+              <a:gd name="adj" fmla="val 12000"/>
+            </a:avLst>
+          </a:prstGeom>
+          <a:solidFill>
+            <a:srgbClr val="F2F2F2"/>
+          </a:solidFill>
+          <a:ln>
+            <a:noFill/>
+          </a:ln>
+        </p:spPr>
+        <p:style>
+          <a:lnRef idx="1">
+            <a:schemeClr val="accent1"/>
+          </a:lnRef>
+          <a:fillRef idx="3">
+            <a:schemeClr val="accent1"/>
+          </a:fillRef>
+          <a:effectRef idx="2">
+            <a:schemeClr val="accent1"/>
+          </a:effectRef>
+          <a:fontRef idx="minor">
+            <a:schemeClr val="lt1"/>
+          </a:fontRef>
+        </p:style>
+        <p:txBody>
+          <a:bodyPr rtlCol="0" anchor="ctr"/>
+          <a:lstStyle/>
+          <a:p>
+            <a:pPr algn="ctr"/>
+          </a:p>
+        </p:txBody>
+      </p:sp>
+      <p:sp>
+        <p:nvSpPr>
+          <p:cNvPr id="23" name="Rounded Rectangle 22"/>
+          <p:cNvSpPr/>
+          <p:nvPr/>
+        </p:nvSpPr>
+        <p:spPr>
+          <a:xfrm>
+            <a:off x="594360" y="5681167"/>
+            <a:ext cx="438912" cy="438912"/>
+          </a:xfrm>
+          <a:prstGeom prst="roundRect">
+            <a:avLst>
+              <a:gd name="adj" fmla="val 12000"/>
+            </a:avLst>
+          </a:prstGeom>
+          <a:solidFill>
+            <a:srgbClr val="095292"/>
+          </a:solidFill>
+          <a:ln>
+            <a:noFill/>
+          </a:ln>
+        </p:spPr>
+        <p:style>
+          <a:lnRef idx="1">
+            <a:schemeClr val="accent1"/>
+          </a:lnRef>
+          <a:fillRef idx="3">
+            <a:schemeClr val="accent1"/>
+          </a:fillRef>
+          <a:effectRef idx="2">
+            <a:schemeClr val="accent1"/>
+          </a:effectRef>
+          <a:fontRef idx="minor">
+            <a:schemeClr val="lt1"/>
+          </a:fontRef>
+        </p:style>
+        <p:txBody>
+          <a:bodyPr rtlCol="0" anchor="ctr"/>
+          <a:lstStyle/>
+          <a:p>
+            <a:pPr algn="ctr"/>
+          </a:p>
+        </p:txBody>
+      </p:sp>
+      <p:sp>
+        <p:nvSpPr>
+          <p:cNvPr id="24" name="TextBox 23"/>
+          <p:cNvSpPr txBox="1"/>
+          <p:nvPr/>
+        </p:nvSpPr>
+        <p:spPr>
+          <a:xfrm>
+            <a:off x="594360" y="5681167"/>
+            <a:ext cx="438912" cy="438912"/>
+          </a:xfrm>
+          <a:prstGeom prst="rect">
+            <a:avLst/>
+          </a:prstGeom>
+          <a:noFill/>
+        </p:spPr>
+        <p:txBody>
+          <a:bodyPr wrap="square" anchor="ctr"/>
+          <a:lstStyle/>
+          <a:p>
+            <a:pPr algn="ctr"/>
+            <a:r>
+              <a:rPr sz="1600" b="1" i="0">
+                <a:solidFill>
+                  <a:srgbClr val="FFFFFF"/>
+                </a:solidFill>
+                <a:latin typeface="Calibri"/>
+              </a:rPr>
+              <a:t>5</a:t>
+            </a:r>
+          </a:p>
+        </p:txBody>
+      </p:sp>
+      <p:sp>
+        <p:nvSpPr>
+          <p:cNvPr id="25" name="TextBox 24"/>
+          <p:cNvSpPr txBox="1"/>
+          <p:nvPr/>
+        </p:nvSpPr>
+        <p:spPr>
+          <a:xfrm>
+            <a:off x="1188720" y="5537606"/>
+            <a:ext cx="10271455" cy="744321"/>
+          </a:xfrm>
+          <a:prstGeom prst="rect">
+            <a:avLst/>
+          </a:prstGeom>
+          <a:noFill/>
+        </p:spPr>
+        <p:txBody>
+          <a:bodyPr wrap="square" anchor="ctr"/>
+          <a:lstStyle/>
+          <a:p>
+            <a:r>
+              <a:rPr sz="1500" b="1" i="0">
+                <a:solidFill>
+                  <a:srgbClr val="095292"/>
+                </a:solidFill>
+                <a:latin typeface="Calibri"/>
+              </a:rPr>
+              <a:t>2 min de corrección</a:t>
+            </a:r>
+          </a:p>
+          <a:p>
+            <a:pPr>
+              <a:spcBef>
+                <a:spcPts val="200"/>
+              </a:spcBef>
+            </a:pPr>
+            <a:r>
+              <a:rPr sz="1300" b="0" i="0">
+                <a:solidFill>
+                  <a:srgbClr val="333333"/>
+                </a:solidFill>
+                <a:latin typeface="Calibri"/>
+              </a:rPr>
+              <a:t>El docente dice </a:t>
+            </a:r>
+            <a:r>
+              <a:rPr sz="1300" b="1" i="0">
+                <a:solidFill>
+                  <a:srgbClr val="333333"/>
+                </a:solidFill>
+                <a:latin typeface="Calibri"/>
+              </a:rPr>
+              <a:t>una sola cosa</a:t>
+            </a:r>
+            <a:r>
+              <a:rPr sz="1300" b="0" i="0">
+                <a:solidFill>
+                  <a:srgbClr val="333333"/>
+                </a:solidFill>
+                <a:latin typeface="Calibri"/>
+              </a:rPr>
+              <a:t>, la que más cambie la presentación.</a:t>
+            </a:r>
+          </a:p>
+        </p:txBody>
+      </p:sp>
+      <p:sp>
+        <p:nvSpPr>
+          <p:cNvPr id="26" name="TextBox 25"/>
+          <p:cNvSpPr txBox="1"/>
+          <p:nvPr/>
+        </p:nvSpPr>
+        <p:spPr>
+          <a:xfrm>
+            <a:off x="11185855" y="6473952"/>
+            <a:ext cx="640080" cy="274320"/>
+          </a:xfrm>
+          <a:prstGeom prst="rect">
+            <a:avLst/>
+          </a:prstGeom>
+          <a:noFill/>
+        </p:spPr>
+        <p:txBody>
+          <a:bodyPr wrap="square">
+            <a:spAutoFit/>
+          </a:bodyPr>
+          <a:lstStyle/>
+          <a:p>
+            <a:pPr algn="r"/>
+            <a:r>
+              <a:rPr sz="1100" b="0" i="0">
+                <a:solidFill>
+                  <a:srgbClr val="666666"/>
+                </a:solidFill>
+                <a:latin typeface="Calibri"/>
+              </a:rPr>
+              <a:t>21</a:t>
+            </a:r>
+          </a:p>
+        </p:txBody>
+      </p:sp>
+    </p:spTree>
+  </p:cSld>
+  <p:clrMapOvr>
+    <a:masterClrMapping/>
+  </p:clrMapOvr>
+</p:sld>
+</file>
+
+<file path=ppt/slides/slide22.xml><?xml version="1.0" encoding="utf-8"?>
+<p:sld xmlns:a="http://schemas.openxmlformats.org/drawingml/2006/main" xmlns:p="http://schemas.openxmlformats.org/presentationml/2006/main" xmlns:r="http://schemas.openxmlformats.org/officeDocument/2006/relationships">
+  <p:cSld>
+    <p:bg>
+      <p:bgPr>
+        <a:solidFill>
+          <a:srgbClr val="FFFFFF"/>
+        </a:solidFill>
+        <a:effectLst/>
+      </p:bgPr>
+    </p:bg>
+    <p:spTree>
+      <p:nvGrpSpPr>
+        <p:cNvPr id="1" name=""/>
+        <p:cNvGrpSpPr/>
+        <p:nvPr/>
+      </p:nvGrpSpPr>
+      <p:grpSpPr/>
+      <p:sp>
+        <p:nvSpPr>
+          <p:cNvPr id="2" name="Rectangle 1"/>
+          <p:cNvSpPr/>
+          <p:nvPr/>
+        </p:nvSpPr>
+        <p:spPr>
+          <a:xfrm>
+            <a:off x="0" y="0"/>
+            <a:ext cx="12191695" cy="960120"/>
+          </a:xfrm>
+          <a:prstGeom prst="rect">
+            <a:avLst/>
+          </a:prstGeom>
+          <a:solidFill>
+            <a:srgbClr val="095292"/>
+          </a:solidFill>
+          <a:ln>
+            <a:noFill/>
+          </a:ln>
+        </p:spPr>
+        <p:style>
+          <a:lnRef idx="1">
+            <a:schemeClr val="accent1"/>
+          </a:lnRef>
+          <a:fillRef idx="3">
+            <a:schemeClr val="accent1"/>
+          </a:fillRef>
+          <a:effectRef idx="2">
+            <a:schemeClr val="accent1"/>
+          </a:effectRef>
+          <a:fontRef idx="minor">
+            <a:schemeClr val="lt1"/>
+          </a:fontRef>
+        </p:style>
+        <p:txBody>
+          <a:bodyPr rtlCol="0" anchor="ctr"/>
+          <a:lstStyle/>
+          <a:p>
+            <a:pPr algn="ctr"/>
+          </a:p>
+        </p:txBody>
+      </p:sp>
+      <p:sp>
+        <p:nvSpPr>
+          <p:cNvPr id="3" name="Rectangle 2"/>
+          <p:cNvSpPr/>
+          <p:nvPr/>
+        </p:nvSpPr>
+        <p:spPr>
+          <a:xfrm>
+            <a:off x="0" y="960120"/>
+            <a:ext cx="12191695" cy="41148"/>
+          </a:xfrm>
+          <a:prstGeom prst="rect">
+            <a:avLst/>
+          </a:prstGeom>
+          <a:solidFill>
+            <a:srgbClr val="FFD000"/>
+          </a:solidFill>
+          <a:ln>
+            <a:noFill/>
+          </a:ln>
+        </p:spPr>
+        <p:style>
+          <a:lnRef idx="1">
+            <a:schemeClr val="accent1"/>
+          </a:lnRef>
+          <a:fillRef idx="3">
+            <a:schemeClr val="accent1"/>
+          </a:fillRef>
+          <a:effectRef idx="2">
+            <a:schemeClr val="accent1"/>
+          </a:effectRef>
+          <a:fontRef idx="minor">
+            <a:schemeClr val="lt1"/>
+          </a:fontRef>
+        </p:style>
+        <p:txBody>
+          <a:bodyPr rtlCol="0" anchor="ctr"/>
+          <a:lstStyle/>
+          <a:p>
+            <a:pPr algn="ctr"/>
+          </a:p>
+        </p:txBody>
+      </p:sp>
+      <p:sp>
+        <p:nvSpPr>
+          <p:cNvPr id="4" name="TextBox 3"/>
+          <p:cNvSpPr txBox="1"/>
+          <p:nvPr/>
+        </p:nvSpPr>
+        <p:spPr>
+          <a:xfrm>
+            <a:off x="457200" y="164592"/>
+            <a:ext cx="11277295" cy="502920"/>
+          </a:xfrm>
+          <a:prstGeom prst="rect">
+            <a:avLst/>
+          </a:prstGeom>
+          <a:noFill/>
+        </p:spPr>
+        <p:txBody>
+          <a:bodyPr wrap="square">
+            <a:spAutoFit/>
+          </a:bodyPr>
+          <a:lstStyle/>
+          <a:p>
+            <a:r>
+              <a:rPr sz="2600" b="1" i="0">
+                <a:solidFill>
+                  <a:srgbClr val="FFFFFF"/>
+                </a:solidFill>
+                <a:latin typeface="Calibri"/>
+              </a:rPr>
+              <a:t>Para la Clase 15</a:t>
+            </a:r>
+          </a:p>
+        </p:txBody>
+      </p:sp>
+      <p:sp>
+        <p:nvSpPr>
+          <p:cNvPr id="5" name="TextBox 4"/>
+          <p:cNvSpPr txBox="1"/>
+          <p:nvPr/>
+        </p:nvSpPr>
+        <p:spPr>
+          <a:xfrm>
+            <a:off x="457200" y="1170432"/>
+            <a:ext cx="11277295" cy="5230368"/>
+          </a:xfrm>
+          <a:prstGeom prst="rect">
+            <a:avLst/>
+          </a:prstGeom>
+          <a:noFill/>
+        </p:spPr>
+        <p:txBody>
+          <a:bodyPr wrap="square">
+            <a:spAutoFit/>
+          </a:bodyPr>
+          <a:lstStyle/>
+          <a:p>
+            <a:pPr>
+              <a:spcAft>
+                <a:spcPts val="800"/>
+              </a:spcAft>
+            </a:pPr>
+            <a:r>
+              <a:rPr sz="2000" b="0" i="0">
+                <a:solidFill>
+                  <a:srgbClr val="333333"/>
+                </a:solidFill>
+                <a:latin typeface="Calibri"/>
+              </a:rPr>
+              <a:t>–   </a:t>
+            </a:r>
+            <a:r>
+              <a:rPr sz="2000" b="1" i="0">
+                <a:solidFill>
+                  <a:srgbClr val="333333"/>
+                </a:solidFill>
+                <a:latin typeface="Calibri"/>
+              </a:rPr>
+              <a:t>Trabajo dirigido:</a:t>
+            </a:r>
+            <a:r>
+              <a:rPr sz="2000" b="0" i="0">
+                <a:solidFill>
+                  <a:srgbClr val="333333"/>
+                </a:solidFill>
+                <a:latin typeface="Calibri"/>
+              </a:rPr>
+              <a:t> Diseño de presentación y recursos visuales — dejar terminadas las ocho diapositivas y el guion con tiempos en la carpeta del equipo, junto con el PDF y las capturas.</a:t>
+            </a:r>
+          </a:p>
+          <a:p>
+            <a:pPr>
+              <a:spcAft>
+                <a:spcPts val="800"/>
+              </a:spcAft>
+            </a:pPr>
+            <a:r>
+              <a:rPr sz="2000" b="0" i="0">
+                <a:solidFill>
+                  <a:srgbClr val="333333"/>
+                </a:solidFill>
+                <a:latin typeface="Calibri"/>
+              </a:rPr>
+              <a:t>–   </a:t>
+            </a:r>
+            <a:r>
+              <a:rPr sz="2000" b="1" i="0">
+                <a:solidFill>
+                  <a:srgbClr val="333333"/>
+                </a:solidFill>
+                <a:latin typeface="Calibri"/>
+              </a:rPr>
+              <a:t>Trabajo independiente:</a:t>
+            </a:r>
+            <a:r>
+              <a:rPr sz="2000" b="0" i="0">
+                <a:solidFill>
+                  <a:srgbClr val="333333"/>
+                </a:solidFill>
+                <a:latin typeface="Calibri"/>
+              </a:rPr>
+              <a:t> Ensayo general: ensayar </a:t>
+            </a:r>
+            <a:r>
+              <a:rPr sz="2000" b="1" i="0">
+                <a:solidFill>
+                  <a:srgbClr val="333333"/>
+                </a:solidFill>
+                <a:latin typeface="Calibri"/>
+              </a:rPr>
+              <a:t>los nueve minutos completos, hablando y con cronómetro, al menos dos veces</a:t>
+            </a:r>
+            <a:r>
+              <a:rPr sz="2000" b="0" i="0">
+                <a:solidFill>
+                  <a:srgbClr val="333333"/>
+                </a:solidFill>
+                <a:latin typeface="Calibri"/>
+              </a:rPr>
+              <a:t>, y ajustar el guion con el tiempo real. Leerlo en silencio no cuenta: dura la mitad.</a:t>
+            </a:r>
+          </a:p>
+          <a:p>
+            <a:pPr>
+              <a:spcAft>
+                <a:spcPts val="800"/>
+              </a:spcAft>
+            </a:pPr>
+            <a:r>
+              <a:rPr sz="2000" b="0" i="0">
+                <a:solidFill>
+                  <a:srgbClr val="333333"/>
+                </a:solidFill>
+                <a:latin typeface="Calibri"/>
+              </a:rPr>
+              <a:t>–   </a:t>
+            </a:r>
+            <a:r>
+              <a:rPr sz="2000" b="1" i="0">
+                <a:solidFill>
+                  <a:srgbClr val="333333"/>
+                </a:solidFill>
+                <a:latin typeface="Calibri"/>
+              </a:rPr>
+              <a:t>Clase 15 · Exposición final de proyectos</a:t>
+            </a:r>
+            <a:r>
+              <a:rPr sz="2000" b="0" i="0">
+                <a:solidFill>
+                  <a:srgbClr val="333333"/>
+                </a:solidFill>
+                <a:latin typeface="Calibri"/>
+              </a:rPr>
+              <a:t> — es la </a:t>
+            </a:r>
+            <a:r>
+              <a:rPr sz="2000" b="1" i="0">
+                <a:solidFill>
+                  <a:srgbClr val="333333"/>
+                </a:solidFill>
+                <a:latin typeface="Calibri"/>
+              </a:rPr>
+              <a:t>exposición final</a:t>
+            </a:r>
+            <a:r>
+              <a:rPr sz="2000" b="0" i="0">
+                <a:solidFill>
+                  <a:srgbClr val="333333"/>
+                </a:solidFill>
+                <a:latin typeface="Calibri"/>
+              </a:rPr>
+              <a:t>, con nota: nueve minutos por equipo y tres de preguntas. Vale el </a:t>
+            </a:r>
+            <a:r>
+              <a:rPr sz="2000" b="1" i="0">
+                <a:solidFill>
+                  <a:srgbClr val="333333"/>
+                </a:solidFill>
+                <a:latin typeface="Calibri"/>
+              </a:rPr>
+              <a:t>15 %</a:t>
+            </a:r>
+            <a:r>
+              <a:rPr sz="2000" b="0" i="0">
+                <a:solidFill>
+                  <a:srgbClr val="333333"/>
+                </a:solidFill>
+                <a:latin typeface="Calibri"/>
+              </a:rPr>
+              <a:t> del curso.</a:t>
+            </a:r>
+          </a:p>
+          <a:p>
+            <a:pPr>
+              <a:spcAft>
+                <a:spcPts val="800"/>
+              </a:spcAft>
+            </a:pPr>
+            <a:r>
+              <a:rPr sz="2000" b="0" i="0">
+                <a:solidFill>
+                  <a:srgbClr val="333333"/>
+                </a:solidFill>
+                <a:latin typeface="Calibri"/>
+              </a:rPr>
+              <a:t>–   </a:t>
+            </a:r>
+            <a:r>
+              <a:rPr sz="2000" b="1" i="0">
+                <a:solidFill>
+                  <a:srgbClr val="333333"/>
+                </a:solidFill>
+                <a:latin typeface="Calibri"/>
+              </a:rPr>
+              <a:t>Aviso:</a:t>
+            </a:r>
+            <a:r>
+              <a:rPr sz="2000" b="0" i="0">
+                <a:solidFill>
+                  <a:srgbClr val="333333"/>
+                </a:solidFill>
+                <a:latin typeface="Calibri"/>
+              </a:rPr>
+              <a:t> En la Clase 15 </a:t>
+            </a:r>
+            <a:r>
+              <a:rPr sz="2000" b="1" i="0">
+                <a:solidFill>
+                  <a:srgbClr val="333333"/>
+                </a:solidFill>
+                <a:latin typeface="Calibri"/>
+              </a:rPr>
+              <a:t>se corta a los nueve minutos</a:t>
+            </a:r>
+            <a:r>
+              <a:rPr sz="2000" b="0" i="0">
+                <a:solidFill>
+                  <a:srgbClr val="333333"/>
+                </a:solidFill>
+                <a:latin typeface="Calibri"/>
+              </a:rPr>
+              <a:t>, sin excepción. Conéctense cinco minutos antes con la presentación y el prototipo ya abiertos, y con las capturas a mano. El orden de exposición se sortea al empezar, así que todos los equipos deben estar listos desde el primer minuto.</a:t>
+            </a:r>
+          </a:p>
+          <a:p>
+            <a:pPr>
+              <a:spcAft>
+                <a:spcPts val="800"/>
+              </a:spcAft>
+            </a:pPr>
+            <a:r>
+              <a:rPr sz="2000" b="0" i="0">
+                <a:solidFill>
+                  <a:srgbClr val="333333"/>
+                </a:solidFill>
+                <a:latin typeface="Calibri"/>
+              </a:rPr>
+              <a:t>–   </a:t>
+            </a:r>
+            <a:r>
+              <a:rPr sz="2000" b="1" i="0">
+                <a:solidFill>
+                  <a:srgbClr val="333333"/>
+                </a:solidFill>
+                <a:latin typeface="Calibri"/>
+              </a:rPr>
+              <a:t>Antes de salir:</a:t>
+            </a:r>
+            <a:r>
+              <a:rPr sz="2000" b="0" i="0">
+                <a:solidFill>
+                  <a:srgbClr val="333333"/>
+                </a:solidFill>
+                <a:latin typeface="Calibri"/>
+              </a:rPr>
+              <a:t> el enlace del documento del equipo en el chat, con permiso de lectura para el docente, y el nombre del vocero de hoy.</a:t>
+            </a:r>
+          </a:p>
+        </p:txBody>
+      </p:sp>
+      <p:sp>
+        <p:nvSpPr>
+          <p:cNvPr id="6" name="TextBox 5"/>
+          <p:cNvSpPr txBox="1"/>
+          <p:nvPr/>
+        </p:nvSpPr>
+        <p:spPr>
+          <a:xfrm>
+            <a:off x="11185855" y="6473952"/>
+            <a:ext cx="640080" cy="274320"/>
+          </a:xfrm>
+          <a:prstGeom prst="rect">
+            <a:avLst/>
+          </a:prstGeom>
+          <a:noFill/>
+        </p:spPr>
+        <p:txBody>
+          <a:bodyPr wrap="square">
+            <a:spAutoFit/>
+          </a:bodyPr>
+          <a:lstStyle/>
+          <a:p>
+            <a:pPr algn="r"/>
+            <a:r>
+              <a:rPr sz="1100" b="0" i="0">
+                <a:solidFill>
+                  <a:srgbClr val="666666"/>
+                </a:solidFill>
+                <a:latin typeface="Calibri"/>
+              </a:rPr>
+              <a:t>22</a:t>
+            </a:r>
+          </a:p>
+        </p:txBody>
+      </p:sp>
+    </p:spTree>
+  </p:cSld>
+  <p:clrMapOvr>
+    <a:masterClrMapping/>
+  </p:clrMapOvr>
+</p:sld>
+</file>
+
+<file path=ppt/slides/slide23.xml><?xml version="1.0" encoding="utf-8"?>
 <p:sld xmlns:a="http://schemas.openxmlformats.org/drawingml/2006/main" xmlns:p="http://schemas.openxmlformats.org/presentationml/2006/main" xmlns:r="http://schemas.openxmlformats.org/officeDocument/2006/relationships">
   <p:cSld>
     <p:bg>

--- a/Introduccion a la Ingenieria/Clases/Clase 14 - Preparacion de la presentacion final/Presentacion.pptx
+++ b/Introduccion a la Ingenieria/Clases/Clase 14 - Preparacion de la presentacion final/Presentacion.pptx
@@ -28,6 +28,8 @@
     <p:sldId id="276" r:id="rId27"/>
     <p:sldId id="277" r:id="rId28"/>
     <p:sldId id="278" r:id="rId29"/>
+    <p:sldId id="279" r:id="rId30"/>
+    <p:sldId id="280" r:id="rId31"/>
   </p:sldIdLst>
   <p:sldSz cx="12191695" cy="6858000" type="screen4x3"/>
   <p:notesSz cx="6858000" cy="9144000"/>
@@ -7506,7 +7508,7 @@
         <p:spPr>
           <a:xfrm>
             <a:off x="0" y="0"/>
-            <a:ext cx="12191695" cy="1170432"/>
+            <a:ext cx="12191695" cy="960120"/>
           </a:xfrm>
           <a:prstGeom prst="rect">
             <a:avLst/>
@@ -7548,7 +7550,7 @@
         </p:nvSpPr>
         <p:spPr>
           <a:xfrm>
-            <a:off x="0" y="1170432"/>
+            <a:off x="0" y="960120"/>
             <a:ext cx="12191695" cy="41148"/>
           </a:xfrm>
           <a:prstGeom prst="rect">
@@ -7592,7 +7594,7 @@
         <p:spPr>
           <a:xfrm>
             <a:off x="457200" y="164592"/>
-            <a:ext cx="11277295" cy="384048"/>
+            <a:ext cx="11277295" cy="502920"/>
           </a:xfrm>
           <a:prstGeom prst="rect">
             <a:avLst/>
@@ -7612,55 +7614,21 @@
                 </a:solidFill>
                 <a:latin typeface="Calibri"/>
               </a:rPr>
-              <a:t>Taller de hoy: Guion de nueve minutos y plan B</a:t>
-            </a:r>
-          </a:p>
-        </p:txBody>
-      </p:sp>
-      <p:sp>
-        <p:nvSpPr>
-          <p:cNvPr id="5" name="TextBox 4"/>
-          <p:cNvSpPr txBox="1"/>
-          <p:nvPr/>
-        </p:nvSpPr>
-        <p:spPr>
-          <a:xfrm>
-            <a:off x="457200" y="566928"/>
-            <a:ext cx="11277295" cy="411480"/>
-          </a:xfrm>
-          <a:prstGeom prst="rect">
-            <a:avLst/>
-          </a:prstGeom>
-          <a:noFill/>
-        </p:spPr>
-        <p:txBody>
-          <a:bodyPr wrap="square">
-            <a:spAutoFit/>
-          </a:bodyPr>
-          <a:lstStyle/>
-          <a:p>
-            <a:r>
-              <a:rPr sz="1400" b="0" i="0">
-                <a:solidFill>
-                  <a:srgbClr val="B8D8EE"/>
-                </a:solidFill>
-                <a:latin typeface="Calibri"/>
-              </a:rPr>
-              <a:t>27 min en equipos · 27 min: guion, diapositivas, demostración y plan B · guion con tiempos + diapositivas + PDF y capturas del plan B</a:t>
-            </a:r>
-          </a:p>
-        </p:txBody>
-      </p:sp>
-      <p:sp>
-        <p:nvSpPr>
-          <p:cNvPr id="6" name="Rounded Rectangle 5"/>
+              <a:t>Plantilla del entregable: los 5 bloques</a:t>
+            </a:r>
+          </a:p>
+        </p:txBody>
+      </p:sp>
+      <p:sp>
+        <p:nvSpPr>
+          <p:cNvPr id="5" name="Rounded Rectangle 4"/>
           <p:cNvSpPr/>
           <p:nvPr/>
         </p:nvSpPr>
         <p:spPr>
           <a:xfrm>
-            <a:off x="457200" y="1472184"/>
-            <a:ext cx="11277295" cy="566928"/>
+            <a:off x="457200" y="1261872"/>
+            <a:ext cx="11277295" cy="5093208"/>
           </a:xfrm>
           <a:prstGeom prst="roundRect">
             <a:avLst>
@@ -7668,7 +7636,7 @@
             </a:avLst>
           </a:prstGeom>
           <a:solidFill>
-            <a:srgbClr val="F2F2F2"/>
+            <a:srgbClr val="1E2A38"/>
           </a:solidFill>
           <a:ln>
             <a:noFill/>
@@ -7698,25 +7666,23 @@
       </p:sp>
       <p:sp>
         <p:nvSpPr>
-          <p:cNvPr id="7" name="Rectangle 6"/>
+          <p:cNvPr id="6" name="Rectangle 5"/>
           <p:cNvSpPr/>
           <p:nvPr/>
         </p:nvSpPr>
         <p:spPr>
           <a:xfrm>
-            <a:off x="640080" y="1618487"/>
-            <a:ext cx="274320" cy="274320"/>
+            <a:off x="457200" y="1261872"/>
+            <a:ext cx="11277295" cy="320040"/>
           </a:xfrm>
           <a:prstGeom prst="rect">
             <a:avLst/>
           </a:prstGeom>
           <a:solidFill>
-            <a:srgbClr val="FFFFFF"/>
+            <a:srgbClr val="095292"/>
           </a:solidFill>
           <a:ln>
-            <a:solidFill>
-              <a:srgbClr val="333333"/>
-            </a:solidFill>
+            <a:noFill/>
           </a:ln>
         </p:spPr>
         <p:style>
@@ -7743,949 +7709,222 @@
       </p:sp>
       <p:sp>
         <p:nvSpPr>
-          <p:cNvPr id="8" name="Rectangle 7"/>
-          <p:cNvSpPr/>
-          <p:nvPr/>
-        </p:nvSpPr>
-        <p:spPr>
-          <a:xfrm>
-            <a:off x="640080" y="1618487"/>
-            <a:ext cx="73152" cy="274320"/>
-          </a:xfrm>
-          <a:prstGeom prst="rect">
-            <a:avLst/>
-          </a:prstGeom>
-          <a:solidFill>
-            <a:srgbClr val="269CCB"/>
-          </a:solidFill>
-          <a:ln>
-            <a:noFill/>
-          </a:ln>
-        </p:spPr>
-        <p:style>
-          <a:lnRef idx="1">
-            <a:schemeClr val="accent1"/>
-          </a:lnRef>
-          <a:fillRef idx="3">
-            <a:schemeClr val="accent1"/>
-          </a:fillRef>
-          <a:effectRef idx="2">
-            <a:schemeClr val="accent1"/>
-          </a:effectRef>
-          <a:fontRef idx="minor">
-            <a:schemeClr val="lt1"/>
-          </a:fontRef>
-        </p:style>
-        <p:txBody>
-          <a:bodyPr rtlCol="0" anchor="ctr"/>
-          <a:lstStyle/>
-          <a:p>
-            <a:pPr algn="ctr"/>
+          <p:cNvPr id="7" name="TextBox 6"/>
+          <p:cNvSpPr txBox="1"/>
+          <p:nvPr/>
+        </p:nvSpPr>
+        <p:spPr>
+          <a:xfrm>
+            <a:off x="685800" y="1307592"/>
+            <a:ext cx="10820095" cy="256032"/>
+          </a:xfrm>
+          <a:prstGeom prst="rect">
+            <a:avLst/>
+          </a:prstGeom>
+          <a:noFill/>
+        </p:spPr>
+        <p:txBody>
+          <a:bodyPr wrap="square" anchor="ctr"/>
+          <a:lstStyle/>
+          <a:p>
+            <a:r>
+              <a:rPr sz="1000" b="1" i="0">
+                <a:solidFill>
+                  <a:srgbClr val="269CCB"/>
+                </a:solidFill>
+                <a:latin typeface="Calibri"/>
+              </a:rPr>
+              <a:t>● ● ●</a:t>
+            </a:r>
+          </a:p>
+        </p:txBody>
+      </p:sp>
+      <p:sp>
+        <p:nvSpPr>
+          <p:cNvPr id="8" name="TextBox 7"/>
+          <p:cNvSpPr txBox="1"/>
+          <p:nvPr/>
+        </p:nvSpPr>
+        <p:spPr>
+          <a:xfrm>
+            <a:off x="777240" y="1719072"/>
+            <a:ext cx="10637215" cy="4453128"/>
+          </a:xfrm>
+          <a:prstGeom prst="rect">
+            <a:avLst/>
+          </a:prstGeom>
+          <a:noFill/>
+        </p:spPr>
+        <p:txBody>
+          <a:bodyPr wrap="square">
+            <a:spAutoFit/>
+          </a:bodyPr>
+          <a:lstStyle/>
+          <a:p>
+            <a:pPr>
+              <a:spcAft>
+                <a:spcPts val="400"/>
+              </a:spcAft>
+            </a:pPr>
+            <a:r>
+              <a:rPr sz="1400" b="0" i="0">
+                <a:solidFill>
+                  <a:srgbClr val="FFFFFF"/>
+                </a:solidFill>
+                <a:latin typeface="Calibri"/>
+              </a:rPr>
+              <a:t># Guion de nueve minutos y plan B</a:t>
+            </a:r>
+          </a:p>
+          <a:p>
+            <a:pPr>
+              <a:spcAft>
+                <a:spcPts val="400"/>
+              </a:spcAft>
+            </a:pPr>
+            <a:r>
+              <a:rPr sz="1400" b="0" i="0">
+                <a:solidFill>
+                  <a:srgbClr val="FFFFFF"/>
+                </a:solidFill>
+                <a:latin typeface="Calibri"/>
+              </a:rPr>
+              <a:t># Documento del equipo · un bloque por titulo, sin cambiar los nombres</a:t>
+            </a:r>
+          </a:p>
+          <a:p>
+            <a:pPr>
+              <a:spcAft>
+                <a:spcPts val="400"/>
+              </a:spcAft>
+            </a:pPr>
+            <a:r>
+              <a:rPr sz="1400" b="0" i="0">
+                <a:solidFill>
+                  <a:srgbClr val="FFFFFF"/>
+                </a:solidFill>
+                <a:latin typeface="Calibri"/>
+              </a:rPr>
+              <a:t/>
+            </a:r>
+          </a:p>
+          <a:p>
+            <a:pPr>
+              <a:spcAft>
+                <a:spcPts val="400"/>
+              </a:spcAft>
+            </a:pPr>
+            <a:r>
+              <a:rPr sz="1400" b="0" i="0">
+                <a:solidFill>
+                  <a:srgbClr val="FFFFFF"/>
+                </a:solidFill>
+                <a:latin typeface="Calibri"/>
+              </a:rPr>
+              <a:t>## 1. EL GUION DE LOS CINCO TRAMOS</a:t>
+            </a:r>
+          </a:p>
+          <a:p>
+            <a:pPr>
+              <a:spcAft>
+                <a:spcPts val="400"/>
+              </a:spcAft>
+            </a:pPr>
+            <a:r>
+              <a:rPr sz="1400" b="0" i="0">
+                <a:solidFill>
+                  <a:srgbClr val="FFFFFF"/>
+                </a:solidFill>
+                <a:latin typeface="Calibri"/>
+              </a:rPr>
+              <a:t>## 2. LAS OCHO DIAPOSITIVAS</a:t>
+            </a:r>
+          </a:p>
+          <a:p>
+            <a:pPr>
+              <a:spcAft>
+                <a:spcPts val="400"/>
+              </a:spcAft>
+            </a:pPr>
+            <a:r>
+              <a:rPr sz="1400" b="0" i="0">
+                <a:solidFill>
+                  <a:srgbClr val="FFFFFF"/>
+                </a:solidFill>
+                <a:latin typeface="Calibri"/>
+              </a:rPr>
+              <a:t>## 3. EL REPARTO ENTRE INTEGRANTES</a:t>
+            </a:r>
+          </a:p>
+          <a:p>
+            <a:pPr>
+              <a:spcAft>
+                <a:spcPts val="400"/>
+              </a:spcAft>
+            </a:pPr>
+            <a:r>
+              <a:rPr sz="1400" b="0" i="0">
+                <a:solidFill>
+                  <a:srgbClr val="FFFFFF"/>
+                </a:solidFill>
+                <a:latin typeface="Calibri"/>
+              </a:rPr>
+              <a:t>## 4. LA DEMOSTRACIÓN DEL PROTOTIPO</a:t>
+            </a:r>
+          </a:p>
+          <a:p>
+            <a:pPr>
+              <a:spcAft>
+                <a:spcPts val="400"/>
+              </a:spcAft>
+            </a:pPr>
+            <a:r>
+              <a:rPr sz="1400" b="0" i="0">
+                <a:solidFill>
+                  <a:srgbClr val="FFFFFF"/>
+                </a:solidFill>
+                <a:latin typeface="Calibri"/>
+              </a:rPr>
+              <a:t>## 5. EL PLAN B TÉCNICO</a:t>
+            </a:r>
+          </a:p>
+          <a:p>
+            <a:pPr>
+              <a:spcAft>
+                <a:spcPts val="400"/>
+              </a:spcAft>
+            </a:pPr>
+            <a:r>
+              <a:rPr sz="1400" b="0" i="0">
+                <a:solidFill>
+                  <a:srgbClr val="FFFFFF"/>
+                </a:solidFill>
+                <a:latin typeface="Calibri"/>
+              </a:rPr>
+              <a:t/>
+            </a:r>
+          </a:p>
+          <a:p>
+            <a:pPr>
+              <a:spcAft>
+                <a:spcPts val="400"/>
+              </a:spcAft>
+            </a:pPr>
+            <a:r>
+              <a:rPr sz="1400" b="0" i="0">
+                <a:solidFill>
+                  <a:srgbClr val="FFFFFF"/>
+                </a:solidFill>
+                <a:latin typeface="Calibri"/>
+              </a:rPr>
+              <a:t># Los titulos van TAL CUAL: son con los que se califica.</a:t>
+            </a:r>
           </a:p>
         </p:txBody>
       </p:sp>
       <p:sp>
         <p:nvSpPr>
           <p:cNvPr id="9" name="TextBox 8"/>
-          <p:cNvSpPr txBox="1"/>
-          <p:nvPr/>
-        </p:nvSpPr>
-        <p:spPr>
-          <a:xfrm>
-            <a:off x="1097280" y="1563624"/>
-            <a:ext cx="10362895" cy="402336"/>
-          </a:xfrm>
-          <a:prstGeom prst="rect">
-            <a:avLst/>
-          </a:prstGeom>
-          <a:noFill/>
-        </p:spPr>
-        <p:txBody>
-          <a:bodyPr wrap="square" anchor="ctr"/>
-          <a:lstStyle/>
-          <a:p>
-            <a:r>
-              <a:rPr sz="1500" b="1" i="0">
-                <a:solidFill>
-                  <a:srgbClr val="333333"/>
-                </a:solidFill>
-                <a:latin typeface="Calibri"/>
-              </a:rPr>
-              <a:t>EL GUION DE LOS CINCO TRAMOS</a:t>
-            </a:r>
-            <a:r>
-              <a:rPr sz="1500" b="0" i="0">
-                <a:solidFill>
-                  <a:srgbClr val="333333"/>
-                </a:solidFill>
-                <a:latin typeface="Calibri"/>
-              </a:rPr>
-              <a:t> — Los cinco tramos con </a:t>
-            </a:r>
-            <a:r>
-              <a:rPr sz="1500" b="1" i="0">
-                <a:solidFill>
-                  <a:srgbClr val="333333"/>
-                </a:solidFill>
-                <a:latin typeface="Calibri"/>
-              </a:rPr>
-              <a:t>el tiempo asignado a cada uno</a:t>
-            </a:r>
-            <a:r>
-              <a:rPr sz="1500" b="0" i="0">
-                <a:solidFill>
-                  <a:srgbClr val="333333"/>
-                </a:solidFill>
-                <a:latin typeface="Calibri"/>
-              </a:rPr>
-              <a:t> —que sume nueve minutos— y </a:t>
-            </a:r>
-            <a:r>
-              <a:rPr sz="1500" b="1" i="0">
-                <a:solidFill>
-                  <a:srgbClr val="333333"/>
-                </a:solidFill>
-                <a:latin typeface="Calibri"/>
-              </a:rPr>
-              <a:t>quién habla</a:t>
-            </a:r>
-            <a:r>
-              <a:rPr sz="1500" b="0" i="0">
-                <a:solidFill>
-                  <a:srgbClr val="333333"/>
-                </a:solidFill>
-                <a:latin typeface="Calibri"/>
-              </a:rPr>
-              <a:t> en cada uno.</a:t>
-            </a:r>
-          </a:p>
-        </p:txBody>
-      </p:sp>
-      <p:sp>
-        <p:nvSpPr>
-          <p:cNvPr id="10" name="Rounded Rectangle 9"/>
-          <p:cNvSpPr/>
-          <p:nvPr/>
-        </p:nvSpPr>
-        <p:spPr>
-          <a:xfrm>
-            <a:off x="457200" y="2148839"/>
-            <a:ext cx="11277295" cy="566928"/>
-          </a:xfrm>
-          <a:prstGeom prst="roundRect">
-            <a:avLst>
-              <a:gd name="adj" fmla="val 12000"/>
-            </a:avLst>
-          </a:prstGeom>
-          <a:solidFill>
-            <a:srgbClr val="F2F2F2"/>
-          </a:solidFill>
-          <a:ln>
-            <a:noFill/>
-          </a:ln>
-        </p:spPr>
-        <p:style>
-          <a:lnRef idx="1">
-            <a:schemeClr val="accent1"/>
-          </a:lnRef>
-          <a:fillRef idx="3">
-            <a:schemeClr val="accent1"/>
-          </a:fillRef>
-          <a:effectRef idx="2">
-            <a:schemeClr val="accent1"/>
-          </a:effectRef>
-          <a:fontRef idx="minor">
-            <a:schemeClr val="lt1"/>
-          </a:fontRef>
-        </p:style>
-        <p:txBody>
-          <a:bodyPr rtlCol="0" anchor="ctr"/>
-          <a:lstStyle/>
-          <a:p>
-            <a:pPr algn="ctr"/>
-          </a:p>
-        </p:txBody>
-      </p:sp>
-      <p:sp>
-        <p:nvSpPr>
-          <p:cNvPr id="11" name="Rectangle 10"/>
-          <p:cNvSpPr/>
-          <p:nvPr/>
-        </p:nvSpPr>
-        <p:spPr>
-          <a:xfrm>
-            <a:off x="640080" y="2295144"/>
-            <a:ext cx="274320" cy="274320"/>
-          </a:xfrm>
-          <a:prstGeom prst="rect">
-            <a:avLst/>
-          </a:prstGeom>
-          <a:solidFill>
-            <a:srgbClr val="FFFFFF"/>
-          </a:solidFill>
-          <a:ln>
-            <a:solidFill>
-              <a:srgbClr val="333333"/>
-            </a:solidFill>
-          </a:ln>
-        </p:spPr>
-        <p:style>
-          <a:lnRef idx="1">
-            <a:schemeClr val="accent1"/>
-          </a:lnRef>
-          <a:fillRef idx="3">
-            <a:schemeClr val="accent1"/>
-          </a:fillRef>
-          <a:effectRef idx="2">
-            <a:schemeClr val="accent1"/>
-          </a:effectRef>
-          <a:fontRef idx="minor">
-            <a:schemeClr val="lt1"/>
-          </a:fontRef>
-        </p:style>
-        <p:txBody>
-          <a:bodyPr rtlCol="0" anchor="ctr"/>
-          <a:lstStyle/>
-          <a:p>
-            <a:pPr algn="ctr"/>
-          </a:p>
-        </p:txBody>
-      </p:sp>
-      <p:sp>
-        <p:nvSpPr>
-          <p:cNvPr id="12" name="Rectangle 11"/>
-          <p:cNvSpPr/>
-          <p:nvPr/>
-        </p:nvSpPr>
-        <p:spPr>
-          <a:xfrm>
-            <a:off x="640080" y="2295144"/>
-            <a:ext cx="73152" cy="274320"/>
-          </a:xfrm>
-          <a:prstGeom prst="rect">
-            <a:avLst/>
-          </a:prstGeom>
-          <a:solidFill>
-            <a:srgbClr val="269CCB"/>
-          </a:solidFill>
-          <a:ln>
-            <a:noFill/>
-          </a:ln>
-        </p:spPr>
-        <p:style>
-          <a:lnRef idx="1">
-            <a:schemeClr val="accent1"/>
-          </a:lnRef>
-          <a:fillRef idx="3">
-            <a:schemeClr val="accent1"/>
-          </a:fillRef>
-          <a:effectRef idx="2">
-            <a:schemeClr val="accent1"/>
-          </a:effectRef>
-          <a:fontRef idx="minor">
-            <a:schemeClr val="lt1"/>
-          </a:fontRef>
-        </p:style>
-        <p:txBody>
-          <a:bodyPr rtlCol="0" anchor="ctr"/>
-          <a:lstStyle/>
-          <a:p>
-            <a:pPr algn="ctr"/>
-          </a:p>
-        </p:txBody>
-      </p:sp>
-      <p:sp>
-        <p:nvSpPr>
-          <p:cNvPr id="13" name="TextBox 12"/>
-          <p:cNvSpPr txBox="1"/>
-          <p:nvPr/>
-        </p:nvSpPr>
-        <p:spPr>
-          <a:xfrm>
-            <a:off x="1097280" y="2240279"/>
-            <a:ext cx="10362895" cy="402336"/>
-          </a:xfrm>
-          <a:prstGeom prst="rect">
-            <a:avLst/>
-          </a:prstGeom>
-          <a:noFill/>
-        </p:spPr>
-        <p:txBody>
-          <a:bodyPr wrap="square" anchor="ctr"/>
-          <a:lstStyle/>
-          <a:p>
-            <a:r>
-              <a:rPr sz="1500" b="1" i="0">
-                <a:solidFill>
-                  <a:srgbClr val="333333"/>
-                </a:solidFill>
-                <a:latin typeface="Calibri"/>
-              </a:rPr>
-              <a:t>LAS OCHO DIAPOSITIVAS</a:t>
-            </a:r>
-            <a:r>
-              <a:rPr sz="1500" b="0" i="0">
-                <a:solidFill>
-                  <a:srgbClr val="333333"/>
-                </a:solidFill>
-                <a:latin typeface="Calibri"/>
-              </a:rPr>
-              <a:t> — Máximo ocho, </a:t>
-            </a:r>
-            <a:r>
-              <a:rPr sz="1500" b="1" i="0">
-                <a:solidFill>
-                  <a:srgbClr val="333333"/>
-                </a:solidFill>
-                <a:latin typeface="Calibri"/>
-              </a:rPr>
-              <a:t>una idea cada una</a:t>
-            </a:r>
-            <a:r>
-              <a:rPr sz="1500" b="0" i="0">
-                <a:solidFill>
-                  <a:srgbClr val="333333"/>
-                </a:solidFill>
-                <a:latin typeface="Calibri"/>
-              </a:rPr>
-              <a:t>, con rótulos y no párrafos. La matriz completa </a:t>
-            </a:r>
-            <a:r>
-              <a:rPr sz="1500" b="1" i="0">
-                <a:solidFill>
-                  <a:srgbClr val="333333"/>
-                </a:solidFill>
-                <a:latin typeface="Calibri"/>
-              </a:rPr>
-              <a:t>no va</a:t>
-            </a:r>
-            <a:r>
-              <a:rPr sz="1500" b="0" i="0">
-                <a:solidFill>
-                  <a:srgbClr val="333333"/>
-                </a:solidFill>
-                <a:latin typeface="Calibri"/>
-              </a:rPr>
-              <a:t>: van las dos alternativas y el ganador.</a:t>
-            </a:r>
-          </a:p>
-        </p:txBody>
-      </p:sp>
-      <p:sp>
-        <p:nvSpPr>
-          <p:cNvPr id="14" name="Rounded Rectangle 13"/>
-          <p:cNvSpPr/>
-          <p:nvPr/>
-        </p:nvSpPr>
-        <p:spPr>
-          <a:xfrm>
-            <a:off x="457200" y="2825496"/>
-            <a:ext cx="11277295" cy="566928"/>
-          </a:xfrm>
-          <a:prstGeom prst="roundRect">
-            <a:avLst>
-              <a:gd name="adj" fmla="val 12000"/>
-            </a:avLst>
-          </a:prstGeom>
-          <a:solidFill>
-            <a:srgbClr val="F2F2F2"/>
-          </a:solidFill>
-          <a:ln>
-            <a:noFill/>
-          </a:ln>
-        </p:spPr>
-        <p:style>
-          <a:lnRef idx="1">
-            <a:schemeClr val="accent1"/>
-          </a:lnRef>
-          <a:fillRef idx="3">
-            <a:schemeClr val="accent1"/>
-          </a:fillRef>
-          <a:effectRef idx="2">
-            <a:schemeClr val="accent1"/>
-          </a:effectRef>
-          <a:fontRef idx="minor">
-            <a:schemeClr val="lt1"/>
-          </a:fontRef>
-        </p:style>
-        <p:txBody>
-          <a:bodyPr rtlCol="0" anchor="ctr"/>
-          <a:lstStyle/>
-          <a:p>
-            <a:pPr algn="ctr"/>
-          </a:p>
-        </p:txBody>
-      </p:sp>
-      <p:sp>
-        <p:nvSpPr>
-          <p:cNvPr id="15" name="Rectangle 14"/>
-          <p:cNvSpPr/>
-          <p:nvPr/>
-        </p:nvSpPr>
-        <p:spPr>
-          <a:xfrm>
-            <a:off x="640080" y="2971800"/>
-            <a:ext cx="274320" cy="274320"/>
-          </a:xfrm>
-          <a:prstGeom prst="rect">
-            <a:avLst/>
-          </a:prstGeom>
-          <a:solidFill>
-            <a:srgbClr val="FFFFFF"/>
-          </a:solidFill>
-          <a:ln>
-            <a:solidFill>
-              <a:srgbClr val="333333"/>
-            </a:solidFill>
-          </a:ln>
-        </p:spPr>
-        <p:style>
-          <a:lnRef idx="1">
-            <a:schemeClr val="accent1"/>
-          </a:lnRef>
-          <a:fillRef idx="3">
-            <a:schemeClr val="accent1"/>
-          </a:fillRef>
-          <a:effectRef idx="2">
-            <a:schemeClr val="accent1"/>
-          </a:effectRef>
-          <a:fontRef idx="minor">
-            <a:schemeClr val="lt1"/>
-          </a:fontRef>
-        </p:style>
-        <p:txBody>
-          <a:bodyPr rtlCol="0" anchor="ctr"/>
-          <a:lstStyle/>
-          <a:p>
-            <a:pPr algn="ctr"/>
-          </a:p>
-        </p:txBody>
-      </p:sp>
-      <p:sp>
-        <p:nvSpPr>
-          <p:cNvPr id="16" name="Rectangle 15"/>
-          <p:cNvSpPr/>
-          <p:nvPr/>
-        </p:nvSpPr>
-        <p:spPr>
-          <a:xfrm>
-            <a:off x="640080" y="2971800"/>
-            <a:ext cx="73152" cy="274320"/>
-          </a:xfrm>
-          <a:prstGeom prst="rect">
-            <a:avLst/>
-          </a:prstGeom>
-          <a:solidFill>
-            <a:srgbClr val="269CCB"/>
-          </a:solidFill>
-          <a:ln>
-            <a:noFill/>
-          </a:ln>
-        </p:spPr>
-        <p:style>
-          <a:lnRef idx="1">
-            <a:schemeClr val="accent1"/>
-          </a:lnRef>
-          <a:fillRef idx="3">
-            <a:schemeClr val="accent1"/>
-          </a:fillRef>
-          <a:effectRef idx="2">
-            <a:schemeClr val="accent1"/>
-          </a:effectRef>
-          <a:fontRef idx="minor">
-            <a:schemeClr val="lt1"/>
-          </a:fontRef>
-        </p:style>
-        <p:txBody>
-          <a:bodyPr rtlCol="0" anchor="ctr"/>
-          <a:lstStyle/>
-          <a:p>
-            <a:pPr algn="ctr"/>
-          </a:p>
-        </p:txBody>
-      </p:sp>
-      <p:sp>
-        <p:nvSpPr>
-          <p:cNvPr id="17" name="TextBox 16"/>
-          <p:cNvSpPr txBox="1"/>
-          <p:nvPr/>
-        </p:nvSpPr>
-        <p:spPr>
-          <a:xfrm>
-            <a:off x="1097280" y="2916936"/>
-            <a:ext cx="10362895" cy="402336"/>
-          </a:xfrm>
-          <a:prstGeom prst="rect">
-            <a:avLst/>
-          </a:prstGeom>
-          <a:noFill/>
-        </p:spPr>
-        <p:txBody>
-          <a:bodyPr wrap="square" anchor="ctr"/>
-          <a:lstStyle/>
-          <a:p>
-            <a:r>
-              <a:rPr sz="1500" b="1" i="0">
-                <a:solidFill>
-                  <a:srgbClr val="333333"/>
-                </a:solidFill>
-                <a:latin typeface="Calibri"/>
-              </a:rPr>
-              <a:t>EL REPARTO ENTRE INTEGRANTES</a:t>
-            </a:r>
-            <a:r>
-              <a:rPr sz="1500" b="0" i="0">
-                <a:solidFill>
-                  <a:srgbClr val="333333"/>
-                </a:solidFill>
-                <a:latin typeface="Calibri"/>
-              </a:rPr>
-              <a:t> — Quién habla en cada tramo, y </a:t>
-            </a:r>
-            <a:r>
-              <a:rPr sz="1500" b="1" i="0">
-                <a:solidFill>
-                  <a:srgbClr val="333333"/>
-                </a:solidFill>
-                <a:latin typeface="Calibri"/>
-              </a:rPr>
-              <a:t>qué hace quien no habla</a:t>
-            </a:r>
-            <a:r>
-              <a:rPr sz="1500" b="0" i="0">
-                <a:solidFill>
-                  <a:srgbClr val="333333"/>
-                </a:solidFill>
-                <a:latin typeface="Calibri"/>
-              </a:rPr>
-              <a:t>: cronómetro, capturas del plan B, la diapositiva siguiente lista.</a:t>
-            </a:r>
-          </a:p>
-        </p:txBody>
-      </p:sp>
-      <p:sp>
-        <p:nvSpPr>
-          <p:cNvPr id="18" name="Rounded Rectangle 17"/>
-          <p:cNvSpPr/>
-          <p:nvPr/>
-        </p:nvSpPr>
-        <p:spPr>
-          <a:xfrm>
-            <a:off x="457200" y="3502152"/>
-            <a:ext cx="11277295" cy="566928"/>
-          </a:xfrm>
-          <a:prstGeom prst="roundRect">
-            <a:avLst>
-              <a:gd name="adj" fmla="val 12000"/>
-            </a:avLst>
-          </a:prstGeom>
-          <a:solidFill>
-            <a:srgbClr val="F2F2F2"/>
-          </a:solidFill>
-          <a:ln>
-            <a:noFill/>
-          </a:ln>
-        </p:spPr>
-        <p:style>
-          <a:lnRef idx="1">
-            <a:schemeClr val="accent1"/>
-          </a:lnRef>
-          <a:fillRef idx="3">
-            <a:schemeClr val="accent1"/>
-          </a:fillRef>
-          <a:effectRef idx="2">
-            <a:schemeClr val="accent1"/>
-          </a:effectRef>
-          <a:fontRef idx="minor">
-            <a:schemeClr val="lt1"/>
-          </a:fontRef>
-        </p:style>
-        <p:txBody>
-          <a:bodyPr rtlCol="0" anchor="ctr"/>
-          <a:lstStyle/>
-          <a:p>
-            <a:pPr algn="ctr"/>
-          </a:p>
-        </p:txBody>
-      </p:sp>
-      <p:sp>
-        <p:nvSpPr>
-          <p:cNvPr id="19" name="Rectangle 18"/>
-          <p:cNvSpPr/>
-          <p:nvPr/>
-        </p:nvSpPr>
-        <p:spPr>
-          <a:xfrm>
-            <a:off x="640080" y="3648456"/>
-            <a:ext cx="274320" cy="274320"/>
-          </a:xfrm>
-          <a:prstGeom prst="rect">
-            <a:avLst/>
-          </a:prstGeom>
-          <a:solidFill>
-            <a:srgbClr val="FFFFFF"/>
-          </a:solidFill>
-          <a:ln>
-            <a:solidFill>
-              <a:srgbClr val="333333"/>
-            </a:solidFill>
-          </a:ln>
-        </p:spPr>
-        <p:style>
-          <a:lnRef idx="1">
-            <a:schemeClr val="accent1"/>
-          </a:lnRef>
-          <a:fillRef idx="3">
-            <a:schemeClr val="accent1"/>
-          </a:fillRef>
-          <a:effectRef idx="2">
-            <a:schemeClr val="accent1"/>
-          </a:effectRef>
-          <a:fontRef idx="minor">
-            <a:schemeClr val="lt1"/>
-          </a:fontRef>
-        </p:style>
-        <p:txBody>
-          <a:bodyPr rtlCol="0" anchor="ctr"/>
-          <a:lstStyle/>
-          <a:p>
-            <a:pPr algn="ctr"/>
-          </a:p>
-        </p:txBody>
-      </p:sp>
-      <p:sp>
-        <p:nvSpPr>
-          <p:cNvPr id="20" name="Rectangle 19"/>
-          <p:cNvSpPr/>
-          <p:nvPr/>
-        </p:nvSpPr>
-        <p:spPr>
-          <a:xfrm>
-            <a:off x="640080" y="3648456"/>
-            <a:ext cx="73152" cy="274320"/>
-          </a:xfrm>
-          <a:prstGeom prst="rect">
-            <a:avLst/>
-          </a:prstGeom>
-          <a:solidFill>
-            <a:srgbClr val="269CCB"/>
-          </a:solidFill>
-          <a:ln>
-            <a:noFill/>
-          </a:ln>
-        </p:spPr>
-        <p:style>
-          <a:lnRef idx="1">
-            <a:schemeClr val="accent1"/>
-          </a:lnRef>
-          <a:fillRef idx="3">
-            <a:schemeClr val="accent1"/>
-          </a:fillRef>
-          <a:effectRef idx="2">
-            <a:schemeClr val="accent1"/>
-          </a:effectRef>
-          <a:fontRef idx="minor">
-            <a:schemeClr val="lt1"/>
-          </a:fontRef>
-        </p:style>
-        <p:txBody>
-          <a:bodyPr rtlCol="0" anchor="ctr"/>
-          <a:lstStyle/>
-          <a:p>
-            <a:pPr algn="ctr"/>
-          </a:p>
-        </p:txBody>
-      </p:sp>
-      <p:sp>
-        <p:nvSpPr>
-          <p:cNvPr id="21" name="TextBox 20"/>
-          <p:cNvSpPr txBox="1"/>
-          <p:nvPr/>
-        </p:nvSpPr>
-        <p:spPr>
-          <a:xfrm>
-            <a:off x="1097280" y="3593592"/>
-            <a:ext cx="10362895" cy="402336"/>
-          </a:xfrm>
-          <a:prstGeom prst="rect">
-            <a:avLst/>
-          </a:prstGeom>
-          <a:noFill/>
-        </p:spPr>
-        <p:txBody>
-          <a:bodyPr wrap="square" anchor="ctr"/>
-          <a:lstStyle/>
-          <a:p>
-            <a:r>
-              <a:rPr sz="1500" b="1" i="0">
-                <a:solidFill>
-                  <a:srgbClr val="333333"/>
-                </a:solidFill>
-                <a:latin typeface="Calibri"/>
-              </a:rPr>
-              <a:t>LA DEMOSTRACIÓN DEL PROTOTIPO</a:t>
-            </a:r>
-            <a:r>
-              <a:rPr sz="1500" b="0" i="0">
-                <a:solidFill>
-                  <a:srgbClr val="333333"/>
-                </a:solidFill>
-                <a:latin typeface="Calibri"/>
-              </a:rPr>
-              <a:t> — El recorrido de </a:t>
-            </a:r>
-            <a:r>
-              <a:rPr sz="1500" b="1" i="0">
-                <a:solidFill>
-                  <a:srgbClr val="333333"/>
-                </a:solidFill>
-                <a:latin typeface="Calibri"/>
-              </a:rPr>
-              <a:t>tres pasos</a:t>
-            </a:r>
-            <a:r>
-              <a:rPr sz="1500" b="0" i="0">
-                <a:solidFill>
-                  <a:srgbClr val="333333"/>
-                </a:solidFill>
-                <a:latin typeface="Calibri"/>
-              </a:rPr>
-              <a:t> que se va a mostrar, con </a:t>
-            </a:r>
-            <a:r>
-              <a:rPr sz="1500" b="1" i="0">
-                <a:solidFill>
-                  <a:srgbClr val="333333"/>
-                </a:solidFill>
-                <a:latin typeface="Calibri"/>
-              </a:rPr>
-              <a:t>una persona narrando y otra manejando la pantalla</a:t>
-            </a:r>
-            <a:r>
-              <a:rPr sz="1500" b="0" i="0">
-                <a:solidFill>
-                  <a:srgbClr val="333333"/>
-                </a:solidFill>
-                <a:latin typeface="Calibri"/>
-              </a:rPr>
-              <a:t>. Ensayado dos veces.</a:t>
-            </a:r>
-          </a:p>
-        </p:txBody>
-      </p:sp>
-      <p:sp>
-        <p:nvSpPr>
-          <p:cNvPr id="22" name="Rounded Rectangle 21"/>
-          <p:cNvSpPr/>
-          <p:nvPr/>
-        </p:nvSpPr>
-        <p:spPr>
-          <a:xfrm>
-            <a:off x="457200" y="4178808"/>
-            <a:ext cx="11277295" cy="566928"/>
-          </a:xfrm>
-          <a:prstGeom prst="roundRect">
-            <a:avLst>
-              <a:gd name="adj" fmla="val 12000"/>
-            </a:avLst>
-          </a:prstGeom>
-          <a:solidFill>
-            <a:srgbClr val="F2F2F2"/>
-          </a:solidFill>
-          <a:ln>
-            <a:noFill/>
-          </a:ln>
-        </p:spPr>
-        <p:style>
-          <a:lnRef idx="1">
-            <a:schemeClr val="accent1"/>
-          </a:lnRef>
-          <a:fillRef idx="3">
-            <a:schemeClr val="accent1"/>
-          </a:fillRef>
-          <a:effectRef idx="2">
-            <a:schemeClr val="accent1"/>
-          </a:effectRef>
-          <a:fontRef idx="minor">
-            <a:schemeClr val="lt1"/>
-          </a:fontRef>
-        </p:style>
-        <p:txBody>
-          <a:bodyPr rtlCol="0" anchor="ctr"/>
-          <a:lstStyle/>
-          <a:p>
-            <a:pPr algn="ctr"/>
-          </a:p>
-        </p:txBody>
-      </p:sp>
-      <p:sp>
-        <p:nvSpPr>
-          <p:cNvPr id="23" name="Rectangle 22"/>
-          <p:cNvSpPr/>
-          <p:nvPr/>
-        </p:nvSpPr>
-        <p:spPr>
-          <a:xfrm>
-            <a:off x="640080" y="4325112"/>
-            <a:ext cx="274320" cy="274320"/>
-          </a:xfrm>
-          <a:prstGeom prst="rect">
-            <a:avLst/>
-          </a:prstGeom>
-          <a:solidFill>
-            <a:srgbClr val="FFFFFF"/>
-          </a:solidFill>
-          <a:ln>
-            <a:solidFill>
-              <a:srgbClr val="333333"/>
-            </a:solidFill>
-          </a:ln>
-        </p:spPr>
-        <p:style>
-          <a:lnRef idx="1">
-            <a:schemeClr val="accent1"/>
-          </a:lnRef>
-          <a:fillRef idx="3">
-            <a:schemeClr val="accent1"/>
-          </a:fillRef>
-          <a:effectRef idx="2">
-            <a:schemeClr val="accent1"/>
-          </a:effectRef>
-          <a:fontRef idx="minor">
-            <a:schemeClr val="lt1"/>
-          </a:fontRef>
-        </p:style>
-        <p:txBody>
-          <a:bodyPr rtlCol="0" anchor="ctr"/>
-          <a:lstStyle/>
-          <a:p>
-            <a:pPr algn="ctr"/>
-          </a:p>
-        </p:txBody>
-      </p:sp>
-      <p:sp>
-        <p:nvSpPr>
-          <p:cNvPr id="24" name="Rectangle 23"/>
-          <p:cNvSpPr/>
-          <p:nvPr/>
-        </p:nvSpPr>
-        <p:spPr>
-          <a:xfrm>
-            <a:off x="640080" y="4325112"/>
-            <a:ext cx="73152" cy="274320"/>
-          </a:xfrm>
-          <a:prstGeom prst="rect">
-            <a:avLst/>
-          </a:prstGeom>
-          <a:solidFill>
-            <a:srgbClr val="269CCB"/>
-          </a:solidFill>
-          <a:ln>
-            <a:noFill/>
-          </a:ln>
-        </p:spPr>
-        <p:style>
-          <a:lnRef idx="1">
-            <a:schemeClr val="accent1"/>
-          </a:lnRef>
-          <a:fillRef idx="3">
-            <a:schemeClr val="accent1"/>
-          </a:fillRef>
-          <a:effectRef idx="2">
-            <a:schemeClr val="accent1"/>
-          </a:effectRef>
-          <a:fontRef idx="minor">
-            <a:schemeClr val="lt1"/>
-          </a:fontRef>
-        </p:style>
-        <p:txBody>
-          <a:bodyPr rtlCol="0" anchor="ctr"/>
-          <a:lstStyle/>
-          <a:p>
-            <a:pPr algn="ctr"/>
-          </a:p>
-        </p:txBody>
-      </p:sp>
-      <p:sp>
-        <p:nvSpPr>
-          <p:cNvPr id="25" name="TextBox 24"/>
-          <p:cNvSpPr txBox="1"/>
-          <p:nvPr/>
-        </p:nvSpPr>
-        <p:spPr>
-          <a:xfrm>
-            <a:off x="1097280" y="4270248"/>
-            <a:ext cx="10362895" cy="402336"/>
-          </a:xfrm>
-          <a:prstGeom prst="rect">
-            <a:avLst/>
-          </a:prstGeom>
-          <a:noFill/>
-        </p:spPr>
-        <p:txBody>
-          <a:bodyPr wrap="square" anchor="ctr"/>
-          <a:lstStyle/>
-          <a:p>
-            <a:r>
-              <a:rPr sz="1500" b="1" i="0">
-                <a:solidFill>
-                  <a:srgbClr val="333333"/>
-                </a:solidFill>
-                <a:latin typeface="Calibri"/>
-              </a:rPr>
-              <a:t>EL PLAN B TÉCNICO</a:t>
-            </a:r>
-            <a:r>
-              <a:rPr sz="1500" b="0" i="0">
-                <a:solidFill>
-                  <a:srgbClr val="333333"/>
-                </a:solidFill>
-                <a:latin typeface="Calibri"/>
-              </a:rPr>
-              <a:t> — En la carpeta del equipo: la presentación </a:t>
-            </a:r>
-            <a:r>
-              <a:rPr sz="1500" b="1" i="0">
-                <a:solidFill>
-                  <a:srgbClr val="333333"/>
-                </a:solidFill>
-                <a:latin typeface="Calibri"/>
-              </a:rPr>
-              <a:t>en PDF</a:t>
-            </a:r>
-            <a:r>
-              <a:rPr sz="1500" b="0" i="0">
-                <a:solidFill>
-                  <a:srgbClr val="333333"/>
-                </a:solidFill>
-                <a:latin typeface="Calibri"/>
-              </a:rPr>
-              <a:t>, </a:t>
-            </a:r>
-            <a:r>
-              <a:rPr sz="1500" b="1" i="0">
-                <a:solidFill>
-                  <a:srgbClr val="333333"/>
-                </a:solidFill>
-                <a:latin typeface="Calibri"/>
-              </a:rPr>
-              <a:t>capturas de cada paso</a:t>
-            </a:r>
-            <a:r>
-              <a:rPr sz="1500" b="0" i="0">
-                <a:solidFill>
-                  <a:srgbClr val="333333"/>
-                </a:solidFill>
-                <a:latin typeface="Calibri"/>
-              </a:rPr>
-              <a:t> de la demostración, y quién comparte pantalla si se cae el primero.</a:t>
-            </a:r>
-          </a:p>
-        </p:txBody>
-      </p:sp>
-      <p:sp>
-        <p:nvSpPr>
-          <p:cNvPr id="26" name="TextBox 25"/>
           <p:cNvSpPr txBox="1"/>
           <p:nvPr/>
         </p:nvSpPr>
@@ -8753,7 +7992,7 @@
         <p:spPr>
           <a:xfrm>
             <a:off x="0" y="0"/>
-            <a:ext cx="12191695" cy="1170432"/>
+            <a:ext cx="12191695" cy="960120"/>
           </a:xfrm>
           <a:prstGeom prst="rect">
             <a:avLst/>
@@ -8795,7 +8034,7 @@
         </p:nvSpPr>
         <p:spPr>
           <a:xfrm>
-            <a:off x="0" y="1170432"/>
+            <a:off x="0" y="960120"/>
             <a:ext cx="12191695" cy="41148"/>
           </a:xfrm>
           <a:prstGeom prst="rect">
@@ -8839,7 +8078,7 @@
         <p:spPr>
           <a:xfrm>
             <a:off x="457200" y="164592"/>
-            <a:ext cx="11277295" cy="384048"/>
+            <a:ext cx="11277295" cy="502920"/>
           </a:xfrm>
           <a:prstGeom prst="rect">
             <a:avLst/>
@@ -8859,55 +8098,21 @@
                 </a:solidFill>
                 <a:latin typeface="Calibri"/>
               </a:rPr>
-              <a:t>Cómo se expone en 4 minutos</a:t>
-            </a:r>
-          </a:p>
-        </p:txBody>
-      </p:sp>
-      <p:sp>
-        <p:nvSpPr>
-          <p:cNvPr id="5" name="TextBox 4"/>
-          <p:cNvSpPr txBox="1"/>
-          <p:nvPr/>
-        </p:nvSpPr>
-        <p:spPr>
-          <a:xfrm>
-            <a:off x="457200" y="566928"/>
-            <a:ext cx="11277295" cy="411480"/>
-          </a:xfrm>
-          <a:prstGeom prst="rect">
-            <a:avLst/>
-          </a:prstGeom>
-          <a:noFill/>
-        </p:spPr>
-        <p:txBody>
-          <a:bodyPr wrap="square">
-            <a:spAutoFit/>
-          </a:bodyPr>
-          <a:lstStyle/>
-          <a:p>
-            <a:r>
-              <a:rPr sz="1400" b="0" i="0">
-                <a:solidFill>
-                  <a:srgbClr val="B8D8EE"/>
-                </a:solidFill>
-                <a:latin typeface="Calibri"/>
-              </a:rPr>
-              <a:t>Habla el vocero con la pantalla ya compartida · cronómetro en pantalla · se corta al llegar a cero</a:t>
-            </a:r>
-          </a:p>
-        </p:txBody>
-      </p:sp>
-      <p:sp>
-        <p:nvSpPr>
-          <p:cNvPr id="6" name="Rounded Rectangle 5"/>
+              <a:t>Guion de la exposicion, con tiempos</a:t>
+            </a:r>
+          </a:p>
+        </p:txBody>
+      </p:sp>
+      <p:sp>
+        <p:nvSpPr>
+          <p:cNvPr id="5" name="Rounded Rectangle 4"/>
           <p:cNvSpPr/>
           <p:nvPr/>
         </p:nvSpPr>
         <p:spPr>
           <a:xfrm>
-            <a:off x="457200" y="1444752"/>
-            <a:ext cx="11277295" cy="908913"/>
+            <a:off x="457200" y="1261872"/>
+            <a:ext cx="11277295" cy="5093208"/>
           </a:xfrm>
           <a:prstGeom prst="roundRect">
             <a:avLst>
@@ -8915,7 +8120,7 @@
             </a:avLst>
           </a:prstGeom>
           <a:solidFill>
-            <a:srgbClr val="F2F2F2"/>
+            <a:srgbClr val="1E2A38"/>
           </a:solidFill>
           <a:ln>
             <a:noFill/>
@@ -8945,19 +8150,17 @@
       </p:sp>
       <p:sp>
         <p:nvSpPr>
-          <p:cNvPr id="7" name="Rounded Rectangle 6"/>
+          <p:cNvPr id="6" name="Rectangle 5"/>
           <p:cNvSpPr/>
           <p:nvPr/>
         </p:nvSpPr>
         <p:spPr>
           <a:xfrm>
-            <a:off x="594360" y="1679752"/>
-            <a:ext cx="438912" cy="438912"/>
-          </a:xfrm>
-          <a:prstGeom prst="roundRect">
-            <a:avLst>
-              <a:gd name="adj" fmla="val 12000"/>
-            </a:avLst>
+            <a:off x="457200" y="1261872"/>
+            <a:ext cx="11277295" cy="320040"/>
+          </a:xfrm>
+          <a:prstGeom prst="rect">
+            <a:avLst/>
           </a:prstGeom>
           <a:solidFill>
             <a:srgbClr val="095292"/>
@@ -8990,14 +8193,46 @@
       </p:sp>
       <p:sp>
         <p:nvSpPr>
+          <p:cNvPr id="7" name="TextBox 6"/>
+          <p:cNvSpPr txBox="1"/>
+          <p:nvPr/>
+        </p:nvSpPr>
+        <p:spPr>
+          <a:xfrm>
+            <a:off x="685800" y="1307592"/>
+            <a:ext cx="10820095" cy="256032"/>
+          </a:xfrm>
+          <a:prstGeom prst="rect">
+            <a:avLst/>
+          </a:prstGeom>
+          <a:noFill/>
+        </p:spPr>
+        <p:txBody>
+          <a:bodyPr wrap="square" anchor="ctr"/>
+          <a:lstStyle/>
+          <a:p>
+            <a:r>
+              <a:rPr sz="1000" b="1" i="0">
+                <a:solidFill>
+                  <a:srgbClr val="269CCB"/>
+                </a:solidFill>
+                <a:latin typeface="Calibri"/>
+              </a:rPr>
+              <a:t>● ● ●</a:t>
+            </a:r>
+          </a:p>
+        </p:txBody>
+      </p:sp>
+      <p:sp>
+        <p:nvSpPr>
           <p:cNvPr id="8" name="TextBox 7"/>
           <p:cNvSpPr txBox="1"/>
           <p:nvPr/>
         </p:nvSpPr>
         <p:spPr>
           <a:xfrm>
-            <a:off x="594360" y="1679752"/>
-            <a:ext cx="438912" cy="438912"/>
+            <a:off x="777240" y="1719072"/>
+            <a:ext cx="10637215" cy="4453128"/>
           </a:xfrm>
           <a:prstGeom prst="rect">
             <a:avLst/>
@@ -9005,18 +8240,168 @@
           <a:noFill/>
         </p:spPr>
         <p:txBody>
-          <a:bodyPr wrap="square" anchor="ctr"/>
-          <a:lstStyle/>
-          <a:p>
-            <a:pPr algn="ctr"/>
-            <a:r>
-              <a:rPr sz="1600" b="1" i="0">
+          <a:bodyPr wrap="square">
+            <a:spAutoFit/>
+          </a:bodyPr>
+          <a:lstStyle/>
+          <a:p>
+            <a:pPr>
+              <a:spcAft>
+                <a:spcPts val="400"/>
+              </a:spcAft>
+            </a:pPr>
+            <a:r>
+              <a:rPr sz="1400" b="0" i="0">
                 <a:solidFill>
                   <a:srgbClr val="FFFFFF"/>
                 </a:solidFill>
                 <a:latin typeface="Calibri"/>
               </a:rPr>
-              <a:t>1</a:t>
+              <a:t># Exposicion de hoy · lo que se califica es el reparto, no el total</a:t>
+            </a:r>
+          </a:p>
+          <a:p>
+            <a:pPr>
+              <a:spcAft>
+                <a:spcPts val="400"/>
+              </a:spcAft>
+            </a:pPr>
+            <a:r>
+              <a:rPr sz="1400" b="0" i="0">
+                <a:solidFill>
+                  <a:srgbClr val="FFFFFF"/>
+                </a:solidFill>
+                <a:latin typeface="Calibri"/>
+              </a:rPr>
+              <a:t/>
+            </a:r>
+          </a:p>
+          <a:p>
+            <a:pPr>
+              <a:spcAft>
+                <a:spcPts val="400"/>
+              </a:spcAft>
+            </a:pPr>
+            <a:r>
+              <a:rPr sz="1400" b="0" i="0">
+                <a:solidFill>
+                  <a:srgbClr val="FFFFFF"/>
+                </a:solidFill>
+                <a:latin typeface="Calibri"/>
+              </a:rPr>
+              <a:t>Tramo 1 · 1 min                    El problema con su cifra. **Sin presentacion</a:t>
+            </a:r>
+          </a:p>
+          <a:p>
+            <a:pPr>
+              <a:spcAft>
+                <a:spcPts val="400"/>
+              </a:spcAft>
+            </a:pPr>
+            <a:r>
+              <a:rPr sz="1400" b="0" i="0">
+                <a:solidFill>
+                  <a:srgbClr val="FFFFFF"/>
+                </a:solidFill>
+                <a:latin typeface="Calibri"/>
+              </a:rPr>
+              <a:t>Tramo 2 · 2 min                    Los afectados y la decisión de la matriz, co</a:t>
+            </a:r>
+          </a:p>
+          <a:p>
+            <a:pPr>
+              <a:spcAft>
+                <a:spcPts val="400"/>
+              </a:spcAft>
+            </a:pPr>
+            <a:r>
+              <a:rPr sz="1400" b="0" i="0">
+                <a:solidFill>
+                  <a:srgbClr val="FFFFFF"/>
+                </a:solidFill>
+                <a:latin typeface="Calibri"/>
+              </a:rPr>
+              <a:t>Comienzo del tramo 3 · 1 min       Arrancar la demostración: hasta donde llegue</a:t>
+            </a:r>
+          </a:p>
+          <a:p>
+            <a:pPr>
+              <a:spcAft>
+                <a:spcPts val="400"/>
+              </a:spcAft>
+            </a:pPr>
+            <a:r>
+              <a:rPr sz="1400" b="0" i="0">
+                <a:solidFill>
+                  <a:srgbClr val="FFFFFF"/>
+                </a:solidFill>
+                <a:latin typeface="Calibri"/>
+              </a:rPr>
+              <a:t>Corte a los 4 min                  Se corta en mitad de la frase. En la Clase 1</a:t>
+            </a:r>
+          </a:p>
+          <a:p>
+            <a:pPr>
+              <a:spcAft>
+                <a:spcPts val="400"/>
+              </a:spcAft>
+            </a:pPr>
+            <a:r>
+              <a:rPr sz="1400" b="0" i="0">
+                <a:solidFill>
+                  <a:srgbClr val="FFFFFF"/>
+                </a:solidFill>
+                <a:latin typeface="Calibri"/>
+              </a:rPr>
+              <a:t>2 min de corrección                El docente dice **una sola cosa**, la que má</a:t>
+            </a:r>
+          </a:p>
+          <a:p>
+            <a:pPr>
+              <a:spcAft>
+                <a:spcPts val="400"/>
+              </a:spcAft>
+            </a:pPr>
+            <a:r>
+              <a:rPr sz="1400" b="0" i="0">
+                <a:solidFill>
+                  <a:srgbClr val="FFFFFF"/>
+                </a:solidFill>
+                <a:latin typeface="Calibri"/>
+              </a:rPr>
+              <a:t/>
+            </a:r>
+          </a:p>
+          <a:p>
+            <a:pPr>
+              <a:spcAft>
+                <a:spcPts val="400"/>
+              </a:spcAft>
+            </a:pPr>
+            <a:r>
+              <a:rPr sz="1400" b="0" i="0">
+                <a:solidFill>
+                  <a:srgbClr val="FFFFFF"/>
+                </a:solidFill>
+                <a:latin typeface="Calibri"/>
+              </a:rPr>
+              <a:t># El tramo marcado como obligatorio es el que el jurado califica:</a:t>
+            </a:r>
+          </a:p>
+          <a:p>
+            <a:pPr>
+              <a:spcAft>
+                <a:spcPts val="400"/>
+              </a:spcAft>
+            </a:pPr>
+            <a:r>
+              <a:rPr sz="1400" b="0" i="0">
+                <a:solidFill>
+                  <a:srgbClr val="FFFFFF"/>
+                </a:solidFill>
+                <a:latin typeface="Calibri"/>
+              </a:rPr>
+              <a:t># si el guion no esta cronometrado, es el que se queda sin tiempo.</a:t>
             </a:r>
           </a:p>
         </p:txBody>
@@ -9024,765 +8409,6 @@
       <p:sp>
         <p:nvSpPr>
           <p:cNvPr id="9" name="TextBox 8"/>
-          <p:cNvSpPr txBox="1"/>
-          <p:nvPr/>
-        </p:nvSpPr>
-        <p:spPr>
-          <a:xfrm>
-            <a:off x="1188720" y="1536192"/>
-            <a:ext cx="10271455" cy="744321"/>
-          </a:xfrm>
-          <a:prstGeom prst="rect">
-            <a:avLst/>
-          </a:prstGeom>
-          <a:noFill/>
-        </p:spPr>
-        <p:txBody>
-          <a:bodyPr wrap="square" anchor="ctr"/>
-          <a:lstStyle/>
-          <a:p>
-            <a:r>
-              <a:rPr sz="1500" b="1" i="0">
-                <a:solidFill>
-                  <a:srgbClr val="095292"/>
-                </a:solidFill>
-                <a:latin typeface="Calibri"/>
-              </a:rPr>
-              <a:t>Tramo 1 · 1 min</a:t>
-            </a:r>
-          </a:p>
-          <a:p>
-            <a:pPr>
-              <a:spcBef>
-                <a:spcPts val="200"/>
-              </a:spcBef>
-            </a:pPr>
-            <a:r>
-              <a:rPr sz="1300" b="0" i="0">
-                <a:solidFill>
-                  <a:srgbClr val="333333"/>
-                </a:solidFill>
-                <a:latin typeface="Calibri"/>
-              </a:rPr>
-              <a:t>El problema con su cifra. </a:t>
-            </a:r>
-            <a:r>
-              <a:rPr sz="1300" b="1" i="0">
-                <a:solidFill>
-                  <a:srgbClr val="333333"/>
-                </a:solidFill>
-                <a:latin typeface="Calibri"/>
-              </a:rPr>
-              <a:t>Sin presentaciones personales.</a:t>
-            </a:r>
-          </a:p>
-        </p:txBody>
-      </p:sp>
-      <p:sp>
-        <p:nvSpPr>
-          <p:cNvPr id="10" name="Rounded Rectangle 9"/>
-          <p:cNvSpPr/>
-          <p:nvPr/>
-        </p:nvSpPr>
-        <p:spPr>
-          <a:xfrm>
-            <a:off x="457200" y="2445105"/>
-            <a:ext cx="11277295" cy="908913"/>
-          </a:xfrm>
-          <a:prstGeom prst="roundRect">
-            <a:avLst>
-              <a:gd name="adj" fmla="val 12000"/>
-            </a:avLst>
-          </a:prstGeom>
-          <a:solidFill>
-            <a:srgbClr val="E8F4FA"/>
-          </a:solidFill>
-          <a:ln>
-            <a:noFill/>
-          </a:ln>
-        </p:spPr>
-        <p:style>
-          <a:lnRef idx="1">
-            <a:schemeClr val="accent1"/>
-          </a:lnRef>
-          <a:fillRef idx="3">
-            <a:schemeClr val="accent1"/>
-          </a:fillRef>
-          <a:effectRef idx="2">
-            <a:schemeClr val="accent1"/>
-          </a:effectRef>
-          <a:fontRef idx="minor">
-            <a:schemeClr val="lt1"/>
-          </a:fontRef>
-        </p:style>
-        <p:txBody>
-          <a:bodyPr rtlCol="0" anchor="ctr"/>
-          <a:lstStyle/>
-          <a:p>
-            <a:pPr algn="ctr"/>
-          </a:p>
-        </p:txBody>
-      </p:sp>
-      <p:sp>
-        <p:nvSpPr>
-          <p:cNvPr id="11" name="Rounded Rectangle 10"/>
-          <p:cNvSpPr/>
-          <p:nvPr/>
-        </p:nvSpPr>
-        <p:spPr>
-          <a:xfrm>
-            <a:off x="594360" y="2680106"/>
-            <a:ext cx="438912" cy="438912"/>
-          </a:xfrm>
-          <a:prstGeom prst="roundRect">
-            <a:avLst>
-              <a:gd name="adj" fmla="val 12000"/>
-            </a:avLst>
-          </a:prstGeom>
-          <a:solidFill>
-            <a:srgbClr val="095292"/>
-          </a:solidFill>
-          <a:ln>
-            <a:noFill/>
-          </a:ln>
-        </p:spPr>
-        <p:style>
-          <a:lnRef idx="1">
-            <a:schemeClr val="accent1"/>
-          </a:lnRef>
-          <a:fillRef idx="3">
-            <a:schemeClr val="accent1"/>
-          </a:fillRef>
-          <a:effectRef idx="2">
-            <a:schemeClr val="accent1"/>
-          </a:effectRef>
-          <a:fontRef idx="minor">
-            <a:schemeClr val="lt1"/>
-          </a:fontRef>
-        </p:style>
-        <p:txBody>
-          <a:bodyPr rtlCol="0" anchor="ctr"/>
-          <a:lstStyle/>
-          <a:p>
-            <a:pPr algn="ctr"/>
-          </a:p>
-        </p:txBody>
-      </p:sp>
-      <p:sp>
-        <p:nvSpPr>
-          <p:cNvPr id="12" name="TextBox 11"/>
-          <p:cNvSpPr txBox="1"/>
-          <p:nvPr/>
-        </p:nvSpPr>
-        <p:spPr>
-          <a:xfrm>
-            <a:off x="594360" y="2680106"/>
-            <a:ext cx="438912" cy="438912"/>
-          </a:xfrm>
-          <a:prstGeom prst="rect">
-            <a:avLst/>
-          </a:prstGeom>
-          <a:noFill/>
-        </p:spPr>
-        <p:txBody>
-          <a:bodyPr wrap="square" anchor="ctr"/>
-          <a:lstStyle/>
-          <a:p>
-            <a:pPr algn="ctr"/>
-            <a:r>
-              <a:rPr sz="1600" b="1" i="0">
-                <a:solidFill>
-                  <a:srgbClr val="FFFFFF"/>
-                </a:solidFill>
-                <a:latin typeface="Calibri"/>
-              </a:rPr>
-              <a:t>2</a:t>
-            </a:r>
-          </a:p>
-        </p:txBody>
-      </p:sp>
-      <p:sp>
-        <p:nvSpPr>
-          <p:cNvPr id="13" name="TextBox 12"/>
-          <p:cNvSpPr txBox="1"/>
-          <p:nvPr/>
-        </p:nvSpPr>
-        <p:spPr>
-          <a:xfrm>
-            <a:off x="1188720" y="2536545"/>
-            <a:ext cx="10271455" cy="744321"/>
-          </a:xfrm>
-          <a:prstGeom prst="rect">
-            <a:avLst/>
-          </a:prstGeom>
-          <a:noFill/>
-        </p:spPr>
-        <p:txBody>
-          <a:bodyPr wrap="square" anchor="ctr"/>
-          <a:lstStyle/>
-          <a:p>
-            <a:r>
-              <a:rPr sz="1500" b="1" i="0">
-                <a:solidFill>
-                  <a:srgbClr val="095292"/>
-                </a:solidFill>
-                <a:latin typeface="Calibri"/>
-              </a:rPr>
-              <a:t>Tramo 2 · 2 min</a:t>
-            </a:r>
-          </a:p>
-          <a:p>
-            <a:pPr>
-              <a:spcBef>
-                <a:spcPts val="200"/>
-              </a:spcBef>
-            </a:pPr>
-            <a:r>
-              <a:rPr sz="1300" b="0" i="0">
-                <a:solidFill>
-                  <a:srgbClr val="333333"/>
-                </a:solidFill>
-                <a:latin typeface="Calibri"/>
-              </a:rPr>
-              <a:t>Los afectados y la decisión de la matriz, con lo que se sacrificó.</a:t>
-            </a:r>
-          </a:p>
-        </p:txBody>
-      </p:sp>
-      <p:sp>
-        <p:nvSpPr>
-          <p:cNvPr id="14" name="Rounded Rectangle 13"/>
-          <p:cNvSpPr/>
-          <p:nvPr/>
-        </p:nvSpPr>
-        <p:spPr>
-          <a:xfrm>
-            <a:off x="457200" y="3445459"/>
-            <a:ext cx="11277295" cy="908913"/>
-          </a:xfrm>
-          <a:prstGeom prst="roundRect">
-            <a:avLst>
-              <a:gd name="adj" fmla="val 12000"/>
-            </a:avLst>
-          </a:prstGeom>
-          <a:solidFill>
-            <a:srgbClr val="F2F2F2"/>
-          </a:solidFill>
-          <a:ln>
-            <a:noFill/>
-          </a:ln>
-        </p:spPr>
-        <p:style>
-          <a:lnRef idx="1">
-            <a:schemeClr val="accent1"/>
-          </a:lnRef>
-          <a:fillRef idx="3">
-            <a:schemeClr val="accent1"/>
-          </a:fillRef>
-          <a:effectRef idx="2">
-            <a:schemeClr val="accent1"/>
-          </a:effectRef>
-          <a:fontRef idx="minor">
-            <a:schemeClr val="lt1"/>
-          </a:fontRef>
-        </p:style>
-        <p:txBody>
-          <a:bodyPr rtlCol="0" anchor="ctr"/>
-          <a:lstStyle/>
-          <a:p>
-            <a:pPr algn="ctr"/>
-          </a:p>
-        </p:txBody>
-      </p:sp>
-      <p:sp>
-        <p:nvSpPr>
-          <p:cNvPr id="15" name="Rounded Rectangle 14"/>
-          <p:cNvSpPr/>
-          <p:nvPr/>
-        </p:nvSpPr>
-        <p:spPr>
-          <a:xfrm>
-            <a:off x="594360" y="3680460"/>
-            <a:ext cx="438912" cy="438912"/>
-          </a:xfrm>
-          <a:prstGeom prst="roundRect">
-            <a:avLst>
-              <a:gd name="adj" fmla="val 12000"/>
-            </a:avLst>
-          </a:prstGeom>
-          <a:solidFill>
-            <a:srgbClr val="095292"/>
-          </a:solidFill>
-          <a:ln>
-            <a:noFill/>
-          </a:ln>
-        </p:spPr>
-        <p:style>
-          <a:lnRef idx="1">
-            <a:schemeClr val="accent1"/>
-          </a:lnRef>
-          <a:fillRef idx="3">
-            <a:schemeClr val="accent1"/>
-          </a:fillRef>
-          <a:effectRef idx="2">
-            <a:schemeClr val="accent1"/>
-          </a:effectRef>
-          <a:fontRef idx="minor">
-            <a:schemeClr val="lt1"/>
-          </a:fontRef>
-        </p:style>
-        <p:txBody>
-          <a:bodyPr rtlCol="0" anchor="ctr"/>
-          <a:lstStyle/>
-          <a:p>
-            <a:pPr algn="ctr"/>
-          </a:p>
-        </p:txBody>
-      </p:sp>
-      <p:sp>
-        <p:nvSpPr>
-          <p:cNvPr id="16" name="TextBox 15"/>
-          <p:cNvSpPr txBox="1"/>
-          <p:nvPr/>
-        </p:nvSpPr>
-        <p:spPr>
-          <a:xfrm>
-            <a:off x="594360" y="3680460"/>
-            <a:ext cx="438912" cy="438912"/>
-          </a:xfrm>
-          <a:prstGeom prst="rect">
-            <a:avLst/>
-          </a:prstGeom>
-          <a:noFill/>
-        </p:spPr>
-        <p:txBody>
-          <a:bodyPr wrap="square" anchor="ctr"/>
-          <a:lstStyle/>
-          <a:p>
-            <a:pPr algn="ctr"/>
-            <a:r>
-              <a:rPr sz="1600" b="1" i="0">
-                <a:solidFill>
-                  <a:srgbClr val="FFFFFF"/>
-                </a:solidFill>
-                <a:latin typeface="Calibri"/>
-              </a:rPr>
-              <a:t>3</a:t>
-            </a:r>
-          </a:p>
-        </p:txBody>
-      </p:sp>
-      <p:sp>
-        <p:nvSpPr>
-          <p:cNvPr id="17" name="TextBox 16"/>
-          <p:cNvSpPr txBox="1"/>
-          <p:nvPr/>
-        </p:nvSpPr>
-        <p:spPr>
-          <a:xfrm>
-            <a:off x="1188720" y="3536899"/>
-            <a:ext cx="10271455" cy="744321"/>
-          </a:xfrm>
-          <a:prstGeom prst="rect">
-            <a:avLst/>
-          </a:prstGeom>
-          <a:noFill/>
-        </p:spPr>
-        <p:txBody>
-          <a:bodyPr wrap="square" anchor="ctr"/>
-          <a:lstStyle/>
-          <a:p>
-            <a:r>
-              <a:rPr sz="1500" b="1" i="0">
-                <a:solidFill>
-                  <a:srgbClr val="095292"/>
-                </a:solidFill>
-                <a:latin typeface="Calibri"/>
-              </a:rPr>
-              <a:t>Comienzo del tramo 3 · 1 min</a:t>
-            </a:r>
-          </a:p>
-          <a:p>
-            <a:pPr>
-              <a:spcBef>
-                <a:spcPts val="200"/>
-              </a:spcBef>
-            </a:pPr>
-            <a:r>
-              <a:rPr sz="1300" b="0" i="0">
-                <a:solidFill>
-                  <a:srgbClr val="333333"/>
-                </a:solidFill>
-                <a:latin typeface="Calibri"/>
-              </a:rPr>
-              <a:t>Arrancar la demostración: hasta donde llegue en el minuto.</a:t>
-            </a:r>
-          </a:p>
-        </p:txBody>
-      </p:sp>
-      <p:sp>
-        <p:nvSpPr>
-          <p:cNvPr id="18" name="Rounded Rectangle 17"/>
-          <p:cNvSpPr/>
-          <p:nvPr/>
-        </p:nvSpPr>
-        <p:spPr>
-          <a:xfrm>
-            <a:off x="457200" y="4445812"/>
-            <a:ext cx="11277295" cy="908913"/>
-          </a:xfrm>
-          <a:prstGeom prst="roundRect">
-            <a:avLst>
-              <a:gd name="adj" fmla="val 12000"/>
-            </a:avLst>
-          </a:prstGeom>
-          <a:solidFill>
-            <a:srgbClr val="E8F4FA"/>
-          </a:solidFill>
-          <a:ln>
-            <a:noFill/>
-          </a:ln>
-        </p:spPr>
-        <p:style>
-          <a:lnRef idx="1">
-            <a:schemeClr val="accent1"/>
-          </a:lnRef>
-          <a:fillRef idx="3">
-            <a:schemeClr val="accent1"/>
-          </a:fillRef>
-          <a:effectRef idx="2">
-            <a:schemeClr val="accent1"/>
-          </a:effectRef>
-          <a:fontRef idx="minor">
-            <a:schemeClr val="lt1"/>
-          </a:fontRef>
-        </p:style>
-        <p:txBody>
-          <a:bodyPr rtlCol="0" anchor="ctr"/>
-          <a:lstStyle/>
-          <a:p>
-            <a:pPr algn="ctr"/>
-          </a:p>
-        </p:txBody>
-      </p:sp>
-      <p:sp>
-        <p:nvSpPr>
-          <p:cNvPr id="19" name="Rounded Rectangle 18"/>
-          <p:cNvSpPr/>
-          <p:nvPr/>
-        </p:nvSpPr>
-        <p:spPr>
-          <a:xfrm>
-            <a:off x="594360" y="4680813"/>
-            <a:ext cx="438912" cy="438912"/>
-          </a:xfrm>
-          <a:prstGeom prst="roundRect">
-            <a:avLst>
-              <a:gd name="adj" fmla="val 12000"/>
-            </a:avLst>
-          </a:prstGeom>
-          <a:solidFill>
-            <a:srgbClr val="095292"/>
-          </a:solidFill>
-          <a:ln>
-            <a:noFill/>
-          </a:ln>
-        </p:spPr>
-        <p:style>
-          <a:lnRef idx="1">
-            <a:schemeClr val="accent1"/>
-          </a:lnRef>
-          <a:fillRef idx="3">
-            <a:schemeClr val="accent1"/>
-          </a:fillRef>
-          <a:effectRef idx="2">
-            <a:schemeClr val="accent1"/>
-          </a:effectRef>
-          <a:fontRef idx="minor">
-            <a:schemeClr val="lt1"/>
-          </a:fontRef>
-        </p:style>
-        <p:txBody>
-          <a:bodyPr rtlCol="0" anchor="ctr"/>
-          <a:lstStyle/>
-          <a:p>
-            <a:pPr algn="ctr"/>
-          </a:p>
-        </p:txBody>
-      </p:sp>
-      <p:sp>
-        <p:nvSpPr>
-          <p:cNvPr id="20" name="TextBox 19"/>
-          <p:cNvSpPr txBox="1"/>
-          <p:nvPr/>
-        </p:nvSpPr>
-        <p:spPr>
-          <a:xfrm>
-            <a:off x="594360" y="4680813"/>
-            <a:ext cx="438912" cy="438912"/>
-          </a:xfrm>
-          <a:prstGeom prst="rect">
-            <a:avLst/>
-          </a:prstGeom>
-          <a:noFill/>
-        </p:spPr>
-        <p:txBody>
-          <a:bodyPr wrap="square" anchor="ctr"/>
-          <a:lstStyle/>
-          <a:p>
-            <a:pPr algn="ctr"/>
-            <a:r>
-              <a:rPr sz="1600" b="1" i="0">
-                <a:solidFill>
-                  <a:srgbClr val="FFFFFF"/>
-                </a:solidFill>
-                <a:latin typeface="Calibri"/>
-              </a:rPr>
-              <a:t>4</a:t>
-            </a:r>
-          </a:p>
-        </p:txBody>
-      </p:sp>
-      <p:sp>
-        <p:nvSpPr>
-          <p:cNvPr id="21" name="TextBox 20"/>
-          <p:cNvSpPr txBox="1"/>
-          <p:nvPr/>
-        </p:nvSpPr>
-        <p:spPr>
-          <a:xfrm>
-            <a:off x="1188720" y="4537252"/>
-            <a:ext cx="10271455" cy="744321"/>
-          </a:xfrm>
-          <a:prstGeom prst="rect">
-            <a:avLst/>
-          </a:prstGeom>
-          <a:noFill/>
-        </p:spPr>
-        <p:txBody>
-          <a:bodyPr wrap="square" anchor="ctr"/>
-          <a:lstStyle/>
-          <a:p>
-            <a:r>
-              <a:rPr sz="1500" b="1" i="0">
-                <a:solidFill>
-                  <a:srgbClr val="095292"/>
-                </a:solidFill>
-                <a:latin typeface="Calibri"/>
-              </a:rPr>
-              <a:t>Corte a los 4 min</a:t>
-            </a:r>
-          </a:p>
-          <a:p>
-            <a:pPr>
-              <a:spcBef>
-                <a:spcPts val="200"/>
-              </a:spcBef>
-            </a:pPr>
-            <a:r>
-              <a:rPr sz="1300" b="0" i="0">
-                <a:solidFill>
-                  <a:srgbClr val="333333"/>
-                </a:solidFill>
-                <a:latin typeface="Calibri"/>
-              </a:rPr>
-              <a:t>Se corta en mitad de la frase. En la Clase 15 pasa igual.</a:t>
-            </a:r>
-          </a:p>
-        </p:txBody>
-      </p:sp>
-      <p:sp>
-        <p:nvSpPr>
-          <p:cNvPr id="22" name="Rounded Rectangle 21"/>
-          <p:cNvSpPr/>
-          <p:nvPr/>
-        </p:nvSpPr>
-        <p:spPr>
-          <a:xfrm>
-            <a:off x="457200" y="5446166"/>
-            <a:ext cx="11277295" cy="908913"/>
-          </a:xfrm>
-          <a:prstGeom prst="roundRect">
-            <a:avLst>
-              <a:gd name="adj" fmla="val 12000"/>
-            </a:avLst>
-          </a:prstGeom>
-          <a:solidFill>
-            <a:srgbClr val="F2F2F2"/>
-          </a:solidFill>
-          <a:ln>
-            <a:noFill/>
-          </a:ln>
-        </p:spPr>
-        <p:style>
-          <a:lnRef idx="1">
-            <a:schemeClr val="accent1"/>
-          </a:lnRef>
-          <a:fillRef idx="3">
-            <a:schemeClr val="accent1"/>
-          </a:fillRef>
-          <a:effectRef idx="2">
-            <a:schemeClr val="accent1"/>
-          </a:effectRef>
-          <a:fontRef idx="minor">
-            <a:schemeClr val="lt1"/>
-          </a:fontRef>
-        </p:style>
-        <p:txBody>
-          <a:bodyPr rtlCol="0" anchor="ctr"/>
-          <a:lstStyle/>
-          <a:p>
-            <a:pPr algn="ctr"/>
-          </a:p>
-        </p:txBody>
-      </p:sp>
-      <p:sp>
-        <p:nvSpPr>
-          <p:cNvPr id="23" name="Rounded Rectangle 22"/>
-          <p:cNvSpPr/>
-          <p:nvPr/>
-        </p:nvSpPr>
-        <p:spPr>
-          <a:xfrm>
-            <a:off x="594360" y="5681167"/>
-            <a:ext cx="438912" cy="438912"/>
-          </a:xfrm>
-          <a:prstGeom prst="roundRect">
-            <a:avLst>
-              <a:gd name="adj" fmla="val 12000"/>
-            </a:avLst>
-          </a:prstGeom>
-          <a:solidFill>
-            <a:srgbClr val="095292"/>
-          </a:solidFill>
-          <a:ln>
-            <a:noFill/>
-          </a:ln>
-        </p:spPr>
-        <p:style>
-          <a:lnRef idx="1">
-            <a:schemeClr val="accent1"/>
-          </a:lnRef>
-          <a:fillRef idx="3">
-            <a:schemeClr val="accent1"/>
-          </a:fillRef>
-          <a:effectRef idx="2">
-            <a:schemeClr val="accent1"/>
-          </a:effectRef>
-          <a:fontRef idx="minor">
-            <a:schemeClr val="lt1"/>
-          </a:fontRef>
-        </p:style>
-        <p:txBody>
-          <a:bodyPr rtlCol="0" anchor="ctr"/>
-          <a:lstStyle/>
-          <a:p>
-            <a:pPr algn="ctr"/>
-          </a:p>
-        </p:txBody>
-      </p:sp>
-      <p:sp>
-        <p:nvSpPr>
-          <p:cNvPr id="24" name="TextBox 23"/>
-          <p:cNvSpPr txBox="1"/>
-          <p:nvPr/>
-        </p:nvSpPr>
-        <p:spPr>
-          <a:xfrm>
-            <a:off x="594360" y="5681167"/>
-            <a:ext cx="438912" cy="438912"/>
-          </a:xfrm>
-          <a:prstGeom prst="rect">
-            <a:avLst/>
-          </a:prstGeom>
-          <a:noFill/>
-        </p:spPr>
-        <p:txBody>
-          <a:bodyPr wrap="square" anchor="ctr"/>
-          <a:lstStyle/>
-          <a:p>
-            <a:pPr algn="ctr"/>
-            <a:r>
-              <a:rPr sz="1600" b="1" i="0">
-                <a:solidFill>
-                  <a:srgbClr val="FFFFFF"/>
-                </a:solidFill>
-                <a:latin typeface="Calibri"/>
-              </a:rPr>
-              <a:t>5</a:t>
-            </a:r>
-          </a:p>
-        </p:txBody>
-      </p:sp>
-      <p:sp>
-        <p:nvSpPr>
-          <p:cNvPr id="25" name="TextBox 24"/>
-          <p:cNvSpPr txBox="1"/>
-          <p:nvPr/>
-        </p:nvSpPr>
-        <p:spPr>
-          <a:xfrm>
-            <a:off x="1188720" y="5537606"/>
-            <a:ext cx="10271455" cy="744321"/>
-          </a:xfrm>
-          <a:prstGeom prst="rect">
-            <a:avLst/>
-          </a:prstGeom>
-          <a:noFill/>
-        </p:spPr>
-        <p:txBody>
-          <a:bodyPr wrap="square" anchor="ctr"/>
-          <a:lstStyle/>
-          <a:p>
-            <a:r>
-              <a:rPr sz="1500" b="1" i="0">
-                <a:solidFill>
-                  <a:srgbClr val="095292"/>
-                </a:solidFill>
-                <a:latin typeface="Calibri"/>
-              </a:rPr>
-              <a:t>2 min de corrección</a:t>
-            </a:r>
-          </a:p>
-          <a:p>
-            <a:pPr>
-              <a:spcBef>
-                <a:spcPts val="200"/>
-              </a:spcBef>
-            </a:pPr>
-            <a:r>
-              <a:rPr sz="1300" b="0" i="0">
-                <a:solidFill>
-                  <a:srgbClr val="333333"/>
-                </a:solidFill>
-                <a:latin typeface="Calibri"/>
-              </a:rPr>
-              <a:t>El docente dice </a:t>
-            </a:r>
-            <a:r>
-              <a:rPr sz="1300" b="1" i="0">
-                <a:solidFill>
-                  <a:srgbClr val="333333"/>
-                </a:solidFill>
-                <a:latin typeface="Calibri"/>
-              </a:rPr>
-              <a:t>una sola cosa</a:t>
-            </a:r>
-            <a:r>
-              <a:rPr sz="1300" b="0" i="0">
-                <a:solidFill>
-                  <a:srgbClr val="333333"/>
-                </a:solidFill>
-                <a:latin typeface="Calibri"/>
-              </a:rPr>
-              <a:t>, la que más cambie la presentación.</a:t>
-            </a:r>
-          </a:p>
-        </p:txBody>
-      </p:sp>
-      <p:sp>
-        <p:nvSpPr>
-          <p:cNvPr id="26" name="TextBox 25"/>
           <p:cNvSpPr txBox="1"/>
           <p:nvPr/>
         </p:nvSpPr>
@@ -9850,7 +8476,7 @@
         <p:spPr>
           <a:xfrm>
             <a:off x="0" y="0"/>
-            <a:ext cx="12191695" cy="960120"/>
+            <a:ext cx="12191695" cy="1170432"/>
           </a:xfrm>
           <a:prstGeom prst="rect">
             <a:avLst/>
@@ -9892,7 +8518,7 @@
         </p:nvSpPr>
         <p:spPr>
           <a:xfrm>
-            <a:off x="0" y="960120"/>
+            <a:off x="0" y="1170432"/>
             <a:ext cx="12191695" cy="41148"/>
           </a:xfrm>
           <a:prstGeom prst="rect">
@@ -9936,7 +8562,7 @@
         <p:spPr>
           <a:xfrm>
             <a:off x="457200" y="164592"/>
-            <a:ext cx="11277295" cy="502920"/>
+            <a:ext cx="11277295" cy="384048"/>
           </a:xfrm>
           <a:prstGeom prst="rect">
             <a:avLst/>
@@ -9956,7 +8582,7 @@
                 </a:solidFill>
                 <a:latin typeface="Calibri"/>
               </a:rPr>
-              <a:t>Para la Clase 15</a:t>
+              <a:t>Taller de hoy: Guion de nueve minutos y plan B</a:t>
             </a:r>
           </a:p>
         </p:txBody>
@@ -9969,8 +8595,8 @@
         </p:nvSpPr>
         <p:spPr>
           <a:xfrm>
-            <a:off x="457200" y="1170432"/>
-            <a:ext cx="11277295" cy="5230368"/>
+            <a:off x="457200" y="566928"/>
+            <a:ext cx="11277295" cy="411480"/>
           </a:xfrm>
           <a:prstGeom prst="rect">
             <a:avLst/>
@@ -9983,252 +8609,1053 @@
           </a:bodyPr>
           <a:lstStyle/>
           <a:p>
-            <a:pPr>
-              <a:spcAft>
-                <a:spcPts val="800"/>
-              </a:spcAft>
-            </a:pPr>
-            <a:r>
-              <a:rPr sz="2000" b="0" i="0">
-                <a:solidFill>
-                  <a:srgbClr val="333333"/>
-                </a:solidFill>
-                <a:latin typeface="Calibri"/>
-              </a:rPr>
-              <a:t>–   </a:t>
-            </a:r>
-            <a:r>
-              <a:rPr sz="2000" b="1" i="0">
-                <a:solidFill>
-                  <a:srgbClr val="333333"/>
-                </a:solidFill>
-                <a:latin typeface="Calibri"/>
-              </a:rPr>
-              <a:t>Trabajo dirigido:</a:t>
-            </a:r>
-            <a:r>
-              <a:rPr sz="2000" b="0" i="0">
-                <a:solidFill>
-                  <a:srgbClr val="333333"/>
-                </a:solidFill>
-                <a:latin typeface="Calibri"/>
-              </a:rPr>
-              <a:t> Diseño de presentación y recursos visuales — dejar terminadas las ocho diapositivas y el guion con tiempos en la carpeta del equipo, junto con el PDF y las capturas.</a:t>
-            </a:r>
-          </a:p>
-          <a:p>
-            <a:pPr>
-              <a:spcAft>
-                <a:spcPts val="800"/>
-              </a:spcAft>
-            </a:pPr>
-            <a:r>
-              <a:rPr sz="2000" b="0" i="0">
-                <a:solidFill>
-                  <a:srgbClr val="333333"/>
-                </a:solidFill>
-                <a:latin typeface="Calibri"/>
-              </a:rPr>
-              <a:t>–   </a:t>
-            </a:r>
-            <a:r>
-              <a:rPr sz="2000" b="1" i="0">
-                <a:solidFill>
-                  <a:srgbClr val="333333"/>
-                </a:solidFill>
-                <a:latin typeface="Calibri"/>
-              </a:rPr>
-              <a:t>Trabajo independiente:</a:t>
-            </a:r>
-            <a:r>
-              <a:rPr sz="2000" b="0" i="0">
-                <a:solidFill>
-                  <a:srgbClr val="333333"/>
-                </a:solidFill>
-                <a:latin typeface="Calibri"/>
-              </a:rPr>
-              <a:t> Ensayo general: ensayar </a:t>
-            </a:r>
-            <a:r>
-              <a:rPr sz="2000" b="1" i="0">
-                <a:solidFill>
-                  <a:srgbClr val="333333"/>
-                </a:solidFill>
-                <a:latin typeface="Calibri"/>
-              </a:rPr>
-              <a:t>los nueve minutos completos, hablando y con cronómetro, al menos dos veces</a:t>
-            </a:r>
-            <a:r>
-              <a:rPr sz="2000" b="0" i="0">
-                <a:solidFill>
-                  <a:srgbClr val="333333"/>
-                </a:solidFill>
-                <a:latin typeface="Calibri"/>
-              </a:rPr>
-              <a:t>, y ajustar el guion con el tiempo real. Leerlo en silencio no cuenta: dura la mitad.</a:t>
-            </a:r>
-          </a:p>
-          <a:p>
-            <a:pPr>
-              <a:spcAft>
-                <a:spcPts val="800"/>
-              </a:spcAft>
-            </a:pPr>
-            <a:r>
-              <a:rPr sz="2000" b="0" i="0">
-                <a:solidFill>
-                  <a:srgbClr val="333333"/>
-                </a:solidFill>
-                <a:latin typeface="Calibri"/>
-              </a:rPr>
-              <a:t>–   </a:t>
-            </a:r>
-            <a:r>
-              <a:rPr sz="2000" b="1" i="0">
-                <a:solidFill>
-                  <a:srgbClr val="333333"/>
-                </a:solidFill>
-                <a:latin typeface="Calibri"/>
-              </a:rPr>
-              <a:t>Clase 15 · Exposición final de proyectos</a:t>
-            </a:r>
-            <a:r>
-              <a:rPr sz="2000" b="0" i="0">
-                <a:solidFill>
-                  <a:srgbClr val="333333"/>
-                </a:solidFill>
-                <a:latin typeface="Calibri"/>
-              </a:rPr>
-              <a:t> — es la </a:t>
-            </a:r>
-            <a:r>
-              <a:rPr sz="2000" b="1" i="0">
-                <a:solidFill>
-                  <a:srgbClr val="333333"/>
-                </a:solidFill>
-                <a:latin typeface="Calibri"/>
-              </a:rPr>
-              <a:t>exposición final</a:t>
-            </a:r>
-            <a:r>
-              <a:rPr sz="2000" b="0" i="0">
-                <a:solidFill>
-                  <a:srgbClr val="333333"/>
-                </a:solidFill>
-                <a:latin typeface="Calibri"/>
-              </a:rPr>
-              <a:t>, con nota: nueve minutos por equipo y tres de preguntas. Vale el </a:t>
-            </a:r>
-            <a:r>
-              <a:rPr sz="2000" b="1" i="0">
-                <a:solidFill>
-                  <a:srgbClr val="333333"/>
-                </a:solidFill>
-                <a:latin typeface="Calibri"/>
-              </a:rPr>
-              <a:t>15 %</a:t>
-            </a:r>
-            <a:r>
-              <a:rPr sz="2000" b="0" i="0">
-                <a:solidFill>
-                  <a:srgbClr val="333333"/>
-                </a:solidFill>
-                <a:latin typeface="Calibri"/>
-              </a:rPr>
-              <a:t> del curso.</a:t>
-            </a:r>
-          </a:p>
-          <a:p>
-            <a:pPr>
-              <a:spcAft>
-                <a:spcPts val="800"/>
-              </a:spcAft>
-            </a:pPr>
-            <a:r>
-              <a:rPr sz="2000" b="0" i="0">
-                <a:solidFill>
-                  <a:srgbClr val="333333"/>
-                </a:solidFill>
-                <a:latin typeface="Calibri"/>
-              </a:rPr>
-              <a:t>–   </a:t>
-            </a:r>
-            <a:r>
-              <a:rPr sz="2000" b="1" i="0">
-                <a:solidFill>
-                  <a:srgbClr val="333333"/>
-                </a:solidFill>
-                <a:latin typeface="Calibri"/>
-              </a:rPr>
-              <a:t>Aviso:</a:t>
-            </a:r>
-            <a:r>
-              <a:rPr sz="2000" b="0" i="0">
-                <a:solidFill>
-                  <a:srgbClr val="333333"/>
-                </a:solidFill>
-                <a:latin typeface="Calibri"/>
-              </a:rPr>
-              <a:t> En la Clase 15 </a:t>
-            </a:r>
-            <a:r>
-              <a:rPr sz="2000" b="1" i="0">
-                <a:solidFill>
-                  <a:srgbClr val="333333"/>
-                </a:solidFill>
-                <a:latin typeface="Calibri"/>
-              </a:rPr>
-              <a:t>se corta a los nueve minutos</a:t>
-            </a:r>
-            <a:r>
-              <a:rPr sz="2000" b="0" i="0">
-                <a:solidFill>
-                  <a:srgbClr val="333333"/>
-                </a:solidFill>
-                <a:latin typeface="Calibri"/>
-              </a:rPr>
-              <a:t>, sin excepción. Conéctense cinco minutos antes con la presentación y el prototipo ya abiertos, y con las capturas a mano. El orden de exposición se sortea al empezar, así que todos los equipos deben estar listos desde el primer minuto.</a:t>
-            </a:r>
-          </a:p>
-          <a:p>
-            <a:pPr>
-              <a:spcAft>
-                <a:spcPts val="800"/>
-              </a:spcAft>
-            </a:pPr>
-            <a:r>
-              <a:rPr sz="2000" b="0" i="0">
-                <a:solidFill>
-                  <a:srgbClr val="333333"/>
-                </a:solidFill>
-                <a:latin typeface="Calibri"/>
-              </a:rPr>
-              <a:t>–   </a:t>
-            </a:r>
-            <a:r>
-              <a:rPr sz="2000" b="1" i="0">
-                <a:solidFill>
-                  <a:srgbClr val="333333"/>
-                </a:solidFill>
-                <a:latin typeface="Calibri"/>
-              </a:rPr>
-              <a:t>Antes de salir:</a:t>
-            </a:r>
-            <a:r>
-              <a:rPr sz="2000" b="0" i="0">
-                <a:solidFill>
-                  <a:srgbClr val="333333"/>
-                </a:solidFill>
-                <a:latin typeface="Calibri"/>
-              </a:rPr>
-              <a:t> el enlace del documento del equipo en el chat, con permiso de lectura para el docente, y el nombre del vocero de hoy.</a:t>
-            </a:r>
-          </a:p>
-        </p:txBody>
-      </p:sp>
-      <p:sp>
-        <p:nvSpPr>
-          <p:cNvPr id="6" name="TextBox 5"/>
+            <a:r>
+              <a:rPr sz="1400" b="0" i="0">
+                <a:solidFill>
+                  <a:srgbClr val="B8D8EE"/>
+                </a:solidFill>
+                <a:latin typeface="Calibri"/>
+              </a:rPr>
+              <a:t>27 min en equipos · 27 min: guion, diapositivas, demostración y plan B · guion con tiempos + diapositivas + PDF y capturas del plan B</a:t>
+            </a:r>
+          </a:p>
+        </p:txBody>
+      </p:sp>
+      <p:sp>
+        <p:nvSpPr>
+          <p:cNvPr id="6" name="Rounded Rectangle 5"/>
+          <p:cNvSpPr/>
+          <p:nvPr/>
+        </p:nvSpPr>
+        <p:spPr>
+          <a:xfrm>
+            <a:off x="457200" y="1472184"/>
+            <a:ext cx="11277295" cy="566928"/>
+          </a:xfrm>
+          <a:prstGeom prst="roundRect">
+            <a:avLst>
+              <a:gd name="adj" fmla="val 12000"/>
+            </a:avLst>
+          </a:prstGeom>
+          <a:solidFill>
+            <a:srgbClr val="F2F2F2"/>
+          </a:solidFill>
+          <a:ln>
+            <a:noFill/>
+          </a:ln>
+        </p:spPr>
+        <p:style>
+          <a:lnRef idx="1">
+            <a:schemeClr val="accent1"/>
+          </a:lnRef>
+          <a:fillRef idx="3">
+            <a:schemeClr val="accent1"/>
+          </a:fillRef>
+          <a:effectRef idx="2">
+            <a:schemeClr val="accent1"/>
+          </a:effectRef>
+          <a:fontRef idx="minor">
+            <a:schemeClr val="lt1"/>
+          </a:fontRef>
+        </p:style>
+        <p:txBody>
+          <a:bodyPr rtlCol="0" anchor="ctr"/>
+          <a:lstStyle/>
+          <a:p>
+            <a:pPr algn="ctr"/>
+          </a:p>
+        </p:txBody>
+      </p:sp>
+      <p:sp>
+        <p:nvSpPr>
+          <p:cNvPr id="7" name="Rectangle 6"/>
+          <p:cNvSpPr/>
+          <p:nvPr/>
+        </p:nvSpPr>
+        <p:spPr>
+          <a:xfrm>
+            <a:off x="640080" y="1618487"/>
+            <a:ext cx="274320" cy="274320"/>
+          </a:xfrm>
+          <a:prstGeom prst="rect">
+            <a:avLst/>
+          </a:prstGeom>
+          <a:solidFill>
+            <a:srgbClr val="FFFFFF"/>
+          </a:solidFill>
+          <a:ln>
+            <a:solidFill>
+              <a:srgbClr val="333333"/>
+            </a:solidFill>
+          </a:ln>
+        </p:spPr>
+        <p:style>
+          <a:lnRef idx="1">
+            <a:schemeClr val="accent1"/>
+          </a:lnRef>
+          <a:fillRef idx="3">
+            <a:schemeClr val="accent1"/>
+          </a:fillRef>
+          <a:effectRef idx="2">
+            <a:schemeClr val="accent1"/>
+          </a:effectRef>
+          <a:fontRef idx="minor">
+            <a:schemeClr val="lt1"/>
+          </a:fontRef>
+        </p:style>
+        <p:txBody>
+          <a:bodyPr rtlCol="0" anchor="ctr"/>
+          <a:lstStyle/>
+          <a:p>
+            <a:pPr algn="ctr"/>
+          </a:p>
+        </p:txBody>
+      </p:sp>
+      <p:sp>
+        <p:nvSpPr>
+          <p:cNvPr id="8" name="Rectangle 7"/>
+          <p:cNvSpPr/>
+          <p:nvPr/>
+        </p:nvSpPr>
+        <p:spPr>
+          <a:xfrm>
+            <a:off x="640080" y="1618487"/>
+            <a:ext cx="73152" cy="274320"/>
+          </a:xfrm>
+          <a:prstGeom prst="rect">
+            <a:avLst/>
+          </a:prstGeom>
+          <a:solidFill>
+            <a:srgbClr val="269CCB"/>
+          </a:solidFill>
+          <a:ln>
+            <a:noFill/>
+          </a:ln>
+        </p:spPr>
+        <p:style>
+          <a:lnRef idx="1">
+            <a:schemeClr val="accent1"/>
+          </a:lnRef>
+          <a:fillRef idx="3">
+            <a:schemeClr val="accent1"/>
+          </a:fillRef>
+          <a:effectRef idx="2">
+            <a:schemeClr val="accent1"/>
+          </a:effectRef>
+          <a:fontRef idx="minor">
+            <a:schemeClr val="lt1"/>
+          </a:fontRef>
+        </p:style>
+        <p:txBody>
+          <a:bodyPr rtlCol="0" anchor="ctr"/>
+          <a:lstStyle/>
+          <a:p>
+            <a:pPr algn="ctr"/>
+          </a:p>
+        </p:txBody>
+      </p:sp>
+      <p:sp>
+        <p:nvSpPr>
+          <p:cNvPr id="9" name="TextBox 8"/>
+          <p:cNvSpPr txBox="1"/>
+          <p:nvPr/>
+        </p:nvSpPr>
+        <p:spPr>
+          <a:xfrm>
+            <a:off x="1097280" y="1563624"/>
+            <a:ext cx="10362895" cy="402336"/>
+          </a:xfrm>
+          <a:prstGeom prst="rect">
+            <a:avLst/>
+          </a:prstGeom>
+          <a:noFill/>
+        </p:spPr>
+        <p:txBody>
+          <a:bodyPr wrap="square" anchor="ctr"/>
+          <a:lstStyle/>
+          <a:p>
+            <a:r>
+              <a:rPr sz="1500" b="1" i="0">
+                <a:solidFill>
+                  <a:srgbClr val="333333"/>
+                </a:solidFill>
+                <a:latin typeface="Calibri"/>
+              </a:rPr>
+              <a:t>EL GUION DE LOS CINCO TRAMOS</a:t>
+            </a:r>
+            <a:r>
+              <a:rPr sz="1500" b="0" i="0">
+                <a:solidFill>
+                  <a:srgbClr val="333333"/>
+                </a:solidFill>
+                <a:latin typeface="Calibri"/>
+              </a:rPr>
+              <a:t> — Los cinco tramos con </a:t>
+            </a:r>
+            <a:r>
+              <a:rPr sz="1500" b="1" i="0">
+                <a:solidFill>
+                  <a:srgbClr val="333333"/>
+                </a:solidFill>
+                <a:latin typeface="Calibri"/>
+              </a:rPr>
+              <a:t>el tiempo asignado a cada uno</a:t>
+            </a:r>
+            <a:r>
+              <a:rPr sz="1500" b="0" i="0">
+                <a:solidFill>
+                  <a:srgbClr val="333333"/>
+                </a:solidFill>
+                <a:latin typeface="Calibri"/>
+              </a:rPr>
+              <a:t> —que sume nueve minutos— y </a:t>
+            </a:r>
+            <a:r>
+              <a:rPr sz="1500" b="1" i="0">
+                <a:solidFill>
+                  <a:srgbClr val="333333"/>
+                </a:solidFill>
+                <a:latin typeface="Calibri"/>
+              </a:rPr>
+              <a:t>quién habla</a:t>
+            </a:r>
+            <a:r>
+              <a:rPr sz="1500" b="0" i="0">
+                <a:solidFill>
+                  <a:srgbClr val="333333"/>
+                </a:solidFill>
+                <a:latin typeface="Calibri"/>
+              </a:rPr>
+              <a:t> en cada uno.</a:t>
+            </a:r>
+          </a:p>
+        </p:txBody>
+      </p:sp>
+      <p:sp>
+        <p:nvSpPr>
+          <p:cNvPr id="10" name="Rounded Rectangle 9"/>
+          <p:cNvSpPr/>
+          <p:nvPr/>
+        </p:nvSpPr>
+        <p:spPr>
+          <a:xfrm>
+            <a:off x="457200" y="2148839"/>
+            <a:ext cx="11277295" cy="566928"/>
+          </a:xfrm>
+          <a:prstGeom prst="roundRect">
+            <a:avLst>
+              <a:gd name="adj" fmla="val 12000"/>
+            </a:avLst>
+          </a:prstGeom>
+          <a:solidFill>
+            <a:srgbClr val="F2F2F2"/>
+          </a:solidFill>
+          <a:ln>
+            <a:noFill/>
+          </a:ln>
+        </p:spPr>
+        <p:style>
+          <a:lnRef idx="1">
+            <a:schemeClr val="accent1"/>
+          </a:lnRef>
+          <a:fillRef idx="3">
+            <a:schemeClr val="accent1"/>
+          </a:fillRef>
+          <a:effectRef idx="2">
+            <a:schemeClr val="accent1"/>
+          </a:effectRef>
+          <a:fontRef idx="minor">
+            <a:schemeClr val="lt1"/>
+          </a:fontRef>
+        </p:style>
+        <p:txBody>
+          <a:bodyPr rtlCol="0" anchor="ctr"/>
+          <a:lstStyle/>
+          <a:p>
+            <a:pPr algn="ctr"/>
+          </a:p>
+        </p:txBody>
+      </p:sp>
+      <p:sp>
+        <p:nvSpPr>
+          <p:cNvPr id="11" name="Rectangle 10"/>
+          <p:cNvSpPr/>
+          <p:nvPr/>
+        </p:nvSpPr>
+        <p:spPr>
+          <a:xfrm>
+            <a:off x="640080" y="2295144"/>
+            <a:ext cx="274320" cy="274320"/>
+          </a:xfrm>
+          <a:prstGeom prst="rect">
+            <a:avLst/>
+          </a:prstGeom>
+          <a:solidFill>
+            <a:srgbClr val="FFFFFF"/>
+          </a:solidFill>
+          <a:ln>
+            <a:solidFill>
+              <a:srgbClr val="333333"/>
+            </a:solidFill>
+          </a:ln>
+        </p:spPr>
+        <p:style>
+          <a:lnRef idx="1">
+            <a:schemeClr val="accent1"/>
+          </a:lnRef>
+          <a:fillRef idx="3">
+            <a:schemeClr val="accent1"/>
+          </a:fillRef>
+          <a:effectRef idx="2">
+            <a:schemeClr val="accent1"/>
+          </a:effectRef>
+          <a:fontRef idx="minor">
+            <a:schemeClr val="lt1"/>
+          </a:fontRef>
+        </p:style>
+        <p:txBody>
+          <a:bodyPr rtlCol="0" anchor="ctr"/>
+          <a:lstStyle/>
+          <a:p>
+            <a:pPr algn="ctr"/>
+          </a:p>
+        </p:txBody>
+      </p:sp>
+      <p:sp>
+        <p:nvSpPr>
+          <p:cNvPr id="12" name="Rectangle 11"/>
+          <p:cNvSpPr/>
+          <p:nvPr/>
+        </p:nvSpPr>
+        <p:spPr>
+          <a:xfrm>
+            <a:off x="640080" y="2295144"/>
+            <a:ext cx="73152" cy="274320"/>
+          </a:xfrm>
+          <a:prstGeom prst="rect">
+            <a:avLst/>
+          </a:prstGeom>
+          <a:solidFill>
+            <a:srgbClr val="269CCB"/>
+          </a:solidFill>
+          <a:ln>
+            <a:noFill/>
+          </a:ln>
+        </p:spPr>
+        <p:style>
+          <a:lnRef idx="1">
+            <a:schemeClr val="accent1"/>
+          </a:lnRef>
+          <a:fillRef idx="3">
+            <a:schemeClr val="accent1"/>
+          </a:fillRef>
+          <a:effectRef idx="2">
+            <a:schemeClr val="accent1"/>
+          </a:effectRef>
+          <a:fontRef idx="minor">
+            <a:schemeClr val="lt1"/>
+          </a:fontRef>
+        </p:style>
+        <p:txBody>
+          <a:bodyPr rtlCol="0" anchor="ctr"/>
+          <a:lstStyle/>
+          <a:p>
+            <a:pPr algn="ctr"/>
+          </a:p>
+        </p:txBody>
+      </p:sp>
+      <p:sp>
+        <p:nvSpPr>
+          <p:cNvPr id="13" name="TextBox 12"/>
+          <p:cNvSpPr txBox="1"/>
+          <p:nvPr/>
+        </p:nvSpPr>
+        <p:spPr>
+          <a:xfrm>
+            <a:off x="1097280" y="2240279"/>
+            <a:ext cx="10362895" cy="402336"/>
+          </a:xfrm>
+          <a:prstGeom prst="rect">
+            <a:avLst/>
+          </a:prstGeom>
+          <a:noFill/>
+        </p:spPr>
+        <p:txBody>
+          <a:bodyPr wrap="square" anchor="ctr"/>
+          <a:lstStyle/>
+          <a:p>
+            <a:r>
+              <a:rPr sz="1500" b="1" i="0">
+                <a:solidFill>
+                  <a:srgbClr val="333333"/>
+                </a:solidFill>
+                <a:latin typeface="Calibri"/>
+              </a:rPr>
+              <a:t>LAS OCHO DIAPOSITIVAS</a:t>
+            </a:r>
+            <a:r>
+              <a:rPr sz="1500" b="0" i="0">
+                <a:solidFill>
+                  <a:srgbClr val="333333"/>
+                </a:solidFill>
+                <a:latin typeface="Calibri"/>
+              </a:rPr>
+              <a:t> — Máximo ocho, </a:t>
+            </a:r>
+            <a:r>
+              <a:rPr sz="1500" b="1" i="0">
+                <a:solidFill>
+                  <a:srgbClr val="333333"/>
+                </a:solidFill>
+                <a:latin typeface="Calibri"/>
+              </a:rPr>
+              <a:t>una idea cada una</a:t>
+            </a:r>
+            <a:r>
+              <a:rPr sz="1500" b="0" i="0">
+                <a:solidFill>
+                  <a:srgbClr val="333333"/>
+                </a:solidFill>
+                <a:latin typeface="Calibri"/>
+              </a:rPr>
+              <a:t>, con rótulos y no párrafos. La matriz completa </a:t>
+            </a:r>
+            <a:r>
+              <a:rPr sz="1500" b="1" i="0">
+                <a:solidFill>
+                  <a:srgbClr val="333333"/>
+                </a:solidFill>
+                <a:latin typeface="Calibri"/>
+              </a:rPr>
+              <a:t>no va</a:t>
+            </a:r>
+            <a:r>
+              <a:rPr sz="1500" b="0" i="0">
+                <a:solidFill>
+                  <a:srgbClr val="333333"/>
+                </a:solidFill>
+                <a:latin typeface="Calibri"/>
+              </a:rPr>
+              <a:t>: van las dos alternativas y el ganador.</a:t>
+            </a:r>
+          </a:p>
+        </p:txBody>
+      </p:sp>
+      <p:sp>
+        <p:nvSpPr>
+          <p:cNvPr id="14" name="Rounded Rectangle 13"/>
+          <p:cNvSpPr/>
+          <p:nvPr/>
+        </p:nvSpPr>
+        <p:spPr>
+          <a:xfrm>
+            <a:off x="457200" y="2825496"/>
+            <a:ext cx="11277295" cy="566928"/>
+          </a:xfrm>
+          <a:prstGeom prst="roundRect">
+            <a:avLst>
+              <a:gd name="adj" fmla="val 12000"/>
+            </a:avLst>
+          </a:prstGeom>
+          <a:solidFill>
+            <a:srgbClr val="F2F2F2"/>
+          </a:solidFill>
+          <a:ln>
+            <a:noFill/>
+          </a:ln>
+        </p:spPr>
+        <p:style>
+          <a:lnRef idx="1">
+            <a:schemeClr val="accent1"/>
+          </a:lnRef>
+          <a:fillRef idx="3">
+            <a:schemeClr val="accent1"/>
+          </a:fillRef>
+          <a:effectRef idx="2">
+            <a:schemeClr val="accent1"/>
+          </a:effectRef>
+          <a:fontRef idx="minor">
+            <a:schemeClr val="lt1"/>
+          </a:fontRef>
+        </p:style>
+        <p:txBody>
+          <a:bodyPr rtlCol="0" anchor="ctr"/>
+          <a:lstStyle/>
+          <a:p>
+            <a:pPr algn="ctr"/>
+          </a:p>
+        </p:txBody>
+      </p:sp>
+      <p:sp>
+        <p:nvSpPr>
+          <p:cNvPr id="15" name="Rectangle 14"/>
+          <p:cNvSpPr/>
+          <p:nvPr/>
+        </p:nvSpPr>
+        <p:spPr>
+          <a:xfrm>
+            <a:off x="640080" y="2971800"/>
+            <a:ext cx="274320" cy="274320"/>
+          </a:xfrm>
+          <a:prstGeom prst="rect">
+            <a:avLst/>
+          </a:prstGeom>
+          <a:solidFill>
+            <a:srgbClr val="FFFFFF"/>
+          </a:solidFill>
+          <a:ln>
+            <a:solidFill>
+              <a:srgbClr val="333333"/>
+            </a:solidFill>
+          </a:ln>
+        </p:spPr>
+        <p:style>
+          <a:lnRef idx="1">
+            <a:schemeClr val="accent1"/>
+          </a:lnRef>
+          <a:fillRef idx="3">
+            <a:schemeClr val="accent1"/>
+          </a:fillRef>
+          <a:effectRef idx="2">
+            <a:schemeClr val="accent1"/>
+          </a:effectRef>
+          <a:fontRef idx="minor">
+            <a:schemeClr val="lt1"/>
+          </a:fontRef>
+        </p:style>
+        <p:txBody>
+          <a:bodyPr rtlCol="0" anchor="ctr"/>
+          <a:lstStyle/>
+          <a:p>
+            <a:pPr algn="ctr"/>
+          </a:p>
+        </p:txBody>
+      </p:sp>
+      <p:sp>
+        <p:nvSpPr>
+          <p:cNvPr id="16" name="Rectangle 15"/>
+          <p:cNvSpPr/>
+          <p:nvPr/>
+        </p:nvSpPr>
+        <p:spPr>
+          <a:xfrm>
+            <a:off x="640080" y="2971800"/>
+            <a:ext cx="73152" cy="274320"/>
+          </a:xfrm>
+          <a:prstGeom prst="rect">
+            <a:avLst/>
+          </a:prstGeom>
+          <a:solidFill>
+            <a:srgbClr val="269CCB"/>
+          </a:solidFill>
+          <a:ln>
+            <a:noFill/>
+          </a:ln>
+        </p:spPr>
+        <p:style>
+          <a:lnRef idx="1">
+            <a:schemeClr val="accent1"/>
+          </a:lnRef>
+          <a:fillRef idx="3">
+            <a:schemeClr val="accent1"/>
+          </a:fillRef>
+          <a:effectRef idx="2">
+            <a:schemeClr val="accent1"/>
+          </a:effectRef>
+          <a:fontRef idx="minor">
+            <a:schemeClr val="lt1"/>
+          </a:fontRef>
+        </p:style>
+        <p:txBody>
+          <a:bodyPr rtlCol="0" anchor="ctr"/>
+          <a:lstStyle/>
+          <a:p>
+            <a:pPr algn="ctr"/>
+          </a:p>
+        </p:txBody>
+      </p:sp>
+      <p:sp>
+        <p:nvSpPr>
+          <p:cNvPr id="17" name="TextBox 16"/>
+          <p:cNvSpPr txBox="1"/>
+          <p:nvPr/>
+        </p:nvSpPr>
+        <p:spPr>
+          <a:xfrm>
+            <a:off x="1097280" y="2916936"/>
+            <a:ext cx="10362895" cy="402336"/>
+          </a:xfrm>
+          <a:prstGeom prst="rect">
+            <a:avLst/>
+          </a:prstGeom>
+          <a:noFill/>
+        </p:spPr>
+        <p:txBody>
+          <a:bodyPr wrap="square" anchor="ctr"/>
+          <a:lstStyle/>
+          <a:p>
+            <a:r>
+              <a:rPr sz="1500" b="1" i="0">
+                <a:solidFill>
+                  <a:srgbClr val="333333"/>
+                </a:solidFill>
+                <a:latin typeface="Calibri"/>
+              </a:rPr>
+              <a:t>EL REPARTO ENTRE INTEGRANTES</a:t>
+            </a:r>
+            <a:r>
+              <a:rPr sz="1500" b="0" i="0">
+                <a:solidFill>
+                  <a:srgbClr val="333333"/>
+                </a:solidFill>
+                <a:latin typeface="Calibri"/>
+              </a:rPr>
+              <a:t> — Quién habla en cada tramo, y </a:t>
+            </a:r>
+            <a:r>
+              <a:rPr sz="1500" b="1" i="0">
+                <a:solidFill>
+                  <a:srgbClr val="333333"/>
+                </a:solidFill>
+                <a:latin typeface="Calibri"/>
+              </a:rPr>
+              <a:t>qué hace quien no habla</a:t>
+            </a:r>
+            <a:r>
+              <a:rPr sz="1500" b="0" i="0">
+                <a:solidFill>
+                  <a:srgbClr val="333333"/>
+                </a:solidFill>
+                <a:latin typeface="Calibri"/>
+              </a:rPr>
+              <a:t>: cronómetro, capturas del plan B, la diapositiva siguiente lista.</a:t>
+            </a:r>
+          </a:p>
+        </p:txBody>
+      </p:sp>
+      <p:sp>
+        <p:nvSpPr>
+          <p:cNvPr id="18" name="Rounded Rectangle 17"/>
+          <p:cNvSpPr/>
+          <p:nvPr/>
+        </p:nvSpPr>
+        <p:spPr>
+          <a:xfrm>
+            <a:off x="457200" y="3502152"/>
+            <a:ext cx="11277295" cy="566928"/>
+          </a:xfrm>
+          <a:prstGeom prst="roundRect">
+            <a:avLst>
+              <a:gd name="adj" fmla="val 12000"/>
+            </a:avLst>
+          </a:prstGeom>
+          <a:solidFill>
+            <a:srgbClr val="F2F2F2"/>
+          </a:solidFill>
+          <a:ln>
+            <a:noFill/>
+          </a:ln>
+        </p:spPr>
+        <p:style>
+          <a:lnRef idx="1">
+            <a:schemeClr val="accent1"/>
+          </a:lnRef>
+          <a:fillRef idx="3">
+            <a:schemeClr val="accent1"/>
+          </a:fillRef>
+          <a:effectRef idx="2">
+            <a:schemeClr val="accent1"/>
+          </a:effectRef>
+          <a:fontRef idx="minor">
+            <a:schemeClr val="lt1"/>
+          </a:fontRef>
+        </p:style>
+        <p:txBody>
+          <a:bodyPr rtlCol="0" anchor="ctr"/>
+          <a:lstStyle/>
+          <a:p>
+            <a:pPr algn="ctr"/>
+          </a:p>
+        </p:txBody>
+      </p:sp>
+      <p:sp>
+        <p:nvSpPr>
+          <p:cNvPr id="19" name="Rectangle 18"/>
+          <p:cNvSpPr/>
+          <p:nvPr/>
+        </p:nvSpPr>
+        <p:spPr>
+          <a:xfrm>
+            <a:off x="640080" y="3648456"/>
+            <a:ext cx="274320" cy="274320"/>
+          </a:xfrm>
+          <a:prstGeom prst="rect">
+            <a:avLst/>
+          </a:prstGeom>
+          <a:solidFill>
+            <a:srgbClr val="FFFFFF"/>
+          </a:solidFill>
+          <a:ln>
+            <a:solidFill>
+              <a:srgbClr val="333333"/>
+            </a:solidFill>
+          </a:ln>
+        </p:spPr>
+        <p:style>
+          <a:lnRef idx="1">
+            <a:schemeClr val="accent1"/>
+          </a:lnRef>
+          <a:fillRef idx="3">
+            <a:schemeClr val="accent1"/>
+          </a:fillRef>
+          <a:effectRef idx="2">
+            <a:schemeClr val="accent1"/>
+          </a:effectRef>
+          <a:fontRef idx="minor">
+            <a:schemeClr val="lt1"/>
+          </a:fontRef>
+        </p:style>
+        <p:txBody>
+          <a:bodyPr rtlCol="0" anchor="ctr"/>
+          <a:lstStyle/>
+          <a:p>
+            <a:pPr algn="ctr"/>
+          </a:p>
+        </p:txBody>
+      </p:sp>
+      <p:sp>
+        <p:nvSpPr>
+          <p:cNvPr id="20" name="Rectangle 19"/>
+          <p:cNvSpPr/>
+          <p:nvPr/>
+        </p:nvSpPr>
+        <p:spPr>
+          <a:xfrm>
+            <a:off x="640080" y="3648456"/>
+            <a:ext cx="73152" cy="274320"/>
+          </a:xfrm>
+          <a:prstGeom prst="rect">
+            <a:avLst/>
+          </a:prstGeom>
+          <a:solidFill>
+            <a:srgbClr val="269CCB"/>
+          </a:solidFill>
+          <a:ln>
+            <a:noFill/>
+          </a:ln>
+        </p:spPr>
+        <p:style>
+          <a:lnRef idx="1">
+            <a:schemeClr val="accent1"/>
+          </a:lnRef>
+          <a:fillRef idx="3">
+            <a:schemeClr val="accent1"/>
+          </a:fillRef>
+          <a:effectRef idx="2">
+            <a:schemeClr val="accent1"/>
+          </a:effectRef>
+          <a:fontRef idx="minor">
+            <a:schemeClr val="lt1"/>
+          </a:fontRef>
+        </p:style>
+        <p:txBody>
+          <a:bodyPr rtlCol="0" anchor="ctr"/>
+          <a:lstStyle/>
+          <a:p>
+            <a:pPr algn="ctr"/>
+          </a:p>
+        </p:txBody>
+      </p:sp>
+      <p:sp>
+        <p:nvSpPr>
+          <p:cNvPr id="21" name="TextBox 20"/>
+          <p:cNvSpPr txBox="1"/>
+          <p:nvPr/>
+        </p:nvSpPr>
+        <p:spPr>
+          <a:xfrm>
+            <a:off x="1097280" y="3593592"/>
+            <a:ext cx="10362895" cy="402336"/>
+          </a:xfrm>
+          <a:prstGeom prst="rect">
+            <a:avLst/>
+          </a:prstGeom>
+          <a:noFill/>
+        </p:spPr>
+        <p:txBody>
+          <a:bodyPr wrap="square" anchor="ctr"/>
+          <a:lstStyle/>
+          <a:p>
+            <a:r>
+              <a:rPr sz="1500" b="1" i="0">
+                <a:solidFill>
+                  <a:srgbClr val="333333"/>
+                </a:solidFill>
+                <a:latin typeface="Calibri"/>
+              </a:rPr>
+              <a:t>LA DEMOSTRACIÓN DEL PROTOTIPO</a:t>
+            </a:r>
+            <a:r>
+              <a:rPr sz="1500" b="0" i="0">
+                <a:solidFill>
+                  <a:srgbClr val="333333"/>
+                </a:solidFill>
+                <a:latin typeface="Calibri"/>
+              </a:rPr>
+              <a:t> — El recorrido de </a:t>
+            </a:r>
+            <a:r>
+              <a:rPr sz="1500" b="1" i="0">
+                <a:solidFill>
+                  <a:srgbClr val="333333"/>
+                </a:solidFill>
+                <a:latin typeface="Calibri"/>
+              </a:rPr>
+              <a:t>tres pasos</a:t>
+            </a:r>
+            <a:r>
+              <a:rPr sz="1500" b="0" i="0">
+                <a:solidFill>
+                  <a:srgbClr val="333333"/>
+                </a:solidFill>
+                <a:latin typeface="Calibri"/>
+              </a:rPr>
+              <a:t> que se va a mostrar, con </a:t>
+            </a:r>
+            <a:r>
+              <a:rPr sz="1500" b="1" i="0">
+                <a:solidFill>
+                  <a:srgbClr val="333333"/>
+                </a:solidFill>
+                <a:latin typeface="Calibri"/>
+              </a:rPr>
+              <a:t>una persona narrando y otra manejando la pantalla</a:t>
+            </a:r>
+            <a:r>
+              <a:rPr sz="1500" b="0" i="0">
+                <a:solidFill>
+                  <a:srgbClr val="333333"/>
+                </a:solidFill>
+                <a:latin typeface="Calibri"/>
+              </a:rPr>
+              <a:t>. Ensayado dos veces.</a:t>
+            </a:r>
+          </a:p>
+        </p:txBody>
+      </p:sp>
+      <p:sp>
+        <p:nvSpPr>
+          <p:cNvPr id="22" name="Rounded Rectangle 21"/>
+          <p:cNvSpPr/>
+          <p:nvPr/>
+        </p:nvSpPr>
+        <p:spPr>
+          <a:xfrm>
+            <a:off x="457200" y="4178808"/>
+            <a:ext cx="11277295" cy="566928"/>
+          </a:xfrm>
+          <a:prstGeom prst="roundRect">
+            <a:avLst>
+              <a:gd name="adj" fmla="val 12000"/>
+            </a:avLst>
+          </a:prstGeom>
+          <a:solidFill>
+            <a:srgbClr val="F2F2F2"/>
+          </a:solidFill>
+          <a:ln>
+            <a:noFill/>
+          </a:ln>
+        </p:spPr>
+        <p:style>
+          <a:lnRef idx="1">
+            <a:schemeClr val="accent1"/>
+          </a:lnRef>
+          <a:fillRef idx="3">
+            <a:schemeClr val="accent1"/>
+          </a:fillRef>
+          <a:effectRef idx="2">
+            <a:schemeClr val="accent1"/>
+          </a:effectRef>
+          <a:fontRef idx="minor">
+            <a:schemeClr val="lt1"/>
+          </a:fontRef>
+        </p:style>
+        <p:txBody>
+          <a:bodyPr rtlCol="0" anchor="ctr"/>
+          <a:lstStyle/>
+          <a:p>
+            <a:pPr algn="ctr"/>
+          </a:p>
+        </p:txBody>
+      </p:sp>
+      <p:sp>
+        <p:nvSpPr>
+          <p:cNvPr id="23" name="Rectangle 22"/>
+          <p:cNvSpPr/>
+          <p:nvPr/>
+        </p:nvSpPr>
+        <p:spPr>
+          <a:xfrm>
+            <a:off x="640080" y="4325112"/>
+            <a:ext cx="274320" cy="274320"/>
+          </a:xfrm>
+          <a:prstGeom prst="rect">
+            <a:avLst/>
+          </a:prstGeom>
+          <a:solidFill>
+            <a:srgbClr val="FFFFFF"/>
+          </a:solidFill>
+          <a:ln>
+            <a:solidFill>
+              <a:srgbClr val="333333"/>
+            </a:solidFill>
+          </a:ln>
+        </p:spPr>
+        <p:style>
+          <a:lnRef idx="1">
+            <a:schemeClr val="accent1"/>
+          </a:lnRef>
+          <a:fillRef idx="3">
+            <a:schemeClr val="accent1"/>
+          </a:fillRef>
+          <a:effectRef idx="2">
+            <a:schemeClr val="accent1"/>
+          </a:effectRef>
+          <a:fontRef idx="minor">
+            <a:schemeClr val="lt1"/>
+          </a:fontRef>
+        </p:style>
+        <p:txBody>
+          <a:bodyPr rtlCol="0" anchor="ctr"/>
+          <a:lstStyle/>
+          <a:p>
+            <a:pPr algn="ctr"/>
+          </a:p>
+        </p:txBody>
+      </p:sp>
+      <p:sp>
+        <p:nvSpPr>
+          <p:cNvPr id="24" name="Rectangle 23"/>
+          <p:cNvSpPr/>
+          <p:nvPr/>
+        </p:nvSpPr>
+        <p:spPr>
+          <a:xfrm>
+            <a:off x="640080" y="4325112"/>
+            <a:ext cx="73152" cy="274320"/>
+          </a:xfrm>
+          <a:prstGeom prst="rect">
+            <a:avLst/>
+          </a:prstGeom>
+          <a:solidFill>
+            <a:srgbClr val="269CCB"/>
+          </a:solidFill>
+          <a:ln>
+            <a:noFill/>
+          </a:ln>
+        </p:spPr>
+        <p:style>
+          <a:lnRef idx="1">
+            <a:schemeClr val="accent1"/>
+          </a:lnRef>
+          <a:fillRef idx="3">
+            <a:schemeClr val="accent1"/>
+          </a:fillRef>
+          <a:effectRef idx="2">
+            <a:schemeClr val="accent1"/>
+          </a:effectRef>
+          <a:fontRef idx="minor">
+            <a:schemeClr val="lt1"/>
+          </a:fontRef>
+        </p:style>
+        <p:txBody>
+          <a:bodyPr rtlCol="0" anchor="ctr"/>
+          <a:lstStyle/>
+          <a:p>
+            <a:pPr algn="ctr"/>
+          </a:p>
+        </p:txBody>
+      </p:sp>
+      <p:sp>
+        <p:nvSpPr>
+          <p:cNvPr id="25" name="TextBox 24"/>
+          <p:cNvSpPr txBox="1"/>
+          <p:nvPr/>
+        </p:nvSpPr>
+        <p:spPr>
+          <a:xfrm>
+            <a:off x="1097280" y="4270248"/>
+            <a:ext cx="10362895" cy="402336"/>
+          </a:xfrm>
+          <a:prstGeom prst="rect">
+            <a:avLst/>
+          </a:prstGeom>
+          <a:noFill/>
+        </p:spPr>
+        <p:txBody>
+          <a:bodyPr wrap="square" anchor="ctr"/>
+          <a:lstStyle/>
+          <a:p>
+            <a:r>
+              <a:rPr sz="1500" b="1" i="0">
+                <a:solidFill>
+                  <a:srgbClr val="333333"/>
+                </a:solidFill>
+                <a:latin typeface="Calibri"/>
+              </a:rPr>
+              <a:t>EL PLAN B TÉCNICO</a:t>
+            </a:r>
+            <a:r>
+              <a:rPr sz="1500" b="0" i="0">
+                <a:solidFill>
+                  <a:srgbClr val="333333"/>
+                </a:solidFill>
+                <a:latin typeface="Calibri"/>
+              </a:rPr>
+              <a:t> — En la carpeta del equipo: la presentación </a:t>
+            </a:r>
+            <a:r>
+              <a:rPr sz="1500" b="1" i="0">
+                <a:solidFill>
+                  <a:srgbClr val="333333"/>
+                </a:solidFill>
+                <a:latin typeface="Calibri"/>
+              </a:rPr>
+              <a:t>en PDF</a:t>
+            </a:r>
+            <a:r>
+              <a:rPr sz="1500" b="0" i="0">
+                <a:solidFill>
+                  <a:srgbClr val="333333"/>
+                </a:solidFill>
+                <a:latin typeface="Calibri"/>
+              </a:rPr>
+              <a:t>, </a:t>
+            </a:r>
+            <a:r>
+              <a:rPr sz="1500" b="1" i="0">
+                <a:solidFill>
+                  <a:srgbClr val="333333"/>
+                </a:solidFill>
+                <a:latin typeface="Calibri"/>
+              </a:rPr>
+              <a:t>capturas de cada paso</a:t>
+            </a:r>
+            <a:r>
+              <a:rPr sz="1500" b="0" i="0">
+                <a:solidFill>
+                  <a:srgbClr val="333333"/>
+                </a:solidFill>
+                <a:latin typeface="Calibri"/>
+              </a:rPr>
+              <a:t> de la demostración, y quién comparte pantalla si se cae el primero.</a:t>
+            </a:r>
+          </a:p>
+        </p:txBody>
+      </p:sp>
+      <p:sp>
+        <p:nvSpPr>
+          <p:cNvPr id="26" name="TextBox 25"/>
           <p:cNvSpPr txBox="1"/>
           <p:nvPr/>
         </p:nvSpPr>
@@ -10270,6 +9697,1549 @@
 </file>
 
 <file path=ppt/slides/slide23.xml><?xml version="1.0" encoding="utf-8"?>
+<p:sld xmlns:a="http://schemas.openxmlformats.org/drawingml/2006/main" xmlns:p="http://schemas.openxmlformats.org/presentationml/2006/main" xmlns:r="http://schemas.openxmlformats.org/officeDocument/2006/relationships">
+  <p:cSld>
+    <p:bg>
+      <p:bgPr>
+        <a:solidFill>
+          <a:srgbClr val="FFFFFF"/>
+        </a:solidFill>
+        <a:effectLst/>
+      </p:bgPr>
+    </p:bg>
+    <p:spTree>
+      <p:nvGrpSpPr>
+        <p:cNvPr id="1" name=""/>
+        <p:cNvGrpSpPr/>
+        <p:nvPr/>
+      </p:nvGrpSpPr>
+      <p:grpSpPr/>
+      <p:sp>
+        <p:nvSpPr>
+          <p:cNvPr id="2" name="Rectangle 1"/>
+          <p:cNvSpPr/>
+          <p:nvPr/>
+        </p:nvSpPr>
+        <p:spPr>
+          <a:xfrm>
+            <a:off x="0" y="0"/>
+            <a:ext cx="12191695" cy="1170432"/>
+          </a:xfrm>
+          <a:prstGeom prst="rect">
+            <a:avLst/>
+          </a:prstGeom>
+          <a:solidFill>
+            <a:srgbClr val="095292"/>
+          </a:solidFill>
+          <a:ln>
+            <a:noFill/>
+          </a:ln>
+        </p:spPr>
+        <p:style>
+          <a:lnRef idx="1">
+            <a:schemeClr val="accent1"/>
+          </a:lnRef>
+          <a:fillRef idx="3">
+            <a:schemeClr val="accent1"/>
+          </a:fillRef>
+          <a:effectRef idx="2">
+            <a:schemeClr val="accent1"/>
+          </a:effectRef>
+          <a:fontRef idx="minor">
+            <a:schemeClr val="lt1"/>
+          </a:fontRef>
+        </p:style>
+        <p:txBody>
+          <a:bodyPr rtlCol="0" anchor="ctr"/>
+          <a:lstStyle/>
+          <a:p>
+            <a:pPr algn="ctr"/>
+          </a:p>
+        </p:txBody>
+      </p:sp>
+      <p:sp>
+        <p:nvSpPr>
+          <p:cNvPr id="3" name="Rectangle 2"/>
+          <p:cNvSpPr/>
+          <p:nvPr/>
+        </p:nvSpPr>
+        <p:spPr>
+          <a:xfrm>
+            <a:off x="0" y="1170432"/>
+            <a:ext cx="12191695" cy="41148"/>
+          </a:xfrm>
+          <a:prstGeom prst="rect">
+            <a:avLst/>
+          </a:prstGeom>
+          <a:solidFill>
+            <a:srgbClr val="FFD000"/>
+          </a:solidFill>
+          <a:ln>
+            <a:noFill/>
+          </a:ln>
+        </p:spPr>
+        <p:style>
+          <a:lnRef idx="1">
+            <a:schemeClr val="accent1"/>
+          </a:lnRef>
+          <a:fillRef idx="3">
+            <a:schemeClr val="accent1"/>
+          </a:fillRef>
+          <a:effectRef idx="2">
+            <a:schemeClr val="accent1"/>
+          </a:effectRef>
+          <a:fontRef idx="minor">
+            <a:schemeClr val="lt1"/>
+          </a:fontRef>
+        </p:style>
+        <p:txBody>
+          <a:bodyPr rtlCol="0" anchor="ctr"/>
+          <a:lstStyle/>
+          <a:p>
+            <a:pPr algn="ctr"/>
+          </a:p>
+        </p:txBody>
+      </p:sp>
+      <p:sp>
+        <p:nvSpPr>
+          <p:cNvPr id="4" name="TextBox 3"/>
+          <p:cNvSpPr txBox="1"/>
+          <p:nvPr/>
+        </p:nvSpPr>
+        <p:spPr>
+          <a:xfrm>
+            <a:off x="457200" y="164592"/>
+            <a:ext cx="11277295" cy="384048"/>
+          </a:xfrm>
+          <a:prstGeom prst="rect">
+            <a:avLst/>
+          </a:prstGeom>
+          <a:noFill/>
+        </p:spPr>
+        <p:txBody>
+          <a:bodyPr wrap="square">
+            <a:spAutoFit/>
+          </a:bodyPr>
+          <a:lstStyle/>
+          <a:p>
+            <a:r>
+              <a:rPr sz="2600" b="1" i="0">
+                <a:solidFill>
+                  <a:srgbClr val="FFFFFF"/>
+                </a:solidFill>
+                <a:latin typeface="Calibri"/>
+              </a:rPr>
+              <a:t>Cómo se expone en 4 minutos</a:t>
+            </a:r>
+          </a:p>
+        </p:txBody>
+      </p:sp>
+      <p:sp>
+        <p:nvSpPr>
+          <p:cNvPr id="5" name="TextBox 4"/>
+          <p:cNvSpPr txBox="1"/>
+          <p:nvPr/>
+        </p:nvSpPr>
+        <p:spPr>
+          <a:xfrm>
+            <a:off x="457200" y="566928"/>
+            <a:ext cx="11277295" cy="411480"/>
+          </a:xfrm>
+          <a:prstGeom prst="rect">
+            <a:avLst/>
+          </a:prstGeom>
+          <a:noFill/>
+        </p:spPr>
+        <p:txBody>
+          <a:bodyPr wrap="square">
+            <a:spAutoFit/>
+          </a:bodyPr>
+          <a:lstStyle/>
+          <a:p>
+            <a:r>
+              <a:rPr sz="1400" b="0" i="0">
+                <a:solidFill>
+                  <a:srgbClr val="B8D8EE"/>
+                </a:solidFill>
+                <a:latin typeface="Calibri"/>
+              </a:rPr>
+              <a:t>Habla el vocero con la pantalla ya compartida · cronómetro en pantalla · se corta al llegar a cero</a:t>
+            </a:r>
+          </a:p>
+        </p:txBody>
+      </p:sp>
+      <p:sp>
+        <p:nvSpPr>
+          <p:cNvPr id="6" name="Rounded Rectangle 5"/>
+          <p:cNvSpPr/>
+          <p:nvPr/>
+        </p:nvSpPr>
+        <p:spPr>
+          <a:xfrm>
+            <a:off x="457200" y="1444752"/>
+            <a:ext cx="11277295" cy="908913"/>
+          </a:xfrm>
+          <a:prstGeom prst="roundRect">
+            <a:avLst>
+              <a:gd name="adj" fmla="val 12000"/>
+            </a:avLst>
+          </a:prstGeom>
+          <a:solidFill>
+            <a:srgbClr val="F2F2F2"/>
+          </a:solidFill>
+          <a:ln>
+            <a:noFill/>
+          </a:ln>
+        </p:spPr>
+        <p:style>
+          <a:lnRef idx="1">
+            <a:schemeClr val="accent1"/>
+          </a:lnRef>
+          <a:fillRef idx="3">
+            <a:schemeClr val="accent1"/>
+          </a:fillRef>
+          <a:effectRef idx="2">
+            <a:schemeClr val="accent1"/>
+          </a:effectRef>
+          <a:fontRef idx="minor">
+            <a:schemeClr val="lt1"/>
+          </a:fontRef>
+        </p:style>
+        <p:txBody>
+          <a:bodyPr rtlCol="0" anchor="ctr"/>
+          <a:lstStyle/>
+          <a:p>
+            <a:pPr algn="ctr"/>
+          </a:p>
+        </p:txBody>
+      </p:sp>
+      <p:sp>
+        <p:nvSpPr>
+          <p:cNvPr id="7" name="Rounded Rectangle 6"/>
+          <p:cNvSpPr/>
+          <p:nvPr/>
+        </p:nvSpPr>
+        <p:spPr>
+          <a:xfrm>
+            <a:off x="594360" y="1679752"/>
+            <a:ext cx="438912" cy="438912"/>
+          </a:xfrm>
+          <a:prstGeom prst="roundRect">
+            <a:avLst>
+              <a:gd name="adj" fmla="val 12000"/>
+            </a:avLst>
+          </a:prstGeom>
+          <a:solidFill>
+            <a:srgbClr val="095292"/>
+          </a:solidFill>
+          <a:ln>
+            <a:noFill/>
+          </a:ln>
+        </p:spPr>
+        <p:style>
+          <a:lnRef idx="1">
+            <a:schemeClr val="accent1"/>
+          </a:lnRef>
+          <a:fillRef idx="3">
+            <a:schemeClr val="accent1"/>
+          </a:fillRef>
+          <a:effectRef idx="2">
+            <a:schemeClr val="accent1"/>
+          </a:effectRef>
+          <a:fontRef idx="minor">
+            <a:schemeClr val="lt1"/>
+          </a:fontRef>
+        </p:style>
+        <p:txBody>
+          <a:bodyPr rtlCol="0" anchor="ctr"/>
+          <a:lstStyle/>
+          <a:p>
+            <a:pPr algn="ctr"/>
+          </a:p>
+        </p:txBody>
+      </p:sp>
+      <p:sp>
+        <p:nvSpPr>
+          <p:cNvPr id="8" name="TextBox 7"/>
+          <p:cNvSpPr txBox="1"/>
+          <p:nvPr/>
+        </p:nvSpPr>
+        <p:spPr>
+          <a:xfrm>
+            <a:off x="594360" y="1679752"/>
+            <a:ext cx="438912" cy="438912"/>
+          </a:xfrm>
+          <a:prstGeom prst="rect">
+            <a:avLst/>
+          </a:prstGeom>
+          <a:noFill/>
+        </p:spPr>
+        <p:txBody>
+          <a:bodyPr wrap="square" anchor="ctr"/>
+          <a:lstStyle/>
+          <a:p>
+            <a:pPr algn="ctr"/>
+            <a:r>
+              <a:rPr sz="1600" b="1" i="0">
+                <a:solidFill>
+                  <a:srgbClr val="FFFFFF"/>
+                </a:solidFill>
+                <a:latin typeface="Calibri"/>
+              </a:rPr>
+              <a:t>1</a:t>
+            </a:r>
+          </a:p>
+        </p:txBody>
+      </p:sp>
+      <p:sp>
+        <p:nvSpPr>
+          <p:cNvPr id="9" name="TextBox 8"/>
+          <p:cNvSpPr txBox="1"/>
+          <p:nvPr/>
+        </p:nvSpPr>
+        <p:spPr>
+          <a:xfrm>
+            <a:off x="1188720" y="1536192"/>
+            <a:ext cx="10271455" cy="744321"/>
+          </a:xfrm>
+          <a:prstGeom prst="rect">
+            <a:avLst/>
+          </a:prstGeom>
+          <a:noFill/>
+        </p:spPr>
+        <p:txBody>
+          <a:bodyPr wrap="square" anchor="ctr"/>
+          <a:lstStyle/>
+          <a:p>
+            <a:r>
+              <a:rPr sz="1500" b="1" i="0">
+                <a:solidFill>
+                  <a:srgbClr val="095292"/>
+                </a:solidFill>
+                <a:latin typeface="Calibri"/>
+              </a:rPr>
+              <a:t>Tramo 1 · 1 min</a:t>
+            </a:r>
+          </a:p>
+          <a:p>
+            <a:pPr>
+              <a:spcBef>
+                <a:spcPts val="200"/>
+              </a:spcBef>
+            </a:pPr>
+            <a:r>
+              <a:rPr sz="1300" b="0" i="0">
+                <a:solidFill>
+                  <a:srgbClr val="333333"/>
+                </a:solidFill>
+                <a:latin typeface="Calibri"/>
+              </a:rPr>
+              <a:t>El problema con su cifra. </a:t>
+            </a:r>
+            <a:r>
+              <a:rPr sz="1300" b="1" i="0">
+                <a:solidFill>
+                  <a:srgbClr val="333333"/>
+                </a:solidFill>
+                <a:latin typeface="Calibri"/>
+              </a:rPr>
+              <a:t>Sin presentaciones personales.</a:t>
+            </a:r>
+          </a:p>
+        </p:txBody>
+      </p:sp>
+      <p:sp>
+        <p:nvSpPr>
+          <p:cNvPr id="10" name="Rounded Rectangle 9"/>
+          <p:cNvSpPr/>
+          <p:nvPr/>
+        </p:nvSpPr>
+        <p:spPr>
+          <a:xfrm>
+            <a:off x="457200" y="2445105"/>
+            <a:ext cx="11277295" cy="908913"/>
+          </a:xfrm>
+          <a:prstGeom prst="roundRect">
+            <a:avLst>
+              <a:gd name="adj" fmla="val 12000"/>
+            </a:avLst>
+          </a:prstGeom>
+          <a:solidFill>
+            <a:srgbClr val="E8F4FA"/>
+          </a:solidFill>
+          <a:ln>
+            <a:noFill/>
+          </a:ln>
+        </p:spPr>
+        <p:style>
+          <a:lnRef idx="1">
+            <a:schemeClr val="accent1"/>
+          </a:lnRef>
+          <a:fillRef idx="3">
+            <a:schemeClr val="accent1"/>
+          </a:fillRef>
+          <a:effectRef idx="2">
+            <a:schemeClr val="accent1"/>
+          </a:effectRef>
+          <a:fontRef idx="minor">
+            <a:schemeClr val="lt1"/>
+          </a:fontRef>
+        </p:style>
+        <p:txBody>
+          <a:bodyPr rtlCol="0" anchor="ctr"/>
+          <a:lstStyle/>
+          <a:p>
+            <a:pPr algn="ctr"/>
+          </a:p>
+        </p:txBody>
+      </p:sp>
+      <p:sp>
+        <p:nvSpPr>
+          <p:cNvPr id="11" name="Rounded Rectangle 10"/>
+          <p:cNvSpPr/>
+          <p:nvPr/>
+        </p:nvSpPr>
+        <p:spPr>
+          <a:xfrm>
+            <a:off x="594360" y="2680106"/>
+            <a:ext cx="438912" cy="438912"/>
+          </a:xfrm>
+          <a:prstGeom prst="roundRect">
+            <a:avLst>
+              <a:gd name="adj" fmla="val 12000"/>
+            </a:avLst>
+          </a:prstGeom>
+          <a:solidFill>
+            <a:srgbClr val="095292"/>
+          </a:solidFill>
+          <a:ln>
+            <a:noFill/>
+          </a:ln>
+        </p:spPr>
+        <p:style>
+          <a:lnRef idx="1">
+            <a:schemeClr val="accent1"/>
+          </a:lnRef>
+          <a:fillRef idx="3">
+            <a:schemeClr val="accent1"/>
+          </a:fillRef>
+          <a:effectRef idx="2">
+            <a:schemeClr val="accent1"/>
+          </a:effectRef>
+          <a:fontRef idx="minor">
+            <a:schemeClr val="lt1"/>
+          </a:fontRef>
+        </p:style>
+        <p:txBody>
+          <a:bodyPr rtlCol="0" anchor="ctr"/>
+          <a:lstStyle/>
+          <a:p>
+            <a:pPr algn="ctr"/>
+          </a:p>
+        </p:txBody>
+      </p:sp>
+      <p:sp>
+        <p:nvSpPr>
+          <p:cNvPr id="12" name="TextBox 11"/>
+          <p:cNvSpPr txBox="1"/>
+          <p:nvPr/>
+        </p:nvSpPr>
+        <p:spPr>
+          <a:xfrm>
+            <a:off x="594360" y="2680106"/>
+            <a:ext cx="438912" cy="438912"/>
+          </a:xfrm>
+          <a:prstGeom prst="rect">
+            <a:avLst/>
+          </a:prstGeom>
+          <a:noFill/>
+        </p:spPr>
+        <p:txBody>
+          <a:bodyPr wrap="square" anchor="ctr"/>
+          <a:lstStyle/>
+          <a:p>
+            <a:pPr algn="ctr"/>
+            <a:r>
+              <a:rPr sz="1600" b="1" i="0">
+                <a:solidFill>
+                  <a:srgbClr val="FFFFFF"/>
+                </a:solidFill>
+                <a:latin typeface="Calibri"/>
+              </a:rPr>
+              <a:t>2</a:t>
+            </a:r>
+          </a:p>
+        </p:txBody>
+      </p:sp>
+      <p:sp>
+        <p:nvSpPr>
+          <p:cNvPr id="13" name="TextBox 12"/>
+          <p:cNvSpPr txBox="1"/>
+          <p:nvPr/>
+        </p:nvSpPr>
+        <p:spPr>
+          <a:xfrm>
+            <a:off x="1188720" y="2536545"/>
+            <a:ext cx="10271455" cy="744321"/>
+          </a:xfrm>
+          <a:prstGeom prst="rect">
+            <a:avLst/>
+          </a:prstGeom>
+          <a:noFill/>
+        </p:spPr>
+        <p:txBody>
+          <a:bodyPr wrap="square" anchor="ctr"/>
+          <a:lstStyle/>
+          <a:p>
+            <a:r>
+              <a:rPr sz="1500" b="1" i="0">
+                <a:solidFill>
+                  <a:srgbClr val="095292"/>
+                </a:solidFill>
+                <a:latin typeface="Calibri"/>
+              </a:rPr>
+              <a:t>Tramo 2 · 2 min</a:t>
+            </a:r>
+          </a:p>
+          <a:p>
+            <a:pPr>
+              <a:spcBef>
+                <a:spcPts val="200"/>
+              </a:spcBef>
+            </a:pPr>
+            <a:r>
+              <a:rPr sz="1300" b="0" i="0">
+                <a:solidFill>
+                  <a:srgbClr val="333333"/>
+                </a:solidFill>
+                <a:latin typeface="Calibri"/>
+              </a:rPr>
+              <a:t>Los afectados y la decisión de la matriz, con lo que se sacrificó.</a:t>
+            </a:r>
+          </a:p>
+        </p:txBody>
+      </p:sp>
+      <p:sp>
+        <p:nvSpPr>
+          <p:cNvPr id="14" name="Rounded Rectangle 13"/>
+          <p:cNvSpPr/>
+          <p:nvPr/>
+        </p:nvSpPr>
+        <p:spPr>
+          <a:xfrm>
+            <a:off x="457200" y="3445459"/>
+            <a:ext cx="11277295" cy="908913"/>
+          </a:xfrm>
+          <a:prstGeom prst="roundRect">
+            <a:avLst>
+              <a:gd name="adj" fmla="val 12000"/>
+            </a:avLst>
+          </a:prstGeom>
+          <a:solidFill>
+            <a:srgbClr val="F2F2F2"/>
+          </a:solidFill>
+          <a:ln>
+            <a:noFill/>
+          </a:ln>
+        </p:spPr>
+        <p:style>
+          <a:lnRef idx="1">
+            <a:schemeClr val="accent1"/>
+          </a:lnRef>
+          <a:fillRef idx="3">
+            <a:schemeClr val="accent1"/>
+          </a:fillRef>
+          <a:effectRef idx="2">
+            <a:schemeClr val="accent1"/>
+          </a:effectRef>
+          <a:fontRef idx="minor">
+            <a:schemeClr val="lt1"/>
+          </a:fontRef>
+        </p:style>
+        <p:txBody>
+          <a:bodyPr rtlCol="0" anchor="ctr"/>
+          <a:lstStyle/>
+          <a:p>
+            <a:pPr algn="ctr"/>
+          </a:p>
+        </p:txBody>
+      </p:sp>
+      <p:sp>
+        <p:nvSpPr>
+          <p:cNvPr id="15" name="Rounded Rectangle 14"/>
+          <p:cNvSpPr/>
+          <p:nvPr/>
+        </p:nvSpPr>
+        <p:spPr>
+          <a:xfrm>
+            <a:off x="594360" y="3680460"/>
+            <a:ext cx="438912" cy="438912"/>
+          </a:xfrm>
+          <a:prstGeom prst="roundRect">
+            <a:avLst>
+              <a:gd name="adj" fmla="val 12000"/>
+            </a:avLst>
+          </a:prstGeom>
+          <a:solidFill>
+            <a:srgbClr val="095292"/>
+          </a:solidFill>
+          <a:ln>
+            <a:noFill/>
+          </a:ln>
+        </p:spPr>
+        <p:style>
+          <a:lnRef idx="1">
+            <a:schemeClr val="accent1"/>
+          </a:lnRef>
+          <a:fillRef idx="3">
+            <a:schemeClr val="accent1"/>
+          </a:fillRef>
+          <a:effectRef idx="2">
+            <a:schemeClr val="accent1"/>
+          </a:effectRef>
+          <a:fontRef idx="minor">
+            <a:schemeClr val="lt1"/>
+          </a:fontRef>
+        </p:style>
+        <p:txBody>
+          <a:bodyPr rtlCol="0" anchor="ctr"/>
+          <a:lstStyle/>
+          <a:p>
+            <a:pPr algn="ctr"/>
+          </a:p>
+        </p:txBody>
+      </p:sp>
+      <p:sp>
+        <p:nvSpPr>
+          <p:cNvPr id="16" name="TextBox 15"/>
+          <p:cNvSpPr txBox="1"/>
+          <p:nvPr/>
+        </p:nvSpPr>
+        <p:spPr>
+          <a:xfrm>
+            <a:off x="594360" y="3680460"/>
+            <a:ext cx="438912" cy="438912"/>
+          </a:xfrm>
+          <a:prstGeom prst="rect">
+            <a:avLst/>
+          </a:prstGeom>
+          <a:noFill/>
+        </p:spPr>
+        <p:txBody>
+          <a:bodyPr wrap="square" anchor="ctr"/>
+          <a:lstStyle/>
+          <a:p>
+            <a:pPr algn="ctr"/>
+            <a:r>
+              <a:rPr sz="1600" b="1" i="0">
+                <a:solidFill>
+                  <a:srgbClr val="FFFFFF"/>
+                </a:solidFill>
+                <a:latin typeface="Calibri"/>
+              </a:rPr>
+              <a:t>3</a:t>
+            </a:r>
+          </a:p>
+        </p:txBody>
+      </p:sp>
+      <p:sp>
+        <p:nvSpPr>
+          <p:cNvPr id="17" name="TextBox 16"/>
+          <p:cNvSpPr txBox="1"/>
+          <p:nvPr/>
+        </p:nvSpPr>
+        <p:spPr>
+          <a:xfrm>
+            <a:off x="1188720" y="3536899"/>
+            <a:ext cx="10271455" cy="744321"/>
+          </a:xfrm>
+          <a:prstGeom prst="rect">
+            <a:avLst/>
+          </a:prstGeom>
+          <a:noFill/>
+        </p:spPr>
+        <p:txBody>
+          <a:bodyPr wrap="square" anchor="ctr"/>
+          <a:lstStyle/>
+          <a:p>
+            <a:r>
+              <a:rPr sz="1500" b="1" i="0">
+                <a:solidFill>
+                  <a:srgbClr val="095292"/>
+                </a:solidFill>
+                <a:latin typeface="Calibri"/>
+              </a:rPr>
+              <a:t>Comienzo del tramo 3 · 1 min</a:t>
+            </a:r>
+          </a:p>
+          <a:p>
+            <a:pPr>
+              <a:spcBef>
+                <a:spcPts val="200"/>
+              </a:spcBef>
+            </a:pPr>
+            <a:r>
+              <a:rPr sz="1300" b="0" i="0">
+                <a:solidFill>
+                  <a:srgbClr val="333333"/>
+                </a:solidFill>
+                <a:latin typeface="Calibri"/>
+              </a:rPr>
+              <a:t>Arrancar la demostración: hasta donde llegue en el minuto.</a:t>
+            </a:r>
+          </a:p>
+        </p:txBody>
+      </p:sp>
+      <p:sp>
+        <p:nvSpPr>
+          <p:cNvPr id="18" name="Rounded Rectangle 17"/>
+          <p:cNvSpPr/>
+          <p:nvPr/>
+        </p:nvSpPr>
+        <p:spPr>
+          <a:xfrm>
+            <a:off x="457200" y="4445812"/>
+            <a:ext cx="11277295" cy="908913"/>
+          </a:xfrm>
+          <a:prstGeom prst="roundRect">
+            <a:avLst>
+              <a:gd name="adj" fmla="val 12000"/>
+            </a:avLst>
+          </a:prstGeom>
+          <a:solidFill>
+            <a:srgbClr val="E8F4FA"/>
+          </a:solidFill>
+          <a:ln>
+            <a:noFill/>
+          </a:ln>
+        </p:spPr>
+        <p:style>
+          <a:lnRef idx="1">
+            <a:schemeClr val="accent1"/>
+          </a:lnRef>
+          <a:fillRef idx="3">
+            <a:schemeClr val="accent1"/>
+          </a:fillRef>
+          <a:effectRef idx="2">
+            <a:schemeClr val="accent1"/>
+          </a:effectRef>
+          <a:fontRef idx="minor">
+            <a:schemeClr val="lt1"/>
+          </a:fontRef>
+        </p:style>
+        <p:txBody>
+          <a:bodyPr rtlCol="0" anchor="ctr"/>
+          <a:lstStyle/>
+          <a:p>
+            <a:pPr algn="ctr"/>
+          </a:p>
+        </p:txBody>
+      </p:sp>
+      <p:sp>
+        <p:nvSpPr>
+          <p:cNvPr id="19" name="Rounded Rectangle 18"/>
+          <p:cNvSpPr/>
+          <p:nvPr/>
+        </p:nvSpPr>
+        <p:spPr>
+          <a:xfrm>
+            <a:off x="594360" y="4680813"/>
+            <a:ext cx="438912" cy="438912"/>
+          </a:xfrm>
+          <a:prstGeom prst="roundRect">
+            <a:avLst>
+              <a:gd name="adj" fmla="val 12000"/>
+            </a:avLst>
+          </a:prstGeom>
+          <a:solidFill>
+            <a:srgbClr val="095292"/>
+          </a:solidFill>
+          <a:ln>
+            <a:noFill/>
+          </a:ln>
+        </p:spPr>
+        <p:style>
+          <a:lnRef idx="1">
+            <a:schemeClr val="accent1"/>
+          </a:lnRef>
+          <a:fillRef idx="3">
+            <a:schemeClr val="accent1"/>
+          </a:fillRef>
+          <a:effectRef idx="2">
+            <a:schemeClr val="accent1"/>
+          </a:effectRef>
+          <a:fontRef idx="minor">
+            <a:schemeClr val="lt1"/>
+          </a:fontRef>
+        </p:style>
+        <p:txBody>
+          <a:bodyPr rtlCol="0" anchor="ctr"/>
+          <a:lstStyle/>
+          <a:p>
+            <a:pPr algn="ctr"/>
+          </a:p>
+        </p:txBody>
+      </p:sp>
+      <p:sp>
+        <p:nvSpPr>
+          <p:cNvPr id="20" name="TextBox 19"/>
+          <p:cNvSpPr txBox="1"/>
+          <p:nvPr/>
+        </p:nvSpPr>
+        <p:spPr>
+          <a:xfrm>
+            <a:off x="594360" y="4680813"/>
+            <a:ext cx="438912" cy="438912"/>
+          </a:xfrm>
+          <a:prstGeom prst="rect">
+            <a:avLst/>
+          </a:prstGeom>
+          <a:noFill/>
+        </p:spPr>
+        <p:txBody>
+          <a:bodyPr wrap="square" anchor="ctr"/>
+          <a:lstStyle/>
+          <a:p>
+            <a:pPr algn="ctr"/>
+            <a:r>
+              <a:rPr sz="1600" b="1" i="0">
+                <a:solidFill>
+                  <a:srgbClr val="FFFFFF"/>
+                </a:solidFill>
+                <a:latin typeface="Calibri"/>
+              </a:rPr>
+              <a:t>4</a:t>
+            </a:r>
+          </a:p>
+        </p:txBody>
+      </p:sp>
+      <p:sp>
+        <p:nvSpPr>
+          <p:cNvPr id="21" name="TextBox 20"/>
+          <p:cNvSpPr txBox="1"/>
+          <p:nvPr/>
+        </p:nvSpPr>
+        <p:spPr>
+          <a:xfrm>
+            <a:off x="1188720" y="4537252"/>
+            <a:ext cx="10271455" cy="744321"/>
+          </a:xfrm>
+          <a:prstGeom prst="rect">
+            <a:avLst/>
+          </a:prstGeom>
+          <a:noFill/>
+        </p:spPr>
+        <p:txBody>
+          <a:bodyPr wrap="square" anchor="ctr"/>
+          <a:lstStyle/>
+          <a:p>
+            <a:r>
+              <a:rPr sz="1500" b="1" i="0">
+                <a:solidFill>
+                  <a:srgbClr val="095292"/>
+                </a:solidFill>
+                <a:latin typeface="Calibri"/>
+              </a:rPr>
+              <a:t>Corte a los 4 min</a:t>
+            </a:r>
+          </a:p>
+          <a:p>
+            <a:pPr>
+              <a:spcBef>
+                <a:spcPts val="200"/>
+              </a:spcBef>
+            </a:pPr>
+            <a:r>
+              <a:rPr sz="1300" b="0" i="0">
+                <a:solidFill>
+                  <a:srgbClr val="333333"/>
+                </a:solidFill>
+                <a:latin typeface="Calibri"/>
+              </a:rPr>
+              <a:t>Se corta en mitad de la frase. En la Clase 15 pasa igual.</a:t>
+            </a:r>
+          </a:p>
+        </p:txBody>
+      </p:sp>
+      <p:sp>
+        <p:nvSpPr>
+          <p:cNvPr id="22" name="Rounded Rectangle 21"/>
+          <p:cNvSpPr/>
+          <p:nvPr/>
+        </p:nvSpPr>
+        <p:spPr>
+          <a:xfrm>
+            <a:off x="457200" y="5446166"/>
+            <a:ext cx="11277295" cy="908913"/>
+          </a:xfrm>
+          <a:prstGeom prst="roundRect">
+            <a:avLst>
+              <a:gd name="adj" fmla="val 12000"/>
+            </a:avLst>
+          </a:prstGeom>
+          <a:solidFill>
+            <a:srgbClr val="F2F2F2"/>
+          </a:solidFill>
+          <a:ln>
+            <a:noFill/>
+          </a:ln>
+        </p:spPr>
+        <p:style>
+          <a:lnRef idx="1">
+            <a:schemeClr val="accent1"/>
+          </a:lnRef>
+          <a:fillRef idx="3">
+            <a:schemeClr val="accent1"/>
+          </a:fillRef>
+          <a:effectRef idx="2">
+            <a:schemeClr val="accent1"/>
+          </a:effectRef>
+          <a:fontRef idx="minor">
+            <a:schemeClr val="lt1"/>
+          </a:fontRef>
+        </p:style>
+        <p:txBody>
+          <a:bodyPr rtlCol="0" anchor="ctr"/>
+          <a:lstStyle/>
+          <a:p>
+            <a:pPr algn="ctr"/>
+          </a:p>
+        </p:txBody>
+      </p:sp>
+      <p:sp>
+        <p:nvSpPr>
+          <p:cNvPr id="23" name="Rounded Rectangle 22"/>
+          <p:cNvSpPr/>
+          <p:nvPr/>
+        </p:nvSpPr>
+        <p:spPr>
+          <a:xfrm>
+            <a:off x="594360" y="5681167"/>
+            <a:ext cx="438912" cy="438912"/>
+          </a:xfrm>
+          <a:prstGeom prst="roundRect">
+            <a:avLst>
+              <a:gd name="adj" fmla="val 12000"/>
+            </a:avLst>
+          </a:prstGeom>
+          <a:solidFill>
+            <a:srgbClr val="095292"/>
+          </a:solidFill>
+          <a:ln>
+            <a:noFill/>
+          </a:ln>
+        </p:spPr>
+        <p:style>
+          <a:lnRef idx="1">
+            <a:schemeClr val="accent1"/>
+          </a:lnRef>
+          <a:fillRef idx="3">
+            <a:schemeClr val="accent1"/>
+          </a:fillRef>
+          <a:effectRef idx="2">
+            <a:schemeClr val="accent1"/>
+          </a:effectRef>
+          <a:fontRef idx="minor">
+            <a:schemeClr val="lt1"/>
+          </a:fontRef>
+        </p:style>
+        <p:txBody>
+          <a:bodyPr rtlCol="0" anchor="ctr"/>
+          <a:lstStyle/>
+          <a:p>
+            <a:pPr algn="ctr"/>
+          </a:p>
+        </p:txBody>
+      </p:sp>
+      <p:sp>
+        <p:nvSpPr>
+          <p:cNvPr id="24" name="TextBox 23"/>
+          <p:cNvSpPr txBox="1"/>
+          <p:nvPr/>
+        </p:nvSpPr>
+        <p:spPr>
+          <a:xfrm>
+            <a:off x="594360" y="5681167"/>
+            <a:ext cx="438912" cy="438912"/>
+          </a:xfrm>
+          <a:prstGeom prst="rect">
+            <a:avLst/>
+          </a:prstGeom>
+          <a:noFill/>
+        </p:spPr>
+        <p:txBody>
+          <a:bodyPr wrap="square" anchor="ctr"/>
+          <a:lstStyle/>
+          <a:p>
+            <a:pPr algn="ctr"/>
+            <a:r>
+              <a:rPr sz="1600" b="1" i="0">
+                <a:solidFill>
+                  <a:srgbClr val="FFFFFF"/>
+                </a:solidFill>
+                <a:latin typeface="Calibri"/>
+              </a:rPr>
+              <a:t>5</a:t>
+            </a:r>
+          </a:p>
+        </p:txBody>
+      </p:sp>
+      <p:sp>
+        <p:nvSpPr>
+          <p:cNvPr id="25" name="TextBox 24"/>
+          <p:cNvSpPr txBox="1"/>
+          <p:nvPr/>
+        </p:nvSpPr>
+        <p:spPr>
+          <a:xfrm>
+            <a:off x="1188720" y="5537606"/>
+            <a:ext cx="10271455" cy="744321"/>
+          </a:xfrm>
+          <a:prstGeom prst="rect">
+            <a:avLst/>
+          </a:prstGeom>
+          <a:noFill/>
+        </p:spPr>
+        <p:txBody>
+          <a:bodyPr wrap="square" anchor="ctr"/>
+          <a:lstStyle/>
+          <a:p>
+            <a:r>
+              <a:rPr sz="1500" b="1" i="0">
+                <a:solidFill>
+                  <a:srgbClr val="095292"/>
+                </a:solidFill>
+                <a:latin typeface="Calibri"/>
+              </a:rPr>
+              <a:t>2 min de corrección</a:t>
+            </a:r>
+          </a:p>
+          <a:p>
+            <a:pPr>
+              <a:spcBef>
+                <a:spcPts val="200"/>
+              </a:spcBef>
+            </a:pPr>
+            <a:r>
+              <a:rPr sz="1300" b="0" i="0">
+                <a:solidFill>
+                  <a:srgbClr val="333333"/>
+                </a:solidFill>
+                <a:latin typeface="Calibri"/>
+              </a:rPr>
+              <a:t>El docente dice </a:t>
+            </a:r>
+            <a:r>
+              <a:rPr sz="1300" b="1" i="0">
+                <a:solidFill>
+                  <a:srgbClr val="333333"/>
+                </a:solidFill>
+                <a:latin typeface="Calibri"/>
+              </a:rPr>
+              <a:t>una sola cosa</a:t>
+            </a:r>
+            <a:r>
+              <a:rPr sz="1300" b="0" i="0">
+                <a:solidFill>
+                  <a:srgbClr val="333333"/>
+                </a:solidFill>
+                <a:latin typeface="Calibri"/>
+              </a:rPr>
+              <a:t>, la que más cambie la presentación.</a:t>
+            </a:r>
+          </a:p>
+        </p:txBody>
+      </p:sp>
+      <p:sp>
+        <p:nvSpPr>
+          <p:cNvPr id="26" name="TextBox 25"/>
+          <p:cNvSpPr txBox="1"/>
+          <p:nvPr/>
+        </p:nvSpPr>
+        <p:spPr>
+          <a:xfrm>
+            <a:off x="11185855" y="6473952"/>
+            <a:ext cx="640080" cy="274320"/>
+          </a:xfrm>
+          <a:prstGeom prst="rect">
+            <a:avLst/>
+          </a:prstGeom>
+          <a:noFill/>
+        </p:spPr>
+        <p:txBody>
+          <a:bodyPr wrap="square">
+            <a:spAutoFit/>
+          </a:bodyPr>
+          <a:lstStyle/>
+          <a:p>
+            <a:pPr algn="r"/>
+            <a:r>
+              <a:rPr sz="1100" b="0" i="0">
+                <a:solidFill>
+                  <a:srgbClr val="666666"/>
+                </a:solidFill>
+                <a:latin typeface="Calibri"/>
+              </a:rPr>
+              <a:t>23</a:t>
+            </a:r>
+          </a:p>
+        </p:txBody>
+      </p:sp>
+    </p:spTree>
+  </p:cSld>
+  <p:clrMapOvr>
+    <a:masterClrMapping/>
+  </p:clrMapOvr>
+</p:sld>
+</file>
+
+<file path=ppt/slides/slide24.xml><?xml version="1.0" encoding="utf-8"?>
+<p:sld xmlns:a="http://schemas.openxmlformats.org/drawingml/2006/main" xmlns:p="http://schemas.openxmlformats.org/presentationml/2006/main" xmlns:r="http://schemas.openxmlformats.org/officeDocument/2006/relationships">
+  <p:cSld>
+    <p:bg>
+      <p:bgPr>
+        <a:solidFill>
+          <a:srgbClr val="FFFFFF"/>
+        </a:solidFill>
+        <a:effectLst/>
+      </p:bgPr>
+    </p:bg>
+    <p:spTree>
+      <p:nvGrpSpPr>
+        <p:cNvPr id="1" name=""/>
+        <p:cNvGrpSpPr/>
+        <p:nvPr/>
+      </p:nvGrpSpPr>
+      <p:grpSpPr/>
+      <p:sp>
+        <p:nvSpPr>
+          <p:cNvPr id="2" name="Rectangle 1"/>
+          <p:cNvSpPr/>
+          <p:nvPr/>
+        </p:nvSpPr>
+        <p:spPr>
+          <a:xfrm>
+            <a:off x="0" y="0"/>
+            <a:ext cx="12191695" cy="960120"/>
+          </a:xfrm>
+          <a:prstGeom prst="rect">
+            <a:avLst/>
+          </a:prstGeom>
+          <a:solidFill>
+            <a:srgbClr val="095292"/>
+          </a:solidFill>
+          <a:ln>
+            <a:noFill/>
+          </a:ln>
+        </p:spPr>
+        <p:style>
+          <a:lnRef idx="1">
+            <a:schemeClr val="accent1"/>
+          </a:lnRef>
+          <a:fillRef idx="3">
+            <a:schemeClr val="accent1"/>
+          </a:fillRef>
+          <a:effectRef idx="2">
+            <a:schemeClr val="accent1"/>
+          </a:effectRef>
+          <a:fontRef idx="minor">
+            <a:schemeClr val="lt1"/>
+          </a:fontRef>
+        </p:style>
+        <p:txBody>
+          <a:bodyPr rtlCol="0" anchor="ctr"/>
+          <a:lstStyle/>
+          <a:p>
+            <a:pPr algn="ctr"/>
+          </a:p>
+        </p:txBody>
+      </p:sp>
+      <p:sp>
+        <p:nvSpPr>
+          <p:cNvPr id="3" name="Rectangle 2"/>
+          <p:cNvSpPr/>
+          <p:nvPr/>
+        </p:nvSpPr>
+        <p:spPr>
+          <a:xfrm>
+            <a:off x="0" y="960120"/>
+            <a:ext cx="12191695" cy="41148"/>
+          </a:xfrm>
+          <a:prstGeom prst="rect">
+            <a:avLst/>
+          </a:prstGeom>
+          <a:solidFill>
+            <a:srgbClr val="FFD000"/>
+          </a:solidFill>
+          <a:ln>
+            <a:noFill/>
+          </a:ln>
+        </p:spPr>
+        <p:style>
+          <a:lnRef idx="1">
+            <a:schemeClr val="accent1"/>
+          </a:lnRef>
+          <a:fillRef idx="3">
+            <a:schemeClr val="accent1"/>
+          </a:fillRef>
+          <a:effectRef idx="2">
+            <a:schemeClr val="accent1"/>
+          </a:effectRef>
+          <a:fontRef idx="minor">
+            <a:schemeClr val="lt1"/>
+          </a:fontRef>
+        </p:style>
+        <p:txBody>
+          <a:bodyPr rtlCol="0" anchor="ctr"/>
+          <a:lstStyle/>
+          <a:p>
+            <a:pPr algn="ctr"/>
+          </a:p>
+        </p:txBody>
+      </p:sp>
+      <p:sp>
+        <p:nvSpPr>
+          <p:cNvPr id="4" name="TextBox 3"/>
+          <p:cNvSpPr txBox="1"/>
+          <p:nvPr/>
+        </p:nvSpPr>
+        <p:spPr>
+          <a:xfrm>
+            <a:off x="457200" y="164592"/>
+            <a:ext cx="11277295" cy="502920"/>
+          </a:xfrm>
+          <a:prstGeom prst="rect">
+            <a:avLst/>
+          </a:prstGeom>
+          <a:noFill/>
+        </p:spPr>
+        <p:txBody>
+          <a:bodyPr wrap="square">
+            <a:spAutoFit/>
+          </a:bodyPr>
+          <a:lstStyle/>
+          <a:p>
+            <a:r>
+              <a:rPr sz="2600" b="1" i="0">
+                <a:solidFill>
+                  <a:srgbClr val="FFFFFF"/>
+                </a:solidFill>
+                <a:latin typeface="Calibri"/>
+              </a:rPr>
+              <a:t>Para la Clase 15</a:t>
+            </a:r>
+          </a:p>
+        </p:txBody>
+      </p:sp>
+      <p:sp>
+        <p:nvSpPr>
+          <p:cNvPr id="5" name="TextBox 4"/>
+          <p:cNvSpPr txBox="1"/>
+          <p:nvPr/>
+        </p:nvSpPr>
+        <p:spPr>
+          <a:xfrm>
+            <a:off x="457200" y="1170432"/>
+            <a:ext cx="11277295" cy="5230368"/>
+          </a:xfrm>
+          <a:prstGeom prst="rect">
+            <a:avLst/>
+          </a:prstGeom>
+          <a:noFill/>
+        </p:spPr>
+        <p:txBody>
+          <a:bodyPr wrap="square">
+            <a:spAutoFit/>
+          </a:bodyPr>
+          <a:lstStyle/>
+          <a:p>
+            <a:pPr>
+              <a:spcAft>
+                <a:spcPts val="800"/>
+              </a:spcAft>
+            </a:pPr>
+            <a:r>
+              <a:rPr sz="2000" b="0" i="0">
+                <a:solidFill>
+                  <a:srgbClr val="333333"/>
+                </a:solidFill>
+                <a:latin typeface="Calibri"/>
+              </a:rPr>
+              <a:t>–   </a:t>
+            </a:r>
+            <a:r>
+              <a:rPr sz="2000" b="1" i="0">
+                <a:solidFill>
+                  <a:srgbClr val="333333"/>
+                </a:solidFill>
+                <a:latin typeface="Calibri"/>
+              </a:rPr>
+              <a:t>Trabajo dirigido:</a:t>
+            </a:r>
+            <a:r>
+              <a:rPr sz="2000" b="0" i="0">
+                <a:solidFill>
+                  <a:srgbClr val="333333"/>
+                </a:solidFill>
+                <a:latin typeface="Calibri"/>
+              </a:rPr>
+              <a:t> Diseño de presentación y recursos visuales — dejar terminadas las ocho diapositivas y el guion con tiempos en la carpeta del equipo, junto con el PDF y las capturas.</a:t>
+            </a:r>
+          </a:p>
+          <a:p>
+            <a:pPr>
+              <a:spcAft>
+                <a:spcPts val="800"/>
+              </a:spcAft>
+            </a:pPr>
+            <a:r>
+              <a:rPr sz="2000" b="0" i="0">
+                <a:solidFill>
+                  <a:srgbClr val="333333"/>
+                </a:solidFill>
+                <a:latin typeface="Calibri"/>
+              </a:rPr>
+              <a:t>–   </a:t>
+            </a:r>
+            <a:r>
+              <a:rPr sz="2000" b="1" i="0">
+                <a:solidFill>
+                  <a:srgbClr val="333333"/>
+                </a:solidFill>
+                <a:latin typeface="Calibri"/>
+              </a:rPr>
+              <a:t>Trabajo independiente:</a:t>
+            </a:r>
+            <a:r>
+              <a:rPr sz="2000" b="0" i="0">
+                <a:solidFill>
+                  <a:srgbClr val="333333"/>
+                </a:solidFill>
+                <a:latin typeface="Calibri"/>
+              </a:rPr>
+              <a:t> Ensayo general: ensayar </a:t>
+            </a:r>
+            <a:r>
+              <a:rPr sz="2000" b="1" i="0">
+                <a:solidFill>
+                  <a:srgbClr val="333333"/>
+                </a:solidFill>
+                <a:latin typeface="Calibri"/>
+              </a:rPr>
+              <a:t>los nueve minutos completos, hablando y con cronómetro, al menos dos veces</a:t>
+            </a:r>
+            <a:r>
+              <a:rPr sz="2000" b="0" i="0">
+                <a:solidFill>
+                  <a:srgbClr val="333333"/>
+                </a:solidFill>
+                <a:latin typeface="Calibri"/>
+              </a:rPr>
+              <a:t>, y ajustar el guion con el tiempo real. Leerlo en silencio no cuenta: dura la mitad.</a:t>
+            </a:r>
+          </a:p>
+          <a:p>
+            <a:pPr>
+              <a:spcAft>
+                <a:spcPts val="800"/>
+              </a:spcAft>
+            </a:pPr>
+            <a:r>
+              <a:rPr sz="2000" b="0" i="0">
+                <a:solidFill>
+                  <a:srgbClr val="333333"/>
+                </a:solidFill>
+                <a:latin typeface="Calibri"/>
+              </a:rPr>
+              <a:t>–   </a:t>
+            </a:r>
+            <a:r>
+              <a:rPr sz="2000" b="1" i="0">
+                <a:solidFill>
+                  <a:srgbClr val="333333"/>
+                </a:solidFill>
+                <a:latin typeface="Calibri"/>
+              </a:rPr>
+              <a:t>Clase 15 · Exposición final de proyectos</a:t>
+            </a:r>
+            <a:r>
+              <a:rPr sz="2000" b="0" i="0">
+                <a:solidFill>
+                  <a:srgbClr val="333333"/>
+                </a:solidFill>
+                <a:latin typeface="Calibri"/>
+              </a:rPr>
+              <a:t> — es la </a:t>
+            </a:r>
+            <a:r>
+              <a:rPr sz="2000" b="1" i="0">
+                <a:solidFill>
+                  <a:srgbClr val="333333"/>
+                </a:solidFill>
+                <a:latin typeface="Calibri"/>
+              </a:rPr>
+              <a:t>exposición final</a:t>
+            </a:r>
+            <a:r>
+              <a:rPr sz="2000" b="0" i="0">
+                <a:solidFill>
+                  <a:srgbClr val="333333"/>
+                </a:solidFill>
+                <a:latin typeface="Calibri"/>
+              </a:rPr>
+              <a:t>, con nota: nueve minutos por equipo y tres de preguntas. Vale el </a:t>
+            </a:r>
+            <a:r>
+              <a:rPr sz="2000" b="1" i="0">
+                <a:solidFill>
+                  <a:srgbClr val="333333"/>
+                </a:solidFill>
+                <a:latin typeface="Calibri"/>
+              </a:rPr>
+              <a:t>15 %</a:t>
+            </a:r>
+            <a:r>
+              <a:rPr sz="2000" b="0" i="0">
+                <a:solidFill>
+                  <a:srgbClr val="333333"/>
+                </a:solidFill>
+                <a:latin typeface="Calibri"/>
+              </a:rPr>
+              <a:t> del curso.</a:t>
+            </a:r>
+          </a:p>
+          <a:p>
+            <a:pPr>
+              <a:spcAft>
+                <a:spcPts val="800"/>
+              </a:spcAft>
+            </a:pPr>
+            <a:r>
+              <a:rPr sz="2000" b="0" i="0">
+                <a:solidFill>
+                  <a:srgbClr val="333333"/>
+                </a:solidFill>
+                <a:latin typeface="Calibri"/>
+              </a:rPr>
+              <a:t>–   </a:t>
+            </a:r>
+            <a:r>
+              <a:rPr sz="2000" b="1" i="0">
+                <a:solidFill>
+                  <a:srgbClr val="333333"/>
+                </a:solidFill>
+                <a:latin typeface="Calibri"/>
+              </a:rPr>
+              <a:t>Aviso:</a:t>
+            </a:r>
+            <a:r>
+              <a:rPr sz="2000" b="0" i="0">
+                <a:solidFill>
+                  <a:srgbClr val="333333"/>
+                </a:solidFill>
+                <a:latin typeface="Calibri"/>
+              </a:rPr>
+              <a:t> En la Clase 15 </a:t>
+            </a:r>
+            <a:r>
+              <a:rPr sz="2000" b="1" i="0">
+                <a:solidFill>
+                  <a:srgbClr val="333333"/>
+                </a:solidFill>
+                <a:latin typeface="Calibri"/>
+              </a:rPr>
+              <a:t>se corta a los nueve minutos</a:t>
+            </a:r>
+            <a:r>
+              <a:rPr sz="2000" b="0" i="0">
+                <a:solidFill>
+                  <a:srgbClr val="333333"/>
+                </a:solidFill>
+                <a:latin typeface="Calibri"/>
+              </a:rPr>
+              <a:t>, sin excepción. Conéctense cinco minutos antes con la presentación y el prototipo ya abiertos, y con las capturas a mano. El orden de exposición se sortea al empezar, así que todos los equipos deben estar listos desde el primer minuto.</a:t>
+            </a:r>
+          </a:p>
+          <a:p>
+            <a:pPr>
+              <a:spcAft>
+                <a:spcPts val="800"/>
+              </a:spcAft>
+            </a:pPr>
+            <a:r>
+              <a:rPr sz="2000" b="0" i="0">
+                <a:solidFill>
+                  <a:srgbClr val="333333"/>
+                </a:solidFill>
+                <a:latin typeface="Calibri"/>
+              </a:rPr>
+              <a:t>–   </a:t>
+            </a:r>
+            <a:r>
+              <a:rPr sz="2000" b="1" i="0">
+                <a:solidFill>
+                  <a:srgbClr val="333333"/>
+                </a:solidFill>
+                <a:latin typeface="Calibri"/>
+              </a:rPr>
+              <a:t>Antes de salir:</a:t>
+            </a:r>
+            <a:r>
+              <a:rPr sz="2000" b="0" i="0">
+                <a:solidFill>
+                  <a:srgbClr val="333333"/>
+                </a:solidFill>
+                <a:latin typeface="Calibri"/>
+              </a:rPr>
+              <a:t> el enlace del documento del equipo en el chat, con permiso de lectura para el docente, y el nombre del vocero de hoy.</a:t>
+            </a:r>
+          </a:p>
+        </p:txBody>
+      </p:sp>
+      <p:sp>
+        <p:nvSpPr>
+          <p:cNvPr id="6" name="TextBox 5"/>
+          <p:cNvSpPr txBox="1"/>
+          <p:nvPr/>
+        </p:nvSpPr>
+        <p:spPr>
+          <a:xfrm>
+            <a:off x="11185855" y="6473952"/>
+            <a:ext cx="640080" cy="274320"/>
+          </a:xfrm>
+          <a:prstGeom prst="rect">
+            <a:avLst/>
+          </a:prstGeom>
+          <a:noFill/>
+        </p:spPr>
+        <p:txBody>
+          <a:bodyPr wrap="square">
+            <a:spAutoFit/>
+          </a:bodyPr>
+          <a:lstStyle/>
+          <a:p>
+            <a:pPr algn="r"/>
+            <a:r>
+              <a:rPr sz="1100" b="0" i="0">
+                <a:solidFill>
+                  <a:srgbClr val="666666"/>
+                </a:solidFill>
+                <a:latin typeface="Calibri"/>
+              </a:rPr>
+              <a:t>24</a:t>
+            </a:r>
+          </a:p>
+        </p:txBody>
+      </p:sp>
+    </p:spTree>
+  </p:cSld>
+  <p:clrMapOvr>
+    <a:masterClrMapping/>
+  </p:clrMapOvr>
+</p:sld>
+</file>
+
+<file path=ppt/slides/slide25.xml><?xml version="1.0" encoding="utf-8"?>
 <p:sld xmlns:a="http://schemas.openxmlformats.org/drawingml/2006/main" xmlns:p="http://schemas.openxmlformats.org/presentationml/2006/main" xmlns:r="http://schemas.openxmlformats.org/officeDocument/2006/relationships">
   <p:cSld>
     <p:bg>

--- a/Introduccion a la Ingenieria/Clases/Clase 14 - Preparacion de la presentacion final/Presentacion.pptx
+++ b/Introduccion a la Ingenieria/Clases/Clase 14 - Preparacion de la presentacion final/Presentacion.pptx
@@ -16,9 +16,6 @@
     <p:sldId id="264" r:id="rId16"/>
     <p:sldId id="265" r:id="rId17"/>
     <p:sldId id="266" r:id="rId18"/>
-    <p:sldId id="267" r:id="rId19"/>
-    <p:sldId id="268" r:id="rId20"/>
-    <p:sldId id="269" r:id="rId21"/>
   </p:sldIdLst>
   <p:sldSz cx="12191695" cy="6858000" type="screen4x3"/>
   <p:notesSz cx="6858000" cy="9144000"/>
@@ -5213,2796 +5210,6 @@
 </file>
 
 <file path=ppt/slides/slide11.xml><?xml version="1.0" encoding="utf-8"?>
-<p:sld xmlns:a="http://schemas.openxmlformats.org/drawingml/2006/main" xmlns:p="http://schemas.openxmlformats.org/presentationml/2006/main" xmlns:r="http://schemas.openxmlformats.org/officeDocument/2006/relationships">
-  <p:cSld>
-    <p:bg>
-      <p:bgPr>
-        <a:solidFill>
-          <a:srgbClr val="FFFFFF"/>
-        </a:solidFill>
-        <a:effectLst/>
-      </p:bgPr>
-    </p:bg>
-    <p:spTree>
-      <p:nvGrpSpPr>
-        <p:cNvPr id="1" name=""/>
-        <p:cNvGrpSpPr/>
-        <p:nvPr/>
-      </p:nvGrpSpPr>
-      <p:grpSpPr/>
-      <p:sp>
-        <p:nvSpPr>
-          <p:cNvPr id="2" name="Rectangle 1"/>
-          <p:cNvSpPr/>
-          <p:nvPr/>
-        </p:nvSpPr>
-        <p:spPr>
-          <a:xfrm>
-            <a:off x="0" y="0"/>
-            <a:ext cx="12191695" cy="1170432"/>
-          </a:xfrm>
-          <a:prstGeom prst="rect">
-            <a:avLst/>
-          </a:prstGeom>
-          <a:solidFill>
-            <a:srgbClr val="095292"/>
-          </a:solidFill>
-          <a:ln>
-            <a:noFill/>
-          </a:ln>
-        </p:spPr>
-        <p:style>
-          <a:lnRef idx="1">
-            <a:schemeClr val="accent1"/>
-          </a:lnRef>
-          <a:fillRef idx="3">
-            <a:schemeClr val="accent1"/>
-          </a:fillRef>
-          <a:effectRef idx="2">
-            <a:schemeClr val="accent1"/>
-          </a:effectRef>
-          <a:fontRef idx="minor">
-            <a:schemeClr val="lt1"/>
-          </a:fontRef>
-        </p:style>
-        <p:txBody>
-          <a:bodyPr rtlCol="0" anchor="ctr"/>
-          <a:lstStyle/>
-          <a:p>
-            <a:pPr algn="ctr"/>
-          </a:p>
-        </p:txBody>
-      </p:sp>
-      <p:sp>
-        <p:nvSpPr>
-          <p:cNvPr id="3" name="Rectangle 2"/>
-          <p:cNvSpPr/>
-          <p:nvPr/>
-        </p:nvSpPr>
-        <p:spPr>
-          <a:xfrm>
-            <a:off x="0" y="1170432"/>
-            <a:ext cx="12191695" cy="41148"/>
-          </a:xfrm>
-          <a:prstGeom prst="rect">
-            <a:avLst/>
-          </a:prstGeom>
-          <a:solidFill>
-            <a:srgbClr val="FFD000"/>
-          </a:solidFill>
-          <a:ln>
-            <a:noFill/>
-          </a:ln>
-        </p:spPr>
-        <p:style>
-          <a:lnRef idx="1">
-            <a:schemeClr val="accent1"/>
-          </a:lnRef>
-          <a:fillRef idx="3">
-            <a:schemeClr val="accent1"/>
-          </a:fillRef>
-          <a:effectRef idx="2">
-            <a:schemeClr val="accent1"/>
-          </a:effectRef>
-          <a:fontRef idx="minor">
-            <a:schemeClr val="lt1"/>
-          </a:fontRef>
-        </p:style>
-        <p:txBody>
-          <a:bodyPr rtlCol="0" anchor="ctr"/>
-          <a:lstStyle/>
-          <a:p>
-            <a:pPr algn="ctr"/>
-          </a:p>
-        </p:txBody>
-      </p:sp>
-      <p:sp>
-        <p:nvSpPr>
-          <p:cNvPr id="4" name="TextBox 3"/>
-          <p:cNvSpPr txBox="1"/>
-          <p:nvPr/>
-        </p:nvSpPr>
-        <p:spPr>
-          <a:xfrm>
-            <a:off x="457200" y="164592"/>
-            <a:ext cx="11277295" cy="384048"/>
-          </a:xfrm>
-          <a:prstGeom prst="rect">
-            <a:avLst/>
-          </a:prstGeom>
-          <a:noFill/>
-        </p:spPr>
-        <p:txBody>
-          <a:bodyPr wrap="square">
-            <a:spAutoFit/>
-          </a:bodyPr>
-          <a:lstStyle/>
-          <a:p>
-            <a:r>
-              <a:rPr sz="2600" b="1" i="0">
-                <a:solidFill>
-                  <a:srgbClr val="FFFFFF"/>
-                </a:solidFill>
-                <a:latin typeface="Calibri"/>
-              </a:rPr>
-              <a:t>Taller de hoy: Guion de nueve minutos y plan B</a:t>
-            </a:r>
-          </a:p>
-        </p:txBody>
-      </p:sp>
-      <p:sp>
-        <p:nvSpPr>
-          <p:cNvPr id="5" name="TextBox 4"/>
-          <p:cNvSpPr txBox="1"/>
-          <p:nvPr/>
-        </p:nvSpPr>
-        <p:spPr>
-          <a:xfrm>
-            <a:off x="457200" y="566928"/>
-            <a:ext cx="11277295" cy="411480"/>
-          </a:xfrm>
-          <a:prstGeom prst="rect">
-            <a:avLst/>
-          </a:prstGeom>
-          <a:noFill/>
-        </p:spPr>
-        <p:txBody>
-          <a:bodyPr wrap="square">
-            <a:spAutoFit/>
-          </a:bodyPr>
-          <a:lstStyle/>
-          <a:p>
-            <a:r>
-              <a:rPr sz="1400" b="0" i="0">
-                <a:solidFill>
-                  <a:srgbClr val="B8D8EE"/>
-                </a:solidFill>
-                <a:latin typeface="Calibri"/>
-              </a:rPr>
-              <a:t>27 min en equipos · 27 min: guion, diapositivas, demostración y plan B · guion con tiempos + diapositivas + PDF y capturas del plan B</a:t>
-            </a:r>
-          </a:p>
-        </p:txBody>
-      </p:sp>
-      <p:sp>
-        <p:nvSpPr>
-          <p:cNvPr id="6" name="Rounded Rectangle 5"/>
-          <p:cNvSpPr/>
-          <p:nvPr/>
-        </p:nvSpPr>
-        <p:spPr>
-          <a:xfrm>
-            <a:off x="457200" y="1472184"/>
-            <a:ext cx="11277295" cy="566928"/>
-          </a:xfrm>
-          <a:prstGeom prst="roundRect">
-            <a:avLst>
-              <a:gd name="adj" fmla="val 12000"/>
-            </a:avLst>
-          </a:prstGeom>
-          <a:solidFill>
-            <a:srgbClr val="F2F2F2"/>
-          </a:solidFill>
-          <a:ln>
-            <a:noFill/>
-          </a:ln>
-        </p:spPr>
-        <p:style>
-          <a:lnRef idx="1">
-            <a:schemeClr val="accent1"/>
-          </a:lnRef>
-          <a:fillRef idx="3">
-            <a:schemeClr val="accent1"/>
-          </a:fillRef>
-          <a:effectRef idx="2">
-            <a:schemeClr val="accent1"/>
-          </a:effectRef>
-          <a:fontRef idx="minor">
-            <a:schemeClr val="lt1"/>
-          </a:fontRef>
-        </p:style>
-        <p:txBody>
-          <a:bodyPr rtlCol="0" anchor="ctr"/>
-          <a:lstStyle/>
-          <a:p>
-            <a:pPr algn="ctr"/>
-          </a:p>
-        </p:txBody>
-      </p:sp>
-      <p:sp>
-        <p:nvSpPr>
-          <p:cNvPr id="7" name="Rectangle 6"/>
-          <p:cNvSpPr/>
-          <p:nvPr/>
-        </p:nvSpPr>
-        <p:spPr>
-          <a:xfrm>
-            <a:off x="640080" y="1618487"/>
-            <a:ext cx="274320" cy="274320"/>
-          </a:xfrm>
-          <a:prstGeom prst="rect">
-            <a:avLst/>
-          </a:prstGeom>
-          <a:solidFill>
-            <a:srgbClr val="FFFFFF"/>
-          </a:solidFill>
-          <a:ln>
-            <a:solidFill>
-              <a:srgbClr val="333333"/>
-            </a:solidFill>
-          </a:ln>
-        </p:spPr>
-        <p:style>
-          <a:lnRef idx="1">
-            <a:schemeClr val="accent1"/>
-          </a:lnRef>
-          <a:fillRef idx="3">
-            <a:schemeClr val="accent1"/>
-          </a:fillRef>
-          <a:effectRef idx="2">
-            <a:schemeClr val="accent1"/>
-          </a:effectRef>
-          <a:fontRef idx="minor">
-            <a:schemeClr val="lt1"/>
-          </a:fontRef>
-        </p:style>
-        <p:txBody>
-          <a:bodyPr rtlCol="0" anchor="ctr"/>
-          <a:lstStyle/>
-          <a:p>
-            <a:pPr algn="ctr"/>
-          </a:p>
-        </p:txBody>
-      </p:sp>
-      <p:sp>
-        <p:nvSpPr>
-          <p:cNvPr id="8" name="Rectangle 7"/>
-          <p:cNvSpPr/>
-          <p:nvPr/>
-        </p:nvSpPr>
-        <p:spPr>
-          <a:xfrm>
-            <a:off x="640080" y="1618487"/>
-            <a:ext cx="73152" cy="274320"/>
-          </a:xfrm>
-          <a:prstGeom prst="rect">
-            <a:avLst/>
-          </a:prstGeom>
-          <a:solidFill>
-            <a:srgbClr val="269CCB"/>
-          </a:solidFill>
-          <a:ln>
-            <a:noFill/>
-          </a:ln>
-        </p:spPr>
-        <p:style>
-          <a:lnRef idx="1">
-            <a:schemeClr val="accent1"/>
-          </a:lnRef>
-          <a:fillRef idx="3">
-            <a:schemeClr val="accent1"/>
-          </a:fillRef>
-          <a:effectRef idx="2">
-            <a:schemeClr val="accent1"/>
-          </a:effectRef>
-          <a:fontRef idx="minor">
-            <a:schemeClr val="lt1"/>
-          </a:fontRef>
-        </p:style>
-        <p:txBody>
-          <a:bodyPr rtlCol="0" anchor="ctr"/>
-          <a:lstStyle/>
-          <a:p>
-            <a:pPr algn="ctr"/>
-          </a:p>
-        </p:txBody>
-      </p:sp>
-      <p:sp>
-        <p:nvSpPr>
-          <p:cNvPr id="9" name="TextBox 8"/>
-          <p:cNvSpPr txBox="1"/>
-          <p:nvPr/>
-        </p:nvSpPr>
-        <p:spPr>
-          <a:xfrm>
-            <a:off x="1097280" y="1563624"/>
-            <a:ext cx="10362895" cy="402336"/>
-          </a:xfrm>
-          <a:prstGeom prst="rect">
-            <a:avLst/>
-          </a:prstGeom>
-          <a:noFill/>
-        </p:spPr>
-        <p:txBody>
-          <a:bodyPr wrap="square" anchor="ctr"/>
-          <a:lstStyle/>
-          <a:p>
-            <a:r>
-              <a:rPr sz="1500" b="1" i="0">
-                <a:solidFill>
-                  <a:srgbClr val="333333"/>
-                </a:solidFill>
-                <a:latin typeface="Calibri"/>
-              </a:rPr>
-              <a:t>EL GUION DE LOS CINCO TRAMOS</a:t>
-            </a:r>
-            <a:r>
-              <a:rPr sz="1500" b="0" i="0">
-                <a:solidFill>
-                  <a:srgbClr val="333333"/>
-                </a:solidFill>
-                <a:latin typeface="Calibri"/>
-              </a:rPr>
-              <a:t> — Los cinco tramos con </a:t>
-            </a:r>
-            <a:r>
-              <a:rPr sz="1500" b="1" i="0">
-                <a:solidFill>
-                  <a:srgbClr val="333333"/>
-                </a:solidFill>
-                <a:latin typeface="Calibri"/>
-              </a:rPr>
-              <a:t>el tiempo asignado a cada uno</a:t>
-            </a:r>
-            <a:r>
-              <a:rPr sz="1500" b="0" i="0">
-                <a:solidFill>
-                  <a:srgbClr val="333333"/>
-                </a:solidFill>
-                <a:latin typeface="Calibri"/>
-              </a:rPr>
-              <a:t> —que sume nueve minutos— y </a:t>
-            </a:r>
-            <a:r>
-              <a:rPr sz="1500" b="1" i="0">
-                <a:solidFill>
-                  <a:srgbClr val="333333"/>
-                </a:solidFill>
-                <a:latin typeface="Calibri"/>
-              </a:rPr>
-              <a:t>quién habla</a:t>
-            </a:r>
-            <a:r>
-              <a:rPr sz="1500" b="0" i="0">
-                <a:solidFill>
-                  <a:srgbClr val="333333"/>
-                </a:solidFill>
-                <a:latin typeface="Calibri"/>
-              </a:rPr>
-              <a:t> en cada uno.</a:t>
-            </a:r>
-          </a:p>
-        </p:txBody>
-      </p:sp>
-      <p:sp>
-        <p:nvSpPr>
-          <p:cNvPr id="10" name="Rounded Rectangle 9"/>
-          <p:cNvSpPr/>
-          <p:nvPr/>
-        </p:nvSpPr>
-        <p:spPr>
-          <a:xfrm>
-            <a:off x="457200" y="2148839"/>
-            <a:ext cx="11277295" cy="566928"/>
-          </a:xfrm>
-          <a:prstGeom prst="roundRect">
-            <a:avLst>
-              <a:gd name="adj" fmla="val 12000"/>
-            </a:avLst>
-          </a:prstGeom>
-          <a:solidFill>
-            <a:srgbClr val="F2F2F2"/>
-          </a:solidFill>
-          <a:ln>
-            <a:noFill/>
-          </a:ln>
-        </p:spPr>
-        <p:style>
-          <a:lnRef idx="1">
-            <a:schemeClr val="accent1"/>
-          </a:lnRef>
-          <a:fillRef idx="3">
-            <a:schemeClr val="accent1"/>
-          </a:fillRef>
-          <a:effectRef idx="2">
-            <a:schemeClr val="accent1"/>
-          </a:effectRef>
-          <a:fontRef idx="minor">
-            <a:schemeClr val="lt1"/>
-          </a:fontRef>
-        </p:style>
-        <p:txBody>
-          <a:bodyPr rtlCol="0" anchor="ctr"/>
-          <a:lstStyle/>
-          <a:p>
-            <a:pPr algn="ctr"/>
-          </a:p>
-        </p:txBody>
-      </p:sp>
-      <p:sp>
-        <p:nvSpPr>
-          <p:cNvPr id="11" name="Rectangle 10"/>
-          <p:cNvSpPr/>
-          <p:nvPr/>
-        </p:nvSpPr>
-        <p:spPr>
-          <a:xfrm>
-            <a:off x="640080" y="2295144"/>
-            <a:ext cx="274320" cy="274320"/>
-          </a:xfrm>
-          <a:prstGeom prst="rect">
-            <a:avLst/>
-          </a:prstGeom>
-          <a:solidFill>
-            <a:srgbClr val="FFFFFF"/>
-          </a:solidFill>
-          <a:ln>
-            <a:solidFill>
-              <a:srgbClr val="333333"/>
-            </a:solidFill>
-          </a:ln>
-        </p:spPr>
-        <p:style>
-          <a:lnRef idx="1">
-            <a:schemeClr val="accent1"/>
-          </a:lnRef>
-          <a:fillRef idx="3">
-            <a:schemeClr val="accent1"/>
-          </a:fillRef>
-          <a:effectRef idx="2">
-            <a:schemeClr val="accent1"/>
-          </a:effectRef>
-          <a:fontRef idx="minor">
-            <a:schemeClr val="lt1"/>
-          </a:fontRef>
-        </p:style>
-        <p:txBody>
-          <a:bodyPr rtlCol="0" anchor="ctr"/>
-          <a:lstStyle/>
-          <a:p>
-            <a:pPr algn="ctr"/>
-          </a:p>
-        </p:txBody>
-      </p:sp>
-      <p:sp>
-        <p:nvSpPr>
-          <p:cNvPr id="12" name="Rectangle 11"/>
-          <p:cNvSpPr/>
-          <p:nvPr/>
-        </p:nvSpPr>
-        <p:spPr>
-          <a:xfrm>
-            <a:off x="640080" y="2295144"/>
-            <a:ext cx="73152" cy="274320"/>
-          </a:xfrm>
-          <a:prstGeom prst="rect">
-            <a:avLst/>
-          </a:prstGeom>
-          <a:solidFill>
-            <a:srgbClr val="269CCB"/>
-          </a:solidFill>
-          <a:ln>
-            <a:noFill/>
-          </a:ln>
-        </p:spPr>
-        <p:style>
-          <a:lnRef idx="1">
-            <a:schemeClr val="accent1"/>
-          </a:lnRef>
-          <a:fillRef idx="3">
-            <a:schemeClr val="accent1"/>
-          </a:fillRef>
-          <a:effectRef idx="2">
-            <a:schemeClr val="accent1"/>
-          </a:effectRef>
-          <a:fontRef idx="minor">
-            <a:schemeClr val="lt1"/>
-          </a:fontRef>
-        </p:style>
-        <p:txBody>
-          <a:bodyPr rtlCol="0" anchor="ctr"/>
-          <a:lstStyle/>
-          <a:p>
-            <a:pPr algn="ctr"/>
-          </a:p>
-        </p:txBody>
-      </p:sp>
-      <p:sp>
-        <p:nvSpPr>
-          <p:cNvPr id="13" name="TextBox 12"/>
-          <p:cNvSpPr txBox="1"/>
-          <p:nvPr/>
-        </p:nvSpPr>
-        <p:spPr>
-          <a:xfrm>
-            <a:off x="1097280" y="2240279"/>
-            <a:ext cx="10362895" cy="402336"/>
-          </a:xfrm>
-          <a:prstGeom prst="rect">
-            <a:avLst/>
-          </a:prstGeom>
-          <a:noFill/>
-        </p:spPr>
-        <p:txBody>
-          <a:bodyPr wrap="square" anchor="ctr"/>
-          <a:lstStyle/>
-          <a:p>
-            <a:r>
-              <a:rPr sz="1500" b="1" i="0">
-                <a:solidFill>
-                  <a:srgbClr val="333333"/>
-                </a:solidFill>
-                <a:latin typeface="Calibri"/>
-              </a:rPr>
-              <a:t>LAS OCHO DIAPOSITIVAS</a:t>
-            </a:r>
-            <a:r>
-              <a:rPr sz="1500" b="0" i="0">
-                <a:solidFill>
-                  <a:srgbClr val="333333"/>
-                </a:solidFill>
-                <a:latin typeface="Calibri"/>
-              </a:rPr>
-              <a:t> — Máximo ocho, </a:t>
-            </a:r>
-            <a:r>
-              <a:rPr sz="1500" b="1" i="0">
-                <a:solidFill>
-                  <a:srgbClr val="333333"/>
-                </a:solidFill>
-                <a:latin typeface="Calibri"/>
-              </a:rPr>
-              <a:t>una idea cada una</a:t>
-            </a:r>
-            <a:r>
-              <a:rPr sz="1500" b="0" i="0">
-                <a:solidFill>
-                  <a:srgbClr val="333333"/>
-                </a:solidFill>
-                <a:latin typeface="Calibri"/>
-              </a:rPr>
-              <a:t>, con rótulos y no párrafos. La matriz completa </a:t>
-            </a:r>
-            <a:r>
-              <a:rPr sz="1500" b="1" i="0">
-                <a:solidFill>
-                  <a:srgbClr val="333333"/>
-                </a:solidFill>
-                <a:latin typeface="Calibri"/>
-              </a:rPr>
-              <a:t>no va</a:t>
-            </a:r>
-            <a:r>
-              <a:rPr sz="1500" b="0" i="0">
-                <a:solidFill>
-                  <a:srgbClr val="333333"/>
-                </a:solidFill>
-                <a:latin typeface="Calibri"/>
-              </a:rPr>
-              <a:t>: van las dos alternativas y el ganador.</a:t>
-            </a:r>
-          </a:p>
-        </p:txBody>
-      </p:sp>
-      <p:sp>
-        <p:nvSpPr>
-          <p:cNvPr id="14" name="Rounded Rectangle 13"/>
-          <p:cNvSpPr/>
-          <p:nvPr/>
-        </p:nvSpPr>
-        <p:spPr>
-          <a:xfrm>
-            <a:off x="457200" y="2825496"/>
-            <a:ext cx="11277295" cy="566928"/>
-          </a:xfrm>
-          <a:prstGeom prst="roundRect">
-            <a:avLst>
-              <a:gd name="adj" fmla="val 12000"/>
-            </a:avLst>
-          </a:prstGeom>
-          <a:solidFill>
-            <a:srgbClr val="F2F2F2"/>
-          </a:solidFill>
-          <a:ln>
-            <a:noFill/>
-          </a:ln>
-        </p:spPr>
-        <p:style>
-          <a:lnRef idx="1">
-            <a:schemeClr val="accent1"/>
-          </a:lnRef>
-          <a:fillRef idx="3">
-            <a:schemeClr val="accent1"/>
-          </a:fillRef>
-          <a:effectRef idx="2">
-            <a:schemeClr val="accent1"/>
-          </a:effectRef>
-          <a:fontRef idx="minor">
-            <a:schemeClr val="lt1"/>
-          </a:fontRef>
-        </p:style>
-        <p:txBody>
-          <a:bodyPr rtlCol="0" anchor="ctr"/>
-          <a:lstStyle/>
-          <a:p>
-            <a:pPr algn="ctr"/>
-          </a:p>
-        </p:txBody>
-      </p:sp>
-      <p:sp>
-        <p:nvSpPr>
-          <p:cNvPr id="15" name="Rectangle 14"/>
-          <p:cNvSpPr/>
-          <p:nvPr/>
-        </p:nvSpPr>
-        <p:spPr>
-          <a:xfrm>
-            <a:off x="640080" y="2971800"/>
-            <a:ext cx="274320" cy="274320"/>
-          </a:xfrm>
-          <a:prstGeom prst="rect">
-            <a:avLst/>
-          </a:prstGeom>
-          <a:solidFill>
-            <a:srgbClr val="FFFFFF"/>
-          </a:solidFill>
-          <a:ln>
-            <a:solidFill>
-              <a:srgbClr val="333333"/>
-            </a:solidFill>
-          </a:ln>
-        </p:spPr>
-        <p:style>
-          <a:lnRef idx="1">
-            <a:schemeClr val="accent1"/>
-          </a:lnRef>
-          <a:fillRef idx="3">
-            <a:schemeClr val="accent1"/>
-          </a:fillRef>
-          <a:effectRef idx="2">
-            <a:schemeClr val="accent1"/>
-          </a:effectRef>
-          <a:fontRef idx="minor">
-            <a:schemeClr val="lt1"/>
-          </a:fontRef>
-        </p:style>
-        <p:txBody>
-          <a:bodyPr rtlCol="0" anchor="ctr"/>
-          <a:lstStyle/>
-          <a:p>
-            <a:pPr algn="ctr"/>
-          </a:p>
-        </p:txBody>
-      </p:sp>
-      <p:sp>
-        <p:nvSpPr>
-          <p:cNvPr id="16" name="Rectangle 15"/>
-          <p:cNvSpPr/>
-          <p:nvPr/>
-        </p:nvSpPr>
-        <p:spPr>
-          <a:xfrm>
-            <a:off x="640080" y="2971800"/>
-            <a:ext cx="73152" cy="274320"/>
-          </a:xfrm>
-          <a:prstGeom prst="rect">
-            <a:avLst/>
-          </a:prstGeom>
-          <a:solidFill>
-            <a:srgbClr val="269CCB"/>
-          </a:solidFill>
-          <a:ln>
-            <a:noFill/>
-          </a:ln>
-        </p:spPr>
-        <p:style>
-          <a:lnRef idx="1">
-            <a:schemeClr val="accent1"/>
-          </a:lnRef>
-          <a:fillRef idx="3">
-            <a:schemeClr val="accent1"/>
-          </a:fillRef>
-          <a:effectRef idx="2">
-            <a:schemeClr val="accent1"/>
-          </a:effectRef>
-          <a:fontRef idx="minor">
-            <a:schemeClr val="lt1"/>
-          </a:fontRef>
-        </p:style>
-        <p:txBody>
-          <a:bodyPr rtlCol="0" anchor="ctr"/>
-          <a:lstStyle/>
-          <a:p>
-            <a:pPr algn="ctr"/>
-          </a:p>
-        </p:txBody>
-      </p:sp>
-      <p:sp>
-        <p:nvSpPr>
-          <p:cNvPr id="17" name="TextBox 16"/>
-          <p:cNvSpPr txBox="1"/>
-          <p:nvPr/>
-        </p:nvSpPr>
-        <p:spPr>
-          <a:xfrm>
-            <a:off x="1097280" y="2916936"/>
-            <a:ext cx="10362895" cy="402336"/>
-          </a:xfrm>
-          <a:prstGeom prst="rect">
-            <a:avLst/>
-          </a:prstGeom>
-          <a:noFill/>
-        </p:spPr>
-        <p:txBody>
-          <a:bodyPr wrap="square" anchor="ctr"/>
-          <a:lstStyle/>
-          <a:p>
-            <a:r>
-              <a:rPr sz="1500" b="1" i="0">
-                <a:solidFill>
-                  <a:srgbClr val="333333"/>
-                </a:solidFill>
-                <a:latin typeface="Calibri"/>
-              </a:rPr>
-              <a:t>EL REPARTO ENTRE INTEGRANTES</a:t>
-            </a:r>
-            <a:r>
-              <a:rPr sz="1500" b="0" i="0">
-                <a:solidFill>
-                  <a:srgbClr val="333333"/>
-                </a:solidFill>
-                <a:latin typeface="Calibri"/>
-              </a:rPr>
-              <a:t> — Quién habla en cada tramo, y </a:t>
-            </a:r>
-            <a:r>
-              <a:rPr sz="1500" b="1" i="0">
-                <a:solidFill>
-                  <a:srgbClr val="333333"/>
-                </a:solidFill>
-                <a:latin typeface="Calibri"/>
-              </a:rPr>
-              <a:t>qué hace quien no habla</a:t>
-            </a:r>
-            <a:r>
-              <a:rPr sz="1500" b="0" i="0">
-                <a:solidFill>
-                  <a:srgbClr val="333333"/>
-                </a:solidFill>
-                <a:latin typeface="Calibri"/>
-              </a:rPr>
-              <a:t>: cronómetro, capturas del plan B, la diapositiva siguiente lista.</a:t>
-            </a:r>
-          </a:p>
-        </p:txBody>
-      </p:sp>
-      <p:sp>
-        <p:nvSpPr>
-          <p:cNvPr id="18" name="Rounded Rectangle 17"/>
-          <p:cNvSpPr/>
-          <p:nvPr/>
-        </p:nvSpPr>
-        <p:spPr>
-          <a:xfrm>
-            <a:off x="457200" y="3502152"/>
-            <a:ext cx="11277295" cy="566928"/>
-          </a:xfrm>
-          <a:prstGeom prst="roundRect">
-            <a:avLst>
-              <a:gd name="adj" fmla="val 12000"/>
-            </a:avLst>
-          </a:prstGeom>
-          <a:solidFill>
-            <a:srgbClr val="F2F2F2"/>
-          </a:solidFill>
-          <a:ln>
-            <a:noFill/>
-          </a:ln>
-        </p:spPr>
-        <p:style>
-          <a:lnRef idx="1">
-            <a:schemeClr val="accent1"/>
-          </a:lnRef>
-          <a:fillRef idx="3">
-            <a:schemeClr val="accent1"/>
-          </a:fillRef>
-          <a:effectRef idx="2">
-            <a:schemeClr val="accent1"/>
-          </a:effectRef>
-          <a:fontRef idx="minor">
-            <a:schemeClr val="lt1"/>
-          </a:fontRef>
-        </p:style>
-        <p:txBody>
-          <a:bodyPr rtlCol="0" anchor="ctr"/>
-          <a:lstStyle/>
-          <a:p>
-            <a:pPr algn="ctr"/>
-          </a:p>
-        </p:txBody>
-      </p:sp>
-      <p:sp>
-        <p:nvSpPr>
-          <p:cNvPr id="19" name="Rectangle 18"/>
-          <p:cNvSpPr/>
-          <p:nvPr/>
-        </p:nvSpPr>
-        <p:spPr>
-          <a:xfrm>
-            <a:off x="640080" y="3648456"/>
-            <a:ext cx="274320" cy="274320"/>
-          </a:xfrm>
-          <a:prstGeom prst="rect">
-            <a:avLst/>
-          </a:prstGeom>
-          <a:solidFill>
-            <a:srgbClr val="FFFFFF"/>
-          </a:solidFill>
-          <a:ln>
-            <a:solidFill>
-              <a:srgbClr val="333333"/>
-            </a:solidFill>
-          </a:ln>
-        </p:spPr>
-        <p:style>
-          <a:lnRef idx="1">
-            <a:schemeClr val="accent1"/>
-          </a:lnRef>
-          <a:fillRef idx="3">
-            <a:schemeClr val="accent1"/>
-          </a:fillRef>
-          <a:effectRef idx="2">
-            <a:schemeClr val="accent1"/>
-          </a:effectRef>
-          <a:fontRef idx="minor">
-            <a:schemeClr val="lt1"/>
-          </a:fontRef>
-        </p:style>
-        <p:txBody>
-          <a:bodyPr rtlCol="0" anchor="ctr"/>
-          <a:lstStyle/>
-          <a:p>
-            <a:pPr algn="ctr"/>
-          </a:p>
-        </p:txBody>
-      </p:sp>
-      <p:sp>
-        <p:nvSpPr>
-          <p:cNvPr id="20" name="Rectangle 19"/>
-          <p:cNvSpPr/>
-          <p:nvPr/>
-        </p:nvSpPr>
-        <p:spPr>
-          <a:xfrm>
-            <a:off x="640080" y="3648456"/>
-            <a:ext cx="73152" cy="274320"/>
-          </a:xfrm>
-          <a:prstGeom prst="rect">
-            <a:avLst/>
-          </a:prstGeom>
-          <a:solidFill>
-            <a:srgbClr val="269CCB"/>
-          </a:solidFill>
-          <a:ln>
-            <a:noFill/>
-          </a:ln>
-        </p:spPr>
-        <p:style>
-          <a:lnRef idx="1">
-            <a:schemeClr val="accent1"/>
-          </a:lnRef>
-          <a:fillRef idx="3">
-            <a:schemeClr val="accent1"/>
-          </a:fillRef>
-          <a:effectRef idx="2">
-            <a:schemeClr val="accent1"/>
-          </a:effectRef>
-          <a:fontRef idx="minor">
-            <a:schemeClr val="lt1"/>
-          </a:fontRef>
-        </p:style>
-        <p:txBody>
-          <a:bodyPr rtlCol="0" anchor="ctr"/>
-          <a:lstStyle/>
-          <a:p>
-            <a:pPr algn="ctr"/>
-          </a:p>
-        </p:txBody>
-      </p:sp>
-      <p:sp>
-        <p:nvSpPr>
-          <p:cNvPr id="21" name="TextBox 20"/>
-          <p:cNvSpPr txBox="1"/>
-          <p:nvPr/>
-        </p:nvSpPr>
-        <p:spPr>
-          <a:xfrm>
-            <a:off x="1097280" y="3593592"/>
-            <a:ext cx="10362895" cy="402336"/>
-          </a:xfrm>
-          <a:prstGeom prst="rect">
-            <a:avLst/>
-          </a:prstGeom>
-          <a:noFill/>
-        </p:spPr>
-        <p:txBody>
-          <a:bodyPr wrap="square" anchor="ctr"/>
-          <a:lstStyle/>
-          <a:p>
-            <a:r>
-              <a:rPr sz="1500" b="1" i="0">
-                <a:solidFill>
-                  <a:srgbClr val="333333"/>
-                </a:solidFill>
-                <a:latin typeface="Calibri"/>
-              </a:rPr>
-              <a:t>LA DEMOSTRACIÓN DEL PROTOTIPO</a:t>
-            </a:r>
-            <a:r>
-              <a:rPr sz="1500" b="0" i="0">
-                <a:solidFill>
-                  <a:srgbClr val="333333"/>
-                </a:solidFill>
-                <a:latin typeface="Calibri"/>
-              </a:rPr>
-              <a:t> — El recorrido de </a:t>
-            </a:r>
-            <a:r>
-              <a:rPr sz="1500" b="1" i="0">
-                <a:solidFill>
-                  <a:srgbClr val="333333"/>
-                </a:solidFill>
-                <a:latin typeface="Calibri"/>
-              </a:rPr>
-              <a:t>tres pasos</a:t>
-            </a:r>
-            <a:r>
-              <a:rPr sz="1500" b="0" i="0">
-                <a:solidFill>
-                  <a:srgbClr val="333333"/>
-                </a:solidFill>
-                <a:latin typeface="Calibri"/>
-              </a:rPr>
-              <a:t> que se va a mostrar, con </a:t>
-            </a:r>
-            <a:r>
-              <a:rPr sz="1500" b="1" i="0">
-                <a:solidFill>
-                  <a:srgbClr val="333333"/>
-                </a:solidFill>
-                <a:latin typeface="Calibri"/>
-              </a:rPr>
-              <a:t>una persona narrando y otra manejando la pantalla</a:t>
-            </a:r>
-            <a:r>
-              <a:rPr sz="1500" b="0" i="0">
-                <a:solidFill>
-                  <a:srgbClr val="333333"/>
-                </a:solidFill>
-                <a:latin typeface="Calibri"/>
-              </a:rPr>
-              <a:t>. Ensayado dos veces.</a:t>
-            </a:r>
-          </a:p>
-        </p:txBody>
-      </p:sp>
-      <p:sp>
-        <p:nvSpPr>
-          <p:cNvPr id="22" name="Rounded Rectangle 21"/>
-          <p:cNvSpPr/>
-          <p:nvPr/>
-        </p:nvSpPr>
-        <p:spPr>
-          <a:xfrm>
-            <a:off x="457200" y="4178808"/>
-            <a:ext cx="11277295" cy="566928"/>
-          </a:xfrm>
-          <a:prstGeom prst="roundRect">
-            <a:avLst>
-              <a:gd name="adj" fmla="val 12000"/>
-            </a:avLst>
-          </a:prstGeom>
-          <a:solidFill>
-            <a:srgbClr val="F2F2F2"/>
-          </a:solidFill>
-          <a:ln>
-            <a:noFill/>
-          </a:ln>
-        </p:spPr>
-        <p:style>
-          <a:lnRef idx="1">
-            <a:schemeClr val="accent1"/>
-          </a:lnRef>
-          <a:fillRef idx="3">
-            <a:schemeClr val="accent1"/>
-          </a:fillRef>
-          <a:effectRef idx="2">
-            <a:schemeClr val="accent1"/>
-          </a:effectRef>
-          <a:fontRef idx="minor">
-            <a:schemeClr val="lt1"/>
-          </a:fontRef>
-        </p:style>
-        <p:txBody>
-          <a:bodyPr rtlCol="0" anchor="ctr"/>
-          <a:lstStyle/>
-          <a:p>
-            <a:pPr algn="ctr"/>
-          </a:p>
-        </p:txBody>
-      </p:sp>
-      <p:sp>
-        <p:nvSpPr>
-          <p:cNvPr id="23" name="Rectangle 22"/>
-          <p:cNvSpPr/>
-          <p:nvPr/>
-        </p:nvSpPr>
-        <p:spPr>
-          <a:xfrm>
-            <a:off x="640080" y="4325112"/>
-            <a:ext cx="274320" cy="274320"/>
-          </a:xfrm>
-          <a:prstGeom prst="rect">
-            <a:avLst/>
-          </a:prstGeom>
-          <a:solidFill>
-            <a:srgbClr val="FFFFFF"/>
-          </a:solidFill>
-          <a:ln>
-            <a:solidFill>
-              <a:srgbClr val="333333"/>
-            </a:solidFill>
-          </a:ln>
-        </p:spPr>
-        <p:style>
-          <a:lnRef idx="1">
-            <a:schemeClr val="accent1"/>
-          </a:lnRef>
-          <a:fillRef idx="3">
-            <a:schemeClr val="accent1"/>
-          </a:fillRef>
-          <a:effectRef idx="2">
-            <a:schemeClr val="accent1"/>
-          </a:effectRef>
-          <a:fontRef idx="minor">
-            <a:schemeClr val="lt1"/>
-          </a:fontRef>
-        </p:style>
-        <p:txBody>
-          <a:bodyPr rtlCol="0" anchor="ctr"/>
-          <a:lstStyle/>
-          <a:p>
-            <a:pPr algn="ctr"/>
-          </a:p>
-        </p:txBody>
-      </p:sp>
-      <p:sp>
-        <p:nvSpPr>
-          <p:cNvPr id="24" name="Rectangle 23"/>
-          <p:cNvSpPr/>
-          <p:nvPr/>
-        </p:nvSpPr>
-        <p:spPr>
-          <a:xfrm>
-            <a:off x="640080" y="4325112"/>
-            <a:ext cx="73152" cy="274320"/>
-          </a:xfrm>
-          <a:prstGeom prst="rect">
-            <a:avLst/>
-          </a:prstGeom>
-          <a:solidFill>
-            <a:srgbClr val="269CCB"/>
-          </a:solidFill>
-          <a:ln>
-            <a:noFill/>
-          </a:ln>
-        </p:spPr>
-        <p:style>
-          <a:lnRef idx="1">
-            <a:schemeClr val="accent1"/>
-          </a:lnRef>
-          <a:fillRef idx="3">
-            <a:schemeClr val="accent1"/>
-          </a:fillRef>
-          <a:effectRef idx="2">
-            <a:schemeClr val="accent1"/>
-          </a:effectRef>
-          <a:fontRef idx="minor">
-            <a:schemeClr val="lt1"/>
-          </a:fontRef>
-        </p:style>
-        <p:txBody>
-          <a:bodyPr rtlCol="0" anchor="ctr"/>
-          <a:lstStyle/>
-          <a:p>
-            <a:pPr algn="ctr"/>
-          </a:p>
-        </p:txBody>
-      </p:sp>
-      <p:sp>
-        <p:nvSpPr>
-          <p:cNvPr id="25" name="TextBox 24"/>
-          <p:cNvSpPr txBox="1"/>
-          <p:nvPr/>
-        </p:nvSpPr>
-        <p:spPr>
-          <a:xfrm>
-            <a:off x="1097280" y="4270248"/>
-            <a:ext cx="10362895" cy="402336"/>
-          </a:xfrm>
-          <a:prstGeom prst="rect">
-            <a:avLst/>
-          </a:prstGeom>
-          <a:noFill/>
-        </p:spPr>
-        <p:txBody>
-          <a:bodyPr wrap="square" anchor="ctr"/>
-          <a:lstStyle/>
-          <a:p>
-            <a:r>
-              <a:rPr sz="1500" b="1" i="0">
-                <a:solidFill>
-                  <a:srgbClr val="333333"/>
-                </a:solidFill>
-                <a:latin typeface="Calibri"/>
-              </a:rPr>
-              <a:t>EL PLAN B TÉCNICO</a:t>
-            </a:r>
-            <a:r>
-              <a:rPr sz="1500" b="0" i="0">
-                <a:solidFill>
-                  <a:srgbClr val="333333"/>
-                </a:solidFill>
-                <a:latin typeface="Calibri"/>
-              </a:rPr>
-              <a:t> — En la carpeta del equipo: la presentación </a:t>
-            </a:r>
-            <a:r>
-              <a:rPr sz="1500" b="1" i="0">
-                <a:solidFill>
-                  <a:srgbClr val="333333"/>
-                </a:solidFill>
-                <a:latin typeface="Calibri"/>
-              </a:rPr>
-              <a:t>en PDF</a:t>
-            </a:r>
-            <a:r>
-              <a:rPr sz="1500" b="0" i="0">
-                <a:solidFill>
-                  <a:srgbClr val="333333"/>
-                </a:solidFill>
-                <a:latin typeface="Calibri"/>
-              </a:rPr>
-              <a:t>, </a:t>
-            </a:r>
-            <a:r>
-              <a:rPr sz="1500" b="1" i="0">
-                <a:solidFill>
-                  <a:srgbClr val="333333"/>
-                </a:solidFill>
-                <a:latin typeface="Calibri"/>
-              </a:rPr>
-              <a:t>capturas de cada paso</a:t>
-            </a:r>
-            <a:r>
-              <a:rPr sz="1500" b="0" i="0">
-                <a:solidFill>
-                  <a:srgbClr val="333333"/>
-                </a:solidFill>
-                <a:latin typeface="Calibri"/>
-              </a:rPr>
-              <a:t> de la demostración, y quién comparte pantalla si se cae el primero.</a:t>
-            </a:r>
-          </a:p>
-        </p:txBody>
-      </p:sp>
-      <p:sp>
-        <p:nvSpPr>
-          <p:cNvPr id="26" name="TextBox 25"/>
-          <p:cNvSpPr txBox="1"/>
-          <p:nvPr/>
-        </p:nvSpPr>
-        <p:spPr>
-          <a:xfrm>
-            <a:off x="11185855" y="6473952"/>
-            <a:ext cx="640080" cy="274320"/>
-          </a:xfrm>
-          <a:prstGeom prst="rect">
-            <a:avLst/>
-          </a:prstGeom>
-          <a:noFill/>
-        </p:spPr>
-        <p:txBody>
-          <a:bodyPr wrap="square">
-            <a:spAutoFit/>
-          </a:bodyPr>
-          <a:lstStyle/>
-          <a:p>
-            <a:pPr algn="r"/>
-            <a:r>
-              <a:rPr sz="1100" b="0" i="0">
-                <a:solidFill>
-                  <a:srgbClr val="666666"/>
-                </a:solidFill>
-                <a:latin typeface="Calibri"/>
-              </a:rPr>
-              <a:t>11</a:t>
-            </a:r>
-          </a:p>
-        </p:txBody>
-      </p:sp>
-    </p:spTree>
-  </p:cSld>
-  <p:clrMapOvr>
-    <a:masterClrMapping/>
-  </p:clrMapOvr>
-</p:sld>
-</file>
-
-<file path=ppt/slides/slide12.xml><?xml version="1.0" encoding="utf-8"?>
-<p:sld xmlns:a="http://schemas.openxmlformats.org/drawingml/2006/main" xmlns:p="http://schemas.openxmlformats.org/presentationml/2006/main" xmlns:r="http://schemas.openxmlformats.org/officeDocument/2006/relationships">
-  <p:cSld>
-    <p:bg>
-      <p:bgPr>
-        <a:solidFill>
-          <a:srgbClr val="FFFFFF"/>
-        </a:solidFill>
-        <a:effectLst/>
-      </p:bgPr>
-    </p:bg>
-    <p:spTree>
-      <p:nvGrpSpPr>
-        <p:cNvPr id="1" name=""/>
-        <p:cNvGrpSpPr/>
-        <p:nvPr/>
-      </p:nvGrpSpPr>
-      <p:grpSpPr/>
-      <p:sp>
-        <p:nvSpPr>
-          <p:cNvPr id="2" name="Rectangle 1"/>
-          <p:cNvSpPr/>
-          <p:nvPr/>
-        </p:nvSpPr>
-        <p:spPr>
-          <a:xfrm>
-            <a:off x="0" y="0"/>
-            <a:ext cx="12191695" cy="1170432"/>
-          </a:xfrm>
-          <a:prstGeom prst="rect">
-            <a:avLst/>
-          </a:prstGeom>
-          <a:solidFill>
-            <a:srgbClr val="095292"/>
-          </a:solidFill>
-          <a:ln>
-            <a:noFill/>
-          </a:ln>
-        </p:spPr>
-        <p:style>
-          <a:lnRef idx="1">
-            <a:schemeClr val="accent1"/>
-          </a:lnRef>
-          <a:fillRef idx="3">
-            <a:schemeClr val="accent1"/>
-          </a:fillRef>
-          <a:effectRef idx="2">
-            <a:schemeClr val="accent1"/>
-          </a:effectRef>
-          <a:fontRef idx="minor">
-            <a:schemeClr val="lt1"/>
-          </a:fontRef>
-        </p:style>
-        <p:txBody>
-          <a:bodyPr rtlCol="0" anchor="ctr"/>
-          <a:lstStyle/>
-          <a:p>
-            <a:pPr algn="ctr"/>
-          </a:p>
-        </p:txBody>
-      </p:sp>
-      <p:sp>
-        <p:nvSpPr>
-          <p:cNvPr id="3" name="Rectangle 2"/>
-          <p:cNvSpPr/>
-          <p:nvPr/>
-        </p:nvSpPr>
-        <p:spPr>
-          <a:xfrm>
-            <a:off x="0" y="1170432"/>
-            <a:ext cx="12191695" cy="41148"/>
-          </a:xfrm>
-          <a:prstGeom prst="rect">
-            <a:avLst/>
-          </a:prstGeom>
-          <a:solidFill>
-            <a:srgbClr val="FFD000"/>
-          </a:solidFill>
-          <a:ln>
-            <a:noFill/>
-          </a:ln>
-        </p:spPr>
-        <p:style>
-          <a:lnRef idx="1">
-            <a:schemeClr val="accent1"/>
-          </a:lnRef>
-          <a:fillRef idx="3">
-            <a:schemeClr val="accent1"/>
-          </a:fillRef>
-          <a:effectRef idx="2">
-            <a:schemeClr val="accent1"/>
-          </a:effectRef>
-          <a:fontRef idx="minor">
-            <a:schemeClr val="lt1"/>
-          </a:fontRef>
-        </p:style>
-        <p:txBody>
-          <a:bodyPr rtlCol="0" anchor="ctr"/>
-          <a:lstStyle/>
-          <a:p>
-            <a:pPr algn="ctr"/>
-          </a:p>
-        </p:txBody>
-      </p:sp>
-      <p:sp>
-        <p:nvSpPr>
-          <p:cNvPr id="4" name="TextBox 3"/>
-          <p:cNvSpPr txBox="1"/>
-          <p:nvPr/>
-        </p:nvSpPr>
-        <p:spPr>
-          <a:xfrm>
-            <a:off x="457200" y="164592"/>
-            <a:ext cx="11277295" cy="384048"/>
-          </a:xfrm>
-          <a:prstGeom prst="rect">
-            <a:avLst/>
-          </a:prstGeom>
-          <a:noFill/>
-        </p:spPr>
-        <p:txBody>
-          <a:bodyPr wrap="square">
-            <a:spAutoFit/>
-          </a:bodyPr>
-          <a:lstStyle/>
-          <a:p>
-            <a:r>
-              <a:rPr sz="2600" b="1" i="0">
-                <a:solidFill>
-                  <a:srgbClr val="FFFFFF"/>
-                </a:solidFill>
-                <a:latin typeface="Calibri"/>
-              </a:rPr>
-              <a:t>Cómo se expone en 4 minutos</a:t>
-            </a:r>
-          </a:p>
-        </p:txBody>
-      </p:sp>
-      <p:sp>
-        <p:nvSpPr>
-          <p:cNvPr id="5" name="TextBox 4"/>
-          <p:cNvSpPr txBox="1"/>
-          <p:nvPr/>
-        </p:nvSpPr>
-        <p:spPr>
-          <a:xfrm>
-            <a:off x="457200" y="566928"/>
-            <a:ext cx="11277295" cy="411480"/>
-          </a:xfrm>
-          <a:prstGeom prst="rect">
-            <a:avLst/>
-          </a:prstGeom>
-          <a:noFill/>
-        </p:spPr>
-        <p:txBody>
-          <a:bodyPr wrap="square">
-            <a:spAutoFit/>
-          </a:bodyPr>
-          <a:lstStyle/>
-          <a:p>
-            <a:r>
-              <a:rPr sz="1400" b="0" i="0">
-                <a:solidFill>
-                  <a:srgbClr val="B8D8EE"/>
-                </a:solidFill>
-                <a:latin typeface="Calibri"/>
-              </a:rPr>
-              <a:t>Habla el vocero con la pantalla ya compartida · cronómetro en pantalla · se corta al llegar a cero</a:t>
-            </a:r>
-          </a:p>
-        </p:txBody>
-      </p:sp>
-      <p:sp>
-        <p:nvSpPr>
-          <p:cNvPr id="6" name="Rounded Rectangle 5"/>
-          <p:cNvSpPr/>
-          <p:nvPr/>
-        </p:nvSpPr>
-        <p:spPr>
-          <a:xfrm>
-            <a:off x="457200" y="1444752"/>
-            <a:ext cx="11277295" cy="908913"/>
-          </a:xfrm>
-          <a:prstGeom prst="roundRect">
-            <a:avLst>
-              <a:gd name="adj" fmla="val 12000"/>
-            </a:avLst>
-          </a:prstGeom>
-          <a:solidFill>
-            <a:srgbClr val="F2F2F2"/>
-          </a:solidFill>
-          <a:ln>
-            <a:noFill/>
-          </a:ln>
-        </p:spPr>
-        <p:style>
-          <a:lnRef idx="1">
-            <a:schemeClr val="accent1"/>
-          </a:lnRef>
-          <a:fillRef idx="3">
-            <a:schemeClr val="accent1"/>
-          </a:fillRef>
-          <a:effectRef idx="2">
-            <a:schemeClr val="accent1"/>
-          </a:effectRef>
-          <a:fontRef idx="minor">
-            <a:schemeClr val="lt1"/>
-          </a:fontRef>
-        </p:style>
-        <p:txBody>
-          <a:bodyPr rtlCol="0" anchor="ctr"/>
-          <a:lstStyle/>
-          <a:p>
-            <a:pPr algn="ctr"/>
-          </a:p>
-        </p:txBody>
-      </p:sp>
-      <p:sp>
-        <p:nvSpPr>
-          <p:cNvPr id="7" name="Rounded Rectangle 6"/>
-          <p:cNvSpPr/>
-          <p:nvPr/>
-        </p:nvSpPr>
-        <p:spPr>
-          <a:xfrm>
-            <a:off x="594360" y="1679752"/>
-            <a:ext cx="438912" cy="438912"/>
-          </a:xfrm>
-          <a:prstGeom prst="roundRect">
-            <a:avLst>
-              <a:gd name="adj" fmla="val 12000"/>
-            </a:avLst>
-          </a:prstGeom>
-          <a:solidFill>
-            <a:srgbClr val="095292"/>
-          </a:solidFill>
-          <a:ln>
-            <a:noFill/>
-          </a:ln>
-        </p:spPr>
-        <p:style>
-          <a:lnRef idx="1">
-            <a:schemeClr val="accent1"/>
-          </a:lnRef>
-          <a:fillRef idx="3">
-            <a:schemeClr val="accent1"/>
-          </a:fillRef>
-          <a:effectRef idx="2">
-            <a:schemeClr val="accent1"/>
-          </a:effectRef>
-          <a:fontRef idx="minor">
-            <a:schemeClr val="lt1"/>
-          </a:fontRef>
-        </p:style>
-        <p:txBody>
-          <a:bodyPr rtlCol="0" anchor="ctr"/>
-          <a:lstStyle/>
-          <a:p>
-            <a:pPr algn="ctr"/>
-          </a:p>
-        </p:txBody>
-      </p:sp>
-      <p:sp>
-        <p:nvSpPr>
-          <p:cNvPr id="8" name="TextBox 7"/>
-          <p:cNvSpPr txBox="1"/>
-          <p:nvPr/>
-        </p:nvSpPr>
-        <p:spPr>
-          <a:xfrm>
-            <a:off x="594360" y="1679752"/>
-            <a:ext cx="438912" cy="438912"/>
-          </a:xfrm>
-          <a:prstGeom prst="rect">
-            <a:avLst/>
-          </a:prstGeom>
-          <a:noFill/>
-        </p:spPr>
-        <p:txBody>
-          <a:bodyPr wrap="square" anchor="ctr"/>
-          <a:lstStyle/>
-          <a:p>
-            <a:pPr algn="ctr"/>
-            <a:r>
-              <a:rPr sz="1600" b="1" i="0">
-                <a:solidFill>
-                  <a:srgbClr val="FFFFFF"/>
-                </a:solidFill>
-                <a:latin typeface="Calibri"/>
-              </a:rPr>
-              <a:t>1</a:t>
-            </a:r>
-          </a:p>
-        </p:txBody>
-      </p:sp>
-      <p:sp>
-        <p:nvSpPr>
-          <p:cNvPr id="9" name="TextBox 8"/>
-          <p:cNvSpPr txBox="1"/>
-          <p:nvPr/>
-        </p:nvSpPr>
-        <p:spPr>
-          <a:xfrm>
-            <a:off x="1188720" y="1536192"/>
-            <a:ext cx="10271455" cy="744321"/>
-          </a:xfrm>
-          <a:prstGeom prst="rect">
-            <a:avLst/>
-          </a:prstGeom>
-          <a:noFill/>
-        </p:spPr>
-        <p:txBody>
-          <a:bodyPr wrap="square" anchor="ctr"/>
-          <a:lstStyle/>
-          <a:p>
-            <a:r>
-              <a:rPr sz="1500" b="1" i="0">
-                <a:solidFill>
-                  <a:srgbClr val="095292"/>
-                </a:solidFill>
-                <a:latin typeface="Calibri"/>
-              </a:rPr>
-              <a:t>Tramo 1 · 1 min</a:t>
-            </a:r>
-          </a:p>
-          <a:p>
-            <a:pPr>
-              <a:spcBef>
-                <a:spcPts val="200"/>
-              </a:spcBef>
-            </a:pPr>
-            <a:r>
-              <a:rPr sz="1300" b="0" i="0">
-                <a:solidFill>
-                  <a:srgbClr val="333333"/>
-                </a:solidFill>
-                <a:latin typeface="Calibri"/>
-              </a:rPr>
-              <a:t>El problema con su cifra. </a:t>
-            </a:r>
-            <a:r>
-              <a:rPr sz="1300" b="1" i="0">
-                <a:solidFill>
-                  <a:srgbClr val="333333"/>
-                </a:solidFill>
-                <a:latin typeface="Calibri"/>
-              </a:rPr>
-              <a:t>Sin presentaciones personales.</a:t>
-            </a:r>
-          </a:p>
-        </p:txBody>
-      </p:sp>
-      <p:sp>
-        <p:nvSpPr>
-          <p:cNvPr id="10" name="Rounded Rectangle 9"/>
-          <p:cNvSpPr/>
-          <p:nvPr/>
-        </p:nvSpPr>
-        <p:spPr>
-          <a:xfrm>
-            <a:off x="457200" y="2445105"/>
-            <a:ext cx="11277295" cy="908913"/>
-          </a:xfrm>
-          <a:prstGeom prst="roundRect">
-            <a:avLst>
-              <a:gd name="adj" fmla="val 12000"/>
-            </a:avLst>
-          </a:prstGeom>
-          <a:solidFill>
-            <a:srgbClr val="E8F4FA"/>
-          </a:solidFill>
-          <a:ln>
-            <a:noFill/>
-          </a:ln>
-        </p:spPr>
-        <p:style>
-          <a:lnRef idx="1">
-            <a:schemeClr val="accent1"/>
-          </a:lnRef>
-          <a:fillRef idx="3">
-            <a:schemeClr val="accent1"/>
-          </a:fillRef>
-          <a:effectRef idx="2">
-            <a:schemeClr val="accent1"/>
-          </a:effectRef>
-          <a:fontRef idx="minor">
-            <a:schemeClr val="lt1"/>
-          </a:fontRef>
-        </p:style>
-        <p:txBody>
-          <a:bodyPr rtlCol="0" anchor="ctr"/>
-          <a:lstStyle/>
-          <a:p>
-            <a:pPr algn="ctr"/>
-          </a:p>
-        </p:txBody>
-      </p:sp>
-      <p:sp>
-        <p:nvSpPr>
-          <p:cNvPr id="11" name="Rounded Rectangle 10"/>
-          <p:cNvSpPr/>
-          <p:nvPr/>
-        </p:nvSpPr>
-        <p:spPr>
-          <a:xfrm>
-            <a:off x="594360" y="2680106"/>
-            <a:ext cx="438912" cy="438912"/>
-          </a:xfrm>
-          <a:prstGeom prst="roundRect">
-            <a:avLst>
-              <a:gd name="adj" fmla="val 12000"/>
-            </a:avLst>
-          </a:prstGeom>
-          <a:solidFill>
-            <a:srgbClr val="095292"/>
-          </a:solidFill>
-          <a:ln>
-            <a:noFill/>
-          </a:ln>
-        </p:spPr>
-        <p:style>
-          <a:lnRef idx="1">
-            <a:schemeClr val="accent1"/>
-          </a:lnRef>
-          <a:fillRef idx="3">
-            <a:schemeClr val="accent1"/>
-          </a:fillRef>
-          <a:effectRef idx="2">
-            <a:schemeClr val="accent1"/>
-          </a:effectRef>
-          <a:fontRef idx="minor">
-            <a:schemeClr val="lt1"/>
-          </a:fontRef>
-        </p:style>
-        <p:txBody>
-          <a:bodyPr rtlCol="0" anchor="ctr"/>
-          <a:lstStyle/>
-          <a:p>
-            <a:pPr algn="ctr"/>
-          </a:p>
-        </p:txBody>
-      </p:sp>
-      <p:sp>
-        <p:nvSpPr>
-          <p:cNvPr id="12" name="TextBox 11"/>
-          <p:cNvSpPr txBox="1"/>
-          <p:nvPr/>
-        </p:nvSpPr>
-        <p:spPr>
-          <a:xfrm>
-            <a:off x="594360" y="2680106"/>
-            <a:ext cx="438912" cy="438912"/>
-          </a:xfrm>
-          <a:prstGeom prst="rect">
-            <a:avLst/>
-          </a:prstGeom>
-          <a:noFill/>
-        </p:spPr>
-        <p:txBody>
-          <a:bodyPr wrap="square" anchor="ctr"/>
-          <a:lstStyle/>
-          <a:p>
-            <a:pPr algn="ctr"/>
-            <a:r>
-              <a:rPr sz="1600" b="1" i="0">
-                <a:solidFill>
-                  <a:srgbClr val="FFFFFF"/>
-                </a:solidFill>
-                <a:latin typeface="Calibri"/>
-              </a:rPr>
-              <a:t>2</a:t>
-            </a:r>
-          </a:p>
-        </p:txBody>
-      </p:sp>
-      <p:sp>
-        <p:nvSpPr>
-          <p:cNvPr id="13" name="TextBox 12"/>
-          <p:cNvSpPr txBox="1"/>
-          <p:nvPr/>
-        </p:nvSpPr>
-        <p:spPr>
-          <a:xfrm>
-            <a:off x="1188720" y="2536545"/>
-            <a:ext cx="10271455" cy="744321"/>
-          </a:xfrm>
-          <a:prstGeom prst="rect">
-            <a:avLst/>
-          </a:prstGeom>
-          <a:noFill/>
-        </p:spPr>
-        <p:txBody>
-          <a:bodyPr wrap="square" anchor="ctr"/>
-          <a:lstStyle/>
-          <a:p>
-            <a:r>
-              <a:rPr sz="1500" b="1" i="0">
-                <a:solidFill>
-                  <a:srgbClr val="095292"/>
-                </a:solidFill>
-                <a:latin typeface="Calibri"/>
-              </a:rPr>
-              <a:t>Tramo 2 · 2 min</a:t>
-            </a:r>
-          </a:p>
-          <a:p>
-            <a:pPr>
-              <a:spcBef>
-                <a:spcPts val="200"/>
-              </a:spcBef>
-            </a:pPr>
-            <a:r>
-              <a:rPr sz="1300" b="0" i="0">
-                <a:solidFill>
-                  <a:srgbClr val="333333"/>
-                </a:solidFill>
-                <a:latin typeface="Calibri"/>
-              </a:rPr>
-              <a:t>Los afectados y la decisión de la matriz, con lo que se sacrificó.</a:t>
-            </a:r>
-          </a:p>
-        </p:txBody>
-      </p:sp>
-      <p:sp>
-        <p:nvSpPr>
-          <p:cNvPr id="14" name="Rounded Rectangle 13"/>
-          <p:cNvSpPr/>
-          <p:nvPr/>
-        </p:nvSpPr>
-        <p:spPr>
-          <a:xfrm>
-            <a:off x="457200" y="3445459"/>
-            <a:ext cx="11277295" cy="908913"/>
-          </a:xfrm>
-          <a:prstGeom prst="roundRect">
-            <a:avLst>
-              <a:gd name="adj" fmla="val 12000"/>
-            </a:avLst>
-          </a:prstGeom>
-          <a:solidFill>
-            <a:srgbClr val="F2F2F2"/>
-          </a:solidFill>
-          <a:ln>
-            <a:noFill/>
-          </a:ln>
-        </p:spPr>
-        <p:style>
-          <a:lnRef idx="1">
-            <a:schemeClr val="accent1"/>
-          </a:lnRef>
-          <a:fillRef idx="3">
-            <a:schemeClr val="accent1"/>
-          </a:fillRef>
-          <a:effectRef idx="2">
-            <a:schemeClr val="accent1"/>
-          </a:effectRef>
-          <a:fontRef idx="minor">
-            <a:schemeClr val="lt1"/>
-          </a:fontRef>
-        </p:style>
-        <p:txBody>
-          <a:bodyPr rtlCol="0" anchor="ctr"/>
-          <a:lstStyle/>
-          <a:p>
-            <a:pPr algn="ctr"/>
-          </a:p>
-        </p:txBody>
-      </p:sp>
-      <p:sp>
-        <p:nvSpPr>
-          <p:cNvPr id="15" name="Rounded Rectangle 14"/>
-          <p:cNvSpPr/>
-          <p:nvPr/>
-        </p:nvSpPr>
-        <p:spPr>
-          <a:xfrm>
-            <a:off x="594360" y="3680460"/>
-            <a:ext cx="438912" cy="438912"/>
-          </a:xfrm>
-          <a:prstGeom prst="roundRect">
-            <a:avLst>
-              <a:gd name="adj" fmla="val 12000"/>
-            </a:avLst>
-          </a:prstGeom>
-          <a:solidFill>
-            <a:srgbClr val="095292"/>
-          </a:solidFill>
-          <a:ln>
-            <a:noFill/>
-          </a:ln>
-        </p:spPr>
-        <p:style>
-          <a:lnRef idx="1">
-            <a:schemeClr val="accent1"/>
-          </a:lnRef>
-          <a:fillRef idx="3">
-            <a:schemeClr val="accent1"/>
-          </a:fillRef>
-          <a:effectRef idx="2">
-            <a:schemeClr val="accent1"/>
-          </a:effectRef>
-          <a:fontRef idx="minor">
-            <a:schemeClr val="lt1"/>
-          </a:fontRef>
-        </p:style>
-        <p:txBody>
-          <a:bodyPr rtlCol="0" anchor="ctr"/>
-          <a:lstStyle/>
-          <a:p>
-            <a:pPr algn="ctr"/>
-          </a:p>
-        </p:txBody>
-      </p:sp>
-      <p:sp>
-        <p:nvSpPr>
-          <p:cNvPr id="16" name="TextBox 15"/>
-          <p:cNvSpPr txBox="1"/>
-          <p:nvPr/>
-        </p:nvSpPr>
-        <p:spPr>
-          <a:xfrm>
-            <a:off x="594360" y="3680460"/>
-            <a:ext cx="438912" cy="438912"/>
-          </a:xfrm>
-          <a:prstGeom prst="rect">
-            <a:avLst/>
-          </a:prstGeom>
-          <a:noFill/>
-        </p:spPr>
-        <p:txBody>
-          <a:bodyPr wrap="square" anchor="ctr"/>
-          <a:lstStyle/>
-          <a:p>
-            <a:pPr algn="ctr"/>
-            <a:r>
-              <a:rPr sz="1600" b="1" i="0">
-                <a:solidFill>
-                  <a:srgbClr val="FFFFFF"/>
-                </a:solidFill>
-                <a:latin typeface="Calibri"/>
-              </a:rPr>
-              <a:t>3</a:t>
-            </a:r>
-          </a:p>
-        </p:txBody>
-      </p:sp>
-      <p:sp>
-        <p:nvSpPr>
-          <p:cNvPr id="17" name="TextBox 16"/>
-          <p:cNvSpPr txBox="1"/>
-          <p:nvPr/>
-        </p:nvSpPr>
-        <p:spPr>
-          <a:xfrm>
-            <a:off x="1188720" y="3536899"/>
-            <a:ext cx="10271455" cy="744321"/>
-          </a:xfrm>
-          <a:prstGeom prst="rect">
-            <a:avLst/>
-          </a:prstGeom>
-          <a:noFill/>
-        </p:spPr>
-        <p:txBody>
-          <a:bodyPr wrap="square" anchor="ctr"/>
-          <a:lstStyle/>
-          <a:p>
-            <a:r>
-              <a:rPr sz="1500" b="1" i="0">
-                <a:solidFill>
-                  <a:srgbClr val="095292"/>
-                </a:solidFill>
-                <a:latin typeface="Calibri"/>
-              </a:rPr>
-              <a:t>Comienzo del tramo 3 · 1 min</a:t>
-            </a:r>
-          </a:p>
-          <a:p>
-            <a:pPr>
-              <a:spcBef>
-                <a:spcPts val="200"/>
-              </a:spcBef>
-            </a:pPr>
-            <a:r>
-              <a:rPr sz="1300" b="0" i="0">
-                <a:solidFill>
-                  <a:srgbClr val="333333"/>
-                </a:solidFill>
-                <a:latin typeface="Calibri"/>
-              </a:rPr>
-              <a:t>Arrancar la demostración: hasta donde llegue en el minuto.</a:t>
-            </a:r>
-          </a:p>
-        </p:txBody>
-      </p:sp>
-      <p:sp>
-        <p:nvSpPr>
-          <p:cNvPr id="18" name="Rounded Rectangle 17"/>
-          <p:cNvSpPr/>
-          <p:nvPr/>
-        </p:nvSpPr>
-        <p:spPr>
-          <a:xfrm>
-            <a:off x="457200" y="4445812"/>
-            <a:ext cx="11277295" cy="908913"/>
-          </a:xfrm>
-          <a:prstGeom prst="roundRect">
-            <a:avLst>
-              <a:gd name="adj" fmla="val 12000"/>
-            </a:avLst>
-          </a:prstGeom>
-          <a:solidFill>
-            <a:srgbClr val="E8F4FA"/>
-          </a:solidFill>
-          <a:ln>
-            <a:noFill/>
-          </a:ln>
-        </p:spPr>
-        <p:style>
-          <a:lnRef idx="1">
-            <a:schemeClr val="accent1"/>
-          </a:lnRef>
-          <a:fillRef idx="3">
-            <a:schemeClr val="accent1"/>
-          </a:fillRef>
-          <a:effectRef idx="2">
-            <a:schemeClr val="accent1"/>
-          </a:effectRef>
-          <a:fontRef idx="minor">
-            <a:schemeClr val="lt1"/>
-          </a:fontRef>
-        </p:style>
-        <p:txBody>
-          <a:bodyPr rtlCol="0" anchor="ctr"/>
-          <a:lstStyle/>
-          <a:p>
-            <a:pPr algn="ctr"/>
-          </a:p>
-        </p:txBody>
-      </p:sp>
-      <p:sp>
-        <p:nvSpPr>
-          <p:cNvPr id="19" name="Rounded Rectangle 18"/>
-          <p:cNvSpPr/>
-          <p:nvPr/>
-        </p:nvSpPr>
-        <p:spPr>
-          <a:xfrm>
-            <a:off x="594360" y="4680813"/>
-            <a:ext cx="438912" cy="438912"/>
-          </a:xfrm>
-          <a:prstGeom prst="roundRect">
-            <a:avLst>
-              <a:gd name="adj" fmla="val 12000"/>
-            </a:avLst>
-          </a:prstGeom>
-          <a:solidFill>
-            <a:srgbClr val="095292"/>
-          </a:solidFill>
-          <a:ln>
-            <a:noFill/>
-          </a:ln>
-        </p:spPr>
-        <p:style>
-          <a:lnRef idx="1">
-            <a:schemeClr val="accent1"/>
-          </a:lnRef>
-          <a:fillRef idx="3">
-            <a:schemeClr val="accent1"/>
-          </a:fillRef>
-          <a:effectRef idx="2">
-            <a:schemeClr val="accent1"/>
-          </a:effectRef>
-          <a:fontRef idx="minor">
-            <a:schemeClr val="lt1"/>
-          </a:fontRef>
-        </p:style>
-        <p:txBody>
-          <a:bodyPr rtlCol="0" anchor="ctr"/>
-          <a:lstStyle/>
-          <a:p>
-            <a:pPr algn="ctr"/>
-          </a:p>
-        </p:txBody>
-      </p:sp>
-      <p:sp>
-        <p:nvSpPr>
-          <p:cNvPr id="20" name="TextBox 19"/>
-          <p:cNvSpPr txBox="1"/>
-          <p:nvPr/>
-        </p:nvSpPr>
-        <p:spPr>
-          <a:xfrm>
-            <a:off x="594360" y="4680813"/>
-            <a:ext cx="438912" cy="438912"/>
-          </a:xfrm>
-          <a:prstGeom prst="rect">
-            <a:avLst/>
-          </a:prstGeom>
-          <a:noFill/>
-        </p:spPr>
-        <p:txBody>
-          <a:bodyPr wrap="square" anchor="ctr"/>
-          <a:lstStyle/>
-          <a:p>
-            <a:pPr algn="ctr"/>
-            <a:r>
-              <a:rPr sz="1600" b="1" i="0">
-                <a:solidFill>
-                  <a:srgbClr val="FFFFFF"/>
-                </a:solidFill>
-                <a:latin typeface="Calibri"/>
-              </a:rPr>
-              <a:t>4</a:t>
-            </a:r>
-          </a:p>
-        </p:txBody>
-      </p:sp>
-      <p:sp>
-        <p:nvSpPr>
-          <p:cNvPr id="21" name="TextBox 20"/>
-          <p:cNvSpPr txBox="1"/>
-          <p:nvPr/>
-        </p:nvSpPr>
-        <p:spPr>
-          <a:xfrm>
-            <a:off x="1188720" y="4537252"/>
-            <a:ext cx="10271455" cy="744321"/>
-          </a:xfrm>
-          <a:prstGeom prst="rect">
-            <a:avLst/>
-          </a:prstGeom>
-          <a:noFill/>
-        </p:spPr>
-        <p:txBody>
-          <a:bodyPr wrap="square" anchor="ctr"/>
-          <a:lstStyle/>
-          <a:p>
-            <a:r>
-              <a:rPr sz="1500" b="1" i="0">
-                <a:solidFill>
-                  <a:srgbClr val="095292"/>
-                </a:solidFill>
-                <a:latin typeface="Calibri"/>
-              </a:rPr>
-              <a:t>Corte a los 4 min</a:t>
-            </a:r>
-          </a:p>
-          <a:p>
-            <a:pPr>
-              <a:spcBef>
-                <a:spcPts val="200"/>
-              </a:spcBef>
-            </a:pPr>
-            <a:r>
-              <a:rPr sz="1300" b="0" i="0">
-                <a:solidFill>
-                  <a:srgbClr val="333333"/>
-                </a:solidFill>
-                <a:latin typeface="Calibri"/>
-              </a:rPr>
-              <a:t>Se corta en mitad de la frase. En la Clase 15 pasa igual.</a:t>
-            </a:r>
-          </a:p>
-        </p:txBody>
-      </p:sp>
-      <p:sp>
-        <p:nvSpPr>
-          <p:cNvPr id="22" name="Rounded Rectangle 21"/>
-          <p:cNvSpPr/>
-          <p:nvPr/>
-        </p:nvSpPr>
-        <p:spPr>
-          <a:xfrm>
-            <a:off x="457200" y="5446166"/>
-            <a:ext cx="11277295" cy="908913"/>
-          </a:xfrm>
-          <a:prstGeom prst="roundRect">
-            <a:avLst>
-              <a:gd name="adj" fmla="val 12000"/>
-            </a:avLst>
-          </a:prstGeom>
-          <a:solidFill>
-            <a:srgbClr val="F2F2F2"/>
-          </a:solidFill>
-          <a:ln>
-            <a:noFill/>
-          </a:ln>
-        </p:spPr>
-        <p:style>
-          <a:lnRef idx="1">
-            <a:schemeClr val="accent1"/>
-          </a:lnRef>
-          <a:fillRef idx="3">
-            <a:schemeClr val="accent1"/>
-          </a:fillRef>
-          <a:effectRef idx="2">
-            <a:schemeClr val="accent1"/>
-          </a:effectRef>
-          <a:fontRef idx="minor">
-            <a:schemeClr val="lt1"/>
-          </a:fontRef>
-        </p:style>
-        <p:txBody>
-          <a:bodyPr rtlCol="0" anchor="ctr"/>
-          <a:lstStyle/>
-          <a:p>
-            <a:pPr algn="ctr"/>
-          </a:p>
-        </p:txBody>
-      </p:sp>
-      <p:sp>
-        <p:nvSpPr>
-          <p:cNvPr id="23" name="Rounded Rectangle 22"/>
-          <p:cNvSpPr/>
-          <p:nvPr/>
-        </p:nvSpPr>
-        <p:spPr>
-          <a:xfrm>
-            <a:off x="594360" y="5681167"/>
-            <a:ext cx="438912" cy="438912"/>
-          </a:xfrm>
-          <a:prstGeom prst="roundRect">
-            <a:avLst>
-              <a:gd name="adj" fmla="val 12000"/>
-            </a:avLst>
-          </a:prstGeom>
-          <a:solidFill>
-            <a:srgbClr val="095292"/>
-          </a:solidFill>
-          <a:ln>
-            <a:noFill/>
-          </a:ln>
-        </p:spPr>
-        <p:style>
-          <a:lnRef idx="1">
-            <a:schemeClr val="accent1"/>
-          </a:lnRef>
-          <a:fillRef idx="3">
-            <a:schemeClr val="accent1"/>
-          </a:fillRef>
-          <a:effectRef idx="2">
-            <a:schemeClr val="accent1"/>
-          </a:effectRef>
-          <a:fontRef idx="minor">
-            <a:schemeClr val="lt1"/>
-          </a:fontRef>
-        </p:style>
-        <p:txBody>
-          <a:bodyPr rtlCol="0" anchor="ctr"/>
-          <a:lstStyle/>
-          <a:p>
-            <a:pPr algn="ctr"/>
-          </a:p>
-        </p:txBody>
-      </p:sp>
-      <p:sp>
-        <p:nvSpPr>
-          <p:cNvPr id="24" name="TextBox 23"/>
-          <p:cNvSpPr txBox="1"/>
-          <p:nvPr/>
-        </p:nvSpPr>
-        <p:spPr>
-          <a:xfrm>
-            <a:off x="594360" y="5681167"/>
-            <a:ext cx="438912" cy="438912"/>
-          </a:xfrm>
-          <a:prstGeom prst="rect">
-            <a:avLst/>
-          </a:prstGeom>
-          <a:noFill/>
-        </p:spPr>
-        <p:txBody>
-          <a:bodyPr wrap="square" anchor="ctr"/>
-          <a:lstStyle/>
-          <a:p>
-            <a:pPr algn="ctr"/>
-            <a:r>
-              <a:rPr sz="1600" b="1" i="0">
-                <a:solidFill>
-                  <a:srgbClr val="FFFFFF"/>
-                </a:solidFill>
-                <a:latin typeface="Calibri"/>
-              </a:rPr>
-              <a:t>5</a:t>
-            </a:r>
-          </a:p>
-        </p:txBody>
-      </p:sp>
-      <p:sp>
-        <p:nvSpPr>
-          <p:cNvPr id="25" name="TextBox 24"/>
-          <p:cNvSpPr txBox="1"/>
-          <p:nvPr/>
-        </p:nvSpPr>
-        <p:spPr>
-          <a:xfrm>
-            <a:off x="1188720" y="5537606"/>
-            <a:ext cx="10271455" cy="744321"/>
-          </a:xfrm>
-          <a:prstGeom prst="rect">
-            <a:avLst/>
-          </a:prstGeom>
-          <a:noFill/>
-        </p:spPr>
-        <p:txBody>
-          <a:bodyPr wrap="square" anchor="ctr"/>
-          <a:lstStyle/>
-          <a:p>
-            <a:r>
-              <a:rPr sz="1500" b="1" i="0">
-                <a:solidFill>
-                  <a:srgbClr val="095292"/>
-                </a:solidFill>
-                <a:latin typeface="Calibri"/>
-              </a:rPr>
-              <a:t>2 min de corrección</a:t>
-            </a:r>
-          </a:p>
-          <a:p>
-            <a:pPr>
-              <a:spcBef>
-                <a:spcPts val="200"/>
-              </a:spcBef>
-            </a:pPr>
-            <a:r>
-              <a:rPr sz="1300" b="0" i="0">
-                <a:solidFill>
-                  <a:srgbClr val="333333"/>
-                </a:solidFill>
-                <a:latin typeface="Calibri"/>
-              </a:rPr>
-              <a:t>El docente dice </a:t>
-            </a:r>
-            <a:r>
-              <a:rPr sz="1300" b="1" i="0">
-                <a:solidFill>
-                  <a:srgbClr val="333333"/>
-                </a:solidFill>
-                <a:latin typeface="Calibri"/>
-              </a:rPr>
-              <a:t>una sola cosa</a:t>
-            </a:r>
-            <a:r>
-              <a:rPr sz="1300" b="0" i="0">
-                <a:solidFill>
-                  <a:srgbClr val="333333"/>
-                </a:solidFill>
-                <a:latin typeface="Calibri"/>
-              </a:rPr>
-              <a:t>, la que más cambie la presentación.</a:t>
-            </a:r>
-          </a:p>
-        </p:txBody>
-      </p:sp>
-      <p:sp>
-        <p:nvSpPr>
-          <p:cNvPr id="26" name="TextBox 25"/>
-          <p:cNvSpPr txBox="1"/>
-          <p:nvPr/>
-        </p:nvSpPr>
-        <p:spPr>
-          <a:xfrm>
-            <a:off x="11185855" y="6473952"/>
-            <a:ext cx="640080" cy="274320"/>
-          </a:xfrm>
-          <a:prstGeom prst="rect">
-            <a:avLst/>
-          </a:prstGeom>
-          <a:noFill/>
-        </p:spPr>
-        <p:txBody>
-          <a:bodyPr wrap="square">
-            <a:spAutoFit/>
-          </a:bodyPr>
-          <a:lstStyle/>
-          <a:p>
-            <a:pPr algn="r"/>
-            <a:r>
-              <a:rPr sz="1100" b="0" i="0">
-                <a:solidFill>
-                  <a:srgbClr val="666666"/>
-                </a:solidFill>
-                <a:latin typeface="Calibri"/>
-              </a:rPr>
-              <a:t>12</a:t>
-            </a:r>
-          </a:p>
-        </p:txBody>
-      </p:sp>
-    </p:spTree>
-  </p:cSld>
-  <p:clrMapOvr>
-    <a:masterClrMapping/>
-  </p:clrMapOvr>
-</p:sld>
-</file>
-
-<file path=ppt/slides/slide13.xml><?xml version="1.0" encoding="utf-8"?>
-<p:sld xmlns:a="http://schemas.openxmlformats.org/drawingml/2006/main" xmlns:p="http://schemas.openxmlformats.org/presentationml/2006/main" xmlns:r="http://schemas.openxmlformats.org/officeDocument/2006/relationships">
-  <p:cSld>
-    <p:bg>
-      <p:bgPr>
-        <a:solidFill>
-          <a:srgbClr val="FFFFFF"/>
-        </a:solidFill>
-        <a:effectLst/>
-      </p:bgPr>
-    </p:bg>
-    <p:spTree>
-      <p:nvGrpSpPr>
-        <p:cNvPr id="1" name=""/>
-        <p:cNvGrpSpPr/>
-        <p:nvPr/>
-      </p:nvGrpSpPr>
-      <p:grpSpPr/>
-      <p:sp>
-        <p:nvSpPr>
-          <p:cNvPr id="2" name="Rectangle 1"/>
-          <p:cNvSpPr/>
-          <p:nvPr/>
-        </p:nvSpPr>
-        <p:spPr>
-          <a:xfrm>
-            <a:off x="0" y="0"/>
-            <a:ext cx="12191695" cy="960120"/>
-          </a:xfrm>
-          <a:prstGeom prst="rect">
-            <a:avLst/>
-          </a:prstGeom>
-          <a:solidFill>
-            <a:srgbClr val="095292"/>
-          </a:solidFill>
-          <a:ln>
-            <a:noFill/>
-          </a:ln>
-        </p:spPr>
-        <p:style>
-          <a:lnRef idx="1">
-            <a:schemeClr val="accent1"/>
-          </a:lnRef>
-          <a:fillRef idx="3">
-            <a:schemeClr val="accent1"/>
-          </a:fillRef>
-          <a:effectRef idx="2">
-            <a:schemeClr val="accent1"/>
-          </a:effectRef>
-          <a:fontRef idx="minor">
-            <a:schemeClr val="lt1"/>
-          </a:fontRef>
-        </p:style>
-        <p:txBody>
-          <a:bodyPr rtlCol="0" anchor="ctr"/>
-          <a:lstStyle/>
-          <a:p>
-            <a:pPr algn="ctr"/>
-          </a:p>
-        </p:txBody>
-      </p:sp>
-      <p:sp>
-        <p:nvSpPr>
-          <p:cNvPr id="3" name="Rectangle 2"/>
-          <p:cNvSpPr/>
-          <p:nvPr/>
-        </p:nvSpPr>
-        <p:spPr>
-          <a:xfrm>
-            <a:off x="0" y="960120"/>
-            <a:ext cx="12191695" cy="41148"/>
-          </a:xfrm>
-          <a:prstGeom prst="rect">
-            <a:avLst/>
-          </a:prstGeom>
-          <a:solidFill>
-            <a:srgbClr val="FFD000"/>
-          </a:solidFill>
-          <a:ln>
-            <a:noFill/>
-          </a:ln>
-        </p:spPr>
-        <p:style>
-          <a:lnRef idx="1">
-            <a:schemeClr val="accent1"/>
-          </a:lnRef>
-          <a:fillRef idx="3">
-            <a:schemeClr val="accent1"/>
-          </a:fillRef>
-          <a:effectRef idx="2">
-            <a:schemeClr val="accent1"/>
-          </a:effectRef>
-          <a:fontRef idx="minor">
-            <a:schemeClr val="lt1"/>
-          </a:fontRef>
-        </p:style>
-        <p:txBody>
-          <a:bodyPr rtlCol="0" anchor="ctr"/>
-          <a:lstStyle/>
-          <a:p>
-            <a:pPr algn="ctr"/>
-          </a:p>
-        </p:txBody>
-      </p:sp>
-      <p:sp>
-        <p:nvSpPr>
-          <p:cNvPr id="4" name="TextBox 3"/>
-          <p:cNvSpPr txBox="1"/>
-          <p:nvPr/>
-        </p:nvSpPr>
-        <p:spPr>
-          <a:xfrm>
-            <a:off x="457200" y="164592"/>
-            <a:ext cx="11277295" cy="502920"/>
-          </a:xfrm>
-          <a:prstGeom prst="rect">
-            <a:avLst/>
-          </a:prstGeom>
-          <a:noFill/>
-        </p:spPr>
-        <p:txBody>
-          <a:bodyPr wrap="square">
-            <a:spAutoFit/>
-          </a:bodyPr>
-          <a:lstStyle/>
-          <a:p>
-            <a:r>
-              <a:rPr sz="2600" b="1" i="0">
-                <a:solidFill>
-                  <a:srgbClr val="FFFFFF"/>
-                </a:solidFill>
-                <a:latin typeface="Calibri"/>
-              </a:rPr>
-              <a:t>Para la Clase 15</a:t>
-            </a:r>
-          </a:p>
-        </p:txBody>
-      </p:sp>
-      <p:sp>
-        <p:nvSpPr>
-          <p:cNvPr id="5" name="TextBox 4"/>
-          <p:cNvSpPr txBox="1"/>
-          <p:nvPr/>
-        </p:nvSpPr>
-        <p:spPr>
-          <a:xfrm>
-            <a:off x="457200" y="1170432"/>
-            <a:ext cx="11277295" cy="5230368"/>
-          </a:xfrm>
-          <a:prstGeom prst="rect">
-            <a:avLst/>
-          </a:prstGeom>
-          <a:noFill/>
-        </p:spPr>
-        <p:txBody>
-          <a:bodyPr wrap="square">
-            <a:spAutoFit/>
-          </a:bodyPr>
-          <a:lstStyle/>
-          <a:p>
-            <a:pPr>
-              <a:spcAft>
-                <a:spcPts val="800"/>
-              </a:spcAft>
-            </a:pPr>
-            <a:r>
-              <a:rPr sz="2000" b="0" i="0">
-                <a:solidFill>
-                  <a:srgbClr val="333333"/>
-                </a:solidFill>
-                <a:latin typeface="Calibri"/>
-              </a:rPr>
-              <a:t>–   </a:t>
-            </a:r>
-            <a:r>
-              <a:rPr sz="2000" b="1" i="0">
-                <a:solidFill>
-                  <a:srgbClr val="333333"/>
-                </a:solidFill>
-                <a:latin typeface="Calibri"/>
-              </a:rPr>
-              <a:t>Trabajo dirigido:</a:t>
-            </a:r>
-            <a:r>
-              <a:rPr sz="2000" b="0" i="0">
-                <a:solidFill>
-                  <a:srgbClr val="333333"/>
-                </a:solidFill>
-                <a:latin typeface="Calibri"/>
-              </a:rPr>
-              <a:t> Diseño de presentación y recursos visuales — dejar terminadas las ocho diapositivas y el guion con tiempos en la carpeta del equipo, junto con el PDF y las capturas.</a:t>
-            </a:r>
-          </a:p>
-          <a:p>
-            <a:pPr>
-              <a:spcAft>
-                <a:spcPts val="800"/>
-              </a:spcAft>
-            </a:pPr>
-            <a:r>
-              <a:rPr sz="2000" b="0" i="0">
-                <a:solidFill>
-                  <a:srgbClr val="333333"/>
-                </a:solidFill>
-                <a:latin typeface="Calibri"/>
-              </a:rPr>
-              <a:t>–   </a:t>
-            </a:r>
-            <a:r>
-              <a:rPr sz="2000" b="1" i="0">
-                <a:solidFill>
-                  <a:srgbClr val="333333"/>
-                </a:solidFill>
-                <a:latin typeface="Calibri"/>
-              </a:rPr>
-              <a:t>Trabajo independiente:</a:t>
-            </a:r>
-            <a:r>
-              <a:rPr sz="2000" b="0" i="0">
-                <a:solidFill>
-                  <a:srgbClr val="333333"/>
-                </a:solidFill>
-                <a:latin typeface="Calibri"/>
-              </a:rPr>
-              <a:t> Ensayo general: ensayar </a:t>
-            </a:r>
-            <a:r>
-              <a:rPr sz="2000" b="1" i="0">
-                <a:solidFill>
-                  <a:srgbClr val="333333"/>
-                </a:solidFill>
-                <a:latin typeface="Calibri"/>
-              </a:rPr>
-              <a:t>los nueve minutos completos, hablando y con cronómetro, al menos dos veces</a:t>
-            </a:r>
-            <a:r>
-              <a:rPr sz="2000" b="0" i="0">
-                <a:solidFill>
-                  <a:srgbClr val="333333"/>
-                </a:solidFill>
-                <a:latin typeface="Calibri"/>
-              </a:rPr>
-              <a:t>, y ajustar el guion con el tiempo real. Leerlo en silencio no cuenta: dura la mitad.</a:t>
-            </a:r>
-          </a:p>
-          <a:p>
-            <a:pPr>
-              <a:spcAft>
-                <a:spcPts val="800"/>
-              </a:spcAft>
-            </a:pPr>
-            <a:r>
-              <a:rPr sz="2000" b="0" i="0">
-                <a:solidFill>
-                  <a:srgbClr val="333333"/>
-                </a:solidFill>
-                <a:latin typeface="Calibri"/>
-              </a:rPr>
-              <a:t>–   </a:t>
-            </a:r>
-            <a:r>
-              <a:rPr sz="2000" b="1" i="0">
-                <a:solidFill>
-                  <a:srgbClr val="333333"/>
-                </a:solidFill>
-                <a:latin typeface="Calibri"/>
-              </a:rPr>
-              <a:t>Clase 15 · Exposición final de proyectos</a:t>
-            </a:r>
-            <a:r>
-              <a:rPr sz="2000" b="0" i="0">
-                <a:solidFill>
-                  <a:srgbClr val="333333"/>
-                </a:solidFill>
-                <a:latin typeface="Calibri"/>
-              </a:rPr>
-              <a:t> — es la </a:t>
-            </a:r>
-            <a:r>
-              <a:rPr sz="2000" b="1" i="0">
-                <a:solidFill>
-                  <a:srgbClr val="333333"/>
-                </a:solidFill>
-                <a:latin typeface="Calibri"/>
-              </a:rPr>
-              <a:t>exposición final</a:t>
-            </a:r>
-            <a:r>
-              <a:rPr sz="2000" b="0" i="0">
-                <a:solidFill>
-                  <a:srgbClr val="333333"/>
-                </a:solidFill>
-                <a:latin typeface="Calibri"/>
-              </a:rPr>
-              <a:t>, con nota: nueve minutos por equipo y tres de preguntas. Vale el </a:t>
-            </a:r>
-            <a:r>
-              <a:rPr sz="2000" b="1" i="0">
-                <a:solidFill>
-                  <a:srgbClr val="333333"/>
-                </a:solidFill>
-                <a:latin typeface="Calibri"/>
-              </a:rPr>
-              <a:t>15 %</a:t>
-            </a:r>
-            <a:r>
-              <a:rPr sz="2000" b="0" i="0">
-                <a:solidFill>
-                  <a:srgbClr val="333333"/>
-                </a:solidFill>
-                <a:latin typeface="Calibri"/>
-              </a:rPr>
-              <a:t> del curso.</a:t>
-            </a:r>
-          </a:p>
-          <a:p>
-            <a:pPr>
-              <a:spcAft>
-                <a:spcPts val="800"/>
-              </a:spcAft>
-            </a:pPr>
-            <a:r>
-              <a:rPr sz="2000" b="0" i="0">
-                <a:solidFill>
-                  <a:srgbClr val="333333"/>
-                </a:solidFill>
-                <a:latin typeface="Calibri"/>
-              </a:rPr>
-              <a:t>–   </a:t>
-            </a:r>
-            <a:r>
-              <a:rPr sz="2000" b="1" i="0">
-                <a:solidFill>
-                  <a:srgbClr val="333333"/>
-                </a:solidFill>
-                <a:latin typeface="Calibri"/>
-              </a:rPr>
-              <a:t>Aviso:</a:t>
-            </a:r>
-            <a:r>
-              <a:rPr sz="2000" b="0" i="0">
-                <a:solidFill>
-                  <a:srgbClr val="333333"/>
-                </a:solidFill>
-                <a:latin typeface="Calibri"/>
-              </a:rPr>
-              <a:t> En la Clase 15 </a:t>
-            </a:r>
-            <a:r>
-              <a:rPr sz="2000" b="1" i="0">
-                <a:solidFill>
-                  <a:srgbClr val="333333"/>
-                </a:solidFill>
-                <a:latin typeface="Calibri"/>
-              </a:rPr>
-              <a:t>se corta a los nueve minutos</a:t>
-            </a:r>
-            <a:r>
-              <a:rPr sz="2000" b="0" i="0">
-                <a:solidFill>
-                  <a:srgbClr val="333333"/>
-                </a:solidFill>
-                <a:latin typeface="Calibri"/>
-              </a:rPr>
-              <a:t>, sin excepción. Conéctense cinco minutos antes con la presentación y el prototipo ya abiertos, y con las capturas a mano. El orden de exposición se sortea al empezar, así que todos los equipos deben estar listos desde el primer minuto.</a:t>
-            </a:r>
-          </a:p>
-          <a:p>
-            <a:pPr>
-              <a:spcAft>
-                <a:spcPts val="800"/>
-              </a:spcAft>
-            </a:pPr>
-            <a:r>
-              <a:rPr sz="2000" b="0" i="0">
-                <a:solidFill>
-                  <a:srgbClr val="333333"/>
-                </a:solidFill>
-                <a:latin typeface="Calibri"/>
-              </a:rPr>
-              <a:t>–   </a:t>
-            </a:r>
-            <a:r>
-              <a:rPr sz="2000" b="1" i="0">
-                <a:solidFill>
-                  <a:srgbClr val="333333"/>
-                </a:solidFill>
-                <a:latin typeface="Calibri"/>
-              </a:rPr>
-              <a:t>Antes de salir:</a:t>
-            </a:r>
-            <a:r>
-              <a:rPr sz="2000" b="0" i="0">
-                <a:solidFill>
-                  <a:srgbClr val="333333"/>
-                </a:solidFill>
-                <a:latin typeface="Calibri"/>
-              </a:rPr>
-              <a:t> el enlace del documento del equipo en el chat, con permiso de lectura para el docente, y el nombre del vocero de hoy.</a:t>
-            </a:r>
-          </a:p>
-        </p:txBody>
-      </p:sp>
-      <p:sp>
-        <p:nvSpPr>
-          <p:cNvPr id="6" name="TextBox 5"/>
-          <p:cNvSpPr txBox="1"/>
-          <p:nvPr/>
-        </p:nvSpPr>
-        <p:spPr>
-          <a:xfrm>
-            <a:off x="11185855" y="6473952"/>
-            <a:ext cx="640080" cy="274320"/>
-          </a:xfrm>
-          <a:prstGeom prst="rect">
-            <a:avLst/>
-          </a:prstGeom>
-          <a:noFill/>
-        </p:spPr>
-        <p:txBody>
-          <a:bodyPr wrap="square">
-            <a:spAutoFit/>
-          </a:bodyPr>
-          <a:lstStyle/>
-          <a:p>
-            <a:pPr algn="r"/>
-            <a:r>
-              <a:rPr sz="1100" b="0" i="0">
-                <a:solidFill>
-                  <a:srgbClr val="666666"/>
-                </a:solidFill>
-                <a:latin typeface="Calibri"/>
-              </a:rPr>
-              <a:t>13</a:t>
-            </a:r>
-          </a:p>
-        </p:txBody>
-      </p:sp>
-    </p:spTree>
-  </p:cSld>
-  <p:clrMapOvr>
-    <a:masterClrMapping/>
-  </p:clrMapOvr>
-</p:sld>
-</file>
-
-<file path=ppt/slides/slide14.xml><?xml version="1.0" encoding="utf-8"?>
 <p:sld xmlns:a="http://schemas.openxmlformats.org/drawingml/2006/main" xmlns:p="http://schemas.openxmlformats.org/presentationml/2006/main" xmlns:r="http://schemas.openxmlformats.org/officeDocument/2006/relationships">
   <p:cSld>
     <p:bg>

--- a/Introduccion a la Ingenieria/Clases/Clase 14 - Preparacion de la presentacion final/Presentacion.pptx
+++ b/Introduccion a la Ingenieria/Clases/Clase 14 - Preparacion de la presentacion final/Presentacion.pptx
@@ -4750,7 +4750,7 @@
                 </a:solidFill>
                 <a:latin typeface="Calibri"/>
               </a:rPr>
-              <a:t>El plan B no es opcional: es parte de la nota.</a:t>
+              <a:t>El plan B no es opcional.</a:t>
             </a:r>
             <a:r>
               <a:rPr sz="1400" b="0" i="0">
@@ -5592,7 +5592,7 @@
                 </a:solidFill>
                 <a:latin typeface="Calibri"/>
               </a:rPr>
-              <a:t>Hoy nadie expone para lucirse: se ensaya con cronómetro y se corrige. La presentación con nota es la próxima sesión</a:t>
+              <a:t>Hoy nadie expone para lucirse: se ensaya con cronómetro y se corrige. La presentación final es la próxima sesión</a:t>
             </a:r>
           </a:p>
         </p:txBody>
@@ -5980,7 +5980,7 @@
                 </a:solidFill>
                 <a:latin typeface="Calibri"/>
               </a:rPr>
-              <a:t>Actividad en equipos — Armar el guion, las diapositivas y la demostración</a:t>
+              <a:t>Actividad en equipos — opcional · la guía está en la carpeta de la clase</a:t>
             </a:r>
           </a:p>
         </p:txBody>
@@ -7157,7 +7157,7 @@
                 </a:solidFill>
                 <a:latin typeface="Calibri"/>
               </a:rPr>
-              <a:t>Nueve minutos exactos y se corta al llegar a cero. El tramo 4 es el que más suben la nota y el que todos quieren saltarse</a:t>
+              <a:t>Nueve minutos exactos y se corta al llegar a cero. El tramo 4 es el que más convence y el que todos quieren saltarse</a:t>
             </a:r>
           </a:p>
         </p:txBody>
@@ -10732,7 +10732,7 @@
                 </a:solidFill>
                 <a:latin typeface="Calibri"/>
               </a:rPr>
-              <a:t>. Un equipo donde uno solo presenta pierde puntos de reparto, y además arriesga todo a que esa persona tenga buena conexión ese día.</a:t>
+              <a:t>. Un equipo donde uno solo presenta muestra un proyecto de una persona, y además arriesga todo a que esa persona tenga buena conexión ese día.</a:t>
             </a:r>
           </a:p>
         </p:txBody>

--- a/Introduccion a la Ingenieria/Clases/Clase 14 - Preparacion de la presentacion final/Presentacion.pptx
+++ b/Introduccion a la Ingenieria/Clases/Clase 14 - Preparacion de la presentacion final/Presentacion.pptx
@@ -6478,14 +6478,118 @@
       </p:sp>
       <p:sp>
         <p:nvSpPr>
-          <p:cNvPr id="5" name="TextBox 4"/>
+          <p:cNvPr id="5" name="Rounded Rectangle 4"/>
+          <p:cNvSpPr/>
+          <p:nvPr/>
+        </p:nvSpPr>
+        <p:spPr>
+          <a:xfrm>
+            <a:off x="5797149" y="1573813"/>
+            <a:ext cx="6010497" cy="4057845"/>
+          </a:xfrm>
+          <a:prstGeom prst="roundRect">
+            <a:avLst>
+              <a:gd name="adj" fmla="val 4000"/>
+            </a:avLst>
+          </a:prstGeom>
+          <a:solidFill>
+            <a:srgbClr val="E8EEF4"/>
+          </a:solidFill>
+          <a:ln>
+            <a:noFill/>
+          </a:ln>
+        </p:spPr>
+        <p:style>
+          <a:lnRef idx="1">
+            <a:schemeClr val="accent1"/>
+          </a:lnRef>
+          <a:fillRef idx="3">
+            <a:schemeClr val="accent1"/>
+          </a:fillRef>
+          <a:effectRef idx="2">
+            <a:schemeClr val="accent1"/>
+          </a:effectRef>
+          <a:fontRef idx="minor">
+            <a:schemeClr val="lt1"/>
+          </a:fontRef>
+        </p:style>
+        <p:txBody>
+          <a:bodyPr rtlCol="0" anchor="ctr"/>
+          <a:lstStyle/>
+          <a:p>
+            <a:pPr algn="ctr"/>
+          </a:p>
+        </p:txBody>
+      </p:sp>
+      <p:pic>
+        <p:nvPicPr>
+          <p:cNvPr id="6" name="Picture 5" descr="students-learning-laptops-classroom.jpg"/>
+          <p:cNvPicPr>
+            <a:picLocks noChangeAspect="1"/>
+          </p:cNvPicPr>
+          <p:nvPr/>
+        </p:nvPicPr>
+        <p:blipFill>
+          <a:blip r:embed="rId2"/>
+          <a:stretch>
+            <a:fillRect/>
+          </a:stretch>
+        </p:blipFill>
+        <p:spPr>
+          <a:xfrm>
+            <a:off x="5870301" y="1646965"/>
+            <a:ext cx="5864193" cy="3911541"/>
+          </a:xfrm>
+          <a:prstGeom prst="rect">
+            <a:avLst/>
+          </a:prstGeom>
+        </p:spPr>
+      </p:pic>
+      <p:sp>
+        <p:nvSpPr>
+          <p:cNvPr id="7" name="TextBox 6"/>
           <p:cNvSpPr txBox="1"/>
           <p:nvPr/>
         </p:nvSpPr>
         <p:spPr>
           <a:xfrm>
-            <a:off x="457200" y="1170432"/>
-            <a:ext cx="11277295" cy="5230368"/>
+            <a:off x="5870301" y="5961888"/>
+            <a:ext cx="5864193" cy="320040"/>
+          </a:xfrm>
+          <a:prstGeom prst="rect">
+            <a:avLst/>
+          </a:prstGeom>
+          <a:noFill/>
+        </p:spPr>
+        <p:txBody>
+          <a:bodyPr wrap="square">
+            <a:spAutoFit/>
+          </a:bodyPr>
+          <a:lstStyle/>
+          <a:p>
+            <a:pPr algn="ctr"/>
+            <a:r>
+              <a:rPr sz="1100" b="0" i="1">
+                <a:solidFill>
+                  <a:srgbClr val="666666"/>
+                </a:solidFill>
+                <a:latin typeface="Calibri"/>
+              </a:rPr>
+              <a:t>Foto: Mikhail Nilov · Pexels</a:t>
+            </a:r>
+          </a:p>
+        </p:txBody>
+      </p:sp>
+      <p:sp>
+        <p:nvSpPr>
+          <p:cNvPr id="8" name="TextBox 7"/>
+          <p:cNvSpPr txBox="1"/>
+          <p:nvPr/>
+        </p:nvSpPr>
+        <p:spPr>
+          <a:xfrm>
+            <a:off x="457200" y="1353312"/>
+            <a:ext cx="5093061" cy="5047488"/>
           </a:xfrm>
           <a:prstGeom prst="rect">
             <a:avLst/>
@@ -6655,7 +6759,7 @@
       </p:sp>
       <p:sp>
         <p:nvSpPr>
-          <p:cNvPr id="6" name="TextBox 5"/>
+          <p:cNvPr id="9" name="TextBox 8"/>
           <p:cNvSpPr txBox="1"/>
           <p:nvPr/>
         </p:nvSpPr>
@@ -8296,16 +8400,16 @@
         </p:nvSpPr>
         <p:spPr>
           <a:xfrm>
-            <a:off x="457200" y="1234440"/>
-            <a:ext cx="11277295" cy="950976"/>
+            <a:off x="5803166" y="1188719"/>
+            <a:ext cx="5998464" cy="4828032"/>
           </a:xfrm>
           <a:prstGeom prst="roundRect">
             <a:avLst>
-              <a:gd name="adj" fmla="val 12000"/>
+              <a:gd name="adj" fmla="val 4000"/>
             </a:avLst>
           </a:prstGeom>
           <a:solidFill>
-            <a:srgbClr val="F2F2F2"/>
+            <a:srgbClr val="E8EEF4"/>
           </a:solidFill>
           <a:ln>
             <a:noFill/>
@@ -8333,597 +8437,134 @@
           </a:p>
         </p:txBody>
       </p:sp>
-      <p:sp>
-        <p:nvSpPr>
-          <p:cNvPr id="6" name="Rounded Rectangle 5"/>
-          <p:cNvSpPr/>
-          <p:nvPr/>
-        </p:nvSpPr>
-        <p:spPr>
-          <a:xfrm>
-            <a:off x="594360" y="1490472"/>
-            <a:ext cx="438912" cy="438912"/>
-          </a:xfrm>
-          <a:prstGeom prst="roundRect">
-            <a:avLst>
-              <a:gd name="adj" fmla="val 12000"/>
-            </a:avLst>
-          </a:prstGeom>
-          <a:solidFill>
-            <a:srgbClr val="095292"/>
-          </a:solidFill>
-          <a:ln>
-            <a:noFill/>
-          </a:ln>
-        </p:spPr>
-        <p:style>
-          <a:lnRef idx="1">
-            <a:schemeClr val="accent1"/>
-          </a:lnRef>
-          <a:fillRef idx="3">
-            <a:schemeClr val="accent1"/>
-          </a:fillRef>
-          <a:effectRef idx="2">
-            <a:schemeClr val="accent1"/>
-          </a:effectRef>
-          <a:fontRef idx="minor">
-            <a:schemeClr val="lt1"/>
-          </a:fontRef>
-        </p:style>
-        <p:txBody>
-          <a:bodyPr rtlCol="0" anchor="ctr"/>
+      <p:pic>
+        <p:nvPicPr>
+          <p:cNvPr id="6" name="Picture 5" descr="cinco-tramos-paso1.png"/>
+          <p:cNvPicPr>
+            <a:picLocks noChangeAspect="1"/>
+          </p:cNvPicPr>
+          <p:nvPr/>
+        </p:nvPicPr>
+        <p:blipFill>
+          <a:blip r:embed="rId2"/>
+          <a:stretch>
+            <a:fillRect/>
+          </a:stretch>
+        </p:blipFill>
+        <p:spPr>
+          <a:xfrm>
+            <a:off x="5876318" y="1261872"/>
+            <a:ext cx="5852160" cy="4681728"/>
+          </a:xfrm>
+          <a:prstGeom prst="rect">
+            <a:avLst/>
+          </a:prstGeom>
+        </p:spPr>
+      </p:pic>
+      <p:pic>
+        <p:nvPicPr>
+          <p:cNvPr id="7" name="Picture 6" descr="cinco-tramos-paso2.png"/>
+          <p:cNvPicPr>
+            <a:picLocks noChangeAspect="1"/>
+          </p:cNvPicPr>
+          <p:nvPr/>
+        </p:nvPicPr>
+        <p:blipFill>
+          <a:blip r:embed="rId3"/>
+          <a:stretch>
+            <a:fillRect/>
+          </a:stretch>
+        </p:blipFill>
+        <p:spPr>
+          <a:xfrm>
+            <a:off x="5876318" y="1261872"/>
+            <a:ext cx="5852160" cy="4681728"/>
+          </a:xfrm>
+          <a:prstGeom prst="rect">
+            <a:avLst/>
+          </a:prstGeom>
+        </p:spPr>
+      </p:pic>
+      <p:pic>
+        <p:nvPicPr>
+          <p:cNvPr id="8" name="Picture 7" descr="cinco-tramos-paso3.png"/>
+          <p:cNvPicPr>
+            <a:picLocks noChangeAspect="1"/>
+          </p:cNvPicPr>
+          <p:nvPr/>
+        </p:nvPicPr>
+        <p:blipFill>
+          <a:blip r:embed="rId4"/>
+          <a:stretch>
+            <a:fillRect/>
+          </a:stretch>
+        </p:blipFill>
+        <p:spPr>
+          <a:xfrm>
+            <a:off x="5876318" y="1261872"/>
+            <a:ext cx="5852160" cy="4681728"/>
+          </a:xfrm>
+          <a:prstGeom prst="rect">
+            <a:avLst/>
+          </a:prstGeom>
+        </p:spPr>
+      </p:pic>
+      <p:pic>
+        <p:nvPicPr>
+          <p:cNvPr id="9" name="Picture 8" descr="cinco-tramos-paso4.png"/>
+          <p:cNvPicPr>
+            <a:picLocks noChangeAspect="1"/>
+          </p:cNvPicPr>
+          <p:nvPr/>
+        </p:nvPicPr>
+        <p:blipFill>
+          <a:blip r:embed="rId5"/>
+          <a:stretch>
+            <a:fillRect/>
+          </a:stretch>
+        </p:blipFill>
+        <p:spPr>
+          <a:xfrm>
+            <a:off x="5876318" y="1261872"/>
+            <a:ext cx="5852160" cy="4681728"/>
+          </a:xfrm>
+          <a:prstGeom prst="rect">
+            <a:avLst/>
+          </a:prstGeom>
+        </p:spPr>
+      </p:pic>
+      <p:sp>
+        <p:nvSpPr>
+          <p:cNvPr id="18" name="TextBox 17"/>
+          <p:cNvSpPr txBox="1"/>
+          <p:nvPr/>
+        </p:nvSpPr>
+        <p:spPr>
+          <a:xfrm>
+            <a:off x="5870301" y="5961888"/>
+            <a:ext cx="5864193" cy="320040"/>
+          </a:xfrm>
+          <a:prstGeom prst="rect">
+            <a:avLst/>
+          </a:prstGeom>
+          <a:noFill/>
+        </p:spPr>
+        <p:txBody>
+          <a:bodyPr wrap="square">
+            <a:spAutoFit/>
+          </a:bodyPr>
           <a:lstStyle/>
           <a:p>
             <a:pPr algn="ctr"/>
-          </a:p>
-        </p:txBody>
-      </p:sp>
-      <p:sp>
-        <p:nvSpPr>
-          <p:cNvPr id="7" name="TextBox 6"/>
-          <p:cNvSpPr txBox="1"/>
-          <p:nvPr/>
-        </p:nvSpPr>
-        <p:spPr>
-          <a:xfrm>
-            <a:off x="594360" y="1490472"/>
-            <a:ext cx="438912" cy="438912"/>
-          </a:xfrm>
-          <a:prstGeom prst="rect">
-            <a:avLst/>
-          </a:prstGeom>
-          <a:noFill/>
-        </p:spPr>
-        <p:txBody>
-          <a:bodyPr wrap="square" anchor="ctr"/>
-          <a:lstStyle/>
-          <a:p>
-            <a:pPr algn="ctr"/>
-            <a:r>
-              <a:rPr sz="1600" b="1" i="0">
-                <a:solidFill>
-                  <a:srgbClr val="FFFFFF"/>
-                </a:solidFill>
-                <a:latin typeface="Calibri"/>
-              </a:rPr>
-              <a:t>1</a:t>
-            </a:r>
-          </a:p>
-        </p:txBody>
-      </p:sp>
-      <p:sp>
-        <p:nvSpPr>
-          <p:cNvPr id="8" name="TextBox 7"/>
-          <p:cNvSpPr txBox="1"/>
-          <p:nvPr/>
-        </p:nvSpPr>
-        <p:spPr>
-          <a:xfrm>
-            <a:off x="1188720" y="1325880"/>
-            <a:ext cx="10271455" cy="786384"/>
-          </a:xfrm>
-          <a:prstGeom prst="rect">
-            <a:avLst/>
-          </a:prstGeom>
-          <a:noFill/>
-        </p:spPr>
-        <p:txBody>
-          <a:bodyPr wrap="square" anchor="ctr"/>
-          <a:lstStyle/>
-          <a:p>
-            <a:r>
-              <a:rPr sz="1500" b="1" i="0">
-                <a:solidFill>
-                  <a:srgbClr val="095292"/>
-                </a:solidFill>
-                <a:latin typeface="Calibri"/>
-              </a:rPr>
-              <a:t>1 · 1 min</a:t>
-            </a:r>
-          </a:p>
-          <a:p>
-            <a:pPr>
-              <a:spcBef>
-                <a:spcPts val="200"/>
-              </a:spcBef>
-            </a:pPr>
-            <a:r>
-              <a:rPr sz="1300" b="0" i="0">
-                <a:solidFill>
-                  <a:srgbClr val="333333"/>
-                </a:solidFill>
-                <a:latin typeface="Calibri"/>
-              </a:rPr>
-              <a:t>«En la tienda de don Jaime, los clientes esperan </a:t>
-            </a:r>
-            <a:r>
-              <a:rPr sz="1300" b="1" i="0">
-                <a:solidFill>
-                  <a:srgbClr val="333333"/>
-                </a:solidFill>
-                <a:latin typeface="Calibri"/>
-              </a:rPr>
-              <a:t>25 minutos de pie</a:t>
-            </a:r>
-            <a:r>
-              <a:rPr sz="1300" b="0" i="0">
-                <a:solidFill>
-                  <a:srgbClr val="333333"/>
-                </a:solidFill>
-                <a:latin typeface="Calibri"/>
-              </a:rPr>
-              <a:t>».</a:t>
-            </a:r>
-          </a:p>
-        </p:txBody>
-      </p:sp>
-      <p:sp>
-        <p:nvSpPr>
-          <p:cNvPr id="9" name="Rounded Rectangle 8"/>
-          <p:cNvSpPr/>
-          <p:nvPr/>
-        </p:nvSpPr>
-        <p:spPr>
-          <a:xfrm>
-            <a:off x="457200" y="2276856"/>
-            <a:ext cx="11277295" cy="950976"/>
-          </a:xfrm>
-          <a:prstGeom prst="roundRect">
-            <a:avLst>
-              <a:gd name="adj" fmla="val 12000"/>
-            </a:avLst>
-          </a:prstGeom>
-          <a:solidFill>
-            <a:srgbClr val="E8F4FA"/>
-          </a:solidFill>
-          <a:ln>
-            <a:noFill/>
-          </a:ln>
-        </p:spPr>
-        <p:style>
-          <a:lnRef idx="1">
-            <a:schemeClr val="accent1"/>
-          </a:lnRef>
-          <a:fillRef idx="3">
-            <a:schemeClr val="accent1"/>
-          </a:fillRef>
-          <a:effectRef idx="2">
-            <a:schemeClr val="accent1"/>
-          </a:effectRef>
-          <a:fontRef idx="minor">
-            <a:schemeClr val="lt1"/>
-          </a:fontRef>
-        </p:style>
-        <p:txBody>
-          <a:bodyPr rtlCol="0" anchor="ctr"/>
-          <a:lstStyle/>
-          <a:p>
-            <a:pPr algn="ctr"/>
-          </a:p>
-        </p:txBody>
-      </p:sp>
-      <p:sp>
-        <p:nvSpPr>
-          <p:cNvPr id="10" name="Rounded Rectangle 9"/>
-          <p:cNvSpPr/>
-          <p:nvPr/>
-        </p:nvSpPr>
-        <p:spPr>
-          <a:xfrm>
-            <a:off x="594360" y="2532888"/>
-            <a:ext cx="438912" cy="438912"/>
-          </a:xfrm>
-          <a:prstGeom prst="roundRect">
-            <a:avLst>
-              <a:gd name="adj" fmla="val 12000"/>
-            </a:avLst>
-          </a:prstGeom>
-          <a:solidFill>
-            <a:srgbClr val="095292"/>
-          </a:solidFill>
-          <a:ln>
-            <a:noFill/>
-          </a:ln>
-        </p:spPr>
-        <p:style>
-          <a:lnRef idx="1">
-            <a:schemeClr val="accent1"/>
-          </a:lnRef>
-          <a:fillRef idx="3">
-            <a:schemeClr val="accent1"/>
-          </a:fillRef>
-          <a:effectRef idx="2">
-            <a:schemeClr val="accent1"/>
-          </a:effectRef>
-          <a:fontRef idx="minor">
-            <a:schemeClr val="lt1"/>
-          </a:fontRef>
-        </p:style>
-        <p:txBody>
-          <a:bodyPr rtlCol="0" anchor="ctr"/>
-          <a:lstStyle/>
-          <a:p>
-            <a:pPr algn="ctr"/>
-          </a:p>
-        </p:txBody>
-      </p:sp>
-      <p:sp>
-        <p:nvSpPr>
-          <p:cNvPr id="11" name="TextBox 10"/>
-          <p:cNvSpPr txBox="1"/>
-          <p:nvPr/>
-        </p:nvSpPr>
-        <p:spPr>
-          <a:xfrm>
-            <a:off x="594360" y="2532888"/>
-            <a:ext cx="438912" cy="438912"/>
-          </a:xfrm>
-          <a:prstGeom prst="rect">
-            <a:avLst/>
-          </a:prstGeom>
-          <a:noFill/>
-        </p:spPr>
-        <p:txBody>
-          <a:bodyPr wrap="square" anchor="ctr"/>
-          <a:lstStyle/>
-          <a:p>
-            <a:pPr algn="ctr"/>
-            <a:r>
-              <a:rPr sz="1600" b="1" i="0">
-                <a:solidFill>
-                  <a:srgbClr val="FFFFFF"/>
-                </a:solidFill>
-                <a:latin typeface="Calibri"/>
-              </a:rPr>
-              <a:t>2</a:t>
-            </a:r>
-          </a:p>
-        </p:txBody>
-      </p:sp>
-      <p:sp>
-        <p:nvSpPr>
-          <p:cNvPr id="12" name="TextBox 11"/>
-          <p:cNvSpPr txBox="1"/>
-          <p:nvPr/>
-        </p:nvSpPr>
-        <p:spPr>
-          <a:xfrm>
-            <a:off x="1188720" y="2368296"/>
-            <a:ext cx="10271455" cy="786384"/>
-          </a:xfrm>
-          <a:prstGeom prst="rect">
-            <a:avLst/>
-          </a:prstGeom>
-          <a:noFill/>
-        </p:spPr>
-        <p:txBody>
-          <a:bodyPr wrap="square" anchor="ctr"/>
-          <a:lstStyle/>
-          <a:p>
-            <a:r>
-              <a:rPr sz="1500" b="1" i="0">
-                <a:solidFill>
-                  <a:srgbClr val="095292"/>
-                </a:solidFill>
-                <a:latin typeface="Calibri"/>
-              </a:rPr>
-              <a:t>2 · 2 min</a:t>
-            </a:r>
-          </a:p>
-          <a:p>
-            <a:pPr>
-              <a:spcBef>
-                <a:spcPts val="200"/>
-              </a:spcBef>
-            </a:pPr>
-            <a:r>
-              <a:rPr sz="1300" b="0" i="0">
-                <a:solidFill>
-                  <a:srgbClr val="333333"/>
-                </a:solidFill>
-                <a:latin typeface="Calibri"/>
-              </a:rPr>
-              <a:t>«Afecta también al cajero. Elegimos web y no WhatsApp: </a:t>
-            </a:r>
-            <a:r>
-              <a:rPr sz="1300" b="1" i="0">
-                <a:solidFill>
-                  <a:srgbClr val="333333"/>
-                </a:solidFill>
-                <a:latin typeface="Calibri"/>
-              </a:rPr>
-              <a:t>perdimos comodidad</a:t>
-            </a:r>
-            <a:r>
-              <a:rPr sz="1300" b="0" i="0">
-                <a:solidFill>
-                  <a:srgbClr val="333333"/>
-                </a:solidFill>
-                <a:latin typeface="Calibri"/>
-              </a:rPr>
-              <a:t>».</a:t>
-            </a:r>
-          </a:p>
-        </p:txBody>
-      </p:sp>
-      <p:sp>
-        <p:nvSpPr>
-          <p:cNvPr id="13" name="Rounded Rectangle 12"/>
-          <p:cNvSpPr/>
-          <p:nvPr/>
-        </p:nvSpPr>
-        <p:spPr>
-          <a:xfrm>
-            <a:off x="457200" y="3319272"/>
-            <a:ext cx="11277295" cy="950976"/>
-          </a:xfrm>
-          <a:prstGeom prst="roundRect">
-            <a:avLst>
-              <a:gd name="adj" fmla="val 12000"/>
-            </a:avLst>
-          </a:prstGeom>
-          <a:solidFill>
-            <a:srgbClr val="F2F2F2"/>
-          </a:solidFill>
-          <a:ln>
-            <a:noFill/>
-          </a:ln>
-        </p:spPr>
-        <p:style>
-          <a:lnRef idx="1">
-            <a:schemeClr val="accent1"/>
-          </a:lnRef>
-          <a:fillRef idx="3">
-            <a:schemeClr val="accent1"/>
-          </a:fillRef>
-          <a:effectRef idx="2">
-            <a:schemeClr val="accent1"/>
-          </a:effectRef>
-          <a:fontRef idx="minor">
-            <a:schemeClr val="lt1"/>
-          </a:fontRef>
-        </p:style>
-        <p:txBody>
-          <a:bodyPr rtlCol="0" anchor="ctr"/>
-          <a:lstStyle/>
-          <a:p>
-            <a:pPr algn="ctr"/>
-          </a:p>
-        </p:txBody>
-      </p:sp>
-      <p:sp>
-        <p:nvSpPr>
-          <p:cNvPr id="14" name="Rounded Rectangle 13"/>
-          <p:cNvSpPr/>
-          <p:nvPr/>
-        </p:nvSpPr>
-        <p:spPr>
-          <a:xfrm>
-            <a:off x="594360" y="3575304"/>
-            <a:ext cx="438912" cy="438912"/>
-          </a:xfrm>
-          <a:prstGeom prst="roundRect">
-            <a:avLst>
-              <a:gd name="adj" fmla="val 12000"/>
-            </a:avLst>
-          </a:prstGeom>
-          <a:solidFill>
-            <a:srgbClr val="095292"/>
-          </a:solidFill>
-          <a:ln>
-            <a:noFill/>
-          </a:ln>
-        </p:spPr>
-        <p:style>
-          <a:lnRef idx="1">
-            <a:schemeClr val="accent1"/>
-          </a:lnRef>
-          <a:fillRef idx="3">
-            <a:schemeClr val="accent1"/>
-          </a:fillRef>
-          <a:effectRef idx="2">
-            <a:schemeClr val="accent1"/>
-          </a:effectRef>
-          <a:fontRef idx="minor">
-            <a:schemeClr val="lt1"/>
-          </a:fontRef>
-        </p:style>
-        <p:txBody>
-          <a:bodyPr rtlCol="0" anchor="ctr"/>
-          <a:lstStyle/>
-          <a:p>
-            <a:pPr algn="ctr"/>
-          </a:p>
-        </p:txBody>
-      </p:sp>
-      <p:sp>
-        <p:nvSpPr>
-          <p:cNvPr id="15" name="TextBox 14"/>
-          <p:cNvSpPr txBox="1"/>
-          <p:nvPr/>
-        </p:nvSpPr>
-        <p:spPr>
-          <a:xfrm>
-            <a:off x="594360" y="3575304"/>
-            <a:ext cx="438912" cy="438912"/>
-          </a:xfrm>
-          <a:prstGeom prst="rect">
-            <a:avLst/>
-          </a:prstGeom>
-          <a:noFill/>
-        </p:spPr>
-        <p:txBody>
-          <a:bodyPr wrap="square" anchor="ctr"/>
-          <a:lstStyle/>
-          <a:p>
-            <a:pPr algn="ctr"/>
-            <a:r>
-              <a:rPr sz="1600" b="1" i="0">
-                <a:solidFill>
-                  <a:srgbClr val="FFFFFF"/>
-                </a:solidFill>
-                <a:latin typeface="Calibri"/>
-              </a:rPr>
-              <a:t>3</a:t>
-            </a:r>
-          </a:p>
-        </p:txBody>
-      </p:sp>
-      <p:sp>
-        <p:nvSpPr>
-          <p:cNvPr id="16" name="TextBox 15"/>
-          <p:cNvSpPr txBox="1"/>
-          <p:nvPr/>
-        </p:nvSpPr>
-        <p:spPr>
-          <a:xfrm>
-            <a:off x="1188720" y="3410712"/>
-            <a:ext cx="10271455" cy="786384"/>
-          </a:xfrm>
-          <a:prstGeom prst="rect">
-            <a:avLst/>
-          </a:prstGeom>
-          <a:noFill/>
-        </p:spPr>
-        <p:txBody>
-          <a:bodyPr wrap="square" anchor="ctr"/>
-          <a:lstStyle/>
-          <a:p>
-            <a:r>
-              <a:rPr sz="1500" b="1" i="0">
-                <a:solidFill>
-                  <a:srgbClr val="095292"/>
-                </a:solidFill>
-                <a:latin typeface="Calibri"/>
-              </a:rPr>
-              <a:t>3 · 3 min</a:t>
-            </a:r>
-          </a:p>
-          <a:p>
-            <a:pPr>
-              <a:spcBef>
-                <a:spcPts val="200"/>
-              </a:spcBef>
-            </a:pPr>
-            <a:r>
-              <a:rPr sz="1300" b="0" i="0">
-                <a:solidFill>
-                  <a:srgbClr val="333333"/>
-                </a:solidFill>
-                <a:latin typeface="Calibri"/>
-              </a:rPr>
-              <a:t>Se pide un turno en vivo y se ve «Van 4 antes que usted».</a:t>
-            </a:r>
-          </a:p>
-        </p:txBody>
-      </p:sp>
-      <p:sp>
-        <p:nvSpPr>
-          <p:cNvPr id="17" name="Rounded Rectangle 16"/>
-          <p:cNvSpPr/>
-          <p:nvPr/>
-        </p:nvSpPr>
-        <p:spPr>
-          <a:xfrm>
-            <a:off x="457200" y="4361688"/>
-            <a:ext cx="11277295" cy="950976"/>
-          </a:xfrm>
-          <a:prstGeom prst="roundRect">
-            <a:avLst>
-              <a:gd name="adj" fmla="val 12000"/>
-            </a:avLst>
-          </a:prstGeom>
-          <a:solidFill>
-            <a:srgbClr val="E8F4FA"/>
-          </a:solidFill>
-          <a:ln>
-            <a:noFill/>
-          </a:ln>
-        </p:spPr>
-        <p:style>
-          <a:lnRef idx="1">
-            <a:schemeClr val="accent1"/>
-          </a:lnRef>
-          <a:fillRef idx="3">
-            <a:schemeClr val="accent1"/>
-          </a:fillRef>
-          <a:effectRef idx="2">
-            <a:schemeClr val="accent1"/>
-          </a:effectRef>
-          <a:fontRef idx="minor">
-            <a:schemeClr val="lt1"/>
-          </a:fontRef>
-        </p:style>
-        <p:txBody>
-          <a:bodyPr rtlCol="0" anchor="ctr"/>
-          <a:lstStyle/>
-          <a:p>
-            <a:pPr algn="ctr"/>
-          </a:p>
-        </p:txBody>
-      </p:sp>
-      <p:sp>
-        <p:nvSpPr>
-          <p:cNvPr id="18" name="Rounded Rectangle 17"/>
-          <p:cNvSpPr/>
-          <p:nvPr/>
-        </p:nvSpPr>
-        <p:spPr>
-          <a:xfrm>
-            <a:off x="594360" y="4617720"/>
-            <a:ext cx="438912" cy="438912"/>
-          </a:xfrm>
-          <a:prstGeom prst="roundRect">
-            <a:avLst>
-              <a:gd name="adj" fmla="val 12000"/>
-            </a:avLst>
-          </a:prstGeom>
-          <a:solidFill>
-            <a:srgbClr val="095292"/>
-          </a:solidFill>
-          <a:ln>
-            <a:noFill/>
-          </a:ln>
-        </p:spPr>
-        <p:style>
-          <a:lnRef idx="1">
-            <a:schemeClr val="accent1"/>
-          </a:lnRef>
-          <a:fillRef idx="3">
-            <a:schemeClr val="accent1"/>
-          </a:fillRef>
-          <a:effectRef idx="2">
-            <a:schemeClr val="accent1"/>
-          </a:effectRef>
-          <a:fontRef idx="minor">
-            <a:schemeClr val="lt1"/>
-          </a:fontRef>
-        </p:style>
-        <p:txBody>
-          <a:bodyPr rtlCol="0" anchor="ctr"/>
-          <a:lstStyle/>
-          <a:p>
-            <a:pPr algn="ctr"/>
+            <a:r>
+              <a:rPr sz="1100" b="0" i="1">
+                <a:solidFill>
+                  <a:srgbClr val="666666"/>
+                </a:solidFill>
+                <a:latin typeface="Calibri"/>
+              </a:rPr>
+              <a:t>Clic para avanzar la animación</a:t>
+            </a:r>
           </a:p>
         </p:txBody>
       </p:sp>
@@ -8935,8 +8576,8 @@
         </p:nvSpPr>
         <p:spPr>
           <a:xfrm>
-            <a:off x="594360" y="4617720"/>
-            <a:ext cx="438912" cy="438912"/>
+            <a:off x="457200" y="1353312"/>
+            <a:ext cx="5093061" cy="5047488"/>
           </a:xfrm>
           <a:prstGeom prst="rect">
             <a:avLst/>
@@ -8944,18 +8585,180 @@
           <a:noFill/>
         </p:spPr>
         <p:txBody>
-          <a:bodyPr wrap="square" anchor="ctr"/>
-          <a:lstStyle/>
-          <a:p>
-            <a:pPr algn="ctr"/>
-            <a:r>
-              <a:rPr sz="1600" b="1" i="0">
-                <a:solidFill>
-                  <a:srgbClr val="FFFFFF"/>
-                </a:solidFill>
-                <a:latin typeface="Calibri"/>
-              </a:rPr>
-              <a:t>4</a:t>
+          <a:bodyPr wrap="square">
+            <a:spAutoFit/>
+          </a:bodyPr>
+          <a:lstStyle/>
+          <a:p>
+            <a:pPr>
+              <a:spcAft>
+                <a:spcPts val="800"/>
+              </a:spcAft>
+            </a:pPr>
+            <a:r>
+              <a:rPr sz="2000" b="0" i="0">
+                <a:solidFill>
+                  <a:srgbClr val="333333"/>
+                </a:solidFill>
+                <a:latin typeface="Calibri"/>
+              </a:rPr>
+              <a:t>–   </a:t>
+            </a:r>
+            <a:r>
+              <a:rPr sz="2000" b="1" i="0">
+                <a:solidFill>
+                  <a:srgbClr val="333333"/>
+                </a:solidFill>
+                <a:latin typeface="Calibri"/>
+              </a:rPr>
+              <a:t>1 · 1 min:</a:t>
+            </a:r>
+            <a:r>
+              <a:rPr sz="2000" b="0" i="0">
+                <a:solidFill>
+                  <a:srgbClr val="333333"/>
+                </a:solidFill>
+                <a:latin typeface="Calibri"/>
+              </a:rPr>
+              <a:t> «En la tienda de don Jaime, los clientes esperan </a:t>
+            </a:r>
+            <a:r>
+              <a:rPr sz="2000" b="1" i="0">
+                <a:solidFill>
+                  <a:srgbClr val="333333"/>
+                </a:solidFill>
+                <a:latin typeface="Calibri"/>
+              </a:rPr>
+              <a:t>25 minutos de pie</a:t>
+            </a:r>
+            <a:r>
+              <a:rPr sz="2000" b="0" i="0">
+                <a:solidFill>
+                  <a:srgbClr val="333333"/>
+                </a:solidFill>
+                <a:latin typeface="Calibri"/>
+              </a:rPr>
+              <a:t>».</a:t>
+            </a:r>
+          </a:p>
+          <a:p>
+            <a:pPr>
+              <a:spcAft>
+                <a:spcPts val="800"/>
+              </a:spcAft>
+            </a:pPr>
+            <a:r>
+              <a:rPr sz="2000" b="0" i="0">
+                <a:solidFill>
+                  <a:srgbClr val="333333"/>
+                </a:solidFill>
+                <a:latin typeface="Calibri"/>
+              </a:rPr>
+              <a:t>–   </a:t>
+            </a:r>
+            <a:r>
+              <a:rPr sz="2000" b="1" i="0">
+                <a:solidFill>
+                  <a:srgbClr val="333333"/>
+                </a:solidFill>
+                <a:latin typeface="Calibri"/>
+              </a:rPr>
+              <a:t>2 · 2 min:</a:t>
+            </a:r>
+            <a:r>
+              <a:rPr sz="2000" b="0" i="0">
+                <a:solidFill>
+                  <a:srgbClr val="333333"/>
+                </a:solidFill>
+                <a:latin typeface="Calibri"/>
+              </a:rPr>
+              <a:t> «Afecta también al cajero. Elegimos web y no WhatsApp: </a:t>
+            </a:r>
+            <a:r>
+              <a:rPr sz="2000" b="1" i="0">
+                <a:solidFill>
+                  <a:srgbClr val="333333"/>
+                </a:solidFill>
+                <a:latin typeface="Calibri"/>
+              </a:rPr>
+              <a:t>perdimos comodidad</a:t>
+            </a:r>
+            <a:r>
+              <a:rPr sz="2000" b="0" i="0">
+                <a:solidFill>
+                  <a:srgbClr val="333333"/>
+                </a:solidFill>
+                <a:latin typeface="Calibri"/>
+              </a:rPr>
+              <a:t>».</a:t>
+            </a:r>
+          </a:p>
+          <a:p>
+            <a:pPr>
+              <a:spcAft>
+                <a:spcPts val="800"/>
+              </a:spcAft>
+            </a:pPr>
+            <a:r>
+              <a:rPr sz="2000" b="0" i="0">
+                <a:solidFill>
+                  <a:srgbClr val="333333"/>
+                </a:solidFill>
+                <a:latin typeface="Calibri"/>
+              </a:rPr>
+              <a:t>–   </a:t>
+            </a:r>
+            <a:r>
+              <a:rPr sz="2000" b="1" i="0">
+                <a:solidFill>
+                  <a:srgbClr val="333333"/>
+                </a:solidFill>
+                <a:latin typeface="Calibri"/>
+              </a:rPr>
+              <a:t>3 · 3 min:</a:t>
+            </a:r>
+            <a:r>
+              <a:rPr sz="2000" b="0" i="0">
+                <a:solidFill>
+                  <a:srgbClr val="333333"/>
+                </a:solidFill>
+                <a:latin typeface="Calibri"/>
+              </a:rPr>
+              <a:t> Se pide un turno en vivo y se ve «Van 4 antes que usted».</a:t>
+            </a:r>
+          </a:p>
+          <a:p>
+            <a:pPr>
+              <a:spcAft>
+                <a:spcPts val="800"/>
+              </a:spcAft>
+            </a:pPr>
+            <a:r>
+              <a:rPr sz="2000" b="0" i="0">
+                <a:solidFill>
+                  <a:srgbClr val="333333"/>
+                </a:solidFill>
+                <a:latin typeface="Calibri"/>
+              </a:rPr>
+              <a:t>–   </a:t>
+            </a:r>
+            <a:r>
+              <a:rPr sz="2000" b="1" i="0">
+                <a:solidFill>
+                  <a:srgbClr val="333333"/>
+                </a:solidFill>
+                <a:latin typeface="Calibri"/>
+              </a:rPr>
+              <a:t>4 · 2 min:</a:t>
+            </a:r>
+            <a:r>
+              <a:rPr sz="2000" b="0" i="0">
+                <a:solidFill>
+                  <a:srgbClr val="333333"/>
+                </a:solidFill>
+                <a:latin typeface="Calibri"/>
+              </a:rPr>
+              <a:t> «2 de 3 no entendieron «en cola»; lo cambiamos. Pagos: decidimos no hacerlo».</a:t>
             </a:r>
           </a:p>
         </p:txBody>
@@ -8963,243 +8766,6 @@
       <p:sp>
         <p:nvSpPr>
           <p:cNvPr id="20" name="TextBox 19"/>
-          <p:cNvSpPr txBox="1"/>
-          <p:nvPr/>
-        </p:nvSpPr>
-        <p:spPr>
-          <a:xfrm>
-            <a:off x="1188720" y="4453128"/>
-            <a:ext cx="10271455" cy="786384"/>
-          </a:xfrm>
-          <a:prstGeom prst="rect">
-            <a:avLst/>
-          </a:prstGeom>
-          <a:noFill/>
-        </p:spPr>
-        <p:txBody>
-          <a:bodyPr wrap="square" anchor="ctr"/>
-          <a:lstStyle/>
-          <a:p>
-            <a:r>
-              <a:rPr sz="1500" b="1" i="0">
-                <a:solidFill>
-                  <a:srgbClr val="095292"/>
-                </a:solidFill>
-                <a:latin typeface="Calibri"/>
-              </a:rPr>
-              <a:t>4 · 2 min</a:t>
-            </a:r>
-          </a:p>
-          <a:p>
-            <a:pPr>
-              <a:spcBef>
-                <a:spcPts val="200"/>
-              </a:spcBef>
-            </a:pPr>
-            <a:r>
-              <a:rPr sz="1300" b="0" i="0">
-                <a:solidFill>
-                  <a:srgbClr val="333333"/>
-                </a:solidFill>
-                <a:latin typeface="Calibri"/>
-              </a:rPr>
-              <a:t>«2 de 3 no entendieron «en cola»; lo cambiamos. Pagos: decidimos no hacerlo».</a:t>
-            </a:r>
-          </a:p>
-        </p:txBody>
-      </p:sp>
-      <p:sp>
-        <p:nvSpPr>
-          <p:cNvPr id="21" name="Rounded Rectangle 20"/>
-          <p:cNvSpPr/>
-          <p:nvPr/>
-        </p:nvSpPr>
-        <p:spPr>
-          <a:xfrm>
-            <a:off x="457200" y="5404104"/>
-            <a:ext cx="11277295" cy="950976"/>
-          </a:xfrm>
-          <a:prstGeom prst="roundRect">
-            <a:avLst>
-              <a:gd name="adj" fmla="val 12000"/>
-            </a:avLst>
-          </a:prstGeom>
-          <a:solidFill>
-            <a:srgbClr val="F2F2F2"/>
-          </a:solidFill>
-          <a:ln>
-            <a:noFill/>
-          </a:ln>
-        </p:spPr>
-        <p:style>
-          <a:lnRef idx="1">
-            <a:schemeClr val="accent1"/>
-          </a:lnRef>
-          <a:fillRef idx="3">
-            <a:schemeClr val="accent1"/>
-          </a:fillRef>
-          <a:effectRef idx="2">
-            <a:schemeClr val="accent1"/>
-          </a:effectRef>
-          <a:fontRef idx="minor">
-            <a:schemeClr val="lt1"/>
-          </a:fontRef>
-        </p:style>
-        <p:txBody>
-          <a:bodyPr rtlCol="0" anchor="ctr"/>
-          <a:lstStyle/>
-          <a:p>
-            <a:pPr algn="ctr"/>
-          </a:p>
-        </p:txBody>
-      </p:sp>
-      <p:sp>
-        <p:nvSpPr>
-          <p:cNvPr id="22" name="Rounded Rectangle 21"/>
-          <p:cNvSpPr/>
-          <p:nvPr/>
-        </p:nvSpPr>
-        <p:spPr>
-          <a:xfrm>
-            <a:off x="594360" y="5660136"/>
-            <a:ext cx="438912" cy="438912"/>
-          </a:xfrm>
-          <a:prstGeom prst="roundRect">
-            <a:avLst>
-              <a:gd name="adj" fmla="val 12000"/>
-            </a:avLst>
-          </a:prstGeom>
-          <a:solidFill>
-            <a:srgbClr val="095292"/>
-          </a:solidFill>
-          <a:ln>
-            <a:noFill/>
-          </a:ln>
-        </p:spPr>
-        <p:style>
-          <a:lnRef idx="1">
-            <a:schemeClr val="accent1"/>
-          </a:lnRef>
-          <a:fillRef idx="3">
-            <a:schemeClr val="accent1"/>
-          </a:fillRef>
-          <a:effectRef idx="2">
-            <a:schemeClr val="accent1"/>
-          </a:effectRef>
-          <a:fontRef idx="minor">
-            <a:schemeClr val="lt1"/>
-          </a:fontRef>
-        </p:style>
-        <p:txBody>
-          <a:bodyPr rtlCol="0" anchor="ctr"/>
-          <a:lstStyle/>
-          <a:p>
-            <a:pPr algn="ctr"/>
-          </a:p>
-        </p:txBody>
-      </p:sp>
-      <p:sp>
-        <p:nvSpPr>
-          <p:cNvPr id="23" name="TextBox 22"/>
-          <p:cNvSpPr txBox="1"/>
-          <p:nvPr/>
-        </p:nvSpPr>
-        <p:spPr>
-          <a:xfrm>
-            <a:off x="594360" y="5660136"/>
-            <a:ext cx="438912" cy="438912"/>
-          </a:xfrm>
-          <a:prstGeom prst="rect">
-            <a:avLst/>
-          </a:prstGeom>
-          <a:noFill/>
-        </p:spPr>
-        <p:txBody>
-          <a:bodyPr wrap="square" anchor="ctr"/>
-          <a:lstStyle/>
-          <a:p>
-            <a:pPr algn="ctr"/>
-            <a:r>
-              <a:rPr sz="1600" b="1" i="0">
-                <a:solidFill>
-                  <a:srgbClr val="FFFFFF"/>
-                </a:solidFill>
-                <a:latin typeface="Calibri"/>
-              </a:rPr>
-              <a:t>5</a:t>
-            </a:r>
-          </a:p>
-        </p:txBody>
-      </p:sp>
-      <p:sp>
-        <p:nvSpPr>
-          <p:cNvPr id="24" name="TextBox 23"/>
-          <p:cNvSpPr txBox="1"/>
-          <p:nvPr/>
-        </p:nvSpPr>
-        <p:spPr>
-          <a:xfrm>
-            <a:off x="1188720" y="5495544"/>
-            <a:ext cx="10271455" cy="786384"/>
-          </a:xfrm>
-          <a:prstGeom prst="rect">
-            <a:avLst/>
-          </a:prstGeom>
-          <a:noFill/>
-        </p:spPr>
-        <p:txBody>
-          <a:bodyPr wrap="square" anchor="ctr"/>
-          <a:lstStyle/>
-          <a:p>
-            <a:r>
-              <a:rPr sz="1500" b="1" i="0">
-                <a:solidFill>
-                  <a:srgbClr val="095292"/>
-                </a:solidFill>
-                <a:latin typeface="Calibri"/>
-              </a:rPr>
-              <a:t>5 · 1 min</a:t>
-            </a:r>
-          </a:p>
-          <a:p>
-            <a:pPr>
-              <a:spcBef>
-                <a:spcPts val="200"/>
-              </a:spcBef>
-            </a:pPr>
-            <a:r>
-              <a:rPr sz="1300" b="0" i="0">
-                <a:solidFill>
-                  <a:srgbClr val="333333"/>
-                </a:solidFill>
-                <a:latin typeface="Calibri"/>
-              </a:rPr>
-              <a:t>«Ahorra 20 minutos de pie. Deja fuera a quien no tiene datos: </a:t>
-            </a:r>
-            <a:r>
-              <a:rPr sz="1300" b="1" i="0">
-                <a:solidFill>
-                  <a:srgbClr val="333333"/>
-                </a:solidFill>
-                <a:latin typeface="Calibri"/>
-              </a:rPr>
-              <a:t>mantenemos fichas</a:t>
-            </a:r>
-            <a:r>
-              <a:rPr sz="1300" b="0" i="0">
-                <a:solidFill>
-                  <a:srgbClr val="333333"/>
-                </a:solidFill>
-                <a:latin typeface="Calibri"/>
-              </a:rPr>
-              <a:t>».</a:t>
-            </a:r>
-          </a:p>
-        </p:txBody>
-      </p:sp>
-      <p:sp>
-        <p:nvSpPr>
-          <p:cNvPr id="25" name="TextBox 24"/>
           <p:cNvSpPr txBox="1"/>
           <p:nvPr/>
         </p:nvSpPr>
@@ -9237,6 +8803,195 @@
   <p:clrMapOvr>
     <a:masterClrMapping/>
   </p:clrMapOvr>
+  <p:timing>
+    <p:tnLst>
+      <p:par>
+        <p:cTn id="1" dur="indefinite" restart="never" nodeType="tmRoot">
+          <p:childTnLst>
+            <p:seq concurrent="1" nextAc="seek">
+              <p:cTn id="2" dur="indefinite" nodeType="mainSeq">
+                <p:childTnLst>
+                  <p:par>
+                    <p:cTn id="3" fill="hold">
+                      <p:stCondLst>
+                        <p:cond delay="indefinite"/>
+                      </p:stCondLst>
+                      <p:childTnLst>
+                        <p:par>
+                          <p:cTn id="4" fill="hold">
+                            <p:stCondLst>
+                              <p:cond delay="0"/>
+                            </p:stCondLst>
+                            <p:childTnLst>
+                              <p:par>
+                                <p:cTn id="5" presetID="10" presetClass="entr" presetSubtype="0" fill="hold" nodeType="clickEffect">
+                                  <p:stCondLst>
+                                    <p:cond delay="0"/>
+                                  </p:stCondLst>
+                                  <p:childTnLst>
+                                    <p:set>
+                                      <p:cBhvr>
+                                        <p:cTn id="6" dur="1" fill="hold">
+                                          <p:stCondLst>
+                                            <p:cond delay="0"/>
+                                          </p:stCondLst>
+                                        </p:cTn>
+                                        <p:tgtEl>
+                                          <p:spTgt spid="7"/>
+                                        </p:tgtEl>
+                                        <p:attrNameLst>
+                                          <p:attrName>style.visibility</p:attrName>
+                                        </p:attrNameLst>
+                                      </p:cBhvr>
+                                      <p:to>
+                                        <p:strVal val="visible"/>
+                                      </p:to>
+                                    </p:set>
+                                    <p:animEffect transition="in" filter="fade">
+                                      <p:cBhvr>
+                                        <p:cTn id="7" dur="450"/>
+                                        <p:tgtEl>
+                                          <p:spTgt spid="7"/>
+                                        </p:tgtEl>
+                                      </p:cBhvr>
+                                    </p:animEffect>
+                                  </p:childTnLst>
+                                </p:cTn>
+                              </p:par>
+                            </p:childTnLst>
+                          </p:cTn>
+                        </p:par>
+                      </p:childTnLst>
+                    </p:cTn>
+                  </p:par>
+                  <p:par>
+                    <p:cTn id="8" fill="hold">
+                      <p:stCondLst>
+                        <p:cond delay="indefinite"/>
+                      </p:stCondLst>
+                      <p:childTnLst>
+                        <p:par>
+                          <p:cTn id="9" fill="hold">
+                            <p:stCondLst>
+                              <p:cond delay="0"/>
+                            </p:stCondLst>
+                            <p:childTnLst>
+                              <p:par>
+                                <p:cTn id="10" presetID="10" presetClass="entr" presetSubtype="0" fill="hold" nodeType="clickEffect">
+                                  <p:stCondLst>
+                                    <p:cond delay="0"/>
+                                  </p:stCondLst>
+                                  <p:childTnLst>
+                                    <p:set>
+                                      <p:cBhvr>
+                                        <p:cTn id="11" dur="1" fill="hold">
+                                          <p:stCondLst>
+                                            <p:cond delay="0"/>
+                                          </p:stCondLst>
+                                        </p:cTn>
+                                        <p:tgtEl>
+                                          <p:spTgt spid="8"/>
+                                        </p:tgtEl>
+                                        <p:attrNameLst>
+                                          <p:attrName>style.visibility</p:attrName>
+                                        </p:attrNameLst>
+                                      </p:cBhvr>
+                                      <p:to>
+                                        <p:strVal val="visible"/>
+                                      </p:to>
+                                    </p:set>
+                                    <p:animEffect transition="in" filter="fade">
+                                      <p:cBhvr>
+                                        <p:cTn id="12" dur="450"/>
+                                        <p:tgtEl>
+                                          <p:spTgt spid="8"/>
+                                        </p:tgtEl>
+                                      </p:cBhvr>
+                                    </p:animEffect>
+                                  </p:childTnLst>
+                                </p:cTn>
+                              </p:par>
+                            </p:childTnLst>
+                          </p:cTn>
+                        </p:par>
+                      </p:childTnLst>
+                    </p:cTn>
+                  </p:par>
+                  <p:par>
+                    <p:cTn id="13" fill="hold">
+                      <p:stCondLst>
+                        <p:cond delay="indefinite"/>
+                      </p:stCondLst>
+                      <p:childTnLst>
+                        <p:par>
+                          <p:cTn id="14" fill="hold">
+                            <p:stCondLst>
+                              <p:cond delay="0"/>
+                            </p:stCondLst>
+                            <p:childTnLst>
+                              <p:par>
+                                <p:cTn id="15" presetID="10" presetClass="entr" presetSubtype="0" fill="hold" nodeType="clickEffect">
+                                  <p:stCondLst>
+                                    <p:cond delay="0"/>
+                                  </p:stCondLst>
+                                  <p:childTnLst>
+                                    <p:set>
+                                      <p:cBhvr>
+                                        <p:cTn id="16" dur="1" fill="hold">
+                                          <p:stCondLst>
+                                            <p:cond delay="0"/>
+                                          </p:stCondLst>
+                                        </p:cTn>
+                                        <p:tgtEl>
+                                          <p:spTgt spid="9"/>
+                                        </p:tgtEl>
+                                        <p:attrNameLst>
+                                          <p:attrName>style.visibility</p:attrName>
+                                        </p:attrNameLst>
+                                      </p:cBhvr>
+                                      <p:to>
+                                        <p:strVal val="visible"/>
+                                      </p:to>
+                                    </p:set>
+                                    <p:animEffect transition="in" filter="fade">
+                                      <p:cBhvr>
+                                        <p:cTn id="17" dur="450"/>
+                                        <p:tgtEl>
+                                          <p:spTgt spid="9"/>
+                                        </p:tgtEl>
+                                      </p:cBhvr>
+                                    </p:animEffect>
+                                  </p:childTnLst>
+                                </p:cTn>
+                              </p:par>
+                            </p:childTnLst>
+                          </p:cTn>
+                        </p:par>
+                      </p:childTnLst>
+                    </p:cTn>
+                  </p:par>
+                </p:childTnLst>
+              </p:cTn>
+              <p:prevCondLst>
+                <p:cond evt="onPrev" delay="0">
+                  <p:tgtEl>
+                    <p:sldTgt/>
+                  </p:tgtEl>
+                </p:cond>
+              </p:prevCondLst>
+              <p:nextCondLst>
+                <p:cond evt="onNext" delay="0">
+                  <p:tgtEl>
+                    <p:sldTgt/>
+                  </p:tgtEl>
+                </p:cond>
+              </p:nextCondLst>
+            </p:seq>
+          </p:childTnLst>
+        </p:cTn>
+      </p:par>
+    </p:tnLst>
+  </p:timing>
 </p:sld>
 </file>
 
@@ -11472,9 +11227,57 @@
           </a:p>
         </p:txBody>
       </p:sp>
-      <p:sp>
-        <p:nvSpPr>
-          <p:cNvPr id="14" name="TextBox 13"/>
+      <p:pic>
+        <p:nvPicPr>
+          <p:cNvPr id="14" name="Picture 13" descr="sello_mal.png"/>
+          <p:cNvPicPr>
+            <a:picLocks noChangeAspect="1"/>
+          </p:cNvPicPr>
+          <p:nvPr/>
+        </p:nvPicPr>
+        <p:blipFill>
+          <a:blip r:embed="rId2"/>
+          <a:stretch>
+            <a:fillRect/>
+          </a:stretch>
+        </p:blipFill>
+        <p:spPr>
+          <a:xfrm>
+            <a:off x="566928" y="1527048"/>
+            <a:ext cx="393192" cy="393192"/>
+          </a:xfrm>
+          <a:prstGeom prst="rect">
+            <a:avLst/>
+          </a:prstGeom>
+        </p:spPr>
+      </p:pic>
+      <p:pic>
+        <p:nvPicPr>
+          <p:cNvPr id="15" name="Picture 14" descr="sello_bien.png"/>
+          <p:cNvPicPr>
+            <a:picLocks noChangeAspect="1"/>
+          </p:cNvPicPr>
+          <p:nvPr/>
+        </p:nvPicPr>
+        <p:blipFill>
+          <a:blip r:embed="rId3"/>
+          <a:stretch>
+            <a:fillRect/>
+          </a:stretch>
+        </p:blipFill>
+        <p:spPr>
+          <a:xfrm>
+            <a:off x="6365595" y="1527048"/>
+            <a:ext cx="393192" cy="393192"/>
+          </a:xfrm>
+          <a:prstGeom prst="rect">
+            <a:avLst/>
+          </a:prstGeom>
+        </p:spPr>
+      </p:pic>
+      <p:sp>
+        <p:nvSpPr>
+          <p:cNvPr id="16" name="TextBox 15"/>
           <p:cNvSpPr txBox="1"/>
           <p:nvPr/>
         </p:nvSpPr>

--- a/Introduccion a la Ingenieria/Clases/Clase 14 - Preparacion de la presentacion final/Presentacion.pptx
+++ b/Introduccion a la Ingenieria/Clases/Clase 14 - Preparacion de la presentacion final/Presentacion.pptx
@@ -6478,118 +6478,14 @@
       </p:sp>
       <p:sp>
         <p:nvSpPr>
-          <p:cNvPr id="5" name="Rounded Rectangle 4"/>
-          <p:cNvSpPr/>
-          <p:nvPr/>
-        </p:nvSpPr>
-        <p:spPr>
-          <a:xfrm>
-            <a:off x="5797149" y="1573813"/>
-            <a:ext cx="6010497" cy="4057845"/>
-          </a:xfrm>
-          <a:prstGeom prst="roundRect">
-            <a:avLst>
-              <a:gd name="adj" fmla="val 4000"/>
-            </a:avLst>
-          </a:prstGeom>
-          <a:solidFill>
-            <a:srgbClr val="E8EEF4"/>
-          </a:solidFill>
-          <a:ln>
-            <a:noFill/>
-          </a:ln>
-        </p:spPr>
-        <p:style>
-          <a:lnRef idx="1">
-            <a:schemeClr val="accent1"/>
-          </a:lnRef>
-          <a:fillRef idx="3">
-            <a:schemeClr val="accent1"/>
-          </a:fillRef>
-          <a:effectRef idx="2">
-            <a:schemeClr val="accent1"/>
-          </a:effectRef>
-          <a:fontRef idx="minor">
-            <a:schemeClr val="lt1"/>
-          </a:fontRef>
-        </p:style>
-        <p:txBody>
-          <a:bodyPr rtlCol="0" anchor="ctr"/>
-          <a:lstStyle/>
-          <a:p>
-            <a:pPr algn="ctr"/>
-          </a:p>
-        </p:txBody>
-      </p:sp>
-      <p:pic>
-        <p:nvPicPr>
-          <p:cNvPr id="6" name="Picture 5" descr="students-learning-laptops-classroom.jpg"/>
-          <p:cNvPicPr>
-            <a:picLocks noChangeAspect="1"/>
-          </p:cNvPicPr>
-          <p:nvPr/>
-        </p:nvPicPr>
-        <p:blipFill>
-          <a:blip r:embed="rId2"/>
-          <a:stretch>
-            <a:fillRect/>
-          </a:stretch>
-        </p:blipFill>
-        <p:spPr>
-          <a:xfrm>
-            <a:off x="5870301" y="1646965"/>
-            <a:ext cx="5864193" cy="3911541"/>
-          </a:xfrm>
-          <a:prstGeom prst="rect">
-            <a:avLst/>
-          </a:prstGeom>
-        </p:spPr>
-      </p:pic>
-      <p:sp>
-        <p:nvSpPr>
-          <p:cNvPr id="7" name="TextBox 6"/>
+          <p:cNvPr id="5" name="TextBox 4"/>
           <p:cNvSpPr txBox="1"/>
           <p:nvPr/>
         </p:nvSpPr>
         <p:spPr>
           <a:xfrm>
-            <a:off x="5870301" y="5961888"/>
-            <a:ext cx="5864193" cy="320040"/>
-          </a:xfrm>
-          <a:prstGeom prst="rect">
-            <a:avLst/>
-          </a:prstGeom>
-          <a:noFill/>
-        </p:spPr>
-        <p:txBody>
-          <a:bodyPr wrap="square">
-            <a:spAutoFit/>
-          </a:bodyPr>
-          <a:lstStyle/>
-          <a:p>
-            <a:pPr algn="ctr"/>
-            <a:r>
-              <a:rPr sz="1100" b="0" i="1">
-                <a:solidFill>
-                  <a:srgbClr val="666666"/>
-                </a:solidFill>
-                <a:latin typeface="Calibri"/>
-              </a:rPr>
-              <a:t>Foto: Mikhail Nilov · Pexels</a:t>
-            </a:r>
-          </a:p>
-        </p:txBody>
-      </p:sp>
-      <p:sp>
-        <p:nvSpPr>
-          <p:cNvPr id="8" name="TextBox 7"/>
-          <p:cNvSpPr txBox="1"/>
-          <p:nvPr/>
-        </p:nvSpPr>
-        <p:spPr>
-          <a:xfrm>
-            <a:off x="457200" y="1353312"/>
-            <a:ext cx="5093061" cy="5047488"/>
+            <a:off x="457200" y="1170432"/>
+            <a:ext cx="11277295" cy="5230368"/>
           </a:xfrm>
           <a:prstGeom prst="rect">
             <a:avLst/>
@@ -6759,7 +6655,7 @@
       </p:sp>
       <p:sp>
         <p:nvSpPr>
-          <p:cNvPr id="9" name="TextBox 8"/>
+          <p:cNvPr id="6" name="TextBox 5"/>
           <p:cNvSpPr txBox="1"/>
           <p:nvPr/>
         </p:nvSpPr>

--- a/Introduccion a la Ingenieria/Clases/Clase 14 - Preparacion de la presentacion final/Presentacion.pptx
+++ b/Introduccion a la Ingenieria/Clases/Clase 14 - Preparacion de la presentacion final/Presentacion.pptx
@@ -8429,9 +8429,57 @@
           </a:prstGeom>
         </p:spPr>
       </p:pic>
-      <p:sp>
-        <p:nvSpPr>
-          <p:cNvPr id="18" name="TextBox 17"/>
+      <p:pic>
+        <p:nvPicPr>
+          <p:cNvPr id="10" name="Picture 9" descr="cinco-tramos-paso5.png"/>
+          <p:cNvPicPr>
+            <a:picLocks noChangeAspect="1"/>
+          </p:cNvPicPr>
+          <p:nvPr/>
+        </p:nvPicPr>
+        <p:blipFill>
+          <a:blip r:embed="rId6"/>
+          <a:stretch>
+            <a:fillRect/>
+          </a:stretch>
+        </p:blipFill>
+        <p:spPr>
+          <a:xfrm>
+            <a:off x="5876318" y="1261872"/>
+            <a:ext cx="5852160" cy="4681728"/>
+          </a:xfrm>
+          <a:prstGeom prst="rect">
+            <a:avLst/>
+          </a:prstGeom>
+        </p:spPr>
+      </p:pic>
+      <p:pic>
+        <p:nvPicPr>
+          <p:cNvPr id="11" name="Picture 10" descr="cinco-tramos-paso6.png"/>
+          <p:cNvPicPr>
+            <a:picLocks noChangeAspect="1"/>
+          </p:cNvPicPr>
+          <p:nvPr/>
+        </p:nvPicPr>
+        <p:blipFill>
+          <a:blip r:embed="rId7"/>
+          <a:stretch>
+            <a:fillRect/>
+          </a:stretch>
+        </p:blipFill>
+        <p:spPr>
+          <a:xfrm>
+            <a:off x="5876318" y="1261872"/>
+            <a:ext cx="5852160" cy="4681728"/>
+          </a:xfrm>
+          <a:prstGeom prst="rect">
+            <a:avLst/>
+          </a:prstGeom>
+        </p:spPr>
+      </p:pic>
+      <p:sp>
+        <p:nvSpPr>
+          <p:cNvPr id="28" name="TextBox 27"/>
           <p:cNvSpPr txBox="1"/>
           <p:nvPr/>
         </p:nvSpPr>
@@ -8466,7 +8514,7 @@
       </p:sp>
       <p:sp>
         <p:nvSpPr>
-          <p:cNvPr id="19" name="TextBox 18"/>
+          <p:cNvPr id="29" name="TextBox 28"/>
           <p:cNvSpPr txBox="1"/>
           <p:nvPr/>
         </p:nvSpPr>
@@ -8661,7 +8709,7 @@
       </p:sp>
       <p:sp>
         <p:nvSpPr>
-          <p:cNvPr id="20" name="TextBox 19"/>
+          <p:cNvPr id="30" name="TextBox 29"/>
           <p:cNvSpPr txBox="1"/>
           <p:nvPr/>
         </p:nvSpPr>
@@ -8854,6 +8902,112 @@
                                         <p:cTn id="17" dur="450"/>
                                         <p:tgtEl>
                                           <p:spTgt spid="9"/>
+                                        </p:tgtEl>
+                                      </p:cBhvr>
+                                    </p:animEffect>
+                                  </p:childTnLst>
+                                </p:cTn>
+                              </p:par>
+                            </p:childTnLst>
+                          </p:cTn>
+                        </p:par>
+                      </p:childTnLst>
+                    </p:cTn>
+                  </p:par>
+                  <p:par>
+                    <p:cTn id="18" fill="hold">
+                      <p:stCondLst>
+                        <p:cond delay="indefinite"/>
+                      </p:stCondLst>
+                      <p:childTnLst>
+                        <p:par>
+                          <p:cTn id="19" fill="hold">
+                            <p:stCondLst>
+                              <p:cond delay="0"/>
+                            </p:stCondLst>
+                            <p:childTnLst>
+                              <p:par>
+                                <p:cTn id="20" presetID="10" presetClass="entr" presetSubtype="0" fill="hold" nodeType="clickEffect">
+                                  <p:stCondLst>
+                                    <p:cond delay="0"/>
+                                  </p:stCondLst>
+                                  <p:childTnLst>
+                                    <p:set>
+                                      <p:cBhvr>
+                                        <p:cTn id="21" dur="1" fill="hold">
+                                          <p:stCondLst>
+                                            <p:cond delay="0"/>
+                                          </p:stCondLst>
+                                        </p:cTn>
+                                        <p:tgtEl>
+                                          <p:spTgt spid="10"/>
+                                        </p:tgtEl>
+                                        <p:attrNameLst>
+                                          <p:attrName>style.visibility</p:attrName>
+                                        </p:attrNameLst>
+                                      </p:cBhvr>
+                                      <p:to>
+                                        <p:strVal val="visible"/>
+                                      </p:to>
+                                    </p:set>
+                                    <p:animEffect transition="in" filter="fade">
+                                      <p:cBhvr>
+                                        <p:cTn id="22" dur="450"/>
+                                        <p:tgtEl>
+                                          <p:spTgt spid="10"/>
+                                        </p:tgtEl>
+                                      </p:cBhvr>
+                                    </p:animEffect>
+                                  </p:childTnLst>
+                                </p:cTn>
+                              </p:par>
+                            </p:childTnLst>
+                          </p:cTn>
+                        </p:par>
+                      </p:childTnLst>
+                    </p:cTn>
+                  </p:par>
+                  <p:par>
+                    <p:cTn id="23" fill="hold">
+                      <p:stCondLst>
+                        <p:cond delay="indefinite"/>
+                      </p:stCondLst>
+                      <p:childTnLst>
+                        <p:par>
+                          <p:cTn id="24" fill="hold">
+                            <p:stCondLst>
+                              <p:cond delay="0"/>
+                            </p:stCondLst>
+                            <p:childTnLst>
+                              <p:par>
+                                <p:cTn id="25" presetID="10" presetClass="entr" presetSubtype="0" fill="hold" nodeType="clickEffect">
+                                  <p:stCondLst>
+                                    <p:cond delay="0"/>
+                                  </p:stCondLst>
+                                  <p:childTnLst>
+                                    <p:set>
+                                      <p:cBhvr>
+                                        <p:cTn id="26" dur="1" fill="hold">
+                                          <p:stCondLst>
+                                            <p:cond delay="0"/>
+                                          </p:stCondLst>
+                                        </p:cTn>
+                                        <p:tgtEl>
+                                          <p:spTgt spid="11"/>
+                                        </p:tgtEl>
+                                        <p:attrNameLst>
+                                          <p:attrName>style.visibility</p:attrName>
+                                        </p:attrNameLst>
+                                      </p:cBhvr>
+                                      <p:to>
+                                        <p:strVal val="visible"/>
+                                      </p:to>
+                                    </p:set>
+                                    <p:animEffect transition="in" filter="fade">
+                                      <p:cBhvr>
+                                        <p:cTn id="27" dur="450"/>
+                                        <p:tgtEl>
+                                          <p:spTgt spid="11"/>
                                         </p:tgtEl>
                                       </p:cBhvr>
                                     </p:animEffect>
